--- a/slides/Malaria_Phase2_Baseline_Hypothesis_filled.pptx
+++ b/slides/Malaria_Phase2_Baseline_Hypothesis_filled.pptx
@@ -16398,7 +16398,7 @@
                 </a:solidFill>
                 <a:latin typeface="Calibri"/>
               </a:rPr>
-              <a:t>within ≈ 1 pp of the paper. Ours = notebook §10 output (Kaggle T4 GPU).</a:t>
+              <a:t>within ≈ 1 pp of the paper. Ours = notebook §10 output (Kaggle 2× T4 GPU).</a:t>
             </a:r>
           </a:p>
         </p:txBody>

--- a/slides/Malaria_Phase2_Baseline_Hypothesis_filled.pptx
+++ b/slides/Malaria_Phase2_Baseline_Hypothesis_filled.pptx
@@ -1640,7 +1640,7 @@
           <a:lstStyle/>
           <a:p>
             <a:r>
-              <a:t>Reproduction. Left: we kept every setting the paper reports. Amber rows are where the paper is silent (augmentation details, epochs) or where we cut compute (3 of 10 folds on a free GPU). Right: paper vs. ours. FILL THE 'OURS' COLUMN with the table printed by the last cell of the notebook before presenting. If we're within about 1 point, the reproduction counts as successful and this is our baseline.</a:t>
+              <a:t>Reproduction. Left: we kept every setting the paper reports. Amber rows are where the paper is silent (augmentation details, epochs) or where we cut compute (3 of 10 folds on a free GPU). Right: paper vs. ours. We landed within 1 point on both headline numbers (mean fold −0.32 pp, ensemble −0.72 pp), so the reproduction counts as successful and this is our baseline. Recall is the one gap (−2 pp).</a:t>
             </a:r>
           </a:p>
           <a:p/>

--- a/slides/Malaria_Phase2_Baseline_Hypothesis_filled.pptx
+++ b/slides/Malaria_Phase2_Baseline_Hypothesis_filled.pptx
@@ -1874,7 +1874,7 @@
           <a:lstStyle/>
           <a:p>
             <a:r>
-              <a:t>How we will test the hypothesis next milestone. A0 is done: that's the reproduction. A1 removes leakage (H1). A2 adds stain normalisation on top (H2). A3 is a control showing that any gain is about generalising to new slides, not a general boost. We report recall and MCC alongside accuracy, as mean ± SD over folds. All of these are already built into the notebook as on/off switches.</a:t>
+              <a:t>How we will test the hypothesis next milestone. A0 is done: that's the reproduction. A1 removes leakage (H1). A2 adds stain normalisation on top (H2). A3 is a control showing that any gain is about generalising to new slides, not a general boost. We report recall and MCC alongside accuracy, as mean ± SD over folds. All of these are already built into the notebook as on/off switches. Our A0 baseline already shows why recall comes first: 96.81 % vs. the paper's 98.82 %, i.e. 44 missed infected cells on the test set.</a:t>
             </a:r>
           </a:p>
         </p:txBody>

--- a/slides/Malaria_Phase2_Baseline_Hypothesis_filled.pptx
+++ b/slides/Malaria_Phase2_Baseline_Hypothesis_filled.pptx
@@ -6,6 +6,7 @@
   </p:sldMasterIdLst>
   <p:sldIdLst>
     <p:sldId id="256" r:id="rId2"/>
+    <p:sldId id="277" r:id="rId28"/>
     <p:sldId id="257" r:id="rId3"/>
     <p:sldId id="258" r:id="rId4"/>
     <p:sldId id="259" r:id="rId5"/>
@@ -2926,6 +2927,10 @@
           </a:solidFill>
           <a:ln/>
         </p:spPr>
+        <p:txBody>
+          <a:bodyPr/>
+          <a:p/>
+        </p:txBody>
       </p:sp>
       <p:sp>
         <p:nvSpPr>
@@ -2948,6 +2953,10 @@
           </a:solidFill>
           <a:ln/>
         </p:spPr>
+        <p:txBody>
+          <a:bodyPr/>
+          <a:p/>
+        </p:txBody>
       </p:sp>
       <p:sp>
         <p:nvSpPr>
@@ -2970,6 +2979,10 @@
           </a:solidFill>
           <a:ln/>
         </p:spPr>
+        <p:txBody>
+          <a:bodyPr/>
+          <a:p/>
+        </p:txBody>
       </p:sp>
       <p:sp>
         <p:nvSpPr>
@@ -2992,6 +3005,10 @@
           </a:solidFill>
           <a:ln/>
         </p:spPr>
+        <p:txBody>
+          <a:bodyPr/>
+          <a:p/>
+        </p:txBody>
       </p:sp>
       <p:sp>
         <p:nvSpPr>
@@ -3014,6 +3031,10 @@
           </a:solidFill>
           <a:ln/>
         </p:spPr>
+        <p:txBody>
+          <a:bodyPr/>
+          <a:p/>
+        </p:txBody>
       </p:sp>
       <p:sp>
         <p:nvSpPr>
@@ -3036,6 +3057,10 @@
           </a:solidFill>
           <a:ln/>
         </p:spPr>
+        <p:txBody>
+          <a:bodyPr/>
+          <a:p/>
+        </p:txBody>
       </p:sp>
       <p:sp>
         <p:nvSpPr>
@@ -3058,6 +3083,10 @@
           </a:solidFill>
           <a:ln/>
         </p:spPr>
+        <p:txBody>
+          <a:bodyPr/>
+          <a:p/>
+        </p:txBody>
       </p:sp>
       <p:sp>
         <p:nvSpPr>
@@ -3080,6 +3109,10 @@
           </a:solidFill>
           <a:ln/>
         </p:spPr>
+        <p:txBody>
+          <a:bodyPr/>
+          <a:p/>
+        </p:txBody>
       </p:sp>
       <p:pic>
         <p:nvPicPr>
@@ -3243,6 +3276,10 @@
           </a:solidFill>
           <a:ln/>
         </p:spPr>
+        <p:txBody>
+          <a:bodyPr/>
+          <a:p/>
+        </p:txBody>
       </p:sp>
       <p:sp>
         <p:nvSpPr>
@@ -3309,6 +3346,10 @@
             <a:prstDash val="solid"/>
           </a:ln>
         </p:spPr>
+        <p:txBody>
+          <a:bodyPr/>
+          <a:p/>
+        </p:txBody>
       </p:sp>
       <p:sp>
         <p:nvSpPr>
@@ -3414,6 +3455,10 @@
             <a:prstDash val="solid"/>
           </a:ln>
         </p:spPr>
+        <p:txBody>
+          <a:bodyPr/>
+          <a:p/>
+        </p:txBody>
       </p:sp>
       <p:sp>
         <p:nvSpPr>
@@ -3519,6 +3564,10 @@
             <a:prstDash val="solid"/>
           </a:ln>
         </p:spPr>
+        <p:txBody>
+          <a:bodyPr/>
+          <a:p/>
+        </p:txBody>
       </p:sp>
       <p:sp>
         <p:nvSpPr>
@@ -3624,6 +3673,10 @@
             <a:prstDash val="solid"/>
           </a:ln>
         </p:spPr>
+        <p:txBody>
+          <a:bodyPr/>
+          <a:p/>
+        </p:txBody>
       </p:sp>
       <p:sp>
         <p:nvSpPr>
@@ -3920,6 +3973,10 @@
             </a:outerShdw>
           </a:effectLst>
         </p:spPr>
+        <p:txBody>
+          <a:bodyPr/>
+          <a:p/>
+        </p:txBody>
       </p:sp>
       <p:sp>
         <p:nvSpPr>
@@ -3940,6 +3997,10 @@
           </a:solidFill>
           <a:ln/>
         </p:spPr>
+        <p:txBody>
+          <a:bodyPr/>
+          <a:p/>
+        </p:txBody>
       </p:sp>
       <p:pic>
         <p:nvPicPr>
@@ -4152,6 +4213,10 @@
             </a:outerShdw>
           </a:effectLst>
         </p:spPr>
+        <p:txBody>
+          <a:bodyPr/>
+          <a:p/>
+        </p:txBody>
       </p:sp>
       <p:sp>
         <p:nvSpPr>
@@ -4172,6 +4237,10 @@
           </a:solidFill>
           <a:ln/>
         </p:spPr>
+        <p:txBody>
+          <a:bodyPr/>
+          <a:p/>
+        </p:txBody>
       </p:sp>
       <p:pic>
         <p:nvPicPr>
@@ -4372,6 +4441,10 @@
           </a:solidFill>
           <a:ln/>
         </p:spPr>
+        <p:txBody>
+          <a:bodyPr/>
+          <a:p/>
+        </p:txBody>
       </p:sp>
       <p:sp>
         <p:nvSpPr>
@@ -4392,6 +4465,10 @@
           </a:solidFill>
           <a:ln/>
         </p:spPr>
+        <p:txBody>
+          <a:bodyPr/>
+          <a:p/>
+        </p:txBody>
       </p:sp>
       <p:pic>
         <p:nvPicPr>
@@ -4548,7 +4625,7 @@
                 <a:ea typeface="Calibri" pitchFamily="34" charset="-122"/>
                 <a:cs typeface="Calibri" pitchFamily="34" charset="-120"/>
               </a:rPr>
-              <a:t>10</a:t>
+              <a:t>11</a:t>
             </a:r>
             <a:endParaRPr lang="en-US" sz="1000" dirty="0"/>
           </a:p>
@@ -8049,7 +8126,7 @@
                 <a:ea typeface="Calibri" pitchFamily="34" charset="-122"/>
                 <a:cs typeface="Calibri" pitchFamily="34" charset="-120"/>
               </a:rPr>
-              <a:t>11</a:t>
+              <a:t>12</a:t>
             </a:r>
             <a:endParaRPr lang="en-US" sz="1000" dirty="0"/>
           </a:p>
@@ -8246,6 +8323,10 @@
             </a:outerShdw>
           </a:effectLst>
         </p:spPr>
+        <p:txBody>
+          <a:bodyPr/>
+          <a:p/>
+        </p:txBody>
       </p:sp>
       <p:sp>
         <p:nvSpPr>
@@ -8266,6 +8347,10 @@
           </a:solidFill>
           <a:ln/>
         </p:spPr>
+        <p:txBody>
+          <a:bodyPr/>
+          <a:p/>
+        </p:txBody>
       </p:sp>
       <p:pic>
         <p:nvPicPr>
@@ -8349,6 +8434,10 @@
           </a:solidFill>
           <a:ln/>
         </p:spPr>
+        <p:txBody>
+          <a:bodyPr/>
+          <a:p/>
+        </p:txBody>
       </p:sp>
       <p:sp>
         <p:nvSpPr>
@@ -8450,6 +8539,10 @@
           </a:solidFill>
           <a:ln/>
         </p:spPr>
+        <p:txBody>
+          <a:bodyPr/>
+          <a:p/>
+        </p:txBody>
       </p:sp>
       <p:sp>
         <p:nvSpPr>
@@ -8551,6 +8644,10 @@
           </a:solidFill>
           <a:ln/>
         </p:spPr>
+        <p:txBody>
+          <a:bodyPr/>
+          <a:p/>
+        </p:txBody>
       </p:sp>
       <p:sp>
         <p:nvSpPr>
@@ -8705,7 +8802,7 @@
                 <a:ea typeface="Calibri" pitchFamily="34" charset="-122"/>
                 <a:cs typeface="Calibri" pitchFamily="34" charset="-120"/>
               </a:rPr>
-              <a:t>12</a:t>
+              <a:t>13</a:t>
             </a:r>
             <a:endParaRPr lang="en-US" sz="1000" dirty="0"/>
           </a:p>
@@ -8757,6 +8854,10 @@
           </a:solidFill>
           <a:ln/>
         </p:spPr>
+        <p:txBody>
+          <a:bodyPr/>
+          <a:p/>
+        </p:txBody>
       </p:sp>
       <p:sp>
         <p:nvSpPr>
@@ -8779,6 +8880,10 @@
           </a:solidFill>
           <a:ln/>
         </p:spPr>
+        <p:txBody>
+          <a:bodyPr/>
+          <a:p/>
+        </p:txBody>
       </p:sp>
       <p:sp>
         <p:nvSpPr>
@@ -8801,6 +8906,10 @@
           </a:solidFill>
           <a:ln/>
         </p:spPr>
+        <p:txBody>
+          <a:bodyPr/>
+          <a:p/>
+        </p:txBody>
       </p:sp>
       <p:sp>
         <p:nvSpPr>
@@ -8906,6 +9015,10 @@
             <a:prstDash val="solid"/>
           </a:ln>
         </p:spPr>
+        <p:txBody>
+          <a:bodyPr/>
+          <a:p/>
+        </p:txBody>
       </p:sp>
       <p:sp>
         <p:nvSpPr>
@@ -8926,6 +9039,10 @@
           </a:solidFill>
           <a:ln/>
         </p:spPr>
+        <p:txBody>
+          <a:bodyPr/>
+          <a:p/>
+        </p:txBody>
       </p:sp>
       <p:pic>
         <p:nvPicPr>
@@ -9097,6 +9214,10 @@
             <a:prstDash val="solid"/>
           </a:ln>
         </p:spPr>
+        <p:txBody>
+          <a:bodyPr/>
+          <a:p/>
+        </p:txBody>
       </p:sp>
       <p:sp>
         <p:nvSpPr>
@@ -9117,6 +9238,10 @@
           </a:solidFill>
           <a:ln/>
         </p:spPr>
+        <p:txBody>
+          <a:bodyPr/>
+          <a:p/>
+        </p:txBody>
       </p:sp>
       <p:pic>
         <p:nvPicPr>
@@ -9288,6 +9413,10 @@
             <a:prstDash val="solid"/>
           </a:ln>
         </p:spPr>
+        <p:txBody>
+          <a:bodyPr/>
+          <a:p/>
+        </p:txBody>
       </p:sp>
       <p:sp>
         <p:nvSpPr>
@@ -9308,6 +9437,10 @@
           </a:solidFill>
           <a:ln/>
         </p:spPr>
+        <p:txBody>
+          <a:bodyPr/>
+          <a:p/>
+        </p:txBody>
       </p:sp>
       <p:pic>
         <p:nvPicPr>
@@ -9479,6 +9612,10 @@
             <a:prstDash val="solid"/>
           </a:ln>
         </p:spPr>
+        <p:txBody>
+          <a:bodyPr/>
+          <a:p/>
+        </p:txBody>
       </p:sp>
       <p:sp>
         <p:nvSpPr>
@@ -9499,6 +9636,10 @@
           </a:solidFill>
           <a:ln/>
         </p:spPr>
+        <p:txBody>
+          <a:bodyPr/>
+          <a:p/>
+        </p:txBody>
       </p:sp>
       <p:pic>
         <p:nvPicPr>
@@ -9812,6 +9953,10 @@
             <a:prstDash val="solid"/>
           </a:ln>
         </p:spPr>
+        <p:txBody>
+          <a:bodyPr/>
+          <a:p/>
+        </p:txBody>
       </p:sp>
       <p:sp>
         <p:nvSpPr>
@@ -9832,6 +9977,10 @@
           </a:solidFill>
           <a:ln/>
         </p:spPr>
+        <p:txBody>
+          <a:bodyPr/>
+          <a:p/>
+        </p:txBody>
       </p:sp>
       <p:pic>
         <p:nvPicPr>
@@ -9922,6 +10071,10 @@
             <a:prstDash val="solid"/>
           </a:ln>
         </p:spPr>
+        <p:txBody>
+          <a:bodyPr/>
+          <a:p/>
+        </p:txBody>
       </p:sp>
       <p:sp>
         <p:nvSpPr>
@@ -10030,6 +10183,10 @@
             <a:prstDash val="solid"/>
           </a:ln>
         </p:spPr>
+        <p:txBody>
+          <a:bodyPr/>
+          <a:p/>
+        </p:txBody>
       </p:sp>
       <p:sp>
         <p:nvSpPr>
@@ -10050,6 +10207,10 @@
           </a:solidFill>
           <a:ln/>
         </p:spPr>
+        <p:txBody>
+          <a:bodyPr/>
+          <a:p/>
+        </p:txBody>
       </p:sp>
       <p:pic>
         <p:nvPicPr>
@@ -10140,6 +10301,10 @@
             <a:prstDash val="solid"/>
           </a:ln>
         </p:spPr>
+        <p:txBody>
+          <a:bodyPr/>
+          <a:p/>
+        </p:txBody>
       </p:sp>
       <p:sp>
         <p:nvSpPr>
@@ -10248,6 +10413,10 @@
             <a:prstDash val="solid"/>
           </a:ln>
         </p:spPr>
+        <p:txBody>
+          <a:bodyPr/>
+          <a:p/>
+        </p:txBody>
       </p:sp>
       <p:sp>
         <p:nvSpPr>
@@ -10268,6 +10437,10 @@
           </a:solidFill>
           <a:ln/>
         </p:spPr>
+        <p:txBody>
+          <a:bodyPr/>
+          <a:p/>
+        </p:txBody>
       </p:sp>
       <p:pic>
         <p:nvPicPr>
@@ -10358,6 +10531,10 @@
             <a:prstDash val="solid"/>
           </a:ln>
         </p:spPr>
+        <p:txBody>
+          <a:bodyPr/>
+          <a:p/>
+        </p:txBody>
       </p:sp>
       <p:sp>
         <p:nvSpPr>
@@ -10466,6 +10643,10 @@
             <a:prstDash val="solid"/>
           </a:ln>
         </p:spPr>
+        <p:txBody>
+          <a:bodyPr/>
+          <a:p/>
+        </p:txBody>
       </p:sp>
       <p:sp>
         <p:nvSpPr>
@@ -10486,6 +10667,10 @@
           </a:solidFill>
           <a:ln/>
         </p:spPr>
+        <p:txBody>
+          <a:bodyPr/>
+          <a:p/>
+        </p:txBody>
       </p:sp>
       <p:pic>
         <p:nvPicPr>
@@ -10576,6 +10761,10 @@
             <a:prstDash val="solid"/>
           </a:ln>
         </p:spPr>
+        <p:txBody>
+          <a:bodyPr/>
+          <a:p/>
+        </p:txBody>
       </p:sp>
       <p:sp>
         <p:nvSpPr>
@@ -10730,7 +10919,7 @@
                 <a:ea typeface="Calibri" pitchFamily="34" charset="-122"/>
                 <a:cs typeface="Calibri" pitchFamily="34" charset="-120"/>
               </a:rPr>
-              <a:t>14</a:t>
+              <a:t>15</a:t>
             </a:r>
             <a:endParaRPr lang="en-US" sz="1000" dirty="0"/>
           </a:p>
@@ -10782,6 +10971,10 @@
           </a:solidFill>
           <a:ln/>
         </p:spPr>
+        <p:txBody>
+          <a:bodyPr/>
+          <a:p/>
+        </p:txBody>
       </p:sp>
       <p:sp>
         <p:nvSpPr>
@@ -10804,6 +10997,10 @@
           </a:solidFill>
           <a:ln/>
         </p:spPr>
+        <p:txBody>
+          <a:bodyPr/>
+          <a:p/>
+        </p:txBody>
       </p:sp>
       <p:sp>
         <p:nvSpPr>
@@ -10909,6 +11106,10 @@
             <a:prstDash val="solid"/>
           </a:ln>
         </p:spPr>
+        <p:txBody>
+          <a:bodyPr/>
+          <a:p/>
+        </p:txBody>
       </p:sp>
       <p:sp>
         <p:nvSpPr>
@@ -11030,6 +11231,10 @@
             <a:prstDash val="solid"/>
           </a:ln>
         </p:spPr>
+        <p:txBody>
+          <a:bodyPr/>
+          <a:p/>
+        </p:txBody>
       </p:sp>
       <p:sp>
         <p:nvSpPr>
@@ -11050,6 +11255,10 @@
           </a:solidFill>
           <a:ln/>
         </p:spPr>
+        <p:txBody>
+          <a:bodyPr/>
+          <a:p/>
+        </p:txBody>
       </p:sp>
       <p:sp>
         <p:nvSpPr>
@@ -11193,6 +11402,10 @@
           </a:solidFill>
           <a:ln/>
         </p:spPr>
+        <p:txBody>
+          <a:bodyPr/>
+          <a:p/>
+        </p:txBody>
       </p:sp>
       <p:sp>
         <p:nvSpPr>
@@ -11336,6 +11549,10 @@
           </a:solidFill>
           <a:ln/>
         </p:spPr>
+        <p:txBody>
+          <a:bodyPr/>
+          <a:p/>
+        </p:txBody>
       </p:sp>
       <p:sp>
         <p:nvSpPr>
@@ -11479,6 +11696,10 @@
           </a:solidFill>
           <a:ln/>
         </p:spPr>
+        <p:txBody>
+          <a:bodyPr/>
+          <a:p/>
+        </p:txBody>
       </p:sp>
       <p:sp>
         <p:nvSpPr>
@@ -11622,6 +11843,10 @@
           </a:solidFill>
           <a:ln/>
         </p:spPr>
+        <p:txBody>
+          <a:bodyPr/>
+          <a:p/>
+        </p:txBody>
       </p:sp>
       <p:sp>
         <p:nvSpPr>
@@ -14860,7 +15085,7 @@
                 </a:solidFill>
                 <a:latin typeface="Calibri"/>
               </a:rPr>
-              <a:t>17</a:t>
+              <a:t>18</a:t>
             </a:r>
           </a:p>
         </p:txBody>
@@ -16468,7 +16693,7 @@
                 </a:solidFill>
                 <a:latin typeface="Calibri"/>
               </a:rPr>
-              <a:t>18</a:t>
+              <a:t>19</a:t>
             </a:r>
           </a:p>
         </p:txBody>
@@ -17729,6 +17954,10 @@
             </a:outerShdw>
           </a:effectLst>
         </p:spPr>
+        <p:txBody>
+          <a:bodyPr/>
+          <a:p/>
+        </p:txBody>
       </p:sp>
       <p:sp>
         <p:nvSpPr>
@@ -17749,6 +17978,10 @@
           </a:solidFill>
           <a:ln/>
         </p:spPr>
+        <p:txBody>
+          <a:bodyPr/>
+          <a:p/>
+        </p:txBody>
       </p:sp>
       <p:pic>
         <p:nvPicPr>
@@ -17888,6 +18121,10 @@
             </a:outerShdw>
           </a:effectLst>
         </p:spPr>
+        <p:txBody>
+          <a:bodyPr/>
+          <a:p/>
+        </p:txBody>
       </p:sp>
       <p:sp>
         <p:nvSpPr>
@@ -17908,6 +18145,10 @@
           </a:solidFill>
           <a:ln/>
         </p:spPr>
+        <p:txBody>
+          <a:bodyPr/>
+          <a:p/>
+        </p:txBody>
       </p:sp>
       <p:pic>
         <p:nvPicPr>
@@ -18047,6 +18288,10 @@
             </a:outerShdw>
           </a:effectLst>
         </p:spPr>
+        <p:txBody>
+          <a:bodyPr/>
+          <a:p/>
+        </p:txBody>
       </p:sp>
       <p:sp>
         <p:nvSpPr>
@@ -18067,6 +18312,10 @@
           </a:solidFill>
           <a:ln/>
         </p:spPr>
+        <p:txBody>
+          <a:bodyPr/>
+          <a:p/>
+        </p:txBody>
       </p:sp>
       <p:pic>
         <p:nvPicPr>
@@ -18194,6 +18443,10 @@
           </a:solidFill>
           <a:ln/>
         </p:spPr>
+        <p:txBody>
+          <a:bodyPr/>
+          <a:p/>
+        </p:txBody>
       </p:sp>
       <p:sp>
         <p:nvSpPr>
@@ -18214,6 +18467,10 @@
           </a:solidFill>
           <a:ln/>
         </p:spPr>
+        <p:txBody>
+          <a:bodyPr/>
+          <a:p/>
+        </p:txBody>
       </p:sp>
       <p:pic>
         <p:nvPicPr>
@@ -18370,7 +18627,7 @@
                 <a:ea typeface="Calibri" pitchFamily="34" charset="-122"/>
                 <a:cs typeface="Calibri" pitchFamily="34" charset="-120"/>
               </a:rPr>
-              <a:t>2</a:t>
+              <a:t>3</a:t>
             </a:r>
             <a:endParaRPr lang="en-US" sz="1000" dirty="0"/>
           </a:p>
@@ -19699,7 +19956,7 @@
                 </a:solidFill>
                 <a:latin typeface="Calibri"/>
               </a:rPr>
-              <a:t>20</a:t>
+              <a:t>21</a:t>
             </a:r>
           </a:p>
         </p:txBody>
@@ -20345,9 +20602,1041 @@
                 <a:ea typeface="Calibri" pitchFamily="34" charset="-122"/>
                 <a:cs typeface="Calibri" pitchFamily="34" charset="-120"/>
               </a:rPr>
-              <a:t>21</a:t>
+              <a:t>22</a:t>
             </a:r>
             <a:endParaRPr lang="en-US" sz="1000" dirty="0"/>
+          </a:p>
+        </p:txBody>
+      </p:sp>
+    </p:spTree>
+  </p:cSld>
+  <p:clrMapOvr>
+    <a:masterClrMapping/>
+  </p:clrMapOvr>
+</p:sld>
+</file>
+
+<file path=ppt/slides/slide22.xml><?xml version="1.0" encoding="utf-8"?>
+<p:sld xmlns:a="http://schemas.openxmlformats.org/drawingml/2006/main" xmlns:p="http://schemas.openxmlformats.org/presentationml/2006/main" xmlns:r="http://schemas.openxmlformats.org/officeDocument/2006/relationships">
+  <p:cSld>
+    <p:spTree>
+      <p:nvGrpSpPr>
+        <p:cNvPr id="2" name=""/>
+        <p:cNvGrpSpPr/>
+        <p:nvPr/>
+      </p:nvGrpSpPr>
+      <p:grpSpPr/>
+      <p:sp>
+        <p:nvSpPr>
+          <p:cNvPr id="3" name="Oval 1"/>
+          <p:cNvSpPr/>
+          <p:nvPr/>
+        </p:nvSpPr>
+        <p:spPr>
+          <a:xfrm>
+            <a:off x="10972800" y="5669280"/>
+            <a:ext cx="1097280" cy="1097280"/>
+          </a:xfrm>
+          <a:prstGeom prst="ellipse">
+            <a:avLst/>
+          </a:prstGeom>
+          <a:solidFill>
+            <a:srgbClr val="137C8E"/>
+          </a:solidFill>
+          <a:ln>
+            <a:noFill/>
+          </a:ln>
+          <a:effectLst/>
+        </p:spPr>
+        <p:style>
+          <a:lnRef idx="1">
+            <a:schemeClr val="accent1"/>
+          </a:lnRef>
+          <a:fillRef idx="3">
+            <a:schemeClr val="accent1"/>
+          </a:fillRef>
+          <a:effectRef idx="2">
+            <a:schemeClr val="accent1"/>
+          </a:effectRef>
+          <a:fontRef idx="minor">
+            <a:schemeClr val="lt1"/>
+          </a:fontRef>
+        </p:style>
+        <p:txBody>
+          <a:bodyPr rtlCol="0" anchor="ctr"/>
+          <a:lstStyle/>
+          <a:p/>
+        </p:txBody>
+      </p:sp>
+      <p:sp>
+        <p:nvSpPr>
+          <p:cNvPr id="4" name="Oval 2"/>
+          <p:cNvSpPr/>
+          <p:nvPr/>
+        </p:nvSpPr>
+        <p:spPr>
+          <a:xfrm>
+            <a:off x="11521440" y="1188720"/>
+            <a:ext cx="548640" cy="548640"/>
+          </a:xfrm>
+          <a:prstGeom prst="ellipse">
+            <a:avLst/>
+          </a:prstGeom>
+          <a:solidFill>
+            <a:srgbClr val="2EA79B"/>
+          </a:solidFill>
+          <a:ln>
+            <a:noFill/>
+          </a:ln>
+          <a:effectLst/>
+        </p:spPr>
+        <p:style>
+          <a:lnRef idx="1">
+            <a:schemeClr val="accent1"/>
+          </a:lnRef>
+          <a:fillRef idx="3">
+            <a:schemeClr val="accent1"/>
+          </a:fillRef>
+          <a:effectRef idx="2">
+            <a:schemeClr val="accent1"/>
+          </a:effectRef>
+          <a:fontRef idx="minor">
+            <a:schemeClr val="lt1"/>
+          </a:fontRef>
+        </p:style>
+        <p:txBody>
+          <a:bodyPr rtlCol="0" anchor="ctr"/>
+          <a:lstStyle/>
+          <a:p/>
+        </p:txBody>
+      </p:sp>
+      <p:sp>
+        <p:nvSpPr>
+          <p:cNvPr id="5" name="TextBox 3"/>
+          <p:cNvSpPr txBox="1"/>
+          <p:nvPr/>
+        </p:nvSpPr>
+        <p:spPr>
+          <a:xfrm>
+            <a:off x="685800" y="548640"/>
+            <a:ext cx="10058400" cy="320040"/>
+          </a:xfrm>
+          <a:prstGeom prst="rect">
+            <a:avLst/>
+          </a:prstGeom>
+          <a:noFill/>
+        </p:spPr>
+        <p:txBody>
+          <a:bodyPr wrap="square" lIns="0" rIns="0" tIns="0" bIns="0" anchor="t">
+            <a:spAutoFit/>
+          </a:bodyPr>
+          <a:lstStyle/>
+          <a:p>
+            <a:pPr algn="l"/>
+            <a:r>
+              <a:rPr sz="1300" b="1" i="0">
+                <a:solidFill>
+                  <a:srgbClr val="2EA79B"/>
+                </a:solidFill>
+                <a:latin typeface="Calibri"/>
+              </a:rPr>
+              <a:t>OUR TEAM</a:t>
+            </a:r>
+          </a:p>
+        </p:txBody>
+      </p:sp>
+      <p:sp>
+        <p:nvSpPr>
+          <p:cNvPr id="6" name="TextBox 4"/>
+          <p:cNvSpPr txBox="1"/>
+          <p:nvPr/>
+        </p:nvSpPr>
+        <p:spPr>
+          <a:xfrm>
+            <a:off x="685800" y="896112"/>
+            <a:ext cx="10972800" cy="640080"/>
+          </a:xfrm>
+          <a:prstGeom prst="rect">
+            <a:avLst/>
+          </a:prstGeom>
+          <a:noFill/>
+        </p:spPr>
+        <p:txBody>
+          <a:bodyPr wrap="square" lIns="0" rIns="0" tIns="0" bIns="0" anchor="t">
+            <a:spAutoFit/>
+          </a:bodyPr>
+          <a:lstStyle/>
+          <a:p>
+            <a:pPr algn="l"/>
+            <a:r>
+              <a:rPr sz="3000" b="1" i="0">
+                <a:solidFill>
+                  <a:srgbClr val="FFFFFF"/>
+                </a:solidFill>
+                <a:latin typeface="Cambria"/>
+              </a:rPr>
+              <a:t>Four people, four jobs</a:t>
+            </a:r>
+          </a:p>
+        </p:txBody>
+      </p:sp>
+      <p:sp>
+        <p:nvSpPr>
+          <p:cNvPr id="7" name="Rounded Rectangle 8"/>
+          <p:cNvSpPr/>
+          <p:nvPr/>
+        </p:nvSpPr>
+        <p:spPr>
+          <a:xfrm>
+            <a:off x="685800" y="2011680"/>
+            <a:ext cx="2571750" cy="2743200"/>
+          </a:xfrm>
+          <a:prstGeom prst="roundRect">
+            <a:avLst>
+              <a:gd name="adj" fmla="val 6000"/>
+            </a:avLst>
+          </a:prstGeom>
+          <a:solidFill>
+            <a:srgbClr val="15455A"/>
+          </a:solidFill>
+          <a:ln w="12700">
+            <a:solidFill>
+              <a:srgbClr val="0E6274"/>
+            </a:solidFill>
+          </a:ln>
+          <a:effectLst/>
+        </p:spPr>
+        <p:style>
+          <a:lnRef idx="1">
+            <a:schemeClr val="accent1"/>
+          </a:lnRef>
+          <a:fillRef idx="3">
+            <a:schemeClr val="accent1"/>
+          </a:fillRef>
+          <a:effectRef idx="2">
+            <a:schemeClr val="accent1"/>
+          </a:effectRef>
+          <a:fontRef idx="minor">
+            <a:schemeClr val="lt1"/>
+          </a:fontRef>
+        </p:style>
+        <p:txBody>
+          <a:bodyPr rtlCol="0" anchor="ctr"/>
+          <a:lstStyle/>
+          <a:p/>
+        </p:txBody>
+      </p:sp>
+      <p:sp>
+        <p:nvSpPr>
+          <p:cNvPr id="8" name="Oval 9"/>
+          <p:cNvSpPr/>
+          <p:nvPr/>
+        </p:nvSpPr>
+        <p:spPr>
+          <a:xfrm>
+            <a:off x="960120" y="2331720"/>
+            <a:ext cx="822960" cy="822960"/>
+          </a:xfrm>
+          <a:prstGeom prst="ellipse">
+            <a:avLst/>
+          </a:prstGeom>
+          <a:solidFill>
+            <a:srgbClr val="CC4A3F"/>
+          </a:solidFill>
+          <a:ln>
+            <a:noFill/>
+          </a:ln>
+          <a:effectLst/>
+        </p:spPr>
+        <p:style>
+          <a:lnRef idx="1">
+            <a:schemeClr val="accent1"/>
+          </a:lnRef>
+          <a:fillRef idx="3">
+            <a:schemeClr val="accent1"/>
+          </a:fillRef>
+          <a:effectRef idx="2">
+            <a:schemeClr val="accent1"/>
+          </a:effectRef>
+          <a:fontRef idx="minor">
+            <a:schemeClr val="lt1"/>
+          </a:fontRef>
+        </p:style>
+        <p:txBody>
+          <a:bodyPr rtlCol="0" anchor="ctr" lIns="0" rIns="0" tIns="0" bIns="0"/>
+          <a:lstStyle/>
+          <a:p>
+            <a:pPr algn="ctr"/>
+            <a:r>
+              <a:rPr sz="2000" b="1">
+                <a:solidFill>
+                  <a:srgbClr val="FFFFFF"/>
+                </a:solidFill>
+                <a:latin typeface="Cambria"/>
+              </a:rPr>
+              <a:t>AJ</a:t>
+            </a:r>
+          </a:p>
+        </p:txBody>
+      </p:sp>
+      <p:sp>
+        <p:nvSpPr>
+          <p:cNvPr id="9" name="TextBox 11"/>
+          <p:cNvSpPr txBox="1"/>
+          <p:nvPr/>
+        </p:nvSpPr>
+        <p:spPr>
+          <a:xfrm>
+            <a:off x="960120" y="3383280"/>
+            <a:ext cx="2023110" cy="365760"/>
+          </a:xfrm>
+          <a:prstGeom prst="rect">
+            <a:avLst/>
+          </a:prstGeom>
+          <a:noFill/>
+        </p:spPr>
+        <p:txBody>
+          <a:bodyPr wrap="square" lIns="0" rIns="0" tIns="0" bIns="0" anchor="t">
+            <a:spAutoFit/>
+          </a:bodyPr>
+          <a:lstStyle/>
+          <a:p>
+            <a:pPr algn="l"/>
+            <a:r>
+              <a:rPr sz="1600" b="1" i="0">
+                <a:solidFill>
+                  <a:srgbClr val="FFFFFF"/>
+                </a:solidFill>
+                <a:latin typeface="Cambria"/>
+              </a:rPr>
+              <a:t>Amathziah J</a:t>
+            </a:r>
+          </a:p>
+        </p:txBody>
+      </p:sp>
+      <p:sp>
+        <p:nvSpPr>
+          <p:cNvPr id="10" name="TextBox 23"/>
+          <p:cNvSpPr txBox="1"/>
+          <p:nvPr/>
+        </p:nvSpPr>
+        <p:spPr>
+          <a:xfrm>
+            <a:off x="960120" y="3886200"/>
+            <a:ext cx="2023110" cy="228600"/>
+          </a:xfrm>
+          <a:prstGeom prst="rect">
+            <a:avLst/>
+          </a:prstGeom>
+          <a:noFill/>
+        </p:spPr>
+        <p:txBody>
+          <a:bodyPr wrap="square" lIns="0" rIns="0" tIns="0" bIns="0" anchor="t">
+            <a:spAutoFit/>
+          </a:bodyPr>
+          <a:lstStyle/>
+          <a:p>
+            <a:pPr algn="l"/>
+            <a:r>
+              <a:rPr sz="1100" b="1" i="0">
+                <a:solidFill>
+                  <a:srgbClr val="2EA79B"/>
+                </a:solidFill>
+                <a:latin typeface="Calibri"/>
+              </a:rPr>
+              <a:t>ROLE</a:t>
+            </a:r>
+          </a:p>
+        </p:txBody>
+      </p:sp>
+      <p:sp>
+        <p:nvSpPr>
+          <p:cNvPr id="11" name="TextBox 12"/>
+          <p:cNvSpPr txBox="1"/>
+          <p:nvPr/>
+        </p:nvSpPr>
+        <p:spPr>
+          <a:xfrm>
+            <a:off x="960120" y="4160520"/>
+            <a:ext cx="2023110" cy="457200"/>
+          </a:xfrm>
+          <a:prstGeom prst="rect">
+            <a:avLst/>
+          </a:prstGeom>
+          <a:noFill/>
+        </p:spPr>
+        <p:txBody>
+          <a:bodyPr wrap="square" lIns="0" rIns="0" tIns="0" bIns="0" anchor="t">
+            <a:spAutoFit/>
+          </a:bodyPr>
+          <a:lstStyle/>
+          <a:p>
+            <a:pPr algn="l"/>
+            <a:r>
+              <a:rPr sz="1400" b="0" i="0">
+                <a:solidFill>
+                  <a:srgbClr val="D5E6EA"/>
+                </a:solidFill>
+                <a:latin typeface="Calibri"/>
+              </a:rPr>
+              <a:t>Kaggle experiments, repository</a:t>
+            </a:r>
+          </a:p>
+        </p:txBody>
+      </p:sp>
+      <p:sp>
+        <p:nvSpPr>
+          <p:cNvPr id="12" name="Rounded Rectangle 8"/>
+          <p:cNvSpPr/>
+          <p:nvPr/>
+        </p:nvSpPr>
+        <p:spPr>
+          <a:xfrm>
+            <a:off x="3440430" y="2011680"/>
+            <a:ext cx="2571750" cy="2743200"/>
+          </a:xfrm>
+          <a:prstGeom prst="roundRect">
+            <a:avLst>
+              <a:gd name="adj" fmla="val 6000"/>
+            </a:avLst>
+          </a:prstGeom>
+          <a:solidFill>
+            <a:srgbClr val="15455A"/>
+          </a:solidFill>
+          <a:ln w="12700">
+            <a:solidFill>
+              <a:srgbClr val="0E6274"/>
+            </a:solidFill>
+          </a:ln>
+          <a:effectLst/>
+        </p:spPr>
+        <p:style>
+          <a:lnRef idx="1">
+            <a:schemeClr val="accent1"/>
+          </a:lnRef>
+          <a:fillRef idx="3">
+            <a:schemeClr val="accent1"/>
+          </a:fillRef>
+          <a:effectRef idx="2">
+            <a:schemeClr val="accent1"/>
+          </a:effectRef>
+          <a:fontRef idx="minor">
+            <a:schemeClr val="lt1"/>
+          </a:fontRef>
+        </p:style>
+        <p:txBody>
+          <a:bodyPr rtlCol="0" anchor="ctr"/>
+          <a:lstStyle/>
+          <a:p/>
+        </p:txBody>
+      </p:sp>
+      <p:sp>
+        <p:nvSpPr>
+          <p:cNvPr id="13" name="Oval 9"/>
+          <p:cNvSpPr/>
+          <p:nvPr/>
+        </p:nvSpPr>
+        <p:spPr>
+          <a:xfrm>
+            <a:off x="3714750" y="2331720"/>
+            <a:ext cx="822960" cy="822960"/>
+          </a:xfrm>
+          <a:prstGeom prst="ellipse">
+            <a:avLst/>
+          </a:prstGeom>
+          <a:solidFill>
+            <a:srgbClr val="8A43B0"/>
+          </a:solidFill>
+          <a:ln>
+            <a:noFill/>
+          </a:ln>
+          <a:effectLst/>
+        </p:spPr>
+        <p:style>
+          <a:lnRef idx="1">
+            <a:schemeClr val="accent1"/>
+          </a:lnRef>
+          <a:fillRef idx="3">
+            <a:schemeClr val="accent1"/>
+          </a:fillRef>
+          <a:effectRef idx="2">
+            <a:schemeClr val="accent1"/>
+          </a:effectRef>
+          <a:fontRef idx="minor">
+            <a:schemeClr val="lt1"/>
+          </a:fontRef>
+        </p:style>
+        <p:txBody>
+          <a:bodyPr rtlCol="0" anchor="ctr" lIns="0" rIns="0" tIns="0" bIns="0"/>
+          <a:lstStyle/>
+          <a:p>
+            <a:pPr algn="ctr"/>
+            <a:r>
+              <a:rPr sz="2000" b="1">
+                <a:solidFill>
+                  <a:srgbClr val="FFFFFF"/>
+                </a:solidFill>
+                <a:latin typeface="Cambria"/>
+              </a:rPr>
+              <a:t>MM</a:t>
+            </a:r>
+          </a:p>
+        </p:txBody>
+      </p:sp>
+      <p:sp>
+        <p:nvSpPr>
+          <p:cNvPr id="14" name="TextBox 11"/>
+          <p:cNvSpPr txBox="1"/>
+          <p:nvPr/>
+        </p:nvSpPr>
+        <p:spPr>
+          <a:xfrm>
+            <a:off x="3714750" y="3383280"/>
+            <a:ext cx="2023110" cy="365760"/>
+          </a:xfrm>
+          <a:prstGeom prst="rect">
+            <a:avLst/>
+          </a:prstGeom>
+          <a:noFill/>
+        </p:spPr>
+        <p:txBody>
+          <a:bodyPr wrap="square" lIns="0" rIns="0" tIns="0" bIns="0" anchor="t">
+            <a:spAutoFit/>
+          </a:bodyPr>
+          <a:lstStyle/>
+          <a:p>
+            <a:pPr algn="l"/>
+            <a:r>
+              <a:rPr sz="1600" b="1" i="0">
+                <a:solidFill>
+                  <a:srgbClr val="FFFFFF"/>
+                </a:solidFill>
+                <a:latin typeface="Cambria"/>
+              </a:rPr>
+              <a:t>Murali Madhav C</a:t>
+            </a:r>
+          </a:p>
+        </p:txBody>
+      </p:sp>
+      <p:sp>
+        <p:nvSpPr>
+          <p:cNvPr id="15" name="TextBox 23"/>
+          <p:cNvSpPr txBox="1"/>
+          <p:nvPr/>
+        </p:nvSpPr>
+        <p:spPr>
+          <a:xfrm>
+            <a:off x="3714750" y="3886200"/>
+            <a:ext cx="2023110" cy="228600"/>
+          </a:xfrm>
+          <a:prstGeom prst="rect">
+            <a:avLst/>
+          </a:prstGeom>
+          <a:noFill/>
+        </p:spPr>
+        <p:txBody>
+          <a:bodyPr wrap="square" lIns="0" rIns="0" tIns="0" bIns="0" anchor="t">
+            <a:spAutoFit/>
+          </a:bodyPr>
+          <a:lstStyle/>
+          <a:p>
+            <a:pPr algn="l"/>
+            <a:r>
+              <a:rPr sz="1100" b="1" i="0">
+                <a:solidFill>
+                  <a:srgbClr val="2EA79B"/>
+                </a:solidFill>
+                <a:latin typeface="Calibri"/>
+              </a:rPr>
+              <a:t>ROLE</a:t>
+            </a:r>
+          </a:p>
+        </p:txBody>
+      </p:sp>
+      <p:sp>
+        <p:nvSpPr>
+          <p:cNvPr id="16" name="TextBox 12"/>
+          <p:cNvSpPr txBox="1"/>
+          <p:nvPr/>
+        </p:nvSpPr>
+        <p:spPr>
+          <a:xfrm>
+            <a:off x="3714750" y="4160520"/>
+            <a:ext cx="2023110" cy="457200"/>
+          </a:xfrm>
+          <a:prstGeom prst="rect">
+            <a:avLst/>
+          </a:prstGeom>
+          <a:noFill/>
+        </p:spPr>
+        <p:txBody>
+          <a:bodyPr wrap="square" lIns="0" rIns="0" tIns="0" bIns="0" anchor="t">
+            <a:spAutoFit/>
+          </a:bodyPr>
+          <a:lstStyle/>
+          <a:p>
+            <a:pPr algn="l"/>
+            <a:r>
+              <a:rPr sz="1400" b="0" i="0">
+                <a:solidFill>
+                  <a:srgbClr val="D5E6EA"/>
+                </a:solidFill>
+                <a:latin typeface="Calibri"/>
+              </a:rPr>
+              <a:t>Code (notebook, scripts)</a:t>
+            </a:r>
+          </a:p>
+        </p:txBody>
+      </p:sp>
+      <p:sp>
+        <p:nvSpPr>
+          <p:cNvPr id="17" name="Rounded Rectangle 8"/>
+          <p:cNvSpPr/>
+          <p:nvPr/>
+        </p:nvSpPr>
+        <p:spPr>
+          <a:xfrm>
+            <a:off x="6195060" y="2011680"/>
+            <a:ext cx="2571750" cy="2743200"/>
+          </a:xfrm>
+          <a:prstGeom prst="roundRect">
+            <a:avLst>
+              <a:gd name="adj" fmla="val 6000"/>
+            </a:avLst>
+          </a:prstGeom>
+          <a:solidFill>
+            <a:srgbClr val="15455A"/>
+          </a:solidFill>
+          <a:ln w="12700">
+            <a:solidFill>
+              <a:srgbClr val="0E6274"/>
+            </a:solidFill>
+          </a:ln>
+          <a:effectLst/>
+        </p:spPr>
+        <p:style>
+          <a:lnRef idx="1">
+            <a:schemeClr val="accent1"/>
+          </a:lnRef>
+          <a:fillRef idx="3">
+            <a:schemeClr val="accent1"/>
+          </a:fillRef>
+          <a:effectRef idx="2">
+            <a:schemeClr val="accent1"/>
+          </a:effectRef>
+          <a:fontRef idx="minor">
+            <a:schemeClr val="lt1"/>
+          </a:fontRef>
+        </p:style>
+        <p:txBody>
+          <a:bodyPr rtlCol="0" anchor="ctr"/>
+          <a:lstStyle/>
+          <a:p/>
+        </p:txBody>
+      </p:sp>
+      <p:sp>
+        <p:nvSpPr>
+          <p:cNvPr id="18" name="Oval 9"/>
+          <p:cNvSpPr/>
+          <p:nvPr/>
+        </p:nvSpPr>
+        <p:spPr>
+          <a:xfrm>
+            <a:off x="6469380" y="2331720"/>
+            <a:ext cx="822960" cy="822960"/>
+          </a:xfrm>
+          <a:prstGeom prst="ellipse">
+            <a:avLst/>
+          </a:prstGeom>
+          <a:solidFill>
+            <a:srgbClr val="D99A00"/>
+          </a:solidFill>
+          <a:ln>
+            <a:noFill/>
+          </a:ln>
+          <a:effectLst/>
+        </p:spPr>
+        <p:style>
+          <a:lnRef idx="1">
+            <a:schemeClr val="accent1"/>
+          </a:lnRef>
+          <a:fillRef idx="3">
+            <a:schemeClr val="accent1"/>
+          </a:fillRef>
+          <a:effectRef idx="2">
+            <a:schemeClr val="accent1"/>
+          </a:effectRef>
+          <a:fontRef idx="minor">
+            <a:schemeClr val="lt1"/>
+          </a:fontRef>
+        </p:style>
+        <p:txBody>
+          <a:bodyPr rtlCol="0" anchor="ctr" lIns="0" rIns="0" tIns="0" bIns="0"/>
+          <a:lstStyle/>
+          <a:p>
+            <a:pPr algn="ctr"/>
+            <a:r>
+              <a:rPr sz="2000" b="1">
+                <a:solidFill>
+                  <a:srgbClr val="FFFFFF"/>
+                </a:solidFill>
+                <a:latin typeface="Cambria"/>
+              </a:rPr>
+              <a:t>RY</a:t>
+            </a:r>
+          </a:p>
+        </p:txBody>
+      </p:sp>
+      <p:sp>
+        <p:nvSpPr>
+          <p:cNvPr id="19" name="TextBox 11"/>
+          <p:cNvSpPr txBox="1"/>
+          <p:nvPr/>
+        </p:nvSpPr>
+        <p:spPr>
+          <a:xfrm>
+            <a:off x="6469380" y="3383280"/>
+            <a:ext cx="2023110" cy="365760"/>
+          </a:xfrm>
+          <a:prstGeom prst="rect">
+            <a:avLst/>
+          </a:prstGeom>
+          <a:noFill/>
+        </p:spPr>
+        <p:txBody>
+          <a:bodyPr wrap="square" lIns="0" rIns="0" tIns="0" bIns="0" anchor="t">
+            <a:spAutoFit/>
+          </a:bodyPr>
+          <a:lstStyle/>
+          <a:p>
+            <a:pPr algn="l"/>
+            <a:r>
+              <a:rPr sz="1600" b="1" i="0">
+                <a:solidFill>
+                  <a:srgbClr val="FFFFFF"/>
+                </a:solidFill>
+                <a:latin typeface="Cambria"/>
+              </a:rPr>
+              <a:t>Ravi Yadav</a:t>
+            </a:r>
+          </a:p>
+        </p:txBody>
+      </p:sp>
+      <p:sp>
+        <p:nvSpPr>
+          <p:cNvPr id="20" name="TextBox 23"/>
+          <p:cNvSpPr txBox="1"/>
+          <p:nvPr/>
+        </p:nvSpPr>
+        <p:spPr>
+          <a:xfrm>
+            <a:off x="6469380" y="3886200"/>
+            <a:ext cx="2023110" cy="228600"/>
+          </a:xfrm>
+          <a:prstGeom prst="rect">
+            <a:avLst/>
+          </a:prstGeom>
+          <a:noFill/>
+        </p:spPr>
+        <p:txBody>
+          <a:bodyPr wrap="square" lIns="0" rIns="0" tIns="0" bIns="0" anchor="t">
+            <a:spAutoFit/>
+          </a:bodyPr>
+          <a:lstStyle/>
+          <a:p>
+            <a:pPr algn="l"/>
+            <a:r>
+              <a:rPr sz="1100" b="1" i="0">
+                <a:solidFill>
+                  <a:srgbClr val="2EA79B"/>
+                </a:solidFill>
+                <a:latin typeface="Calibri"/>
+              </a:rPr>
+              <a:t>ROLE</a:t>
+            </a:r>
+          </a:p>
+        </p:txBody>
+      </p:sp>
+      <p:sp>
+        <p:nvSpPr>
+          <p:cNvPr id="21" name="TextBox 12"/>
+          <p:cNvSpPr txBox="1"/>
+          <p:nvPr/>
+        </p:nvSpPr>
+        <p:spPr>
+          <a:xfrm>
+            <a:off x="6469380" y="4160520"/>
+            <a:ext cx="2023110" cy="457200"/>
+          </a:xfrm>
+          <a:prstGeom prst="rect">
+            <a:avLst/>
+          </a:prstGeom>
+          <a:noFill/>
+        </p:spPr>
+        <p:txBody>
+          <a:bodyPr wrap="square" lIns="0" rIns="0" tIns="0" bIns="0" anchor="t">
+            <a:spAutoFit/>
+          </a:bodyPr>
+          <a:lstStyle/>
+          <a:p>
+            <a:pPr algn="l"/>
+            <a:r>
+              <a:rPr sz="1400" b="0" i="0">
+                <a:solidFill>
+                  <a:srgbClr val="D5E6EA"/>
+                </a:solidFill>
+                <a:latin typeface="Calibri"/>
+              </a:rPr>
+              <a:t>Slides</a:t>
+            </a:r>
+          </a:p>
+        </p:txBody>
+      </p:sp>
+      <p:sp>
+        <p:nvSpPr>
+          <p:cNvPr id="22" name="Rounded Rectangle 8"/>
+          <p:cNvSpPr/>
+          <p:nvPr/>
+        </p:nvSpPr>
+        <p:spPr>
+          <a:xfrm>
+            <a:off x="8949690" y="2011680"/>
+            <a:ext cx="2571750" cy="2743200"/>
+          </a:xfrm>
+          <a:prstGeom prst="roundRect">
+            <a:avLst>
+              <a:gd name="adj" fmla="val 6000"/>
+            </a:avLst>
+          </a:prstGeom>
+          <a:solidFill>
+            <a:srgbClr val="15455A"/>
+          </a:solidFill>
+          <a:ln w="12700">
+            <a:solidFill>
+              <a:srgbClr val="0E6274"/>
+            </a:solidFill>
+          </a:ln>
+          <a:effectLst/>
+        </p:spPr>
+        <p:style>
+          <a:lnRef idx="1">
+            <a:schemeClr val="accent1"/>
+          </a:lnRef>
+          <a:fillRef idx="3">
+            <a:schemeClr val="accent1"/>
+          </a:fillRef>
+          <a:effectRef idx="2">
+            <a:schemeClr val="accent1"/>
+          </a:effectRef>
+          <a:fontRef idx="minor">
+            <a:schemeClr val="lt1"/>
+          </a:fontRef>
+        </p:style>
+        <p:txBody>
+          <a:bodyPr rtlCol="0" anchor="ctr"/>
+          <a:lstStyle/>
+          <a:p/>
+        </p:txBody>
+      </p:sp>
+      <p:sp>
+        <p:nvSpPr>
+          <p:cNvPr id="23" name="Oval 9"/>
+          <p:cNvSpPr/>
+          <p:nvPr/>
+        </p:nvSpPr>
+        <p:spPr>
+          <a:xfrm>
+            <a:off x="9224010" y="2331720"/>
+            <a:ext cx="822960" cy="822960"/>
+          </a:xfrm>
+          <a:prstGeom prst="ellipse">
+            <a:avLst/>
+          </a:prstGeom>
+          <a:solidFill>
+            <a:srgbClr val="2EA79B"/>
+          </a:solidFill>
+          <a:ln>
+            <a:noFill/>
+          </a:ln>
+          <a:effectLst/>
+        </p:spPr>
+        <p:style>
+          <a:lnRef idx="1">
+            <a:schemeClr val="accent1"/>
+          </a:lnRef>
+          <a:fillRef idx="3">
+            <a:schemeClr val="accent1"/>
+          </a:fillRef>
+          <a:effectRef idx="2">
+            <a:schemeClr val="accent1"/>
+          </a:effectRef>
+          <a:fontRef idx="minor">
+            <a:schemeClr val="lt1"/>
+          </a:fontRef>
+        </p:style>
+        <p:txBody>
+          <a:bodyPr rtlCol="0" anchor="ctr" lIns="0" rIns="0" tIns="0" bIns="0"/>
+          <a:lstStyle/>
+          <a:p>
+            <a:pPr algn="ctr"/>
+            <a:r>
+              <a:rPr sz="2000" b="1">
+                <a:solidFill>
+                  <a:srgbClr val="FFFFFF"/>
+                </a:solidFill>
+                <a:latin typeface="Cambria"/>
+              </a:rPr>
+              <a:t>PJ</a:t>
+            </a:r>
+          </a:p>
+        </p:txBody>
+      </p:sp>
+      <p:sp>
+        <p:nvSpPr>
+          <p:cNvPr id="24" name="TextBox 11"/>
+          <p:cNvSpPr txBox="1"/>
+          <p:nvPr/>
+        </p:nvSpPr>
+        <p:spPr>
+          <a:xfrm>
+            <a:off x="9224010" y="3383280"/>
+            <a:ext cx="2023110" cy="365760"/>
+          </a:xfrm>
+          <a:prstGeom prst="rect">
+            <a:avLst/>
+          </a:prstGeom>
+          <a:noFill/>
+        </p:spPr>
+        <p:txBody>
+          <a:bodyPr wrap="square" lIns="0" rIns="0" tIns="0" bIns="0" anchor="t">
+            <a:spAutoFit/>
+          </a:bodyPr>
+          <a:lstStyle/>
+          <a:p>
+            <a:pPr algn="l"/>
+            <a:r>
+              <a:rPr sz="1600" b="1" i="0">
+                <a:solidFill>
+                  <a:srgbClr val="FFFFFF"/>
+                </a:solidFill>
+                <a:latin typeface="Cambria"/>
+              </a:rPr>
+              <a:t>Pugazhendhi J</a:t>
+            </a:r>
+          </a:p>
+        </p:txBody>
+      </p:sp>
+      <p:sp>
+        <p:nvSpPr>
+          <p:cNvPr id="25" name="TextBox 23"/>
+          <p:cNvSpPr txBox="1"/>
+          <p:nvPr/>
+        </p:nvSpPr>
+        <p:spPr>
+          <a:xfrm>
+            <a:off x="9224010" y="3886200"/>
+            <a:ext cx="2023110" cy="228600"/>
+          </a:xfrm>
+          <a:prstGeom prst="rect">
+            <a:avLst/>
+          </a:prstGeom>
+          <a:noFill/>
+        </p:spPr>
+        <p:txBody>
+          <a:bodyPr wrap="square" lIns="0" rIns="0" tIns="0" bIns="0" anchor="t">
+            <a:spAutoFit/>
+          </a:bodyPr>
+          <a:lstStyle/>
+          <a:p>
+            <a:pPr algn="l"/>
+            <a:r>
+              <a:rPr sz="1100" b="1" i="0">
+                <a:solidFill>
+                  <a:srgbClr val="2EA79B"/>
+                </a:solidFill>
+                <a:latin typeface="Calibri"/>
+              </a:rPr>
+              <a:t>ROLE</a:t>
+            </a:r>
+          </a:p>
+        </p:txBody>
+      </p:sp>
+      <p:sp>
+        <p:nvSpPr>
+          <p:cNvPr id="26" name="TextBox 12"/>
+          <p:cNvSpPr txBox="1"/>
+          <p:nvPr/>
+        </p:nvSpPr>
+        <p:spPr>
+          <a:xfrm>
+            <a:off x="9224010" y="4160520"/>
+            <a:ext cx="2023110" cy="457200"/>
+          </a:xfrm>
+          <a:prstGeom prst="rect">
+            <a:avLst/>
+          </a:prstGeom>
+          <a:noFill/>
+        </p:spPr>
+        <p:txBody>
+          <a:bodyPr wrap="square" lIns="0" rIns="0" tIns="0" bIns="0" anchor="t">
+            <a:spAutoFit/>
+          </a:bodyPr>
+          <a:lstStyle/>
+          <a:p>
+            <a:pPr algn="l"/>
+            <a:r>
+              <a:rPr sz="1400" b="0" i="0">
+                <a:solidFill>
+                  <a:srgbClr val="D5E6EA"/>
+                </a:solidFill>
+                <a:latin typeface="Calibri"/>
+              </a:rPr>
+              <a:t>Report</a:t>
+            </a:r>
+          </a:p>
+        </p:txBody>
+      </p:sp>
+      <p:sp>
+        <p:nvSpPr>
+          <p:cNvPr id="27" name="TextBox 23"/>
+          <p:cNvSpPr txBox="1"/>
+          <p:nvPr/>
+        </p:nvSpPr>
+        <p:spPr>
+          <a:xfrm>
+            <a:off x="685800" y="5212080"/>
+            <a:ext cx="10058400" cy="365760"/>
+          </a:xfrm>
+          <a:prstGeom prst="rect">
+            <a:avLst/>
+          </a:prstGeom>
+          <a:noFill/>
+        </p:spPr>
+        <p:txBody>
+          <a:bodyPr wrap="square" lIns="0" rIns="0" tIns="0" bIns="0" anchor="t">
+            <a:spAutoFit/>
+          </a:bodyPr>
+          <a:lstStyle/>
+          <a:p>
+            <a:pPr algn="l"/>
+            <a:r>
+              <a:rPr sz="1400" b="1" i="0">
+                <a:solidFill>
+                  <a:srgbClr val="2EA79B"/>
+                </a:solidFill>
+                <a:latin typeface="Calibri"/>
+              </a:rPr>
+              <a:t>Code, results &amp; slides:  </a:t>
+            </a:r>
+            <a:r>
+              <a:rPr sz="1400" b="0" i="0">
+                <a:solidFill>
+                  <a:srgbClr val="CFE3E8"/>
+                </a:solidFill>
+                <a:latin typeface="Calibri"/>
+              </a:rPr>
+              <a:t>github.com/amathziah/malaria-detection</a:t>
+            </a:r>
           </a:p>
         </p:txBody>
       </p:sp>
@@ -21259,7 +22548,7 @@
                 <a:ea typeface="Calibri" pitchFamily="34" charset="-122"/>
                 <a:cs typeface="Calibri" pitchFamily="34" charset="-120"/>
               </a:rPr>
-              <a:t>3</a:t>
+              <a:t>4</a:t>
             </a:r>
             <a:endParaRPr lang="en-US" sz="1000" dirty="0"/>
           </a:p>
@@ -21477,6 +22766,10 @@
             </a:outerShdw>
           </a:effectLst>
         </p:spPr>
+        <p:txBody>
+          <a:bodyPr/>
+          <a:p/>
+        </p:txBody>
       </p:sp>
       <p:sp>
         <p:nvSpPr>
@@ -21592,6 +22885,10 @@
             </a:outerShdw>
           </a:effectLst>
         </p:spPr>
+        <p:txBody>
+          <a:bodyPr/>
+          <a:p/>
+        </p:txBody>
       </p:sp>
       <p:sp>
         <p:nvSpPr>
@@ -21707,6 +23004,10 @@
             </a:outerShdw>
           </a:effectLst>
         </p:spPr>
+        <p:txBody>
+          <a:bodyPr/>
+          <a:p/>
+        </p:txBody>
       </p:sp>
       <p:sp>
         <p:nvSpPr>
@@ -21815,6 +23116,10 @@
             <a:prstDash val="solid"/>
           </a:ln>
         </p:spPr>
+        <p:txBody>
+          <a:bodyPr/>
+          <a:p/>
+        </p:txBody>
       </p:sp>
       <p:sp>
         <p:nvSpPr>
@@ -21835,6 +23140,10 @@
           </a:solidFill>
           <a:ln/>
         </p:spPr>
+        <p:txBody>
+          <a:bodyPr/>
+          <a:p/>
+        </p:txBody>
       </p:sp>
       <p:pic>
         <p:nvPicPr>
@@ -22025,6 +23334,10 @@
             </a:outerShdw>
           </a:effectLst>
         </p:spPr>
+        <p:txBody>
+          <a:bodyPr/>
+          <a:p/>
+        </p:txBody>
       </p:sp>
       <p:sp>
         <p:nvSpPr>
@@ -22213,6 +23526,10 @@
             <a:prstDash val="solid"/>
           </a:ln>
         </p:spPr>
+        <p:txBody>
+          <a:bodyPr/>
+          <a:p/>
+        </p:txBody>
       </p:sp>
       <p:sp>
         <p:nvSpPr>
@@ -22362,7 +23679,7 @@
                 <a:ea typeface="Calibri" pitchFamily="34" charset="-122"/>
                 <a:cs typeface="Calibri" pitchFamily="34" charset="-120"/>
               </a:rPr>
-              <a:t>4</a:t>
+              <a:t>5</a:t>
             </a:r>
             <a:endParaRPr lang="en-US" sz="1000" dirty="0"/>
           </a:p>
@@ -22414,6 +23731,10 @@
           </a:solidFill>
           <a:ln/>
         </p:spPr>
+        <p:txBody>
+          <a:bodyPr/>
+          <a:p/>
+        </p:txBody>
       </p:sp>
       <p:sp>
         <p:nvSpPr>
@@ -22436,6 +23757,10 @@
           </a:solidFill>
           <a:ln/>
         </p:spPr>
+        <p:txBody>
+          <a:bodyPr/>
+          <a:p/>
+        </p:txBody>
       </p:sp>
       <p:sp>
         <p:nvSpPr>
@@ -22458,6 +23783,10 @@
           </a:solidFill>
           <a:ln/>
         </p:spPr>
+        <p:txBody>
+          <a:bodyPr/>
+          <a:p/>
+        </p:txBody>
       </p:sp>
       <p:sp>
         <p:nvSpPr>
@@ -22559,6 +23888,10 @@
             <a:prstDash val="solid"/>
           </a:ln>
         </p:spPr>
+        <p:txBody>
+          <a:bodyPr/>
+          <a:p/>
+        </p:txBody>
       </p:sp>
       <p:sp>
         <p:nvSpPr>
@@ -22680,6 +24013,10 @@
           </a:solidFill>
           <a:ln/>
         </p:spPr>
+        <p:txBody>
+          <a:bodyPr/>
+          <a:p/>
+        </p:txBody>
       </p:sp>
       <p:pic>
         <p:nvPicPr>
@@ -22726,6 +24063,10 @@
             <a:prstDash val="solid"/>
           </a:ln>
         </p:spPr>
+        <p:txBody>
+          <a:bodyPr/>
+          <a:p/>
+        </p:txBody>
       </p:sp>
       <p:sp>
         <p:nvSpPr>
@@ -22889,6 +24230,10 @@
           </a:solidFill>
           <a:ln/>
         </p:spPr>
+        <p:txBody>
+          <a:bodyPr/>
+          <a:p/>
+        </p:txBody>
       </p:sp>
       <p:pic>
         <p:nvPicPr>
@@ -22935,6 +24280,10 @@
             <a:prstDash val="solid"/>
           </a:ln>
         </p:spPr>
+        <p:txBody>
+          <a:bodyPr/>
+          <a:p/>
+        </p:txBody>
       </p:sp>
       <p:sp>
         <p:nvSpPr>
@@ -23098,6 +24447,10 @@
           </a:solidFill>
           <a:ln/>
         </p:spPr>
+        <p:txBody>
+          <a:bodyPr/>
+          <a:p/>
+        </p:txBody>
       </p:sp>
       <p:pic>
         <p:nvPicPr>
@@ -23144,6 +24497,10 @@
             <a:prstDash val="solid"/>
           </a:ln>
         </p:spPr>
+        <p:txBody>
+          <a:bodyPr/>
+          <a:p/>
+        </p:txBody>
       </p:sp>
       <p:sp>
         <p:nvSpPr>
@@ -23307,6 +24664,10 @@
           </a:solidFill>
           <a:ln/>
         </p:spPr>
+        <p:txBody>
+          <a:bodyPr/>
+          <a:p/>
+        </p:txBody>
       </p:sp>
       <p:pic>
         <p:nvPicPr>
@@ -23353,6 +24714,10 @@
             <a:prstDash val="solid"/>
           </a:ln>
         </p:spPr>
+        <p:txBody>
+          <a:bodyPr/>
+          <a:p/>
+        </p:txBody>
       </p:sp>
       <p:sp>
         <p:nvSpPr>
@@ -23516,6 +24881,10 @@
           </a:solidFill>
           <a:ln/>
         </p:spPr>
+        <p:txBody>
+          <a:bodyPr/>
+          <a:p/>
+        </p:txBody>
       </p:sp>
       <p:pic>
         <p:nvPicPr>
@@ -23562,6 +24931,10 @@
             <a:prstDash val="solid"/>
           </a:ln>
         </p:spPr>
+        <p:txBody>
+          <a:bodyPr/>
+          <a:p/>
+        </p:txBody>
       </p:sp>
       <p:sp>
         <p:nvSpPr>
@@ -23800,6 +25173,10 @@
             </a:outerShdw>
           </a:effectLst>
         </p:spPr>
+        <p:txBody>
+          <a:bodyPr/>
+          <a:p/>
+        </p:txBody>
       </p:sp>
       <p:sp>
         <p:nvSpPr>
@@ -23820,6 +25197,10 @@
           </a:solidFill>
           <a:ln/>
         </p:spPr>
+        <p:txBody>
+          <a:bodyPr/>
+          <a:p/>
+        </p:txBody>
       </p:sp>
       <p:pic>
         <p:nvPicPr>
@@ -23952,6 +25333,10 @@
             <a:prstDash val="solid"/>
           </a:ln>
         </p:spPr>
+        <p:txBody>
+          <a:bodyPr/>
+          <a:p/>
+        </p:txBody>
       </p:sp>
       <p:sp>
         <p:nvSpPr>
@@ -24057,6 +25442,10 @@
             <a:prstDash val="solid"/>
           </a:ln>
         </p:spPr>
+        <p:txBody>
+          <a:bodyPr/>
+          <a:p/>
+        </p:txBody>
       </p:sp>
       <p:sp>
         <p:nvSpPr>
@@ -24169,6 +25558,10 @@
             </a:outerShdw>
           </a:effectLst>
         </p:spPr>
+        <p:txBody>
+          <a:bodyPr/>
+          <a:p/>
+        </p:txBody>
       </p:sp>
       <p:sp>
         <p:nvSpPr>
@@ -24189,6 +25582,10 @@
           </a:solidFill>
           <a:ln/>
         </p:spPr>
+        <p:txBody>
+          <a:bodyPr/>
+          <a:p/>
+        </p:txBody>
       </p:sp>
       <p:pic>
         <p:nvPicPr>
@@ -24321,6 +25718,10 @@
             <a:prstDash val="solid"/>
           </a:ln>
         </p:spPr>
+        <p:txBody>
+          <a:bodyPr/>
+          <a:p/>
+        </p:txBody>
       </p:sp>
       <p:sp>
         <p:nvSpPr>
@@ -24387,6 +25788,10 @@
             <a:prstDash val="solid"/>
           </a:ln>
         </p:spPr>
+        <p:txBody>
+          <a:bodyPr/>
+          <a:p/>
+        </p:txBody>
       </p:sp>
       <p:sp>
         <p:nvSpPr>
@@ -24453,6 +25858,10 @@
             <a:prstDash val="solid"/>
           </a:ln>
         </p:spPr>
+        <p:txBody>
+          <a:bodyPr/>
+          <a:p/>
+        </p:txBody>
       </p:sp>
       <p:sp>
         <p:nvSpPr>
@@ -24519,6 +25928,10 @@
             <a:prstDash val="solid"/>
           </a:ln>
         </p:spPr>
+        <p:txBody>
+          <a:bodyPr/>
+          <a:p/>
+        </p:txBody>
       </p:sp>
       <p:sp>
         <p:nvSpPr>
@@ -24585,6 +25998,10 @@
             <a:prstDash val="solid"/>
           </a:ln>
         </p:spPr>
+        <p:txBody>
+          <a:bodyPr/>
+          <a:p/>
+        </p:txBody>
       </p:sp>
       <p:sp>
         <p:nvSpPr>
@@ -24685,6 +26102,10 @@
           </a:solidFill>
           <a:ln/>
         </p:spPr>
+        <p:txBody>
+          <a:bodyPr/>
+          <a:p/>
+        </p:txBody>
       </p:sp>
       <p:sp>
         <p:nvSpPr>
@@ -24705,6 +26126,10 @@
           </a:solidFill>
           <a:ln/>
         </p:spPr>
+        <p:txBody>
+          <a:bodyPr/>
+          <a:p/>
+        </p:txBody>
       </p:sp>
       <p:pic>
         <p:nvPicPr>
@@ -24900,7 +26325,7 @@
                 <a:ea typeface="Calibri" pitchFamily="34" charset="-122"/>
                 <a:cs typeface="Calibri" pitchFamily="34" charset="-120"/>
               </a:rPr>
-              <a:t>6</a:t>
+              <a:t>7</a:t>
             </a:r>
             <a:endParaRPr lang="en-US" sz="1000" dirty="0"/>
           </a:p>
@@ -25118,6 +26543,10 @@
             </a:outerShdw>
           </a:effectLst>
         </p:spPr>
+        <p:txBody>
+          <a:bodyPr/>
+          <a:p/>
+        </p:txBody>
       </p:sp>
       <p:sp>
         <p:nvSpPr>
@@ -25138,6 +26567,10 @@
           </a:solidFill>
           <a:ln/>
         </p:spPr>
+        <p:txBody>
+          <a:bodyPr/>
+          <a:p/>
+        </p:txBody>
       </p:sp>
       <p:pic>
         <p:nvPicPr>
@@ -25350,6 +26783,10 @@
             </a:outerShdw>
           </a:effectLst>
         </p:spPr>
+        <p:txBody>
+          <a:bodyPr/>
+          <a:p/>
+        </p:txBody>
       </p:sp>
       <p:sp>
         <p:nvSpPr>
@@ -25370,6 +26807,10 @@
           </a:solidFill>
           <a:ln/>
         </p:spPr>
+        <p:txBody>
+          <a:bodyPr/>
+          <a:p/>
+        </p:txBody>
       </p:sp>
       <p:pic>
         <p:nvPicPr>
@@ -25575,6 +27016,10 @@
             <a:prstDash val="solid"/>
           </a:ln>
         </p:spPr>
+        <p:txBody>
+          <a:bodyPr/>
+          <a:p/>
+        </p:txBody>
       </p:sp>
       <p:sp>
         <p:nvSpPr>
@@ -25595,6 +27040,10 @@
           </a:solidFill>
           <a:ln/>
         </p:spPr>
+        <p:txBody>
+          <a:bodyPr/>
+          <a:p/>
+        </p:txBody>
       </p:sp>
       <p:pic>
         <p:nvPicPr>
@@ -25751,7 +27200,7 @@
                 <a:ea typeface="Calibri" pitchFamily="34" charset="-122"/>
                 <a:cs typeface="Calibri" pitchFamily="34" charset="-120"/>
               </a:rPr>
-              <a:t>7</a:t>
+              <a:t>8</a:t>
             </a:r>
             <a:endParaRPr lang="en-US" sz="1000" dirty="0"/>
           </a:p>
@@ -25935,6 +27384,10 @@
             </a:outerShdw>
           </a:effectLst>
         </p:spPr>
+        <p:txBody>
+          <a:bodyPr/>
+          <a:p/>
+        </p:txBody>
       </p:sp>
       <p:sp>
         <p:nvSpPr>
@@ -25955,6 +27408,10 @@
           </a:solidFill>
           <a:ln/>
         </p:spPr>
+        <p:txBody>
+          <a:bodyPr/>
+          <a:p/>
+        </p:txBody>
       </p:sp>
       <p:pic>
         <p:nvPicPr>
@@ -26337,6 +27794,10 @@
             </a:outerShdw>
           </a:effectLst>
         </p:spPr>
+        <p:txBody>
+          <a:bodyPr/>
+          <a:p/>
+        </p:txBody>
       </p:sp>
       <p:sp>
         <p:nvSpPr>
@@ -26357,6 +27818,10 @@
           </a:solidFill>
           <a:ln/>
         </p:spPr>
+        <p:txBody>
+          <a:bodyPr/>
+          <a:p/>
+        </p:txBody>
       </p:sp>
       <p:pic>
         <p:nvPicPr>
@@ -26739,6 +28204,10 @@
             </a:outerShdw>
           </a:effectLst>
         </p:spPr>
+        <p:txBody>
+          <a:bodyPr/>
+          <a:p/>
+        </p:txBody>
       </p:sp>
       <p:sp>
         <p:nvSpPr>
@@ -26759,6 +28228,10 @@
           </a:solidFill>
           <a:ln/>
         </p:spPr>
+        <p:txBody>
+          <a:bodyPr/>
+          <a:p/>
+        </p:txBody>
       </p:sp>
       <p:pic>
         <p:nvPicPr>
@@ -27180,7 +28653,7 @@
                 <a:ea typeface="Calibri" pitchFamily="34" charset="-122"/>
                 <a:cs typeface="Calibri" pitchFamily="34" charset="-120"/>
               </a:rPr>
-              <a:t>8</a:t>
+              <a:t>9</a:t>
             </a:r>
             <a:endParaRPr lang="en-US" sz="1000" dirty="0"/>
           </a:p>
@@ -27322,6 +28795,10 @@
             </a:outerShdw>
           </a:effectLst>
         </p:spPr>
+        <p:txBody>
+          <a:bodyPr/>
+          <a:p/>
+        </p:txBody>
       </p:sp>
       <p:sp>
         <p:nvSpPr>
@@ -27342,6 +28819,10 @@
           </a:solidFill>
           <a:ln/>
         </p:spPr>
+        <p:txBody>
+          <a:bodyPr/>
+          <a:p/>
+        </p:txBody>
       </p:sp>
       <p:pic>
         <p:nvPicPr>
@@ -27581,6 +29062,10 @@
             <a:prstDash val="solid"/>
           </a:ln>
         </p:spPr>
+        <p:txBody>
+          <a:bodyPr/>
+          <a:p/>
+        </p:txBody>
       </p:sp>
       <p:sp>
         <p:nvSpPr>
@@ -27814,6 +29299,10 @@
             </a:outerShdw>
           </a:effectLst>
         </p:spPr>
+        <p:txBody>
+          <a:bodyPr/>
+          <a:p/>
+        </p:txBody>
       </p:sp>
       <p:sp>
         <p:nvSpPr>
@@ -27834,6 +29323,10 @@
           </a:solidFill>
           <a:ln/>
         </p:spPr>
+        <p:txBody>
+          <a:bodyPr/>
+          <a:p/>
+        </p:txBody>
       </p:sp>
       <p:pic>
         <p:nvPicPr>
@@ -27956,6 +29449,10 @@
           </a:solidFill>
           <a:ln/>
         </p:spPr>
+        <p:txBody>
+          <a:bodyPr/>
+          <a:p/>
+        </p:txBody>
       </p:sp>
       <p:sp>
         <p:nvSpPr>
@@ -28071,6 +29568,10 @@
             <a:prstDash val="solid"/>
           </a:ln>
         </p:spPr>
+        <p:txBody>
+          <a:bodyPr/>
+          <a:p/>
+        </p:txBody>
       </p:sp>
       <p:sp>
         <p:nvSpPr>
@@ -28091,6 +29592,10 @@
           </a:solidFill>
           <a:ln/>
         </p:spPr>
+        <p:txBody>
+          <a:bodyPr/>
+          <a:p/>
+        </p:txBody>
       </p:sp>
       <p:sp>
         <p:nvSpPr>
@@ -28206,6 +29711,10 @@
             <a:prstDash val="solid"/>
           </a:ln>
         </p:spPr>
+        <p:txBody>
+          <a:bodyPr/>
+          <a:p/>
+        </p:txBody>
       </p:sp>
       <p:sp>
         <p:nvSpPr>
@@ -28226,6 +29735,10 @@
           </a:solidFill>
           <a:ln/>
         </p:spPr>
+        <p:txBody>
+          <a:bodyPr/>
+          <a:p/>
+        </p:txBody>
       </p:sp>
       <p:sp>
         <p:nvSpPr>
@@ -28341,6 +29854,10 @@
             <a:prstDash val="solid"/>
           </a:ln>
         </p:spPr>
+        <p:txBody>
+          <a:bodyPr/>
+          <a:p/>
+        </p:txBody>
       </p:sp>
       <p:sp>
         <p:nvSpPr>
@@ -28361,6 +29878,10 @@
           </a:solidFill>
           <a:ln/>
         </p:spPr>
+        <p:txBody>
+          <a:bodyPr/>
+          <a:p/>
+        </p:txBody>
       </p:sp>
       <p:sp>
         <p:nvSpPr>
@@ -28476,6 +29997,10 @@
             <a:prstDash val="solid"/>
           </a:ln>
         </p:spPr>
+        <p:txBody>
+          <a:bodyPr/>
+          <a:p/>
+        </p:txBody>
       </p:sp>
       <p:sp>
         <p:nvSpPr>
@@ -28496,6 +30021,10 @@
           </a:solidFill>
           <a:ln/>
         </p:spPr>
+        <p:txBody>
+          <a:bodyPr/>
+          <a:p/>
+        </p:txBody>
       </p:sp>
       <p:sp>
         <p:nvSpPr>
@@ -28714,7 +30243,7 @@
                 <a:ea typeface="Calibri" pitchFamily="34" charset="-122"/>
                 <a:cs typeface="Calibri" pitchFamily="34" charset="-120"/>
               </a:rPr>
-              <a:t>9</a:t>
+              <a:t>10</a:t>
             </a:r>
             <a:endParaRPr lang="en-US" sz="1000" dirty="0"/>
           </a:p>

--- a/slides/Malaria_Phase2_Baseline_Hypothesis_filled.pptx
+++ b/slides/Malaria_Phase2_Baseline_Hypothesis_filled.pptx
@@ -1877,6 +1877,96 @@
           <a:p>
             <a:r>
               <a:t>How we will test the hypothesis next milestone. A0 is done: that's the reproduction. A1 removes leakage (H1). A2 adds stain normalisation on top (H2). A3 is a control showing that any gain is about generalising to new slides, not a general boost. We report recall and MCC alongside accuracy, as mean ± SD over folds. All of these are already built into the notebook as on/off switches. Our A0 baseline already shows why recall comes first: 96.81 % vs. the paper's 98.82 %, i.e. 44 missed infected cells on the test set.</a:t>
+            </a:r>
+          </a:p>
+        </p:txBody>
+      </p:sp>
+      <p:sp>
+        <p:nvSpPr>
+          <p:cNvPr id="4" name="Slide Number Placeholder 3"/>
+          <p:cNvSpPr>
+            <a:spLocks noGrp="1"/>
+          </p:cNvSpPr>
+          <p:nvPr>
+            <p:ph type="sldNum" idx="5" sz="quarter"/>
+          </p:nvPr>
+        </p:nvSpPr>
+        <p:spPr/>
+      </p:sp>
+    </p:spTree>
+  </p:cSld>
+  <p:clrMapOvr>
+    <a:masterClrMapping/>
+  </p:clrMapOvr>
+</p:notes>
+</file>
+
+<file path=ppt/notesSlides/notesSlide22.xml><?xml version="1.0" encoding="utf-8"?>
+<p:notes xmlns:a="http://schemas.openxmlformats.org/drawingml/2006/main" xmlns:p="http://schemas.openxmlformats.org/presentationml/2006/main" xmlns:r="http://schemas.openxmlformats.org/officeDocument/2006/relationships">
+  <p:cSld>
+    <p:spTree>
+      <p:nvGrpSpPr>
+        <p:cNvPr id="1" name=""/>
+        <p:cNvGrpSpPr/>
+        <p:nvPr/>
+      </p:nvGrpSpPr>
+      <p:grpSpPr>
+        <a:xfrm>
+          <a:off x="0" y="0"/>
+          <a:ext cx="0" cy="0"/>
+          <a:chOff x="0" y="0"/>
+          <a:chExt cx="0" cy="0"/>
+        </a:xfrm>
+      </p:grpSpPr>
+      <p:sp>
+        <p:nvSpPr>
+          <p:cNvPr id="2" name="Slide Image Placeholder 1"/>
+          <p:cNvSpPr>
+            <a:spLocks noGrp="1"/>
+          </p:cNvSpPr>
+          <p:nvPr>
+            <p:ph type="sldImg" idx="2"/>
+          </p:nvPr>
+        </p:nvSpPr>
+        <p:spPr/>
+      </p:sp>
+      <p:sp>
+        <p:nvSpPr>
+          <p:cNvPr id="3" name="Notes Placeholder 2"/>
+          <p:cNvSpPr>
+            <a:spLocks noGrp="1"/>
+          </p:cNvSpPr>
+          <p:nvPr>
+            <p:ph type="body" idx="3" sz="quarter"/>
+          </p:nvPr>
+        </p:nvSpPr>
+        <p:spPr/>
+        <p:txBody>
+          <a:bodyPr/>
+          <a:lstStyle/>
+          <a:p>
+            <a:r>
+              <a:t>This slide is just the A0 results as pictures, so you can see them instead of reading the table.</a:t>
+            </a:r>
+          </a:p>
+          <a:p>
+            <a:r>
+              <a:t>Left, paper vs. ours: light bars are what Marques et al. report, dark bars are our run. The axis starts at 94 %, so the gaps look bigger than they are. Mean fold accuracy is 0.32 pp lower and ensemble accuracy 0.72 pp lower, both inside our 1 pp target. Precision is actually a bit higher than the paper, ROC-AUC is the same (99.76 %). Recall is the one real gap: 96.81 % vs. 98.82 %.</a:t>
+            </a:r>
+          </a:p>
+          <a:p>
+            <a:r>
+              <a:t>Right, first panel, training curves: accuracy per epoch for each of our 3 folds, dashed is training and solid is validation. Validation flattens out after a few epochs, which is why early stopping ended each fold after 9 or 10 epochs. Fold 1 (orange) sits lowest the whole time.</a:t>
+            </a:r>
+          </a:p>
+          <a:p>
+            <a:r>
+              <a:t>Middle panel, confusion matrix of the 3-model ensemble on the 2,756 test cells: 1,334 infected cells caught (true positives), 1,355 healthy cells correctly cleared (true negatives), 23 false alarms and 44 infected cells missed. Those 44 misses are why recall is lower, and for diagnosis a miss is the worse mistake.</a:t>
+            </a:r>
+          </a:p>
+          <a:p>
+            <a:r>
+              <a:t>Last panel, ROC curve, zoomed into the top-left corner: the curve hugs the top, ensemble AUC is 99.76 %, the same as the paper. So the model separates the two classes very well; the misses come from where the threshold sits, not from the model being bad at ranking.</a:t>
             </a:r>
           </a:p>
         </p:txBody>
@@ -19334,30 +19424,139 @@
   <p:cSld>
     <p:spTree>
       <p:nvGrpSpPr>
-        <p:cNvPr id="1" name=""/>
+        <p:cNvPr id="2" name=""/>
         <p:cNvGrpSpPr/>
         <p:nvPr/>
       </p:nvGrpSpPr>
       <p:grpSpPr/>
       <p:sp>
         <p:nvSpPr>
-          <p:cNvPr id="2" name="Oval 1"/>
+          <p:cNvPr id="3" name="TextBox 1"/>
+          <p:cNvSpPr txBox="1"/>
+          <p:nvPr/>
+        </p:nvSpPr>
+        <p:spPr>
+          <a:xfrm>
+            <a:off x="548640" y="457200"/>
+            <a:ext cx="11064240" cy="274320"/>
+          </a:xfrm>
+          <a:prstGeom prst="rect">
+            <a:avLst/>
+          </a:prstGeom>
+          <a:noFill/>
+        </p:spPr>
+        <p:txBody>
+          <a:bodyPr wrap="square" lIns="0" rIns="0" tIns="0" bIns="0" anchor="t">
+            <a:spAutoFit/>
+          </a:bodyPr>
+          <a:lstStyle/>
+          <a:p>
+            <a:pPr algn="l"/>
+            <a:r>
+              <a:rPr sz="1250" b="1" i="0">
+                <a:solidFill>
+                  <a:srgbClr val="137C8E"/>
+                </a:solidFill>
+                <a:latin typeface="Calibri"/>
+              </a:rPr>
+              <a:t>MILESTONE 2 · BASELINE REPRODUCTION</a:t>
+            </a:r>
+          </a:p>
+        </p:txBody>
+      </p:sp>
+      <p:sp>
+        <p:nvSpPr>
+          <p:cNvPr id="4" name="TextBox 2"/>
+          <p:cNvSpPr txBox="1"/>
+          <p:nvPr/>
+        </p:nvSpPr>
+        <p:spPr>
+          <a:xfrm>
+            <a:off x="548640" y="749808"/>
+            <a:ext cx="11064240" cy="658368"/>
+          </a:xfrm>
+          <a:prstGeom prst="rect">
+            <a:avLst/>
+          </a:prstGeom>
+          <a:noFill/>
+        </p:spPr>
+        <p:txBody>
+          <a:bodyPr wrap="square" lIns="0" rIns="0" tIns="0" bIns="0" anchor="t">
+            <a:spAutoFit/>
+          </a:bodyPr>
+          <a:lstStyle/>
+          <a:p>
+            <a:pPr algn="l"/>
+            <a:r>
+              <a:rPr sz="3000" b="1" i="0">
+                <a:solidFill>
+                  <a:srgbClr val="17262E"/>
+                </a:solidFill>
+                <a:latin typeface="Cambria"/>
+              </a:rPr>
+              <a:t>A0 results at a glance</a:t>
+            </a:r>
+          </a:p>
+        </p:txBody>
+      </p:sp>
+      <p:sp>
+        <p:nvSpPr>
+          <p:cNvPr id="5" name="TextBox 3"/>
+          <p:cNvSpPr txBox="1"/>
+          <p:nvPr/>
+        </p:nvSpPr>
+        <p:spPr>
+          <a:xfrm>
+            <a:off x="548640" y="1463040"/>
+            <a:ext cx="11064240" cy="457200"/>
+          </a:xfrm>
+          <a:prstGeom prst="rect">
+            <a:avLst/>
+          </a:prstGeom>
+          <a:noFill/>
+        </p:spPr>
+        <p:txBody>
+          <a:bodyPr wrap="square" lIns="0" rIns="0" tIns="0" bIns="0" anchor="t">
+            <a:spAutoFit/>
+          </a:bodyPr>
+          <a:lstStyle/>
+          <a:p>
+            <a:pPr algn="l"/>
+            <a:r>
+              <a:rPr sz="1550" b="0" i="0">
+                <a:solidFill>
+                  <a:srgbClr val="41525B"/>
+                </a:solidFill>
+                <a:latin typeface="Calibri"/>
+              </a:rPr>
+              <a:t>Ensemble of our 3 fold models on the 2,756-image hold-out test set, next to what Marques et al. [8] report.</a:t>
+            </a:r>
+          </a:p>
+        </p:txBody>
+      </p:sp>
+      <p:sp>
+        <p:nvSpPr>
+          <p:cNvPr id="6" name="Rounded Rectangle 6"/>
           <p:cNvSpPr/>
           <p:nvPr/>
         </p:nvSpPr>
         <p:spPr>
           <a:xfrm>
-            <a:off x="11109960" y="320040"/>
-            <a:ext cx="1005840" cy="1005840"/>
-          </a:xfrm>
-          <a:prstGeom prst="ellipse">
-            <a:avLst/>
+            <a:off x="548640" y="2057400"/>
+            <a:ext cx="4454730" cy="2312244"/>
+          </a:xfrm>
+          <a:prstGeom prst="roundRect">
+            <a:avLst>
+              <a:gd name="adj" fmla="val 6000"/>
+            </a:avLst>
           </a:prstGeom>
           <a:solidFill>
-            <a:srgbClr val="8A43B0"/>
+            <a:srgbClr val="EAF3F5"/>
           </a:solidFill>
-          <a:ln>
-            <a:noFill/>
+          <a:ln w="12700">
+            <a:solidFill>
+              <a:srgbClr val="D3E1E6"/>
+            </a:solidFill>
           </a:ln>
           <a:effectLst/>
         </p:spPr>
@@ -19383,23 +19582,86 @@
       </p:sp>
       <p:sp>
         <p:nvSpPr>
-          <p:cNvPr id="3" name="Oval 2"/>
+          <p:cNvPr id="7" name="TextBox 7"/>
+          <p:cNvSpPr txBox="1"/>
+          <p:nvPr/>
+        </p:nvSpPr>
+        <p:spPr>
+          <a:xfrm>
+            <a:off x="685800" y="2194560"/>
+            <a:ext cx="4180410" cy="274320"/>
+          </a:xfrm>
+          <a:prstGeom prst="rect">
+            <a:avLst/>
+          </a:prstGeom>
+          <a:noFill/>
+        </p:spPr>
+        <p:txBody>
+          <a:bodyPr wrap="square" lIns="0" rIns="0" tIns="0" bIns="0" anchor="t">
+            <a:spAutoFit/>
+          </a:bodyPr>
+          <a:lstStyle/>
+          <a:p>
+            <a:pPr algn="l"/>
+            <a:r>
+              <a:rPr sz="1100" b="1" i="0">
+                <a:solidFill>
+                  <a:srgbClr val="137C8E"/>
+                </a:solidFill>
+                <a:latin typeface="Calibri"/>
+              </a:rPr>
+              <a:t>PAPER VS. OURS</a:t>
+            </a:r>
+          </a:p>
+        </p:txBody>
+      </p:sp>
+      <p:pic>
+        <p:nvPicPr>
+          <p:cNvPr id="8" name="Figure Paper" descr="A0_vs_paper.png"/>
+          <p:cNvPicPr>
+            <a:picLocks noChangeAspect="1"/>
+          </p:cNvPicPr>
+          <p:nvPr/>
+        </p:nvPicPr>
+        <p:blipFill>
+          <a:blip r:embed="rId2"/>
+          <a:stretch>
+            <a:fillRect/>
+          </a:stretch>
+        </p:blipFill>
+        <p:spPr>
+          <a:xfrm>
+            <a:off x="685800" y="2560320"/>
+            <a:ext cx="4180410" cy="1672164"/>
+          </a:xfrm>
+          <a:prstGeom prst="rect">
+            <a:avLst/>
+          </a:prstGeom>
+        </p:spPr>
+      </p:pic>
+      <p:sp>
+        <p:nvSpPr>
+          <p:cNvPr id="9" name="Rounded Rectangle 6"/>
           <p:cNvSpPr/>
           <p:nvPr/>
         </p:nvSpPr>
         <p:spPr>
           <a:xfrm>
-            <a:off x="11475720" y="6172200"/>
-            <a:ext cx="822960" cy="822960"/>
-          </a:xfrm>
-          <a:prstGeom prst="ellipse">
-            <a:avLst/>
+            <a:off x="5186250" y="2057400"/>
+            <a:ext cx="6454056" cy="2312244"/>
+          </a:xfrm>
+          <a:prstGeom prst="roundRect">
+            <a:avLst>
+              <a:gd name="adj" fmla="val 6000"/>
+            </a:avLst>
           </a:prstGeom>
           <a:solidFill>
-            <a:srgbClr val="137C8E"/>
+            <a:srgbClr val="EAF3F5"/>
           </a:solidFill>
-          <a:ln>
-            <a:noFill/>
+          <a:ln w="12700">
+            <a:solidFill>
+              <a:srgbClr val="D3E1E6"/>
+            </a:solidFill>
           </a:ln>
           <a:effectLst/>
         </p:spPr>
@@ -19425,22 +19687,300 @@
       </p:sp>
       <p:sp>
         <p:nvSpPr>
-          <p:cNvPr id="4" name="Rounded Rectangle 3"/>
+          <p:cNvPr id="10" name="TextBox 7"/>
+          <p:cNvSpPr txBox="1"/>
+          <p:nvPr/>
+        </p:nvSpPr>
+        <p:spPr>
+          <a:xfrm>
+            <a:off x="5323410" y="2194560"/>
+            <a:ext cx="6179736" cy="274320"/>
+          </a:xfrm>
+          <a:prstGeom prst="rect">
+            <a:avLst/>
+          </a:prstGeom>
+          <a:noFill/>
+        </p:spPr>
+        <p:txBody>
+          <a:bodyPr wrap="square" lIns="0" rIns="0" tIns="0" bIns="0" anchor="t">
+            <a:spAutoFit/>
+          </a:bodyPr>
+          <a:lstStyle/>
+          <a:p>
+            <a:pPr algn="l"/>
+            <a:r>
+              <a:rPr sz="1100" b="1" i="0">
+                <a:solidFill>
+                  <a:srgbClr val="137C8E"/>
+                </a:solidFill>
+                <a:latin typeface="Calibri"/>
+              </a:rPr>
+              <a:t>TRAINING CURVES · CONFUSION MATRIX · ROC</a:t>
+            </a:r>
+          </a:p>
+        </p:txBody>
+      </p:sp>
+      <p:pic>
+        <p:nvPicPr>
+          <p:cNvPr id="11" name="Figure Training" descr="A0_curves_cm_roc.png"/>
+          <p:cNvPicPr>
+            <a:picLocks noChangeAspect="1"/>
+          </p:cNvPicPr>
+          <p:nvPr/>
+        </p:nvPicPr>
+        <p:blipFill>
+          <a:blip r:embed="rId3"/>
+          <a:stretch>
+            <a:fillRect/>
+          </a:stretch>
+        </p:blipFill>
+        <p:spPr>
+          <a:xfrm>
+            <a:off x="5323410" y="2560320"/>
+            <a:ext cx="6179736" cy="1672164"/>
+          </a:xfrm>
+          <a:prstGeom prst="rect">
+            <a:avLst/>
+          </a:prstGeom>
+        </p:spPr>
+      </p:pic>
+      <p:sp>
+        <p:nvSpPr>
+          <p:cNvPr id="12" name="Shape 15"/>
           <p:cNvSpPr/>
           <p:nvPr/>
         </p:nvSpPr>
         <p:spPr>
           <a:xfrm>
-            <a:off x="640080" y="502920"/>
-            <a:ext cx="2377440" cy="402336"/>
+            <a:off x="548640" y="4689684"/>
+            <a:ext cx="11091672" cy="868680"/>
           </a:xfrm>
           <a:prstGeom prst="roundRect">
             <a:avLst>
-              <a:gd name="adj" fmla="val 50000"/>
+              <a:gd name="adj" fmla="val 10526"/>
             </a:avLst>
           </a:prstGeom>
           <a:solidFill>
-            <a:srgbClr val="D99A00"/>
+            <a:srgbClr val="0F2E3D"/>
+          </a:solidFill>
+          <a:ln/>
+        </p:spPr>
+        <p:txBody>
+          <a:bodyPr/>
+          <a:p/>
+        </p:txBody>
+      </p:sp>
+      <p:sp>
+        <p:nvSpPr>
+          <p:cNvPr id="13" name="Shape 16"/>
+          <p:cNvSpPr/>
+          <p:nvPr/>
+        </p:nvSpPr>
+        <p:spPr>
+          <a:xfrm>
+            <a:off x="905256" y="4790268"/>
+            <a:ext cx="658368" cy="658368"/>
+          </a:xfrm>
+          <a:prstGeom prst="ellipse">
+            <a:avLst/>
+          </a:prstGeom>
+          <a:solidFill>
+            <a:srgbClr val="2EA79B"/>
+          </a:solidFill>
+          <a:ln/>
+        </p:spPr>
+        <p:txBody>
+          <a:bodyPr/>
+          <a:p/>
+        </p:txBody>
+      </p:sp>
+      <p:pic>
+        <p:nvPicPr>
+          <p:cNvPr id="14" name="Image 3" descr="/tmp/build/assets/ic_bolt.png">    </p:cNvPr>
+          <p:cNvPicPr>
+            <a:picLocks noChangeAspect="1"/>
+          </p:cNvPicPr>
+          <p:nvPr/>
+        </p:nvPicPr>
+        <p:blipFill>
+          <a:blip r:embed="rId4"/>
+          <a:stretch>
+            <a:fillRect/>
+          </a:stretch>
+        </p:blipFill>
+        <p:spPr>
+          <a:xfrm>
+            <a:off x="1069848" y="4954860"/>
+            <a:ext cx="329184" cy="329184"/>
+          </a:xfrm>
+          <a:prstGeom prst="rect">
+            <a:avLst/>
+          </a:prstGeom>
+        </p:spPr>
+      </p:pic>
+      <p:sp>
+        <p:nvSpPr>
+          <p:cNvPr id="15" name="Text 17"/>
+          <p:cNvSpPr txBox="1"/>
+          <p:nvPr/>
+        </p:nvSpPr>
+        <p:spPr>
+          <a:xfrm>
+            <a:off x="1783080" y="4689684"/>
+            <a:ext cx="9601200" cy="868680"/>
+          </a:xfrm>
+          <a:prstGeom prst="rect">
+            <a:avLst/>
+          </a:prstGeom>
+          <a:noFill/>
+          <a:ln/>
+        </p:spPr>
+        <p:txBody>
+          <a:bodyPr wrap="square" lIns="0" tIns="0" rIns="0" bIns="0" rtlCol="0" anchor="ctr"/>
+          <a:lstStyle/>
+          <a:p>
+            <a:pPr indent="0" marL="0">
+              <a:lnSpc>
+                <a:spcPct val="105000"/>
+              </a:lnSpc>
+              <a:buNone/>
+            </a:pPr>
+            <a:r>
+              <a:rPr lang="en-US" sz="1550" b="1" dirty="0">
+                <a:solidFill>
+                  <a:srgbClr val="2EA79B"/>
+                </a:solidFill>
+                <a:latin typeface="Calibri" pitchFamily="34" charset="0"/>
+                <a:ea typeface="Calibri" pitchFamily="34" charset="-122"/>
+                <a:cs typeface="Calibri" pitchFamily="34" charset="-120"/>
+              </a:rPr>
+              <a:t>Takeaway:  </a:t>
+            </a:r>
+            <a:pPr indent="0" marL="0">
+              <a:lnSpc>
+                <a:spcPct val="105000"/>
+              </a:lnSpc>
+              <a:buNone/>
+            </a:pPr>
+            <a:r>
+              <a:rPr lang="en-US" sz="1550" dirty="0">
+                <a:solidFill>
+                  <a:srgbClr val="E8F2F4"/>
+                </a:solidFill>
+                <a:latin typeface="Calibri" pitchFamily="34" charset="0"/>
+                <a:ea typeface="Calibri" pitchFamily="34" charset="-122"/>
+                <a:cs typeface="Calibri" pitchFamily="34" charset="-120"/>
+              </a:rPr>
+              <a:t>Within 1 pp of the paper on both headline accuracies; recall is 2 pp lower (44 missed infected cells).</a:t>
+            </a:r>
+            <a:endParaRPr lang="en-US" sz="1550" dirty="0"/>
+          </a:p>
+        </p:txBody>
+      </p:sp>
+      <p:sp>
+        <p:nvSpPr>
+          <p:cNvPr id="16" name="TextBox 10"/>
+          <p:cNvSpPr txBox="1"/>
+          <p:nvPr/>
+        </p:nvSpPr>
+        <p:spPr>
+          <a:xfrm>
+            <a:off x="548640" y="6455664"/>
+            <a:ext cx="7315200" cy="274320"/>
+          </a:xfrm>
+          <a:prstGeom prst="rect">
+            <a:avLst/>
+          </a:prstGeom>
+          <a:noFill/>
+        </p:spPr>
+        <p:txBody>
+          <a:bodyPr wrap="square" lIns="0" rIns="0" tIns="0" bIns="0" anchor="t">
+            <a:spAutoFit/>
+          </a:bodyPr>
+          <a:lstStyle/>
+          <a:p>
+            <a:pPr algn="l"/>
+            <a:r>
+              <a:rPr sz="900" b="0" i="0">
+                <a:solidFill>
+                  <a:srgbClr val="7C8B93"/>
+                </a:solidFill>
+                <a:latin typeface="Calibri"/>
+              </a:rPr>
+              <a:t>Phase 2 · Baseline &amp; Hypothesis · Automated Malaria Cell Detection</a:t>
+            </a:r>
+          </a:p>
+        </p:txBody>
+      </p:sp>
+      <p:sp>
+        <p:nvSpPr>
+          <p:cNvPr id="17" name="TextBox 11"/>
+          <p:cNvSpPr txBox="1"/>
+          <p:nvPr/>
+        </p:nvSpPr>
+        <p:spPr>
+          <a:xfrm>
+            <a:off x="11183112" y="6419088"/>
+            <a:ext cx="457200" cy="274320"/>
+          </a:xfrm>
+          <a:prstGeom prst="rect">
+            <a:avLst/>
+          </a:prstGeom>
+          <a:noFill/>
+        </p:spPr>
+        <p:txBody>
+          <a:bodyPr wrap="square" lIns="0" rIns="0" tIns="0" bIns="0" anchor="t">
+            <a:spAutoFit/>
+          </a:bodyPr>
+          <a:lstStyle/>
+          <a:p>
+            <a:pPr algn="r"/>
+            <a:r>
+              <a:rPr sz="1000" b="0" i="0">
+                <a:solidFill>
+                  <a:srgbClr val="7C8B93"/>
+                </a:solidFill>
+                <a:latin typeface="Calibri"/>
+              </a:rPr>
+              <a:t>20</a:t>
+            </a:r>
+          </a:p>
+        </p:txBody>
+      </p:sp>
+    </p:spTree>
+  </p:cSld>
+  <p:clrMapOvr>
+    <a:masterClrMapping/>
+  </p:clrMapOvr>
+</p:sld>
+</file>
+
+<file path=ppt/slides/slide21.xml><?xml version="1.0" encoding="utf-8"?>
+<p:sld xmlns:a="http://schemas.openxmlformats.org/drawingml/2006/main" xmlns:p="http://schemas.openxmlformats.org/presentationml/2006/main" xmlns:r="http://schemas.openxmlformats.org/officeDocument/2006/relationships">
+  <p:cSld>
+    <p:spTree>
+      <p:nvGrpSpPr>
+        <p:cNvPr id="1" name=""/>
+        <p:cNvGrpSpPr/>
+        <p:nvPr/>
+      </p:nvGrpSpPr>
+      <p:grpSpPr/>
+      <p:sp>
+        <p:nvSpPr>
+          <p:cNvPr id="2" name="Oval 1"/>
+          <p:cNvSpPr/>
+          <p:nvPr/>
+        </p:nvSpPr>
+        <p:spPr>
+          <a:xfrm>
+            <a:off x="11109960" y="320040"/>
+            <a:ext cx="1005840" cy="1005840"/>
+          </a:xfrm>
+          <a:prstGeom prst="ellipse">
+            <a:avLst/>
+          </a:prstGeom>
+          <a:solidFill>
+            <a:srgbClr val="8A43B0"/>
           </a:solidFill>
           <a:ln>
             <a:noFill/>
@@ -19469,97 +20009,23 @@
       </p:sp>
       <p:sp>
         <p:nvSpPr>
-          <p:cNvPr id="5" name="TextBox 4"/>
-          <p:cNvSpPr txBox="1"/>
-          <p:nvPr/>
-        </p:nvSpPr>
-        <p:spPr>
-          <a:xfrm>
-            <a:off x="640080" y="502920"/>
-            <a:ext cx="2377440" cy="402336"/>
-          </a:xfrm>
-          <a:prstGeom prst="rect">
-            <a:avLst/>
-          </a:prstGeom>
-          <a:noFill/>
-        </p:spPr>
-        <p:txBody>
-          <a:bodyPr wrap="square" lIns="0" rIns="0" tIns="0" bIns="0" anchor="ctr">
-            <a:spAutoFit/>
-          </a:bodyPr>
-          <a:lstStyle/>
-          <a:p>
-            <a:pPr algn="ctr"/>
-            <a:r>
-              <a:rPr sz="1250" b="1" i="0">
-                <a:solidFill>
-                  <a:srgbClr val="3A2A00"/>
-                </a:solidFill>
-                <a:latin typeface="Calibri"/>
-              </a:rPr>
-              <a:t>★ OUR HYPOTHESIS</a:t>
-            </a:r>
-          </a:p>
-        </p:txBody>
-      </p:sp>
-      <p:sp>
-        <p:nvSpPr>
-          <p:cNvPr id="6" name="TextBox 5"/>
-          <p:cNvSpPr txBox="1"/>
-          <p:nvPr/>
-        </p:nvSpPr>
-        <p:spPr>
-          <a:xfrm>
-            <a:off x="640080" y="1024128"/>
-            <a:ext cx="10972800" cy="640080"/>
-          </a:xfrm>
-          <a:prstGeom prst="rect">
-            <a:avLst/>
-          </a:prstGeom>
-          <a:noFill/>
-        </p:spPr>
-        <p:txBody>
-          <a:bodyPr wrap="square" lIns="0" rIns="0" tIns="0" bIns="0" anchor="t">
-            <a:spAutoFit/>
-          </a:bodyPr>
-          <a:lstStyle/>
-          <a:p>
-            <a:pPr algn="l"/>
-            <a:r>
-              <a:rPr sz="3000" b="1" i="0">
-                <a:solidFill>
-                  <a:srgbClr val="FFFFFF"/>
-                </a:solidFill>
-                <a:latin typeface="Cambria"/>
-              </a:rPr>
-              <a:t>Two proposed changes, one variable at a time</a:t>
-            </a:r>
-          </a:p>
-        </p:txBody>
-      </p:sp>
-      <p:sp>
-        <p:nvSpPr>
-          <p:cNvPr id="7" name="Rounded Rectangle 6"/>
+          <p:cNvPr id="3" name="Oval 2"/>
           <p:cNvSpPr/>
           <p:nvPr/>
         </p:nvSpPr>
         <p:spPr>
           <a:xfrm>
-            <a:off x="640080" y="1828800"/>
-            <a:ext cx="5468112" cy="3931920"/>
-          </a:xfrm>
-          <a:prstGeom prst="roundRect">
-            <a:avLst>
-              <a:gd name="adj" fmla="val 6000"/>
-            </a:avLst>
+            <a:off x="11475720" y="6172200"/>
+            <a:ext cx="822960" cy="822960"/>
+          </a:xfrm>
+          <a:prstGeom prst="ellipse">
+            <a:avLst/>
           </a:prstGeom>
           <a:solidFill>
-            <a:srgbClr val="15455A"/>
+            <a:srgbClr val="137C8E"/>
           </a:solidFill>
-          <a:ln w="12700">
-            <a:solidFill>
-              <a:srgbClr val="0E6274"/>
-            </a:solidFill>
+          <a:ln>
+            <a:noFill/>
           </a:ln>
           <a:effectLst/>
         </p:spPr>
@@ -19585,20 +20051,22 @@
       </p:sp>
       <p:sp>
         <p:nvSpPr>
-          <p:cNvPr id="8" name="Oval 7"/>
+          <p:cNvPr id="4" name="Rounded Rectangle 3"/>
           <p:cNvSpPr/>
           <p:nvPr/>
         </p:nvSpPr>
         <p:spPr>
           <a:xfrm>
-            <a:off x="914400" y="2057400"/>
-            <a:ext cx="731520" cy="731520"/>
-          </a:xfrm>
-          <a:prstGeom prst="ellipse">
-            <a:avLst/>
+            <a:off x="640080" y="502920"/>
+            <a:ext cx="2377440" cy="402336"/>
+          </a:xfrm>
+          <a:prstGeom prst="roundRect">
+            <a:avLst>
+              <a:gd name="adj" fmla="val 50000"/>
+            </a:avLst>
           </a:prstGeom>
           <a:solidFill>
-            <a:srgbClr val="CC4A3F"/>
+            <a:srgbClr val="D99A00"/>
           </a:solidFill>
           <a:ln>
             <a:noFill/>
@@ -19625,40 +20093,51 @@
           <a:p/>
         </p:txBody>
       </p:sp>
-      <p:pic>
-        <p:nvPicPr>
-          <p:cNvPr id="9" name="Picture 8" descr="image.png"/>
-          <p:cNvPicPr>
-            <a:picLocks noChangeAspect="1"/>
-          </p:cNvPicPr>
-          <p:nvPr/>
-        </p:nvPicPr>
-        <p:blipFill>
-          <a:blip r:embed="rId2"/>
-          <a:stretch>
-            <a:fillRect/>
-          </a:stretch>
-        </p:blipFill>
-        <p:spPr>
-          <a:xfrm>
-            <a:off x="1097280" y="2240280"/>
-            <a:ext cx="365760" cy="365760"/>
-          </a:xfrm>
-          <a:prstGeom prst="rect">
-            <a:avLst/>
-          </a:prstGeom>
-        </p:spPr>
-      </p:pic>
-      <p:sp>
-        <p:nvSpPr>
-          <p:cNvPr id="10" name="TextBox 9"/>
-          <p:cNvSpPr txBox="1"/>
-          <p:nvPr/>
-        </p:nvSpPr>
-        <p:spPr>
-          <a:xfrm>
-            <a:off x="1828800" y="2048256"/>
-            <a:ext cx="4069080" cy="274320"/>
+      <p:sp>
+        <p:nvSpPr>
+          <p:cNvPr id="5" name="TextBox 4"/>
+          <p:cNvSpPr txBox="1"/>
+          <p:nvPr/>
+        </p:nvSpPr>
+        <p:spPr>
+          <a:xfrm>
+            <a:off x="640080" y="502920"/>
+            <a:ext cx="2377440" cy="402336"/>
+          </a:xfrm>
+          <a:prstGeom prst="rect">
+            <a:avLst/>
+          </a:prstGeom>
+          <a:noFill/>
+        </p:spPr>
+        <p:txBody>
+          <a:bodyPr wrap="square" lIns="0" rIns="0" tIns="0" bIns="0" anchor="ctr">
+            <a:spAutoFit/>
+          </a:bodyPr>
+          <a:lstStyle/>
+          <a:p>
+            <a:pPr algn="ctr"/>
+            <a:r>
+              <a:rPr sz="1250" b="1" i="0">
+                <a:solidFill>
+                  <a:srgbClr val="3A2A00"/>
+                </a:solidFill>
+                <a:latin typeface="Calibri"/>
+              </a:rPr>
+              <a:t>★ OUR HYPOTHESIS</a:t>
+            </a:r>
+          </a:p>
+        </p:txBody>
+      </p:sp>
+      <p:sp>
+        <p:nvSpPr>
+          <p:cNvPr id="6" name="TextBox 5"/>
+          <p:cNvSpPr txBox="1"/>
+          <p:nvPr/>
+        </p:nvSpPr>
+        <p:spPr>
+          <a:xfrm>
+            <a:off x="640080" y="1024128"/>
+            <a:ext cx="10972800" cy="640080"/>
           </a:xfrm>
           <a:prstGeom prst="rect">
             <a:avLst/>
@@ -19673,271 +20152,26 @@
           <a:p>
             <a:pPr algn="l"/>
             <a:r>
-              <a:rPr sz="1100" b="1" i="0">
-                <a:solidFill>
-                  <a:srgbClr val="9FC0C9"/>
-                </a:solidFill>
-                <a:latin typeface="Calibri"/>
-              </a:rPr>
-              <a:t>H1 · VALIDATION</a:t>
-            </a:r>
-          </a:p>
-        </p:txBody>
-      </p:sp>
-      <p:sp>
-        <p:nvSpPr>
-          <p:cNvPr id="11" name="TextBox 10"/>
-          <p:cNvSpPr txBox="1"/>
-          <p:nvPr/>
-        </p:nvSpPr>
-        <p:spPr>
-          <a:xfrm>
-            <a:off x="1828800" y="2304288"/>
-            <a:ext cx="4114800" cy="502920"/>
-          </a:xfrm>
-          <a:prstGeom prst="rect">
-            <a:avLst/>
-          </a:prstGeom>
-          <a:noFill/>
-        </p:spPr>
-        <p:txBody>
-          <a:bodyPr wrap="square" lIns="0" rIns="0" tIns="0" bIns="0" anchor="t">
-            <a:spAutoFit/>
-          </a:bodyPr>
-          <a:lstStyle/>
-          <a:p>
-            <a:pPr algn="l"/>
-            <a:r>
-              <a:rPr sz="1650" b="1" i="0">
+              <a:rPr sz="3000" b="1" i="0">
                 <a:solidFill>
                   <a:srgbClr val="FFFFFF"/>
                 </a:solidFill>
                 <a:latin typeface="Cambria"/>
               </a:rPr>
-              <a:t>Leakage-free, slide-grouped split</a:t>
-            </a:r>
-          </a:p>
-        </p:txBody>
-      </p:sp>
-      <p:sp>
-        <p:nvSpPr>
-          <p:cNvPr id="12" name="TextBox 11"/>
-          <p:cNvSpPr txBox="1"/>
-          <p:nvPr/>
-        </p:nvSpPr>
-        <p:spPr>
-          <a:xfrm>
-            <a:off x="932688" y="3017520"/>
-            <a:ext cx="1188720" cy="274320"/>
-          </a:xfrm>
-          <a:prstGeom prst="rect">
-            <a:avLst/>
-          </a:prstGeom>
-          <a:noFill/>
-        </p:spPr>
-        <p:txBody>
-          <a:bodyPr wrap="square" lIns="0" rIns="0" tIns="0" bIns="0" anchor="t">
-            <a:spAutoFit/>
-          </a:bodyPr>
-          <a:lstStyle/>
-          <a:p>
-            <a:pPr algn="l"/>
-            <a:r>
-              <a:rPr sz="1050" b="1" i="0">
-                <a:solidFill>
-                  <a:srgbClr val="9FC0C9"/>
-                </a:solidFill>
-                <a:latin typeface="Calibri"/>
-              </a:rPr>
-              <a:t>CHANGE</a:t>
-            </a:r>
-          </a:p>
-        </p:txBody>
-      </p:sp>
-      <p:sp>
-        <p:nvSpPr>
-          <p:cNvPr id="13" name="TextBox 12"/>
-          <p:cNvSpPr txBox="1"/>
-          <p:nvPr/>
-        </p:nvSpPr>
-        <p:spPr>
-          <a:xfrm>
-            <a:off x="2057400" y="2990088"/>
-            <a:ext cx="3840480" cy="868680"/>
-          </a:xfrm>
-          <a:prstGeom prst="rect">
-            <a:avLst/>
-          </a:prstGeom>
-          <a:noFill/>
-        </p:spPr>
-        <p:txBody>
-          <a:bodyPr wrap="square" lIns="0" rIns="0" tIns="0" bIns="0" anchor="t">
-            <a:spAutoFit/>
-          </a:bodyPr>
-          <a:lstStyle/>
-          <a:p>
-            <a:pPr algn="l"/>
-            <a:r>
-              <a:rPr sz="1200" b="0" i="0">
-                <a:solidFill>
-                  <a:srgbClr val="D5E6EA"/>
-                </a:solidFill>
-                <a:latin typeface="Calibri"/>
-              </a:rPr>
-              <a:t>Split by slide/patient (StratifiedGroupKFold) instead of random images. Model unchanged.</a:t>
-            </a:r>
-          </a:p>
-        </p:txBody>
-      </p:sp>
-      <p:sp>
-        <p:nvSpPr>
-          <p:cNvPr id="14" name="TextBox 13"/>
-          <p:cNvSpPr txBox="1"/>
-          <p:nvPr/>
-        </p:nvSpPr>
-        <p:spPr>
-          <a:xfrm>
-            <a:off x="932688" y="3913631"/>
-            <a:ext cx="1188720" cy="274320"/>
-          </a:xfrm>
-          <a:prstGeom prst="rect">
-            <a:avLst/>
-          </a:prstGeom>
-          <a:noFill/>
-        </p:spPr>
-        <p:txBody>
-          <a:bodyPr wrap="square" lIns="0" rIns="0" tIns="0" bIns="0" anchor="t">
-            <a:spAutoFit/>
-          </a:bodyPr>
-          <a:lstStyle/>
-          <a:p>
-            <a:pPr algn="l"/>
-            <a:r>
-              <a:rPr sz="1050" b="1" i="0">
-                <a:solidFill>
-                  <a:srgbClr val="D99A00"/>
-                </a:solidFill>
-                <a:latin typeface="Calibri"/>
-              </a:rPr>
-              <a:t>WE EXPECT</a:t>
-            </a:r>
-          </a:p>
-        </p:txBody>
-      </p:sp>
-      <p:sp>
-        <p:nvSpPr>
-          <p:cNvPr id="15" name="TextBox 14"/>
-          <p:cNvSpPr txBox="1"/>
-          <p:nvPr/>
-        </p:nvSpPr>
-        <p:spPr>
-          <a:xfrm>
-            <a:off x="2057400" y="3886199"/>
-            <a:ext cx="3840480" cy="868680"/>
-          </a:xfrm>
-          <a:prstGeom prst="rect">
-            <a:avLst/>
-          </a:prstGeom>
-          <a:noFill/>
-        </p:spPr>
-        <p:txBody>
-          <a:bodyPr wrap="square" lIns="0" rIns="0" tIns="0" bIns="0" anchor="t">
-            <a:spAutoFit/>
-          </a:bodyPr>
-          <a:lstStyle/>
-          <a:p>
-            <a:pPr algn="l"/>
-            <a:r>
-              <a:rPr sz="1200" b="1" i="0">
-                <a:solidFill>
-                  <a:srgbClr val="FFFFFF"/>
-                </a:solidFill>
-                <a:latin typeface="Calibri"/>
-              </a:rPr>
-              <a:t>Accuracy and MCC fall below the image-split baseline, and fold-to-fold spread widens.</a:t>
-            </a:r>
-          </a:p>
-        </p:txBody>
-      </p:sp>
-      <p:sp>
-        <p:nvSpPr>
-          <p:cNvPr id="16" name="TextBox 15"/>
-          <p:cNvSpPr txBox="1"/>
-          <p:nvPr/>
-        </p:nvSpPr>
-        <p:spPr>
-          <a:xfrm>
-            <a:off x="932688" y="4809744"/>
-            <a:ext cx="1188720" cy="274320"/>
-          </a:xfrm>
-          <a:prstGeom prst="rect">
-            <a:avLst/>
-          </a:prstGeom>
-          <a:noFill/>
-        </p:spPr>
-        <p:txBody>
-          <a:bodyPr wrap="square" lIns="0" rIns="0" tIns="0" bIns="0" anchor="t">
-            <a:spAutoFit/>
-          </a:bodyPr>
-          <a:lstStyle/>
-          <a:p>
-            <a:pPr algn="l"/>
-            <a:r>
-              <a:rPr sz="1050" b="1" i="0">
-                <a:solidFill>
-                  <a:srgbClr val="9FC0C9"/>
-                </a:solidFill>
-                <a:latin typeface="Calibri"/>
-              </a:rPr>
-              <a:t>BECAUSE</a:t>
-            </a:r>
-          </a:p>
-        </p:txBody>
-      </p:sp>
-      <p:sp>
-        <p:nvSpPr>
-          <p:cNvPr id="17" name="TextBox 16"/>
-          <p:cNvSpPr txBox="1"/>
-          <p:nvPr/>
-        </p:nvSpPr>
-        <p:spPr>
-          <a:xfrm>
-            <a:off x="2057400" y="4782312"/>
-            <a:ext cx="3840480" cy="868680"/>
-          </a:xfrm>
-          <a:prstGeom prst="rect">
-            <a:avLst/>
-          </a:prstGeom>
-          <a:noFill/>
-        </p:spPr>
-        <p:txBody>
-          <a:bodyPr wrap="square" lIns="0" rIns="0" tIns="0" bIns="0" anchor="t">
-            <a:spAutoFit/>
-          </a:bodyPr>
-          <a:lstStyle/>
-          <a:p>
-            <a:pPr algn="l"/>
-            <a:r>
-              <a:rPr sz="1200" b="0" i="0">
-                <a:solidFill>
-                  <a:srgbClr val="D5E6EA"/>
-                </a:solidFill>
-                <a:latin typeface="Calibri"/>
-              </a:rPr>
-              <a:t>Cells from one slide share stain, lighting and the patient's cell shape. A random split lets the model recognise the slide rather than the parasite.</a:t>
-            </a:r>
-          </a:p>
-        </p:txBody>
-      </p:sp>
-      <p:sp>
-        <p:nvSpPr>
-          <p:cNvPr id="18" name="Rounded Rectangle 17"/>
+              <a:t>Two proposed changes, one variable at a time</a:t>
+            </a:r>
+          </a:p>
+        </p:txBody>
+      </p:sp>
+      <p:sp>
+        <p:nvSpPr>
+          <p:cNvPr id="7" name="Rounded Rectangle 6"/>
           <p:cNvSpPr/>
           <p:nvPr/>
         </p:nvSpPr>
         <p:spPr>
           <a:xfrm>
-            <a:off x="6345936" y="1828800"/>
+            <a:off x="640080" y="1828800"/>
             <a:ext cx="5468112" cy="3931920"/>
           </a:xfrm>
           <a:prstGeom prst="roundRect">
@@ -19977,20 +20211,20 @@
       </p:sp>
       <p:sp>
         <p:nvSpPr>
-          <p:cNvPr id="19" name="Oval 18"/>
+          <p:cNvPr id="8" name="Oval 7"/>
           <p:cNvSpPr/>
           <p:nvPr/>
         </p:nvSpPr>
         <p:spPr>
           <a:xfrm>
-            <a:off x="6620256" y="2057400"/>
+            <a:off x="914400" y="2057400"/>
             <a:ext cx="731520" cy="731520"/>
           </a:xfrm>
           <a:prstGeom prst="ellipse">
             <a:avLst/>
           </a:prstGeom>
           <a:solidFill>
-            <a:srgbClr val="2EA79B"/>
+            <a:srgbClr val="CC4A3F"/>
           </a:solidFill>
           <a:ln>
             <a:noFill/>
@@ -20019,6 +20253,398 @@
       </p:sp>
       <p:pic>
         <p:nvPicPr>
+          <p:cNvPr id="9" name="Picture 8" descr="image.png"/>
+          <p:cNvPicPr>
+            <a:picLocks noChangeAspect="1"/>
+          </p:cNvPicPr>
+          <p:nvPr/>
+        </p:nvPicPr>
+        <p:blipFill>
+          <a:blip r:embed="rId2"/>
+          <a:stretch>
+            <a:fillRect/>
+          </a:stretch>
+        </p:blipFill>
+        <p:spPr>
+          <a:xfrm>
+            <a:off x="1097280" y="2240280"/>
+            <a:ext cx="365760" cy="365760"/>
+          </a:xfrm>
+          <a:prstGeom prst="rect">
+            <a:avLst/>
+          </a:prstGeom>
+        </p:spPr>
+      </p:pic>
+      <p:sp>
+        <p:nvSpPr>
+          <p:cNvPr id="10" name="TextBox 9"/>
+          <p:cNvSpPr txBox="1"/>
+          <p:nvPr/>
+        </p:nvSpPr>
+        <p:spPr>
+          <a:xfrm>
+            <a:off x="1828800" y="2048256"/>
+            <a:ext cx="4069080" cy="274320"/>
+          </a:xfrm>
+          <a:prstGeom prst="rect">
+            <a:avLst/>
+          </a:prstGeom>
+          <a:noFill/>
+        </p:spPr>
+        <p:txBody>
+          <a:bodyPr wrap="square" lIns="0" rIns="0" tIns="0" bIns="0" anchor="t">
+            <a:spAutoFit/>
+          </a:bodyPr>
+          <a:lstStyle/>
+          <a:p>
+            <a:pPr algn="l"/>
+            <a:r>
+              <a:rPr sz="1100" b="1" i="0">
+                <a:solidFill>
+                  <a:srgbClr val="9FC0C9"/>
+                </a:solidFill>
+                <a:latin typeface="Calibri"/>
+              </a:rPr>
+              <a:t>H1 · VALIDATION</a:t>
+            </a:r>
+          </a:p>
+        </p:txBody>
+      </p:sp>
+      <p:sp>
+        <p:nvSpPr>
+          <p:cNvPr id="11" name="TextBox 10"/>
+          <p:cNvSpPr txBox="1"/>
+          <p:nvPr/>
+        </p:nvSpPr>
+        <p:spPr>
+          <a:xfrm>
+            <a:off x="1828800" y="2304288"/>
+            <a:ext cx="4114800" cy="502920"/>
+          </a:xfrm>
+          <a:prstGeom prst="rect">
+            <a:avLst/>
+          </a:prstGeom>
+          <a:noFill/>
+        </p:spPr>
+        <p:txBody>
+          <a:bodyPr wrap="square" lIns="0" rIns="0" tIns="0" bIns="0" anchor="t">
+            <a:spAutoFit/>
+          </a:bodyPr>
+          <a:lstStyle/>
+          <a:p>
+            <a:pPr algn="l"/>
+            <a:r>
+              <a:rPr sz="1650" b="1" i="0">
+                <a:solidFill>
+                  <a:srgbClr val="FFFFFF"/>
+                </a:solidFill>
+                <a:latin typeface="Cambria"/>
+              </a:rPr>
+              <a:t>Leakage-free, slide-grouped split</a:t>
+            </a:r>
+          </a:p>
+        </p:txBody>
+      </p:sp>
+      <p:sp>
+        <p:nvSpPr>
+          <p:cNvPr id="12" name="TextBox 11"/>
+          <p:cNvSpPr txBox="1"/>
+          <p:nvPr/>
+        </p:nvSpPr>
+        <p:spPr>
+          <a:xfrm>
+            <a:off x="932688" y="3017520"/>
+            <a:ext cx="1188720" cy="274320"/>
+          </a:xfrm>
+          <a:prstGeom prst="rect">
+            <a:avLst/>
+          </a:prstGeom>
+          <a:noFill/>
+        </p:spPr>
+        <p:txBody>
+          <a:bodyPr wrap="square" lIns="0" rIns="0" tIns="0" bIns="0" anchor="t">
+            <a:spAutoFit/>
+          </a:bodyPr>
+          <a:lstStyle/>
+          <a:p>
+            <a:pPr algn="l"/>
+            <a:r>
+              <a:rPr sz="1050" b="1" i="0">
+                <a:solidFill>
+                  <a:srgbClr val="9FC0C9"/>
+                </a:solidFill>
+                <a:latin typeface="Calibri"/>
+              </a:rPr>
+              <a:t>CHANGE</a:t>
+            </a:r>
+          </a:p>
+        </p:txBody>
+      </p:sp>
+      <p:sp>
+        <p:nvSpPr>
+          <p:cNvPr id="13" name="TextBox 12"/>
+          <p:cNvSpPr txBox="1"/>
+          <p:nvPr/>
+        </p:nvSpPr>
+        <p:spPr>
+          <a:xfrm>
+            <a:off x="2057400" y="2990088"/>
+            <a:ext cx="3840480" cy="868680"/>
+          </a:xfrm>
+          <a:prstGeom prst="rect">
+            <a:avLst/>
+          </a:prstGeom>
+          <a:noFill/>
+        </p:spPr>
+        <p:txBody>
+          <a:bodyPr wrap="square" lIns="0" rIns="0" tIns="0" bIns="0" anchor="t">
+            <a:spAutoFit/>
+          </a:bodyPr>
+          <a:lstStyle/>
+          <a:p>
+            <a:pPr algn="l"/>
+            <a:r>
+              <a:rPr sz="1200" b="0" i="0">
+                <a:solidFill>
+                  <a:srgbClr val="D5E6EA"/>
+                </a:solidFill>
+                <a:latin typeface="Calibri"/>
+              </a:rPr>
+              <a:t>Split by slide/patient (StratifiedGroupKFold) instead of random images. Model unchanged.</a:t>
+            </a:r>
+          </a:p>
+        </p:txBody>
+      </p:sp>
+      <p:sp>
+        <p:nvSpPr>
+          <p:cNvPr id="14" name="TextBox 13"/>
+          <p:cNvSpPr txBox="1"/>
+          <p:nvPr/>
+        </p:nvSpPr>
+        <p:spPr>
+          <a:xfrm>
+            <a:off x="932688" y="3913631"/>
+            <a:ext cx="1188720" cy="274320"/>
+          </a:xfrm>
+          <a:prstGeom prst="rect">
+            <a:avLst/>
+          </a:prstGeom>
+          <a:noFill/>
+        </p:spPr>
+        <p:txBody>
+          <a:bodyPr wrap="square" lIns="0" rIns="0" tIns="0" bIns="0" anchor="t">
+            <a:spAutoFit/>
+          </a:bodyPr>
+          <a:lstStyle/>
+          <a:p>
+            <a:pPr algn="l"/>
+            <a:r>
+              <a:rPr sz="1050" b="1" i="0">
+                <a:solidFill>
+                  <a:srgbClr val="D99A00"/>
+                </a:solidFill>
+                <a:latin typeface="Calibri"/>
+              </a:rPr>
+              <a:t>WE EXPECT</a:t>
+            </a:r>
+          </a:p>
+        </p:txBody>
+      </p:sp>
+      <p:sp>
+        <p:nvSpPr>
+          <p:cNvPr id="15" name="TextBox 14"/>
+          <p:cNvSpPr txBox="1"/>
+          <p:nvPr/>
+        </p:nvSpPr>
+        <p:spPr>
+          <a:xfrm>
+            <a:off x="2057400" y="3886199"/>
+            <a:ext cx="3840480" cy="868680"/>
+          </a:xfrm>
+          <a:prstGeom prst="rect">
+            <a:avLst/>
+          </a:prstGeom>
+          <a:noFill/>
+        </p:spPr>
+        <p:txBody>
+          <a:bodyPr wrap="square" lIns="0" rIns="0" tIns="0" bIns="0" anchor="t">
+            <a:spAutoFit/>
+          </a:bodyPr>
+          <a:lstStyle/>
+          <a:p>
+            <a:pPr algn="l"/>
+            <a:r>
+              <a:rPr sz="1200" b="1" i="0">
+                <a:solidFill>
+                  <a:srgbClr val="FFFFFF"/>
+                </a:solidFill>
+                <a:latin typeface="Calibri"/>
+              </a:rPr>
+              <a:t>Accuracy and MCC fall below the image-split baseline, and fold-to-fold spread widens.</a:t>
+            </a:r>
+          </a:p>
+        </p:txBody>
+      </p:sp>
+      <p:sp>
+        <p:nvSpPr>
+          <p:cNvPr id="16" name="TextBox 15"/>
+          <p:cNvSpPr txBox="1"/>
+          <p:nvPr/>
+        </p:nvSpPr>
+        <p:spPr>
+          <a:xfrm>
+            <a:off x="932688" y="4809744"/>
+            <a:ext cx="1188720" cy="274320"/>
+          </a:xfrm>
+          <a:prstGeom prst="rect">
+            <a:avLst/>
+          </a:prstGeom>
+          <a:noFill/>
+        </p:spPr>
+        <p:txBody>
+          <a:bodyPr wrap="square" lIns="0" rIns="0" tIns="0" bIns="0" anchor="t">
+            <a:spAutoFit/>
+          </a:bodyPr>
+          <a:lstStyle/>
+          <a:p>
+            <a:pPr algn="l"/>
+            <a:r>
+              <a:rPr sz="1050" b="1" i="0">
+                <a:solidFill>
+                  <a:srgbClr val="9FC0C9"/>
+                </a:solidFill>
+                <a:latin typeface="Calibri"/>
+              </a:rPr>
+              <a:t>BECAUSE</a:t>
+            </a:r>
+          </a:p>
+        </p:txBody>
+      </p:sp>
+      <p:sp>
+        <p:nvSpPr>
+          <p:cNvPr id="17" name="TextBox 16"/>
+          <p:cNvSpPr txBox="1"/>
+          <p:nvPr/>
+        </p:nvSpPr>
+        <p:spPr>
+          <a:xfrm>
+            <a:off x="2057400" y="4782312"/>
+            <a:ext cx="3840480" cy="868680"/>
+          </a:xfrm>
+          <a:prstGeom prst="rect">
+            <a:avLst/>
+          </a:prstGeom>
+          <a:noFill/>
+        </p:spPr>
+        <p:txBody>
+          <a:bodyPr wrap="square" lIns="0" rIns="0" tIns="0" bIns="0" anchor="t">
+            <a:spAutoFit/>
+          </a:bodyPr>
+          <a:lstStyle/>
+          <a:p>
+            <a:pPr algn="l"/>
+            <a:r>
+              <a:rPr sz="1200" b="0" i="0">
+                <a:solidFill>
+                  <a:srgbClr val="D5E6EA"/>
+                </a:solidFill>
+                <a:latin typeface="Calibri"/>
+              </a:rPr>
+              <a:t>Cells from one slide share stain, lighting and the patient's cell shape. A random split lets the model recognise the slide rather than the parasite.</a:t>
+            </a:r>
+          </a:p>
+        </p:txBody>
+      </p:sp>
+      <p:sp>
+        <p:nvSpPr>
+          <p:cNvPr id="18" name="Rounded Rectangle 17"/>
+          <p:cNvSpPr/>
+          <p:nvPr/>
+        </p:nvSpPr>
+        <p:spPr>
+          <a:xfrm>
+            <a:off x="6345936" y="1828800"/>
+            <a:ext cx="5468112" cy="3931920"/>
+          </a:xfrm>
+          <a:prstGeom prst="roundRect">
+            <a:avLst>
+              <a:gd name="adj" fmla="val 6000"/>
+            </a:avLst>
+          </a:prstGeom>
+          <a:solidFill>
+            <a:srgbClr val="15455A"/>
+          </a:solidFill>
+          <a:ln w="12700">
+            <a:solidFill>
+              <a:srgbClr val="0E6274"/>
+            </a:solidFill>
+          </a:ln>
+          <a:effectLst/>
+        </p:spPr>
+        <p:style>
+          <a:lnRef idx="1">
+            <a:schemeClr val="accent1"/>
+          </a:lnRef>
+          <a:fillRef idx="3">
+            <a:schemeClr val="accent1"/>
+          </a:fillRef>
+          <a:effectRef idx="2">
+            <a:schemeClr val="accent1"/>
+          </a:effectRef>
+          <a:fontRef idx="minor">
+            <a:schemeClr val="lt1"/>
+          </a:fontRef>
+        </p:style>
+        <p:txBody>
+          <a:bodyPr rtlCol="0" anchor="ctr"/>
+          <a:lstStyle/>
+          <a:p/>
+        </p:txBody>
+      </p:sp>
+      <p:sp>
+        <p:nvSpPr>
+          <p:cNvPr id="19" name="Oval 18"/>
+          <p:cNvSpPr/>
+          <p:nvPr/>
+        </p:nvSpPr>
+        <p:spPr>
+          <a:xfrm>
+            <a:off x="6620256" y="2057400"/>
+            <a:ext cx="731520" cy="731520"/>
+          </a:xfrm>
+          <a:prstGeom prst="ellipse">
+            <a:avLst/>
+          </a:prstGeom>
+          <a:solidFill>
+            <a:srgbClr val="2EA79B"/>
+          </a:solidFill>
+          <a:ln>
+            <a:noFill/>
+          </a:ln>
+          <a:effectLst/>
+        </p:spPr>
+        <p:style>
+          <a:lnRef idx="1">
+            <a:schemeClr val="accent1"/>
+          </a:lnRef>
+          <a:fillRef idx="3">
+            <a:schemeClr val="accent1"/>
+          </a:fillRef>
+          <a:effectRef idx="2">
+            <a:schemeClr val="accent1"/>
+          </a:effectRef>
+          <a:fontRef idx="minor">
+            <a:schemeClr val="lt1"/>
+          </a:fontRef>
+        </p:style>
+        <p:txBody>
+          <a:bodyPr rtlCol="0" anchor="ctr"/>
+          <a:lstStyle/>
+          <a:p/>
+        </p:txBody>
+      </p:sp>
+      <p:pic>
+        <p:nvPicPr>
           <p:cNvPr id="20" name="Picture 19" descr="image.png"/>
           <p:cNvPicPr>
             <a:picLocks noChangeAspect="1"/>
@@ -20373,7 +20999,7 @@
 </p:sld>
 </file>
 
-<file path=ppt/slides/slide21.xml><?xml version="1.0" encoding="utf-8"?>
+<file path=ppt/slides/slide22.xml><?xml version="1.0" encoding="utf-8"?>
 <p:sld xmlns:a="http://schemas.openxmlformats.org/drawingml/2006/main" xmlns:p="http://schemas.openxmlformats.org/presentationml/2006/main" xmlns:r="http://schemas.openxmlformats.org/officeDocument/2006/relationships">
   <p:cSld>
     <p:spTree>
@@ -21701,7 +22327,7 @@
 </p:sld>
 </file>
 
-<file path=ppt/slides/slide22.xml><?xml version="1.0" encoding="utf-8"?>
+<file path=ppt/slides/slide23.xml><?xml version="1.0" encoding="utf-8"?>
 <p:sld xmlns:a="http://schemas.openxmlformats.org/drawingml/2006/main" xmlns:r="http://schemas.openxmlformats.org/officeDocument/2006/relationships" xmlns:p="http://schemas.openxmlformats.org/presentationml/2006/main">
   <p:cSld name="Slide 16">
     <p:spTree>
@@ -22337,542 +22963,6 @@
               <a:t>23</a:t>
             </a:r>
             <a:endParaRPr lang="en-US" sz="1000" dirty="0"/>
-          </a:p>
-        </p:txBody>
-      </p:sp>
-    </p:spTree>
-  </p:cSld>
-  <p:clrMapOvr>
-    <a:masterClrMapping/>
-  </p:clrMapOvr>
-</p:sld>
-</file>
-
-<file path=ppt/slides/slide23.xml><?xml version="1.0" encoding="utf-8"?>
-<p:sld xmlns:a="http://schemas.openxmlformats.org/drawingml/2006/main" xmlns:p="http://schemas.openxmlformats.org/presentationml/2006/main" xmlns:r="http://schemas.openxmlformats.org/officeDocument/2006/relationships">
-  <p:cSld>
-    <p:spTree>
-      <p:nvGrpSpPr>
-        <p:cNvPr id="2" name=""/>
-        <p:cNvGrpSpPr/>
-        <p:nvPr/>
-      </p:nvGrpSpPr>
-      <p:grpSpPr/>
-      <p:sp>
-        <p:nvSpPr>
-          <p:cNvPr id="3" name="TextBox 1"/>
-          <p:cNvSpPr txBox="1"/>
-          <p:nvPr/>
-        </p:nvSpPr>
-        <p:spPr>
-          <a:xfrm>
-            <a:off x="548640" y="457200"/>
-            <a:ext cx="11064240" cy="274320"/>
-          </a:xfrm>
-          <a:prstGeom prst="rect">
-            <a:avLst/>
-          </a:prstGeom>
-          <a:noFill/>
-        </p:spPr>
-        <p:txBody>
-          <a:bodyPr wrap="square" lIns="0" rIns="0" tIns="0" bIns="0" anchor="t">
-            <a:spAutoFit/>
-          </a:bodyPr>
-          <a:lstStyle/>
-          <a:p>
-            <a:pPr algn="l"/>
-            <a:r>
-              <a:rPr sz="1250" b="1" i="0">
-                <a:solidFill>
-                  <a:srgbClr val="137C8E"/>
-                </a:solidFill>
-                <a:latin typeface="Calibri"/>
-              </a:rPr>
-              <a:t>MILESTONE 2 · BASELINE REPRODUCTION</a:t>
-            </a:r>
-          </a:p>
-        </p:txBody>
-      </p:sp>
-      <p:sp>
-        <p:nvSpPr>
-          <p:cNvPr id="4" name="TextBox 2"/>
-          <p:cNvSpPr txBox="1"/>
-          <p:nvPr/>
-        </p:nvSpPr>
-        <p:spPr>
-          <a:xfrm>
-            <a:off x="548640" y="749808"/>
-            <a:ext cx="11064240" cy="658368"/>
-          </a:xfrm>
-          <a:prstGeom prst="rect">
-            <a:avLst/>
-          </a:prstGeom>
-          <a:noFill/>
-        </p:spPr>
-        <p:txBody>
-          <a:bodyPr wrap="square" lIns="0" rIns="0" tIns="0" bIns="0" anchor="t">
-            <a:spAutoFit/>
-          </a:bodyPr>
-          <a:lstStyle/>
-          <a:p>
-            <a:pPr algn="l"/>
-            <a:r>
-              <a:rPr sz="3000" b="1" i="0">
-                <a:solidFill>
-                  <a:srgbClr val="17262E"/>
-                </a:solidFill>
-                <a:latin typeface="Cambria"/>
-              </a:rPr>
-              <a:t>A0 results at a glance</a:t>
-            </a:r>
-          </a:p>
-        </p:txBody>
-      </p:sp>
-      <p:sp>
-        <p:nvSpPr>
-          <p:cNvPr id="5" name="TextBox 3"/>
-          <p:cNvSpPr txBox="1"/>
-          <p:nvPr/>
-        </p:nvSpPr>
-        <p:spPr>
-          <a:xfrm>
-            <a:off x="548640" y="1463040"/>
-            <a:ext cx="11064240" cy="457200"/>
-          </a:xfrm>
-          <a:prstGeom prst="rect">
-            <a:avLst/>
-          </a:prstGeom>
-          <a:noFill/>
-        </p:spPr>
-        <p:txBody>
-          <a:bodyPr wrap="square" lIns="0" rIns="0" tIns="0" bIns="0" anchor="t">
-            <a:spAutoFit/>
-          </a:bodyPr>
-          <a:lstStyle/>
-          <a:p>
-            <a:pPr algn="l"/>
-            <a:r>
-              <a:rPr sz="1550" b="0" i="0">
-                <a:solidFill>
-                  <a:srgbClr val="41525B"/>
-                </a:solidFill>
-                <a:latin typeface="Calibri"/>
-              </a:rPr>
-              <a:t>Ensemble of our 3 fold models on the 2,756-image hold-out test set, next to what Marques et al. [8] report.</a:t>
-            </a:r>
-          </a:p>
-        </p:txBody>
-      </p:sp>
-      <p:sp>
-        <p:nvSpPr>
-          <p:cNvPr id="6" name="Rounded Rectangle 6"/>
-          <p:cNvSpPr/>
-          <p:nvPr/>
-        </p:nvSpPr>
-        <p:spPr>
-          <a:xfrm>
-            <a:off x="548640" y="2057400"/>
-            <a:ext cx="4454730" cy="2312244"/>
-          </a:xfrm>
-          <a:prstGeom prst="roundRect">
-            <a:avLst>
-              <a:gd name="adj" fmla="val 6000"/>
-            </a:avLst>
-          </a:prstGeom>
-          <a:solidFill>
-            <a:srgbClr val="EAF3F5"/>
-          </a:solidFill>
-          <a:ln w="12700">
-            <a:solidFill>
-              <a:srgbClr val="D3E1E6"/>
-            </a:solidFill>
-          </a:ln>
-          <a:effectLst/>
-        </p:spPr>
-        <p:style>
-          <a:lnRef idx="1">
-            <a:schemeClr val="accent1"/>
-          </a:lnRef>
-          <a:fillRef idx="3">
-            <a:schemeClr val="accent1"/>
-          </a:fillRef>
-          <a:effectRef idx="2">
-            <a:schemeClr val="accent1"/>
-          </a:effectRef>
-          <a:fontRef idx="minor">
-            <a:schemeClr val="lt1"/>
-          </a:fontRef>
-        </p:style>
-        <p:txBody>
-          <a:bodyPr rtlCol="0" anchor="ctr"/>
-          <a:lstStyle/>
-          <a:p/>
-        </p:txBody>
-      </p:sp>
-      <p:sp>
-        <p:nvSpPr>
-          <p:cNvPr id="7" name="TextBox 7"/>
-          <p:cNvSpPr txBox="1"/>
-          <p:nvPr/>
-        </p:nvSpPr>
-        <p:spPr>
-          <a:xfrm>
-            <a:off x="685800" y="2194560"/>
-            <a:ext cx="4180410" cy="274320"/>
-          </a:xfrm>
-          <a:prstGeom prst="rect">
-            <a:avLst/>
-          </a:prstGeom>
-          <a:noFill/>
-        </p:spPr>
-        <p:txBody>
-          <a:bodyPr wrap="square" lIns="0" rIns="0" tIns="0" bIns="0" anchor="t">
-            <a:spAutoFit/>
-          </a:bodyPr>
-          <a:lstStyle/>
-          <a:p>
-            <a:pPr algn="l"/>
-            <a:r>
-              <a:rPr sz="1100" b="1" i="0">
-                <a:solidFill>
-                  <a:srgbClr val="137C8E"/>
-                </a:solidFill>
-                <a:latin typeface="Calibri"/>
-              </a:rPr>
-              <a:t>PAPER VS. OURS</a:t>
-            </a:r>
-          </a:p>
-        </p:txBody>
-      </p:sp>
-      <p:pic>
-        <p:nvPicPr>
-          <p:cNvPr id="8" name="Figure Paper" descr="A0_vs_paper.png"/>
-          <p:cNvPicPr>
-            <a:picLocks noChangeAspect="1"/>
-          </p:cNvPicPr>
-          <p:nvPr/>
-        </p:nvPicPr>
-        <p:blipFill>
-          <a:blip r:embed="rId2"/>
-          <a:stretch>
-            <a:fillRect/>
-          </a:stretch>
-        </p:blipFill>
-        <p:spPr>
-          <a:xfrm>
-            <a:off x="685800" y="2560320"/>
-            <a:ext cx="4180410" cy="1672164"/>
-          </a:xfrm>
-          <a:prstGeom prst="rect">
-            <a:avLst/>
-          </a:prstGeom>
-        </p:spPr>
-      </p:pic>
-      <p:sp>
-        <p:nvSpPr>
-          <p:cNvPr id="9" name="Rounded Rectangle 6"/>
-          <p:cNvSpPr/>
-          <p:nvPr/>
-        </p:nvSpPr>
-        <p:spPr>
-          <a:xfrm>
-            <a:off x="5186250" y="2057400"/>
-            <a:ext cx="6454056" cy="2312244"/>
-          </a:xfrm>
-          <a:prstGeom prst="roundRect">
-            <a:avLst>
-              <a:gd name="adj" fmla="val 6000"/>
-            </a:avLst>
-          </a:prstGeom>
-          <a:solidFill>
-            <a:srgbClr val="EAF3F5"/>
-          </a:solidFill>
-          <a:ln w="12700">
-            <a:solidFill>
-              <a:srgbClr val="D3E1E6"/>
-            </a:solidFill>
-          </a:ln>
-          <a:effectLst/>
-        </p:spPr>
-        <p:style>
-          <a:lnRef idx="1">
-            <a:schemeClr val="accent1"/>
-          </a:lnRef>
-          <a:fillRef idx="3">
-            <a:schemeClr val="accent1"/>
-          </a:fillRef>
-          <a:effectRef idx="2">
-            <a:schemeClr val="accent1"/>
-          </a:effectRef>
-          <a:fontRef idx="minor">
-            <a:schemeClr val="lt1"/>
-          </a:fontRef>
-        </p:style>
-        <p:txBody>
-          <a:bodyPr rtlCol="0" anchor="ctr"/>
-          <a:lstStyle/>
-          <a:p/>
-        </p:txBody>
-      </p:sp>
-      <p:sp>
-        <p:nvSpPr>
-          <p:cNvPr id="10" name="TextBox 7"/>
-          <p:cNvSpPr txBox="1"/>
-          <p:nvPr/>
-        </p:nvSpPr>
-        <p:spPr>
-          <a:xfrm>
-            <a:off x="5323410" y="2194560"/>
-            <a:ext cx="6179736" cy="274320"/>
-          </a:xfrm>
-          <a:prstGeom prst="rect">
-            <a:avLst/>
-          </a:prstGeom>
-          <a:noFill/>
-        </p:spPr>
-        <p:txBody>
-          <a:bodyPr wrap="square" lIns="0" rIns="0" tIns="0" bIns="0" anchor="t">
-            <a:spAutoFit/>
-          </a:bodyPr>
-          <a:lstStyle/>
-          <a:p>
-            <a:pPr algn="l"/>
-            <a:r>
-              <a:rPr sz="1100" b="1" i="0">
-                <a:solidFill>
-                  <a:srgbClr val="137C8E"/>
-                </a:solidFill>
-                <a:latin typeface="Calibri"/>
-              </a:rPr>
-              <a:t>TRAINING CURVES · CONFUSION MATRIX · ROC</a:t>
-            </a:r>
-          </a:p>
-        </p:txBody>
-      </p:sp>
-      <p:pic>
-        <p:nvPicPr>
-          <p:cNvPr id="11" name="Figure Training" descr="A0_curves_cm_roc.png"/>
-          <p:cNvPicPr>
-            <a:picLocks noChangeAspect="1"/>
-          </p:cNvPicPr>
-          <p:nvPr/>
-        </p:nvPicPr>
-        <p:blipFill>
-          <a:blip r:embed="rId3"/>
-          <a:stretch>
-            <a:fillRect/>
-          </a:stretch>
-        </p:blipFill>
-        <p:spPr>
-          <a:xfrm>
-            <a:off x="5323410" y="2560320"/>
-            <a:ext cx="6179736" cy="1672164"/>
-          </a:xfrm>
-          <a:prstGeom prst="rect">
-            <a:avLst/>
-          </a:prstGeom>
-        </p:spPr>
-      </p:pic>
-      <p:sp>
-        <p:nvSpPr>
-          <p:cNvPr id="12" name="Shape 15"/>
-          <p:cNvSpPr/>
-          <p:nvPr/>
-        </p:nvSpPr>
-        <p:spPr>
-          <a:xfrm>
-            <a:off x="548640" y="4689684"/>
-            <a:ext cx="11091672" cy="868680"/>
-          </a:xfrm>
-          <a:prstGeom prst="roundRect">
-            <a:avLst>
-              <a:gd name="adj" fmla="val 10526"/>
-            </a:avLst>
-          </a:prstGeom>
-          <a:solidFill>
-            <a:srgbClr val="0F2E3D"/>
-          </a:solidFill>
-          <a:ln/>
-        </p:spPr>
-        <p:txBody>
-          <a:bodyPr/>
-          <a:p/>
-        </p:txBody>
-      </p:sp>
-      <p:sp>
-        <p:nvSpPr>
-          <p:cNvPr id="13" name="Shape 16"/>
-          <p:cNvSpPr/>
-          <p:nvPr/>
-        </p:nvSpPr>
-        <p:spPr>
-          <a:xfrm>
-            <a:off x="905256" y="4790268"/>
-            <a:ext cx="658368" cy="658368"/>
-          </a:xfrm>
-          <a:prstGeom prst="ellipse">
-            <a:avLst/>
-          </a:prstGeom>
-          <a:solidFill>
-            <a:srgbClr val="2EA79B"/>
-          </a:solidFill>
-          <a:ln/>
-        </p:spPr>
-        <p:txBody>
-          <a:bodyPr/>
-          <a:p/>
-        </p:txBody>
-      </p:sp>
-      <p:pic>
-        <p:nvPicPr>
-          <p:cNvPr id="14" name="Image 3" descr="/tmp/build/assets/ic_bolt.png">    </p:cNvPr>
-          <p:cNvPicPr>
-            <a:picLocks noChangeAspect="1"/>
-          </p:cNvPicPr>
-          <p:nvPr/>
-        </p:nvPicPr>
-        <p:blipFill>
-          <a:blip r:embed="rId4"/>
-          <a:stretch>
-            <a:fillRect/>
-          </a:stretch>
-        </p:blipFill>
-        <p:spPr>
-          <a:xfrm>
-            <a:off x="1069848" y="4954860"/>
-            <a:ext cx="329184" cy="329184"/>
-          </a:xfrm>
-          <a:prstGeom prst="rect">
-            <a:avLst/>
-          </a:prstGeom>
-        </p:spPr>
-      </p:pic>
-      <p:sp>
-        <p:nvSpPr>
-          <p:cNvPr id="15" name="Text 17"/>
-          <p:cNvSpPr txBox="1"/>
-          <p:nvPr/>
-        </p:nvSpPr>
-        <p:spPr>
-          <a:xfrm>
-            <a:off x="1783080" y="4689684"/>
-            <a:ext cx="9601200" cy="868680"/>
-          </a:xfrm>
-          <a:prstGeom prst="rect">
-            <a:avLst/>
-          </a:prstGeom>
-          <a:noFill/>
-          <a:ln/>
-        </p:spPr>
-        <p:txBody>
-          <a:bodyPr wrap="square" lIns="0" tIns="0" rIns="0" bIns="0" rtlCol="0" anchor="ctr"/>
-          <a:lstStyle/>
-          <a:p>
-            <a:pPr indent="0" marL="0">
-              <a:lnSpc>
-                <a:spcPct val="105000"/>
-              </a:lnSpc>
-              <a:buNone/>
-            </a:pPr>
-            <a:r>
-              <a:rPr lang="en-US" sz="1550" b="1" dirty="0">
-                <a:solidFill>
-                  <a:srgbClr val="2EA79B"/>
-                </a:solidFill>
-                <a:latin typeface="Calibri" pitchFamily="34" charset="0"/>
-                <a:ea typeface="Calibri" pitchFamily="34" charset="-122"/>
-                <a:cs typeface="Calibri" pitchFamily="34" charset="-120"/>
-              </a:rPr>
-              <a:t>Takeaway:  </a:t>
-            </a:r>
-            <a:pPr indent="0" marL="0">
-              <a:lnSpc>
-                <a:spcPct val="105000"/>
-              </a:lnSpc>
-              <a:buNone/>
-            </a:pPr>
-            <a:r>
-              <a:rPr lang="en-US" sz="1550" dirty="0">
-                <a:solidFill>
-                  <a:srgbClr val="E8F2F4"/>
-                </a:solidFill>
-                <a:latin typeface="Calibri" pitchFamily="34" charset="0"/>
-                <a:ea typeface="Calibri" pitchFamily="34" charset="-122"/>
-                <a:cs typeface="Calibri" pitchFamily="34" charset="-120"/>
-              </a:rPr>
-              <a:t>Within 1 pp of the paper on both headline accuracies; recall is 2 pp lower (44 missed infected cells).</a:t>
-            </a:r>
-            <a:endParaRPr lang="en-US" sz="1550" dirty="0"/>
-          </a:p>
-        </p:txBody>
-      </p:sp>
-      <p:sp>
-        <p:nvSpPr>
-          <p:cNvPr id="16" name="TextBox 10"/>
-          <p:cNvSpPr txBox="1"/>
-          <p:nvPr/>
-        </p:nvSpPr>
-        <p:spPr>
-          <a:xfrm>
-            <a:off x="548640" y="6455664"/>
-            <a:ext cx="7315200" cy="274320"/>
-          </a:xfrm>
-          <a:prstGeom prst="rect">
-            <a:avLst/>
-          </a:prstGeom>
-          <a:noFill/>
-        </p:spPr>
-        <p:txBody>
-          <a:bodyPr wrap="square" lIns="0" rIns="0" tIns="0" bIns="0" anchor="t">
-            <a:spAutoFit/>
-          </a:bodyPr>
-          <a:lstStyle/>
-          <a:p>
-            <a:pPr algn="l"/>
-            <a:r>
-              <a:rPr sz="900" b="0" i="0">
-                <a:solidFill>
-                  <a:srgbClr val="7C8B93"/>
-                </a:solidFill>
-                <a:latin typeface="Calibri"/>
-              </a:rPr>
-              <a:t>Phase 2 · Baseline &amp; Hypothesis · Automated Malaria Cell Detection</a:t>
-            </a:r>
-          </a:p>
-        </p:txBody>
-      </p:sp>
-      <p:sp>
-        <p:nvSpPr>
-          <p:cNvPr id="17" name="TextBox 11"/>
-          <p:cNvSpPr txBox="1"/>
-          <p:nvPr/>
-        </p:nvSpPr>
-        <p:spPr>
-          <a:xfrm>
-            <a:off x="11183112" y="6419088"/>
-            <a:ext cx="457200" cy="274320"/>
-          </a:xfrm>
-          <a:prstGeom prst="rect">
-            <a:avLst/>
-          </a:prstGeom>
-          <a:noFill/>
-        </p:spPr>
-        <p:txBody>
-          <a:bodyPr wrap="square" lIns="0" rIns="0" tIns="0" bIns="0" anchor="t">
-            <a:spAutoFit/>
-          </a:bodyPr>
-          <a:lstStyle/>
-          <a:p>
-            <a:pPr algn="r"/>
-            <a:r>
-              <a:rPr sz="1000" b="0" i="0">
-                <a:solidFill>
-                  <a:srgbClr val="7C8B93"/>
-                </a:solidFill>
-                <a:latin typeface="Calibri"/>
-              </a:rPr>
-              <a:t>20</a:t>
-            </a:r>
           </a:p>
         </p:txBody>
       </p:sp>

--- a/slides/Malaria_Phase2_Baseline_Hypothesis_filled.pptx
+++ b/slides/Malaria_Phase2_Baseline_Hypothesis_filled.pptx
@@ -25,6 +25,7 @@
     <p:sldId id="273" r:id="rId24"/>
     <p:sldId id="274" r:id="rId25"/>
     <p:sldId id="278" r:id="rId29"/>
+    <p:sldId id="279" r:id="rId30"/>
     <p:sldId id="275" r:id="rId26"/>
     <p:sldId id="276" r:id="rId27"/>
     <p:sldId id="271" r:id="rId17"/>
@@ -22314,7 +22315,7 @@
                 </a:solidFill>
                 <a:latin typeface="Calibri"/>
               </a:rPr>
-              <a:t>22</a:t>
+              <a:t>23</a:t>
             </a:r>
           </a:p>
         </p:txBody>
@@ -22960,9 +22961,1176 @@
                 <a:ea typeface="Calibri" pitchFamily="34" charset="-122"/>
                 <a:cs typeface="Calibri" pitchFamily="34" charset="-120"/>
               </a:rPr>
-              <a:t>23</a:t>
+              <a:t>24</a:t>
             </a:r>
             <a:endParaRPr lang="en-US" sz="1000" dirty="0"/>
+          </a:p>
+        </p:txBody>
+      </p:sp>
+    </p:spTree>
+  </p:cSld>
+  <p:clrMapOvr>
+    <a:masterClrMapping/>
+  </p:clrMapOvr>
+</p:sld>
+</file>
+
+<file path=ppt/slides/slide24.xml><?xml version="1.0" encoding="utf-8"?>
+<p:sld xmlns:a="http://schemas.openxmlformats.org/drawingml/2006/main" xmlns:p="http://schemas.openxmlformats.org/presentationml/2006/main" xmlns:r="http://schemas.openxmlformats.org/officeDocument/2006/relationships">
+  <p:cSld>
+    <p:spTree>
+      <p:nvGrpSpPr>
+        <p:cNvPr id="2" name=""/>
+        <p:cNvGrpSpPr/>
+        <p:nvPr/>
+      </p:nvGrpSpPr>
+      <p:grpSpPr/>
+      <p:sp>
+        <p:nvSpPr>
+          <p:cNvPr id="3" name="TextBox 1"/>
+          <p:cNvSpPr txBox="1"/>
+          <p:nvPr/>
+        </p:nvSpPr>
+        <p:spPr>
+          <a:xfrm>
+            <a:off x="548640" y="457200"/>
+            <a:ext cx="11064240" cy="274320"/>
+          </a:xfrm>
+          <a:prstGeom prst="rect">
+            <a:avLst/>
+          </a:prstGeom>
+          <a:noFill/>
+        </p:spPr>
+        <p:txBody>
+          <a:bodyPr wrap="square" lIns="0" rIns="0" tIns="0" bIns="0" anchor="t">
+            <a:spAutoFit/>
+          </a:bodyPr>
+          <a:lstStyle/>
+          <a:p>
+            <a:pPr algn="l"/>
+            <a:r>
+              <a:rPr sz="1250" b="1" i="0">
+                <a:solidFill>
+                  <a:srgbClr val="137C8E"/>
+                </a:solidFill>
+                <a:latin typeface="Calibri"/>
+              </a:rPr>
+              <a:t>MILESTONE 2 · BASELINE REPRODUCTION</a:t>
+            </a:r>
+          </a:p>
+        </p:txBody>
+      </p:sp>
+      <p:sp>
+        <p:nvSpPr>
+          <p:cNvPr id="4" name="TextBox 2"/>
+          <p:cNvSpPr txBox="1"/>
+          <p:nvPr/>
+        </p:nvSpPr>
+        <p:spPr>
+          <a:xfrm>
+            <a:off x="548640" y="749808"/>
+            <a:ext cx="11064240" cy="658368"/>
+          </a:xfrm>
+          <a:prstGeom prst="rect">
+            <a:avLst/>
+          </a:prstGeom>
+          <a:noFill/>
+        </p:spPr>
+        <p:txBody>
+          <a:bodyPr wrap="square" lIns="0" rIns="0" tIns="0" bIns="0" anchor="t">
+            <a:spAutoFit/>
+          </a:bodyPr>
+          <a:lstStyle/>
+          <a:p>
+            <a:pPr algn="l"/>
+            <a:r>
+              <a:rPr sz="3000" b="1" i="0">
+                <a:solidFill>
+                  <a:srgbClr val="17262E"/>
+                </a:solidFill>
+                <a:latin typeface="Cambria"/>
+              </a:rPr>
+              <a:t>A0 per-fold results</a:t>
+            </a:r>
+          </a:p>
+        </p:txBody>
+      </p:sp>
+      <p:sp>
+        <p:nvSpPr>
+          <p:cNvPr id="5" name="TextBox 3"/>
+          <p:cNvSpPr txBox="1"/>
+          <p:nvPr/>
+        </p:nvSpPr>
+        <p:spPr>
+          <a:xfrm>
+            <a:off x="548640" y="1463040"/>
+            <a:ext cx="11064240" cy="457200"/>
+          </a:xfrm>
+          <a:prstGeom prst="rect">
+            <a:avLst/>
+          </a:prstGeom>
+          <a:noFill/>
+        </p:spPr>
+        <p:txBody>
+          <a:bodyPr wrap="square" lIns="0" rIns="0" tIns="0" bIns="0" anchor="t">
+            <a:spAutoFit/>
+          </a:bodyPr>
+          <a:lstStyle/>
+          <a:p>
+            <a:pPr algn="l"/>
+            <a:r>
+              <a:rPr sz="1550" b="0" i="0">
+                <a:solidFill>
+                  <a:srgbClr val="41525B"/>
+                </a:solidFill>
+                <a:latin typeface="Calibri"/>
+              </a:rPr>
+              <a:t>Each fold model scored on its own validation split (2,481 cells). Last row: mean ± SD over the 3 folds. MCC as a coefficient (0–1).</a:t>
+            </a:r>
+          </a:p>
+        </p:txBody>
+      </p:sp>
+      <p:graphicFrame>
+        <p:nvGraphicFramePr>
+          <p:cNvPr id="6" name="Table 8"/>
+          <p:cNvGraphicFramePr>
+            <a:graphicFrameLocks noGrp="1"/>
+          </p:cNvGraphicFramePr>
+          <p:nvPr/>
+        </p:nvGraphicFramePr>
+        <p:xfrm>
+          <a:off x="548640" y="2103120"/>
+          <a:ext cx="11091672" cy="2286000"/>
+        </p:xfrm>
+        <a:graphic>
+          <a:graphicData uri="http://schemas.openxmlformats.org/drawingml/2006/table">
+            <a:tbl>
+              <a:tblPr firstRow="1" bandRow="0">
+                <a:tableStyleId>{5C22544A-7EE6-4342-B048-85BDC9FD1C3A}</a:tableStyleId>
+              </a:tblPr>
+              <a:tblGrid>
+                <a:gridCol w="1645920"/>
+                <a:gridCol w="1574292"/>
+                <a:gridCol w="1574292"/>
+                <a:gridCol w="1574292"/>
+                <a:gridCol w="1574292"/>
+                <a:gridCol w="1574292"/>
+                <a:gridCol w="1574292"/>
+              </a:tblGrid>
+              <a:tr h="457200">
+                <a:tc>
+                  <a:txBody>
+                    <a:bodyPr wrap="square"/>
+                    <a:lstStyle/>
+                    <a:p>
+                      <a:r>
+                        <a:rPr sz="1400" b="1">
+                          <a:solidFill>
+                            <a:srgbClr val="FFFFFF"/>
+                          </a:solidFill>
+                          <a:latin typeface="Calibri"/>
+                        </a:rPr>
+                        <a:t>Fold</a:t>
+                      </a:r>
+                    </a:p>
+                  </a:txBody>
+                  <a:tcPr marL="73152" marR="73152" marT="27432" marB="27432" anchor="ctr">
+                    <a:solidFill>
+                      <a:srgbClr val="17262E"/>
+                    </a:solidFill>
+                  </a:tcPr>
+                </a:tc>
+                <a:tc>
+                  <a:txBody>
+                    <a:bodyPr wrap="square"/>
+                    <a:lstStyle/>
+                    <a:p>
+                      <a:pPr algn="ctr"/>
+                      <a:r>
+                        <a:rPr sz="1400" b="1">
+                          <a:solidFill>
+                            <a:srgbClr val="FFFFFF"/>
+                          </a:solidFill>
+                          <a:latin typeface="Calibri"/>
+                        </a:rPr>
+                        <a:t>Epochs</a:t>
+                      </a:r>
+                    </a:p>
+                  </a:txBody>
+                  <a:tcPr marL="73152" marR="73152" marT="27432" marB="27432" anchor="ctr">
+                    <a:solidFill>
+                      <a:srgbClr val="17262E"/>
+                    </a:solidFill>
+                  </a:tcPr>
+                </a:tc>
+                <a:tc>
+                  <a:txBody>
+                    <a:bodyPr wrap="square"/>
+                    <a:lstStyle/>
+                    <a:p>
+                      <a:pPr algn="ctr"/>
+                      <a:r>
+                        <a:rPr sz="1400" b="1">
+                          <a:solidFill>
+                            <a:srgbClr val="FFFFFF"/>
+                          </a:solidFill>
+                          <a:latin typeface="Calibri"/>
+                        </a:rPr>
+                        <a:t>Minutes</a:t>
+                      </a:r>
+                    </a:p>
+                  </a:txBody>
+                  <a:tcPr marL="73152" marR="73152" marT="27432" marB="27432" anchor="ctr">
+                    <a:solidFill>
+                      <a:srgbClr val="17262E"/>
+                    </a:solidFill>
+                  </a:tcPr>
+                </a:tc>
+                <a:tc>
+                  <a:txBody>
+                    <a:bodyPr wrap="square"/>
+                    <a:lstStyle/>
+                    <a:p>
+                      <a:pPr algn="ctr"/>
+                      <a:r>
+                        <a:rPr sz="1400" b="1">
+                          <a:solidFill>
+                            <a:srgbClr val="FFFFFF"/>
+                          </a:solidFill>
+                          <a:latin typeface="Calibri"/>
+                        </a:rPr>
+                        <a:t>Accuracy</a:t>
+                      </a:r>
+                    </a:p>
+                  </a:txBody>
+                  <a:tcPr marL="73152" marR="73152" marT="27432" marB="27432" anchor="ctr">
+                    <a:solidFill>
+                      <a:srgbClr val="17262E"/>
+                    </a:solidFill>
+                  </a:tcPr>
+                </a:tc>
+                <a:tc>
+                  <a:txBody>
+                    <a:bodyPr wrap="square"/>
+                    <a:lstStyle/>
+                    <a:p>
+                      <a:pPr algn="ctr"/>
+                      <a:r>
+                        <a:rPr sz="1400" b="1">
+                          <a:solidFill>
+                            <a:srgbClr val="FFFFFF"/>
+                          </a:solidFill>
+                          <a:latin typeface="Calibri"/>
+                        </a:rPr>
+                        <a:t>Recall</a:t>
+                      </a:r>
+                    </a:p>
+                  </a:txBody>
+                  <a:tcPr marL="73152" marR="73152" marT="27432" marB="27432" anchor="ctr">
+                    <a:solidFill>
+                      <a:srgbClr val="17262E"/>
+                    </a:solidFill>
+                  </a:tcPr>
+                </a:tc>
+                <a:tc>
+                  <a:txBody>
+                    <a:bodyPr wrap="square"/>
+                    <a:lstStyle/>
+                    <a:p>
+                      <a:pPr algn="ctr"/>
+                      <a:r>
+                        <a:rPr sz="1400" b="1">
+                          <a:solidFill>
+                            <a:srgbClr val="FFFFFF"/>
+                          </a:solidFill>
+                          <a:latin typeface="Calibri"/>
+                        </a:rPr>
+                        <a:t>Precision</a:t>
+                      </a:r>
+                    </a:p>
+                  </a:txBody>
+                  <a:tcPr marL="73152" marR="73152" marT="27432" marB="27432" anchor="ctr">
+                    <a:solidFill>
+                      <a:srgbClr val="17262E"/>
+                    </a:solidFill>
+                  </a:tcPr>
+                </a:tc>
+                <a:tc>
+                  <a:txBody>
+                    <a:bodyPr wrap="square"/>
+                    <a:lstStyle/>
+                    <a:p>
+                      <a:pPr algn="ctr"/>
+                      <a:r>
+                        <a:rPr sz="1400" b="1">
+                          <a:solidFill>
+                            <a:srgbClr val="FFFFFF"/>
+                          </a:solidFill>
+                          <a:latin typeface="Calibri"/>
+                        </a:rPr>
+                        <a:t>MCC</a:t>
+                      </a:r>
+                    </a:p>
+                  </a:txBody>
+                  <a:tcPr marL="73152" marR="73152" marT="27432" marB="27432" anchor="ctr">
+                    <a:solidFill>
+                      <a:srgbClr val="17262E"/>
+                    </a:solidFill>
+                  </a:tcPr>
+                </a:tc>
+              </a:tr>
+              <a:tr h="457200">
+                <a:tc>
+                  <a:txBody>
+                    <a:bodyPr wrap="square"/>
+                    <a:lstStyle/>
+                    <a:p>
+                      <a:r>
+                        <a:rPr sz="1400" b="1">
+                          <a:solidFill>
+                            <a:srgbClr val="17262E"/>
+                          </a:solidFill>
+                          <a:latin typeface="Calibri"/>
+                        </a:rPr>
+                        <a:t>Fold 1</a:t>
+                      </a:r>
+                    </a:p>
+                  </a:txBody>
+                  <a:tcPr marL="73152" marR="73152" marT="27432" marB="27432" anchor="ctr">
+                    <a:solidFill>
+                      <a:srgbClr val="FFFFFF"/>
+                    </a:solidFill>
+                  </a:tcPr>
+                </a:tc>
+                <a:tc>
+                  <a:txBody>
+                    <a:bodyPr wrap="square"/>
+                    <a:lstStyle/>
+                    <a:p>
+                      <a:pPr algn="ctr"/>
+                      <a:r>
+                        <a:rPr sz="1400" b="0">
+                          <a:solidFill>
+                            <a:srgbClr val="41525B"/>
+                          </a:solidFill>
+                          <a:latin typeface="Calibri"/>
+                        </a:rPr>
+                        <a:t>9</a:t>
+                      </a:r>
+                    </a:p>
+                  </a:txBody>
+                  <a:tcPr marL="73152" marR="73152" marT="27432" marB="27432" anchor="ctr">
+                    <a:solidFill>
+                      <a:srgbClr val="FFFFFF"/>
+                    </a:solidFill>
+                  </a:tcPr>
+                </a:tc>
+                <a:tc>
+                  <a:txBody>
+                    <a:bodyPr wrap="square"/>
+                    <a:lstStyle/>
+                    <a:p>
+                      <a:pPr algn="ctr"/>
+                      <a:r>
+                        <a:rPr sz="1400" b="0">
+                          <a:solidFill>
+                            <a:srgbClr val="41525B"/>
+                          </a:solidFill>
+                          <a:latin typeface="Calibri"/>
+                        </a:rPr>
+                        <a:t>20.7</a:t>
+                      </a:r>
+                    </a:p>
+                  </a:txBody>
+                  <a:tcPr marL="73152" marR="73152" marT="27432" marB="27432" anchor="ctr">
+                    <a:solidFill>
+                      <a:srgbClr val="FFFFFF"/>
+                    </a:solidFill>
+                  </a:tcPr>
+                </a:tc>
+                <a:tc>
+                  <a:txBody>
+                    <a:bodyPr wrap="square"/>
+                    <a:lstStyle/>
+                    <a:p>
+                      <a:pPr algn="ctr"/>
+                      <a:r>
+                        <a:rPr sz="1400" b="0">
+                          <a:solidFill>
+                            <a:srgbClr val="41525B"/>
+                          </a:solidFill>
+                          <a:latin typeface="Calibri"/>
+                        </a:rPr>
+                        <a:t>96.57 %</a:t>
+                      </a:r>
+                    </a:p>
+                  </a:txBody>
+                  <a:tcPr marL="73152" marR="73152" marT="27432" marB="27432" anchor="ctr">
+                    <a:solidFill>
+                      <a:srgbClr val="FFFFFF"/>
+                    </a:solidFill>
+                  </a:tcPr>
+                </a:tc>
+                <a:tc>
+                  <a:txBody>
+                    <a:bodyPr wrap="square"/>
+                    <a:lstStyle/>
+                    <a:p>
+                      <a:pPr algn="ctr"/>
+                      <a:r>
+                        <a:rPr sz="1400" b="1">
+                          <a:solidFill>
+                            <a:srgbClr val="D99A00"/>
+                          </a:solidFill>
+                          <a:latin typeface="Calibri"/>
+                        </a:rPr>
+                        <a:t>94.84 %</a:t>
+                      </a:r>
+                    </a:p>
+                  </a:txBody>
+                  <a:tcPr marL="73152" marR="73152" marT="27432" marB="27432" anchor="ctr">
+                    <a:solidFill>
+                      <a:srgbClr val="FFFFFF"/>
+                    </a:solidFill>
+                  </a:tcPr>
+                </a:tc>
+                <a:tc>
+                  <a:txBody>
+                    <a:bodyPr wrap="square"/>
+                    <a:lstStyle/>
+                    <a:p>
+                      <a:pPr algn="ctr"/>
+                      <a:r>
+                        <a:rPr sz="1400" b="0">
+                          <a:solidFill>
+                            <a:srgbClr val="41525B"/>
+                          </a:solidFill>
+                          <a:latin typeface="Calibri"/>
+                        </a:rPr>
+                        <a:t>98.25 %</a:t>
+                      </a:r>
+                    </a:p>
+                  </a:txBody>
+                  <a:tcPr marL="73152" marR="73152" marT="27432" marB="27432" anchor="ctr">
+                    <a:solidFill>
+                      <a:srgbClr val="FFFFFF"/>
+                    </a:solidFill>
+                  </a:tcPr>
+                </a:tc>
+                <a:tc>
+                  <a:txBody>
+                    <a:bodyPr wrap="square"/>
+                    <a:lstStyle/>
+                    <a:p>
+                      <a:pPr algn="ctr"/>
+                      <a:r>
+                        <a:rPr sz="1400" b="0">
+                          <a:solidFill>
+                            <a:srgbClr val="41525B"/>
+                          </a:solidFill>
+                          <a:latin typeface="Calibri"/>
+                        </a:rPr>
+                        <a:t>0.93</a:t>
+                      </a:r>
+                    </a:p>
+                  </a:txBody>
+                  <a:tcPr marL="73152" marR="73152" marT="27432" marB="27432" anchor="ctr">
+                    <a:solidFill>
+                      <a:srgbClr val="FFFFFF"/>
+                    </a:solidFill>
+                  </a:tcPr>
+                </a:tc>
+              </a:tr>
+              <a:tr h="457200">
+                <a:tc>
+                  <a:txBody>
+                    <a:bodyPr wrap="square"/>
+                    <a:lstStyle/>
+                    <a:p>
+                      <a:r>
+                        <a:rPr sz="1400" b="1">
+                          <a:solidFill>
+                            <a:srgbClr val="17262E"/>
+                          </a:solidFill>
+                          <a:latin typeface="Calibri"/>
+                        </a:rPr>
+                        <a:t>Fold 2</a:t>
+                      </a:r>
+                    </a:p>
+                  </a:txBody>
+                  <a:tcPr marL="73152" marR="73152" marT="27432" marB="27432" anchor="ctr">
+                    <a:solidFill>
+                      <a:srgbClr val="F5F9FA"/>
+                    </a:solidFill>
+                  </a:tcPr>
+                </a:tc>
+                <a:tc>
+                  <a:txBody>
+                    <a:bodyPr wrap="square"/>
+                    <a:lstStyle/>
+                    <a:p>
+                      <a:pPr algn="ctr"/>
+                      <a:r>
+                        <a:rPr sz="1400" b="0">
+                          <a:solidFill>
+                            <a:srgbClr val="41525B"/>
+                          </a:solidFill>
+                          <a:latin typeface="Calibri"/>
+                        </a:rPr>
+                        <a:t>10</a:t>
+                      </a:r>
+                    </a:p>
+                  </a:txBody>
+                  <a:tcPr marL="73152" marR="73152" marT="27432" marB="27432" anchor="ctr">
+                    <a:solidFill>
+                      <a:srgbClr val="F5F9FA"/>
+                    </a:solidFill>
+                  </a:tcPr>
+                </a:tc>
+                <a:tc>
+                  <a:txBody>
+                    <a:bodyPr wrap="square"/>
+                    <a:lstStyle/>
+                    <a:p>
+                      <a:pPr algn="ctr"/>
+                      <a:r>
+                        <a:rPr sz="1400" b="0">
+                          <a:solidFill>
+                            <a:srgbClr val="41525B"/>
+                          </a:solidFill>
+                          <a:latin typeface="Calibri"/>
+                        </a:rPr>
+                        <a:t>21.9</a:t>
+                      </a:r>
+                    </a:p>
+                  </a:txBody>
+                  <a:tcPr marL="73152" marR="73152" marT="27432" marB="27432" anchor="ctr">
+                    <a:solidFill>
+                      <a:srgbClr val="F5F9FA"/>
+                    </a:solidFill>
+                  </a:tcPr>
+                </a:tc>
+                <a:tc>
+                  <a:txBody>
+                    <a:bodyPr wrap="square"/>
+                    <a:lstStyle/>
+                    <a:p>
+                      <a:pPr algn="ctr"/>
+                      <a:r>
+                        <a:rPr sz="1400" b="0">
+                          <a:solidFill>
+                            <a:srgbClr val="41525B"/>
+                          </a:solidFill>
+                          <a:latin typeface="Calibri"/>
+                        </a:rPr>
+                        <a:t>98.02 %</a:t>
+                      </a:r>
+                    </a:p>
+                  </a:txBody>
+                  <a:tcPr marL="73152" marR="73152" marT="27432" marB="27432" anchor="ctr">
+                    <a:solidFill>
+                      <a:srgbClr val="F5F9FA"/>
+                    </a:solidFill>
+                  </a:tcPr>
+                </a:tc>
+                <a:tc>
+                  <a:txBody>
+                    <a:bodyPr wrap="square"/>
+                    <a:lstStyle/>
+                    <a:p>
+                      <a:pPr algn="ctr"/>
+                      <a:r>
+                        <a:rPr sz="1400" b="0">
+                          <a:solidFill>
+                            <a:srgbClr val="41525B"/>
+                          </a:solidFill>
+                          <a:latin typeface="Calibri"/>
+                        </a:rPr>
+                        <a:t>97.90 %</a:t>
+                      </a:r>
+                    </a:p>
+                  </a:txBody>
+                  <a:tcPr marL="73152" marR="73152" marT="27432" marB="27432" anchor="ctr">
+                    <a:solidFill>
+                      <a:srgbClr val="F5F9FA"/>
+                    </a:solidFill>
+                  </a:tcPr>
+                </a:tc>
+                <a:tc>
+                  <a:txBody>
+                    <a:bodyPr wrap="square"/>
+                    <a:lstStyle/>
+                    <a:p>
+                      <a:pPr algn="ctr"/>
+                      <a:r>
+                        <a:rPr sz="1400" b="0">
+                          <a:solidFill>
+                            <a:srgbClr val="41525B"/>
+                          </a:solidFill>
+                          <a:latin typeface="Calibri"/>
+                        </a:rPr>
+                        <a:t>98.14 %</a:t>
+                      </a:r>
+                    </a:p>
+                  </a:txBody>
+                  <a:tcPr marL="73152" marR="73152" marT="27432" marB="27432" anchor="ctr">
+                    <a:solidFill>
+                      <a:srgbClr val="F5F9FA"/>
+                    </a:solidFill>
+                  </a:tcPr>
+                </a:tc>
+                <a:tc>
+                  <a:txBody>
+                    <a:bodyPr wrap="square"/>
+                    <a:lstStyle/>
+                    <a:p>
+                      <a:pPr algn="ctr"/>
+                      <a:r>
+                        <a:rPr sz="1400" b="0">
+                          <a:solidFill>
+                            <a:srgbClr val="41525B"/>
+                          </a:solidFill>
+                          <a:latin typeface="Calibri"/>
+                        </a:rPr>
+                        <a:t>0.96</a:t>
+                      </a:r>
+                    </a:p>
+                  </a:txBody>
+                  <a:tcPr marL="73152" marR="73152" marT="27432" marB="27432" anchor="ctr">
+                    <a:solidFill>
+                      <a:srgbClr val="F5F9FA"/>
+                    </a:solidFill>
+                  </a:tcPr>
+                </a:tc>
+              </a:tr>
+              <a:tr h="457200">
+                <a:tc>
+                  <a:txBody>
+                    <a:bodyPr wrap="square"/>
+                    <a:lstStyle/>
+                    <a:p>
+                      <a:r>
+                        <a:rPr sz="1400" b="1">
+                          <a:solidFill>
+                            <a:srgbClr val="17262E"/>
+                          </a:solidFill>
+                          <a:latin typeface="Calibri"/>
+                        </a:rPr>
+                        <a:t>Fold 3</a:t>
+                      </a:r>
+                    </a:p>
+                  </a:txBody>
+                  <a:tcPr marL="73152" marR="73152" marT="27432" marB="27432" anchor="ctr">
+                    <a:solidFill>
+                      <a:srgbClr val="FFFFFF"/>
+                    </a:solidFill>
+                  </a:tcPr>
+                </a:tc>
+                <a:tc>
+                  <a:txBody>
+                    <a:bodyPr wrap="square"/>
+                    <a:lstStyle/>
+                    <a:p>
+                      <a:pPr algn="ctr"/>
+                      <a:r>
+                        <a:rPr sz="1400" b="0">
+                          <a:solidFill>
+                            <a:srgbClr val="41525B"/>
+                          </a:solidFill>
+                          <a:latin typeface="Calibri"/>
+                        </a:rPr>
+                        <a:t>10</a:t>
+                      </a:r>
+                    </a:p>
+                  </a:txBody>
+                  <a:tcPr marL="73152" marR="73152" marT="27432" marB="27432" anchor="ctr">
+                    <a:solidFill>
+                      <a:srgbClr val="FFFFFF"/>
+                    </a:solidFill>
+                  </a:tcPr>
+                </a:tc>
+                <a:tc>
+                  <a:txBody>
+                    <a:bodyPr wrap="square"/>
+                    <a:lstStyle/>
+                    <a:p>
+                      <a:pPr algn="ctr"/>
+                      <a:r>
+                        <a:rPr sz="1400" b="0">
+                          <a:solidFill>
+                            <a:srgbClr val="41525B"/>
+                          </a:solidFill>
+                          <a:latin typeface="Calibri"/>
+                        </a:rPr>
+                        <a:t>21.7</a:t>
+                      </a:r>
+                    </a:p>
+                  </a:txBody>
+                  <a:tcPr marL="73152" marR="73152" marT="27432" marB="27432" anchor="ctr">
+                    <a:solidFill>
+                      <a:srgbClr val="FFFFFF"/>
+                    </a:solidFill>
+                  </a:tcPr>
+                </a:tc>
+                <a:tc>
+                  <a:txBody>
+                    <a:bodyPr wrap="square"/>
+                    <a:lstStyle/>
+                    <a:p>
+                      <a:pPr algn="ctr"/>
+                      <a:r>
+                        <a:rPr sz="1400" b="0">
+                          <a:solidFill>
+                            <a:srgbClr val="41525B"/>
+                          </a:solidFill>
+                          <a:latin typeface="Calibri"/>
+                        </a:rPr>
+                        <a:t>97.54 %</a:t>
+                      </a:r>
+                    </a:p>
+                  </a:txBody>
+                  <a:tcPr marL="73152" marR="73152" marT="27432" marB="27432" anchor="ctr">
+                    <a:solidFill>
+                      <a:srgbClr val="FFFFFF"/>
+                    </a:solidFill>
+                  </a:tcPr>
+                </a:tc>
+                <a:tc>
+                  <a:txBody>
+                    <a:bodyPr wrap="square"/>
+                    <a:lstStyle/>
+                    <a:p>
+                      <a:pPr algn="ctr"/>
+                      <a:r>
+                        <a:rPr sz="1400" b="0">
+                          <a:solidFill>
+                            <a:srgbClr val="41525B"/>
+                          </a:solidFill>
+                          <a:latin typeface="Calibri"/>
+                        </a:rPr>
+                        <a:t>97.18 %</a:t>
+                      </a:r>
+                    </a:p>
+                  </a:txBody>
+                  <a:tcPr marL="73152" marR="73152" marT="27432" marB="27432" anchor="ctr">
+                    <a:solidFill>
+                      <a:srgbClr val="FFFFFF"/>
+                    </a:solidFill>
+                  </a:tcPr>
+                </a:tc>
+                <a:tc>
+                  <a:txBody>
+                    <a:bodyPr wrap="square"/>
+                    <a:lstStyle/>
+                    <a:p>
+                      <a:pPr algn="ctr"/>
+                      <a:r>
+                        <a:rPr sz="1400" b="0">
+                          <a:solidFill>
+                            <a:srgbClr val="41525B"/>
+                          </a:solidFill>
+                          <a:latin typeface="Calibri"/>
+                        </a:rPr>
+                        <a:t>97.89 %</a:t>
+                      </a:r>
+                    </a:p>
+                  </a:txBody>
+                  <a:tcPr marL="73152" marR="73152" marT="27432" marB="27432" anchor="ctr">
+                    <a:solidFill>
+                      <a:srgbClr val="FFFFFF"/>
+                    </a:solidFill>
+                  </a:tcPr>
+                </a:tc>
+                <a:tc>
+                  <a:txBody>
+                    <a:bodyPr wrap="square"/>
+                    <a:lstStyle/>
+                    <a:p>
+                      <a:pPr algn="ctr"/>
+                      <a:r>
+                        <a:rPr sz="1400" b="0">
+                          <a:solidFill>
+                            <a:srgbClr val="41525B"/>
+                          </a:solidFill>
+                          <a:latin typeface="Calibri"/>
+                        </a:rPr>
+                        <a:t>0.95</a:t>
+                      </a:r>
+                    </a:p>
+                  </a:txBody>
+                  <a:tcPr marL="73152" marR="73152" marT="27432" marB="27432" anchor="ctr">
+                    <a:solidFill>
+                      <a:srgbClr val="FFFFFF"/>
+                    </a:solidFill>
+                  </a:tcPr>
+                </a:tc>
+              </a:tr>
+              <a:tr h="457200">
+                <a:tc>
+                  <a:txBody>
+                    <a:bodyPr wrap="square"/>
+                    <a:lstStyle/>
+                    <a:p>
+                      <a:r>
+                        <a:rPr sz="1400" b="1">
+                          <a:solidFill>
+                            <a:srgbClr val="137C8E"/>
+                          </a:solidFill>
+                          <a:latin typeface="Calibri"/>
+                        </a:rPr>
+                        <a:t>Mean ± SD</a:t>
+                      </a:r>
+                    </a:p>
+                  </a:txBody>
+                  <a:tcPr marL="73152" marR="73152" marT="27432" marB="27432" anchor="ctr">
+                    <a:solidFill>
+                      <a:srgbClr val="EAF3F5"/>
+                    </a:solidFill>
+                  </a:tcPr>
+                </a:tc>
+                <a:tc>
+                  <a:txBody>
+                    <a:bodyPr wrap="square"/>
+                    <a:lstStyle/>
+                    <a:p>
+                      <a:pPr algn="ctr"/>
+                      <a:r>
+                        <a:rPr sz="1400" b="1">
+                          <a:solidFill>
+                            <a:srgbClr val="137C8E"/>
+                          </a:solidFill>
+                          <a:latin typeface="Calibri"/>
+                        </a:rPr>
+                        <a:t>—</a:t>
+                      </a:r>
+                    </a:p>
+                  </a:txBody>
+                  <a:tcPr marL="73152" marR="73152" marT="27432" marB="27432" anchor="ctr">
+                    <a:solidFill>
+                      <a:srgbClr val="EAF3F5"/>
+                    </a:solidFill>
+                  </a:tcPr>
+                </a:tc>
+                <a:tc>
+                  <a:txBody>
+                    <a:bodyPr wrap="square"/>
+                    <a:lstStyle/>
+                    <a:p>
+                      <a:pPr algn="ctr"/>
+                      <a:r>
+                        <a:rPr sz="1400" b="1">
+                          <a:solidFill>
+                            <a:srgbClr val="137C8E"/>
+                          </a:solidFill>
+                          <a:latin typeface="Calibri"/>
+                        </a:rPr>
+                        <a:t>—</a:t>
+                      </a:r>
+                    </a:p>
+                  </a:txBody>
+                  <a:tcPr marL="73152" marR="73152" marT="27432" marB="27432" anchor="ctr">
+                    <a:solidFill>
+                      <a:srgbClr val="EAF3F5"/>
+                    </a:solidFill>
+                  </a:tcPr>
+                </a:tc>
+                <a:tc>
+                  <a:txBody>
+                    <a:bodyPr wrap="square"/>
+                    <a:lstStyle/>
+                    <a:p>
+                      <a:pPr algn="ctr"/>
+                      <a:r>
+                        <a:rPr sz="1400" b="1">
+                          <a:solidFill>
+                            <a:srgbClr val="137C8E"/>
+                          </a:solidFill>
+                          <a:latin typeface="Calibri"/>
+                        </a:rPr>
+                        <a:t>97.38 ± 0.74 %</a:t>
+                      </a:r>
+                    </a:p>
+                  </a:txBody>
+                  <a:tcPr marL="73152" marR="73152" marT="27432" marB="27432" anchor="ctr">
+                    <a:solidFill>
+                      <a:srgbClr val="EAF3F5"/>
+                    </a:solidFill>
+                  </a:tcPr>
+                </a:tc>
+                <a:tc>
+                  <a:txBody>
+                    <a:bodyPr wrap="square"/>
+                    <a:lstStyle/>
+                    <a:p>
+                      <a:pPr algn="ctr"/>
+                      <a:r>
+                        <a:rPr sz="1400" b="1">
+                          <a:solidFill>
+                            <a:srgbClr val="137C8E"/>
+                          </a:solidFill>
+                          <a:latin typeface="Calibri"/>
+                        </a:rPr>
+                        <a:t>96.64 ± 1.60 %</a:t>
+                      </a:r>
+                    </a:p>
+                  </a:txBody>
+                  <a:tcPr marL="73152" marR="73152" marT="27432" marB="27432" anchor="ctr">
+                    <a:solidFill>
+                      <a:srgbClr val="EAF3F5"/>
+                    </a:solidFill>
+                  </a:tcPr>
+                </a:tc>
+                <a:tc>
+                  <a:txBody>
+                    <a:bodyPr wrap="square"/>
+                    <a:lstStyle/>
+                    <a:p>
+                      <a:pPr algn="ctr"/>
+                      <a:r>
+                        <a:rPr sz="1400" b="1">
+                          <a:solidFill>
+                            <a:srgbClr val="137C8E"/>
+                          </a:solidFill>
+                          <a:latin typeface="Calibri"/>
+                        </a:rPr>
+                        <a:t>98.09 ± 0.18 %</a:t>
+                      </a:r>
+                    </a:p>
+                  </a:txBody>
+                  <a:tcPr marL="73152" marR="73152" marT="27432" marB="27432" anchor="ctr">
+                    <a:solidFill>
+                      <a:srgbClr val="EAF3F5"/>
+                    </a:solidFill>
+                  </a:tcPr>
+                </a:tc>
+                <a:tc>
+                  <a:txBody>
+                    <a:bodyPr wrap="square"/>
+                    <a:lstStyle/>
+                    <a:p>
+                      <a:pPr algn="ctr"/>
+                      <a:r>
+                        <a:rPr sz="1400" b="1">
+                          <a:solidFill>
+                            <a:srgbClr val="137C8E"/>
+                          </a:solidFill>
+                          <a:latin typeface="Calibri"/>
+                        </a:rPr>
+                        <a:t>0.95 ± 0.01</a:t>
+                      </a:r>
+                    </a:p>
+                  </a:txBody>
+                  <a:tcPr marL="73152" marR="73152" marT="27432" marB="27432" anchor="ctr">
+                    <a:solidFill>
+                      <a:srgbClr val="EAF3F5"/>
+                    </a:solidFill>
+                  </a:tcPr>
+                </a:tc>
+              </a:tr>
+            </a:tbl>
+          </a:graphicData>
+        </a:graphic>
+      </p:graphicFrame>
+      <p:sp>
+        <p:nvSpPr>
+          <p:cNvPr id="7" name="Shape 15"/>
+          <p:cNvSpPr/>
+          <p:nvPr/>
+        </p:nvSpPr>
+        <p:spPr>
+          <a:xfrm>
+            <a:off x="548640" y="4846320"/>
+            <a:ext cx="11091672" cy="868680"/>
+          </a:xfrm>
+          <a:prstGeom prst="roundRect">
+            <a:avLst>
+              <a:gd name="adj" fmla="val 10526"/>
+            </a:avLst>
+          </a:prstGeom>
+          <a:solidFill>
+            <a:srgbClr val="0F2E3D"/>
+          </a:solidFill>
+          <a:ln/>
+        </p:spPr>
+        <p:txBody>
+          <a:bodyPr/>
+          <a:p/>
+        </p:txBody>
+      </p:sp>
+      <p:sp>
+        <p:nvSpPr>
+          <p:cNvPr id="8" name="Shape 16"/>
+          <p:cNvSpPr/>
+          <p:nvPr/>
+        </p:nvSpPr>
+        <p:spPr>
+          <a:xfrm>
+            <a:off x="905256" y="4946904"/>
+            <a:ext cx="658368" cy="658368"/>
+          </a:xfrm>
+          <a:prstGeom prst="ellipse">
+            <a:avLst/>
+          </a:prstGeom>
+          <a:solidFill>
+            <a:srgbClr val="D99A00"/>
+          </a:solidFill>
+          <a:ln/>
+        </p:spPr>
+        <p:txBody>
+          <a:bodyPr/>
+          <a:p/>
+        </p:txBody>
+      </p:sp>
+      <p:sp>
+        <p:nvSpPr>
+          <p:cNvPr id="9" name="Text 17"/>
+          <p:cNvSpPr txBox="1"/>
+          <p:nvPr/>
+        </p:nvSpPr>
+        <p:spPr>
+          <a:xfrm>
+            <a:off x="1783080" y="4846320"/>
+            <a:ext cx="9601200" cy="868680"/>
+          </a:xfrm>
+          <a:prstGeom prst="rect">
+            <a:avLst/>
+          </a:prstGeom>
+          <a:noFill/>
+          <a:ln/>
+        </p:spPr>
+        <p:txBody>
+          <a:bodyPr wrap="square" lIns="0" tIns="0" rIns="0" bIns="0" rtlCol="0" anchor="ctr"/>
+          <a:lstStyle/>
+          <a:p>
+            <a:pPr indent="0" marL="0">
+              <a:lnSpc>
+                <a:spcPct val="105000"/>
+              </a:lnSpc>
+              <a:buNone/>
+            </a:pPr>
+            <a:r>
+              <a:rPr lang="en-US" sz="1550" b="1" dirty="0">
+                <a:solidFill>
+                  <a:srgbClr val="2EA79B"/>
+                </a:solidFill>
+                <a:latin typeface="Calibri" pitchFamily="34" charset="0"/>
+                <a:ea typeface="Calibri" pitchFamily="34" charset="-122"/>
+                <a:cs typeface="Calibri" pitchFamily="34" charset="-120"/>
+              </a:rPr>
+              <a:t>Fold 1 is the weakest:  </a:t>
+            </a:r>
+            <a:pPr indent="0" marL="0">
+              <a:lnSpc>
+                <a:spcPct val="105000"/>
+              </a:lnSpc>
+              <a:buNone/>
+            </a:pPr>
+            <a:r>
+              <a:rPr lang="en-US" sz="1550" dirty="0">
+                <a:solidFill>
+                  <a:srgbClr val="E8F2F4"/>
+                </a:solidFill>
+                <a:latin typeface="Calibri" pitchFamily="34" charset="0"/>
+                <a:ea typeface="Calibri" pitchFamily="34" charset="-122"/>
+                <a:cs typeface="Calibri" pitchFamily="34" charset="-120"/>
+              </a:rPr>
+              <a:t>recall 94.84 % (64 missed infected cells) vs. 97.90 % and 97.18 % on the other two folds.</a:t>
+            </a:r>
+            <a:endParaRPr lang="en-US" sz="1550" dirty="0"/>
+          </a:p>
+        </p:txBody>
+      </p:sp>
+      <p:pic>
+        <p:nvPicPr>
+          <p:cNvPr id="10" name="Picture 12" descr="image.png"/>
+          <p:cNvPicPr>
+            <a:picLocks noChangeAspect="1"/>
+          </p:cNvPicPr>
+          <p:nvPr/>
+        </p:nvPicPr>
+        <p:blipFill>
+          <a:blip r:embed="rId2"/>
+          <a:stretch>
+            <a:fillRect/>
+          </a:stretch>
+        </p:blipFill>
+        <p:spPr>
+          <a:xfrm>
+            <a:off x="1092708" y="5134356"/>
+            <a:ext cx="283464" cy="283464"/>
+          </a:xfrm>
+          <a:prstGeom prst="rect">
+            <a:avLst/>
+          </a:prstGeom>
+        </p:spPr>
+      </p:pic>
+      <p:sp>
+        <p:nvSpPr>
+          <p:cNvPr id="11" name="TextBox 10"/>
+          <p:cNvSpPr txBox="1"/>
+          <p:nvPr/>
+        </p:nvSpPr>
+        <p:spPr>
+          <a:xfrm>
+            <a:off x="548640" y="6455664"/>
+            <a:ext cx="7315200" cy="274320"/>
+          </a:xfrm>
+          <a:prstGeom prst="rect">
+            <a:avLst/>
+          </a:prstGeom>
+          <a:noFill/>
+        </p:spPr>
+        <p:txBody>
+          <a:bodyPr wrap="square" lIns="0" rIns="0" tIns="0" bIns="0" anchor="t">
+            <a:spAutoFit/>
+          </a:bodyPr>
+          <a:lstStyle/>
+          <a:p>
+            <a:pPr algn="l"/>
+            <a:r>
+              <a:rPr sz="900" b="0" i="0">
+                <a:solidFill>
+                  <a:srgbClr val="7C8B93"/>
+                </a:solidFill>
+                <a:latin typeface="Calibri"/>
+              </a:rPr>
+              <a:t>Phase 2 · Baseline &amp; Hypothesis · Automated Malaria Cell Detection</a:t>
+            </a:r>
+          </a:p>
+        </p:txBody>
+      </p:sp>
+      <p:sp>
+        <p:nvSpPr>
+          <p:cNvPr id="12" name="TextBox 11"/>
+          <p:cNvSpPr txBox="1"/>
+          <p:nvPr/>
+        </p:nvSpPr>
+        <p:spPr>
+          <a:xfrm>
+            <a:off x="11183112" y="6419088"/>
+            <a:ext cx="457200" cy="274320"/>
+          </a:xfrm>
+          <a:prstGeom prst="rect">
+            <a:avLst/>
+          </a:prstGeom>
+          <a:noFill/>
+        </p:spPr>
+        <p:txBody>
+          <a:bodyPr wrap="square" lIns="0" rIns="0" tIns="0" bIns="0" anchor="t">
+            <a:spAutoFit/>
+          </a:bodyPr>
+          <a:lstStyle/>
+          <a:p>
+            <a:pPr algn="r"/>
+            <a:r>
+              <a:rPr sz="1000" b="0" i="0">
+                <a:solidFill>
+                  <a:srgbClr val="7C8B93"/>
+                </a:solidFill>
+                <a:latin typeface="Calibri"/>
+              </a:rPr>
+              <a:t>21</a:t>
+            </a:r>
           </a:p>
         </p:txBody>
       </p:sp>

--- a/slides/Malaria_Phase2_Baseline_Hypothesis_filled.pptx
+++ b/slides/Malaria_Phase2_Baseline_Hypothesis_filled.pptx
@@ -19961,3025 +19961,6 @@
   <p:cSld>
     <p:spTree>
       <p:nvGrpSpPr>
-        <p:cNvPr id="1" name=""/>
-        <p:cNvGrpSpPr/>
-        <p:nvPr/>
-      </p:nvGrpSpPr>
-      <p:grpSpPr/>
-      <p:sp>
-        <p:nvSpPr>
-          <p:cNvPr id="2" name="Oval 1"/>
-          <p:cNvSpPr/>
-          <p:nvPr/>
-        </p:nvSpPr>
-        <p:spPr>
-          <a:xfrm>
-            <a:off x="11109960" y="320040"/>
-            <a:ext cx="1005840" cy="1005840"/>
-          </a:xfrm>
-          <a:prstGeom prst="ellipse">
-            <a:avLst/>
-          </a:prstGeom>
-          <a:solidFill>
-            <a:srgbClr val="8A43B0"/>
-          </a:solidFill>
-          <a:ln>
-            <a:noFill/>
-          </a:ln>
-          <a:effectLst/>
-        </p:spPr>
-        <p:style>
-          <a:lnRef idx="1">
-            <a:schemeClr val="accent1"/>
-          </a:lnRef>
-          <a:fillRef idx="3">
-            <a:schemeClr val="accent1"/>
-          </a:fillRef>
-          <a:effectRef idx="2">
-            <a:schemeClr val="accent1"/>
-          </a:effectRef>
-          <a:fontRef idx="minor">
-            <a:schemeClr val="lt1"/>
-          </a:fontRef>
-        </p:style>
-        <p:txBody>
-          <a:bodyPr rtlCol="0" anchor="ctr"/>
-          <a:lstStyle/>
-          <a:p/>
-        </p:txBody>
-      </p:sp>
-      <p:sp>
-        <p:nvSpPr>
-          <p:cNvPr id="3" name="Oval 2"/>
-          <p:cNvSpPr/>
-          <p:nvPr/>
-        </p:nvSpPr>
-        <p:spPr>
-          <a:xfrm>
-            <a:off x="11475720" y="6172200"/>
-            <a:ext cx="822960" cy="822960"/>
-          </a:xfrm>
-          <a:prstGeom prst="ellipse">
-            <a:avLst/>
-          </a:prstGeom>
-          <a:solidFill>
-            <a:srgbClr val="137C8E"/>
-          </a:solidFill>
-          <a:ln>
-            <a:noFill/>
-          </a:ln>
-          <a:effectLst/>
-        </p:spPr>
-        <p:style>
-          <a:lnRef idx="1">
-            <a:schemeClr val="accent1"/>
-          </a:lnRef>
-          <a:fillRef idx="3">
-            <a:schemeClr val="accent1"/>
-          </a:fillRef>
-          <a:effectRef idx="2">
-            <a:schemeClr val="accent1"/>
-          </a:effectRef>
-          <a:fontRef idx="minor">
-            <a:schemeClr val="lt1"/>
-          </a:fontRef>
-        </p:style>
-        <p:txBody>
-          <a:bodyPr rtlCol="0" anchor="ctr"/>
-          <a:lstStyle/>
-          <a:p/>
-        </p:txBody>
-      </p:sp>
-      <p:sp>
-        <p:nvSpPr>
-          <p:cNvPr id="4" name="Rounded Rectangle 3"/>
-          <p:cNvSpPr/>
-          <p:nvPr/>
-        </p:nvSpPr>
-        <p:spPr>
-          <a:xfrm>
-            <a:off x="640080" y="502920"/>
-            <a:ext cx="2377440" cy="402336"/>
-          </a:xfrm>
-          <a:prstGeom prst="roundRect">
-            <a:avLst>
-              <a:gd name="adj" fmla="val 50000"/>
-            </a:avLst>
-          </a:prstGeom>
-          <a:solidFill>
-            <a:srgbClr val="D99A00"/>
-          </a:solidFill>
-          <a:ln>
-            <a:noFill/>
-          </a:ln>
-          <a:effectLst/>
-        </p:spPr>
-        <p:style>
-          <a:lnRef idx="1">
-            <a:schemeClr val="accent1"/>
-          </a:lnRef>
-          <a:fillRef idx="3">
-            <a:schemeClr val="accent1"/>
-          </a:fillRef>
-          <a:effectRef idx="2">
-            <a:schemeClr val="accent1"/>
-          </a:effectRef>
-          <a:fontRef idx="minor">
-            <a:schemeClr val="lt1"/>
-          </a:fontRef>
-        </p:style>
-        <p:txBody>
-          <a:bodyPr rtlCol="0" anchor="ctr"/>
-          <a:lstStyle/>
-          <a:p/>
-        </p:txBody>
-      </p:sp>
-      <p:sp>
-        <p:nvSpPr>
-          <p:cNvPr id="5" name="TextBox 4"/>
-          <p:cNvSpPr txBox="1"/>
-          <p:nvPr/>
-        </p:nvSpPr>
-        <p:spPr>
-          <a:xfrm>
-            <a:off x="640080" y="502920"/>
-            <a:ext cx="2377440" cy="402336"/>
-          </a:xfrm>
-          <a:prstGeom prst="rect">
-            <a:avLst/>
-          </a:prstGeom>
-          <a:noFill/>
-        </p:spPr>
-        <p:txBody>
-          <a:bodyPr wrap="square" lIns="0" rIns="0" tIns="0" bIns="0" anchor="ctr">
-            <a:spAutoFit/>
-          </a:bodyPr>
-          <a:lstStyle/>
-          <a:p>
-            <a:pPr algn="ctr"/>
-            <a:r>
-              <a:rPr sz="1250" b="1" i="0">
-                <a:solidFill>
-                  <a:srgbClr val="3A2A00"/>
-                </a:solidFill>
-                <a:latin typeface="Calibri"/>
-              </a:rPr>
-              <a:t>★ OUR HYPOTHESIS</a:t>
-            </a:r>
-          </a:p>
-        </p:txBody>
-      </p:sp>
-      <p:sp>
-        <p:nvSpPr>
-          <p:cNvPr id="6" name="TextBox 5"/>
-          <p:cNvSpPr txBox="1"/>
-          <p:nvPr/>
-        </p:nvSpPr>
-        <p:spPr>
-          <a:xfrm>
-            <a:off x="640080" y="1024128"/>
-            <a:ext cx="10972800" cy="640080"/>
-          </a:xfrm>
-          <a:prstGeom prst="rect">
-            <a:avLst/>
-          </a:prstGeom>
-          <a:noFill/>
-        </p:spPr>
-        <p:txBody>
-          <a:bodyPr wrap="square" lIns="0" rIns="0" tIns="0" bIns="0" anchor="t">
-            <a:spAutoFit/>
-          </a:bodyPr>
-          <a:lstStyle/>
-          <a:p>
-            <a:pPr algn="l"/>
-            <a:r>
-              <a:rPr sz="3000" b="1" i="0">
-                <a:solidFill>
-                  <a:srgbClr val="FFFFFF"/>
-                </a:solidFill>
-                <a:latin typeface="Cambria"/>
-              </a:rPr>
-              <a:t>Two proposed changes, one variable at a time</a:t>
-            </a:r>
-          </a:p>
-        </p:txBody>
-      </p:sp>
-      <p:sp>
-        <p:nvSpPr>
-          <p:cNvPr id="7" name="Rounded Rectangle 6"/>
-          <p:cNvSpPr/>
-          <p:nvPr/>
-        </p:nvSpPr>
-        <p:spPr>
-          <a:xfrm>
-            <a:off x="640080" y="1828800"/>
-            <a:ext cx="5468112" cy="3931920"/>
-          </a:xfrm>
-          <a:prstGeom prst="roundRect">
-            <a:avLst>
-              <a:gd name="adj" fmla="val 6000"/>
-            </a:avLst>
-          </a:prstGeom>
-          <a:solidFill>
-            <a:srgbClr val="15455A"/>
-          </a:solidFill>
-          <a:ln w="12700">
-            <a:solidFill>
-              <a:srgbClr val="0E6274"/>
-            </a:solidFill>
-          </a:ln>
-          <a:effectLst/>
-        </p:spPr>
-        <p:style>
-          <a:lnRef idx="1">
-            <a:schemeClr val="accent1"/>
-          </a:lnRef>
-          <a:fillRef idx="3">
-            <a:schemeClr val="accent1"/>
-          </a:fillRef>
-          <a:effectRef idx="2">
-            <a:schemeClr val="accent1"/>
-          </a:effectRef>
-          <a:fontRef idx="minor">
-            <a:schemeClr val="lt1"/>
-          </a:fontRef>
-        </p:style>
-        <p:txBody>
-          <a:bodyPr rtlCol="0" anchor="ctr"/>
-          <a:lstStyle/>
-          <a:p/>
-        </p:txBody>
-      </p:sp>
-      <p:sp>
-        <p:nvSpPr>
-          <p:cNvPr id="8" name="Oval 7"/>
-          <p:cNvSpPr/>
-          <p:nvPr/>
-        </p:nvSpPr>
-        <p:spPr>
-          <a:xfrm>
-            <a:off x="914400" y="2057400"/>
-            <a:ext cx="731520" cy="731520"/>
-          </a:xfrm>
-          <a:prstGeom prst="ellipse">
-            <a:avLst/>
-          </a:prstGeom>
-          <a:solidFill>
-            <a:srgbClr val="CC4A3F"/>
-          </a:solidFill>
-          <a:ln>
-            <a:noFill/>
-          </a:ln>
-          <a:effectLst/>
-        </p:spPr>
-        <p:style>
-          <a:lnRef idx="1">
-            <a:schemeClr val="accent1"/>
-          </a:lnRef>
-          <a:fillRef idx="3">
-            <a:schemeClr val="accent1"/>
-          </a:fillRef>
-          <a:effectRef idx="2">
-            <a:schemeClr val="accent1"/>
-          </a:effectRef>
-          <a:fontRef idx="minor">
-            <a:schemeClr val="lt1"/>
-          </a:fontRef>
-        </p:style>
-        <p:txBody>
-          <a:bodyPr rtlCol="0" anchor="ctr"/>
-          <a:lstStyle/>
-          <a:p/>
-        </p:txBody>
-      </p:sp>
-      <p:pic>
-        <p:nvPicPr>
-          <p:cNvPr id="9" name="Picture 8" descr="image.png"/>
-          <p:cNvPicPr>
-            <a:picLocks noChangeAspect="1"/>
-          </p:cNvPicPr>
-          <p:nvPr/>
-        </p:nvPicPr>
-        <p:blipFill>
-          <a:blip r:embed="rId2"/>
-          <a:stretch>
-            <a:fillRect/>
-          </a:stretch>
-        </p:blipFill>
-        <p:spPr>
-          <a:xfrm>
-            <a:off x="1097280" y="2240280"/>
-            <a:ext cx="365760" cy="365760"/>
-          </a:xfrm>
-          <a:prstGeom prst="rect">
-            <a:avLst/>
-          </a:prstGeom>
-        </p:spPr>
-      </p:pic>
-      <p:sp>
-        <p:nvSpPr>
-          <p:cNvPr id="10" name="TextBox 9"/>
-          <p:cNvSpPr txBox="1"/>
-          <p:nvPr/>
-        </p:nvSpPr>
-        <p:spPr>
-          <a:xfrm>
-            <a:off x="1828800" y="2048256"/>
-            <a:ext cx="4069080" cy="274320"/>
-          </a:xfrm>
-          <a:prstGeom prst="rect">
-            <a:avLst/>
-          </a:prstGeom>
-          <a:noFill/>
-        </p:spPr>
-        <p:txBody>
-          <a:bodyPr wrap="square" lIns="0" rIns="0" tIns="0" bIns="0" anchor="t">
-            <a:spAutoFit/>
-          </a:bodyPr>
-          <a:lstStyle/>
-          <a:p>
-            <a:pPr algn="l"/>
-            <a:r>
-              <a:rPr sz="1100" b="1" i="0">
-                <a:solidFill>
-                  <a:srgbClr val="9FC0C9"/>
-                </a:solidFill>
-                <a:latin typeface="Calibri"/>
-              </a:rPr>
-              <a:t>H1 · VALIDATION</a:t>
-            </a:r>
-          </a:p>
-        </p:txBody>
-      </p:sp>
-      <p:sp>
-        <p:nvSpPr>
-          <p:cNvPr id="11" name="TextBox 10"/>
-          <p:cNvSpPr txBox="1"/>
-          <p:nvPr/>
-        </p:nvSpPr>
-        <p:spPr>
-          <a:xfrm>
-            <a:off x="1828800" y="2304288"/>
-            <a:ext cx="4114800" cy="502920"/>
-          </a:xfrm>
-          <a:prstGeom prst="rect">
-            <a:avLst/>
-          </a:prstGeom>
-          <a:noFill/>
-        </p:spPr>
-        <p:txBody>
-          <a:bodyPr wrap="square" lIns="0" rIns="0" tIns="0" bIns="0" anchor="t">
-            <a:spAutoFit/>
-          </a:bodyPr>
-          <a:lstStyle/>
-          <a:p>
-            <a:pPr algn="l"/>
-            <a:r>
-              <a:rPr sz="1650" b="1" i="0">
-                <a:solidFill>
-                  <a:srgbClr val="FFFFFF"/>
-                </a:solidFill>
-                <a:latin typeface="Cambria"/>
-              </a:rPr>
-              <a:t>Leakage-free, slide-grouped split</a:t>
-            </a:r>
-          </a:p>
-        </p:txBody>
-      </p:sp>
-      <p:sp>
-        <p:nvSpPr>
-          <p:cNvPr id="12" name="TextBox 11"/>
-          <p:cNvSpPr txBox="1"/>
-          <p:nvPr/>
-        </p:nvSpPr>
-        <p:spPr>
-          <a:xfrm>
-            <a:off x="932688" y="3017520"/>
-            <a:ext cx="1188720" cy="274320"/>
-          </a:xfrm>
-          <a:prstGeom prst="rect">
-            <a:avLst/>
-          </a:prstGeom>
-          <a:noFill/>
-        </p:spPr>
-        <p:txBody>
-          <a:bodyPr wrap="square" lIns="0" rIns="0" tIns="0" bIns="0" anchor="t">
-            <a:spAutoFit/>
-          </a:bodyPr>
-          <a:lstStyle/>
-          <a:p>
-            <a:pPr algn="l"/>
-            <a:r>
-              <a:rPr sz="1050" b="1" i="0">
-                <a:solidFill>
-                  <a:srgbClr val="9FC0C9"/>
-                </a:solidFill>
-                <a:latin typeface="Calibri"/>
-              </a:rPr>
-              <a:t>CHANGE</a:t>
-            </a:r>
-          </a:p>
-        </p:txBody>
-      </p:sp>
-      <p:sp>
-        <p:nvSpPr>
-          <p:cNvPr id="13" name="TextBox 12"/>
-          <p:cNvSpPr txBox="1"/>
-          <p:nvPr/>
-        </p:nvSpPr>
-        <p:spPr>
-          <a:xfrm>
-            <a:off x="2057400" y="2990088"/>
-            <a:ext cx="3840480" cy="868680"/>
-          </a:xfrm>
-          <a:prstGeom prst="rect">
-            <a:avLst/>
-          </a:prstGeom>
-          <a:noFill/>
-        </p:spPr>
-        <p:txBody>
-          <a:bodyPr wrap="square" lIns="0" rIns="0" tIns="0" bIns="0" anchor="t">
-            <a:spAutoFit/>
-          </a:bodyPr>
-          <a:lstStyle/>
-          <a:p>
-            <a:pPr algn="l"/>
-            <a:r>
-              <a:rPr sz="1200" b="0" i="0">
-                <a:solidFill>
-                  <a:srgbClr val="D5E6EA"/>
-                </a:solidFill>
-                <a:latin typeface="Calibri"/>
-              </a:rPr>
-              <a:t>Split by slide/patient (StratifiedGroupKFold) instead of random images. Model unchanged.</a:t>
-            </a:r>
-          </a:p>
-        </p:txBody>
-      </p:sp>
-      <p:sp>
-        <p:nvSpPr>
-          <p:cNvPr id="14" name="TextBox 13"/>
-          <p:cNvSpPr txBox="1"/>
-          <p:nvPr/>
-        </p:nvSpPr>
-        <p:spPr>
-          <a:xfrm>
-            <a:off x="932688" y="3913631"/>
-            <a:ext cx="1188720" cy="274320"/>
-          </a:xfrm>
-          <a:prstGeom prst="rect">
-            <a:avLst/>
-          </a:prstGeom>
-          <a:noFill/>
-        </p:spPr>
-        <p:txBody>
-          <a:bodyPr wrap="square" lIns="0" rIns="0" tIns="0" bIns="0" anchor="t">
-            <a:spAutoFit/>
-          </a:bodyPr>
-          <a:lstStyle/>
-          <a:p>
-            <a:pPr algn="l"/>
-            <a:r>
-              <a:rPr sz="1050" b="1" i="0">
-                <a:solidFill>
-                  <a:srgbClr val="D99A00"/>
-                </a:solidFill>
-                <a:latin typeface="Calibri"/>
-              </a:rPr>
-              <a:t>WE EXPECT</a:t>
-            </a:r>
-          </a:p>
-        </p:txBody>
-      </p:sp>
-      <p:sp>
-        <p:nvSpPr>
-          <p:cNvPr id="15" name="TextBox 14"/>
-          <p:cNvSpPr txBox="1"/>
-          <p:nvPr/>
-        </p:nvSpPr>
-        <p:spPr>
-          <a:xfrm>
-            <a:off x="2057400" y="3886199"/>
-            <a:ext cx="3840480" cy="868680"/>
-          </a:xfrm>
-          <a:prstGeom prst="rect">
-            <a:avLst/>
-          </a:prstGeom>
-          <a:noFill/>
-        </p:spPr>
-        <p:txBody>
-          <a:bodyPr wrap="square" lIns="0" rIns="0" tIns="0" bIns="0" anchor="t">
-            <a:spAutoFit/>
-          </a:bodyPr>
-          <a:lstStyle/>
-          <a:p>
-            <a:pPr algn="l"/>
-            <a:r>
-              <a:rPr sz="1200" b="1" i="0">
-                <a:solidFill>
-                  <a:srgbClr val="FFFFFF"/>
-                </a:solidFill>
-                <a:latin typeface="Calibri"/>
-              </a:rPr>
-              <a:t>Accuracy and MCC fall below the image-split baseline, and fold-to-fold spread widens.</a:t>
-            </a:r>
-          </a:p>
-        </p:txBody>
-      </p:sp>
-      <p:sp>
-        <p:nvSpPr>
-          <p:cNvPr id="16" name="TextBox 15"/>
-          <p:cNvSpPr txBox="1"/>
-          <p:nvPr/>
-        </p:nvSpPr>
-        <p:spPr>
-          <a:xfrm>
-            <a:off x="932688" y="4809744"/>
-            <a:ext cx="1188720" cy="274320"/>
-          </a:xfrm>
-          <a:prstGeom prst="rect">
-            <a:avLst/>
-          </a:prstGeom>
-          <a:noFill/>
-        </p:spPr>
-        <p:txBody>
-          <a:bodyPr wrap="square" lIns="0" rIns="0" tIns="0" bIns="0" anchor="t">
-            <a:spAutoFit/>
-          </a:bodyPr>
-          <a:lstStyle/>
-          <a:p>
-            <a:pPr algn="l"/>
-            <a:r>
-              <a:rPr sz="1050" b="1" i="0">
-                <a:solidFill>
-                  <a:srgbClr val="9FC0C9"/>
-                </a:solidFill>
-                <a:latin typeface="Calibri"/>
-              </a:rPr>
-              <a:t>BECAUSE</a:t>
-            </a:r>
-          </a:p>
-        </p:txBody>
-      </p:sp>
-      <p:sp>
-        <p:nvSpPr>
-          <p:cNvPr id="17" name="TextBox 16"/>
-          <p:cNvSpPr txBox="1"/>
-          <p:nvPr/>
-        </p:nvSpPr>
-        <p:spPr>
-          <a:xfrm>
-            <a:off x="2057400" y="4782312"/>
-            <a:ext cx="3840480" cy="868680"/>
-          </a:xfrm>
-          <a:prstGeom prst="rect">
-            <a:avLst/>
-          </a:prstGeom>
-          <a:noFill/>
-        </p:spPr>
-        <p:txBody>
-          <a:bodyPr wrap="square" lIns="0" rIns="0" tIns="0" bIns="0" anchor="t">
-            <a:spAutoFit/>
-          </a:bodyPr>
-          <a:lstStyle/>
-          <a:p>
-            <a:pPr algn="l"/>
-            <a:r>
-              <a:rPr sz="1200" b="0" i="0">
-                <a:solidFill>
-                  <a:srgbClr val="D5E6EA"/>
-                </a:solidFill>
-                <a:latin typeface="Calibri"/>
-              </a:rPr>
-              <a:t>Cells from one slide share stain, lighting and the patient's cell shape. A random split lets the model recognise the slide rather than the parasite.</a:t>
-            </a:r>
-          </a:p>
-        </p:txBody>
-      </p:sp>
-      <p:sp>
-        <p:nvSpPr>
-          <p:cNvPr id="18" name="Rounded Rectangle 17"/>
-          <p:cNvSpPr/>
-          <p:nvPr/>
-        </p:nvSpPr>
-        <p:spPr>
-          <a:xfrm>
-            <a:off x="6345936" y="1828800"/>
-            <a:ext cx="5468112" cy="3931920"/>
-          </a:xfrm>
-          <a:prstGeom prst="roundRect">
-            <a:avLst>
-              <a:gd name="adj" fmla="val 6000"/>
-            </a:avLst>
-          </a:prstGeom>
-          <a:solidFill>
-            <a:srgbClr val="15455A"/>
-          </a:solidFill>
-          <a:ln w="12700">
-            <a:solidFill>
-              <a:srgbClr val="0E6274"/>
-            </a:solidFill>
-          </a:ln>
-          <a:effectLst/>
-        </p:spPr>
-        <p:style>
-          <a:lnRef idx="1">
-            <a:schemeClr val="accent1"/>
-          </a:lnRef>
-          <a:fillRef idx="3">
-            <a:schemeClr val="accent1"/>
-          </a:fillRef>
-          <a:effectRef idx="2">
-            <a:schemeClr val="accent1"/>
-          </a:effectRef>
-          <a:fontRef idx="minor">
-            <a:schemeClr val="lt1"/>
-          </a:fontRef>
-        </p:style>
-        <p:txBody>
-          <a:bodyPr rtlCol="0" anchor="ctr"/>
-          <a:lstStyle/>
-          <a:p/>
-        </p:txBody>
-      </p:sp>
-      <p:sp>
-        <p:nvSpPr>
-          <p:cNvPr id="19" name="Oval 18"/>
-          <p:cNvSpPr/>
-          <p:nvPr/>
-        </p:nvSpPr>
-        <p:spPr>
-          <a:xfrm>
-            <a:off x="6620256" y="2057400"/>
-            <a:ext cx="731520" cy="731520"/>
-          </a:xfrm>
-          <a:prstGeom prst="ellipse">
-            <a:avLst/>
-          </a:prstGeom>
-          <a:solidFill>
-            <a:srgbClr val="2EA79B"/>
-          </a:solidFill>
-          <a:ln>
-            <a:noFill/>
-          </a:ln>
-          <a:effectLst/>
-        </p:spPr>
-        <p:style>
-          <a:lnRef idx="1">
-            <a:schemeClr val="accent1"/>
-          </a:lnRef>
-          <a:fillRef idx="3">
-            <a:schemeClr val="accent1"/>
-          </a:fillRef>
-          <a:effectRef idx="2">
-            <a:schemeClr val="accent1"/>
-          </a:effectRef>
-          <a:fontRef idx="minor">
-            <a:schemeClr val="lt1"/>
-          </a:fontRef>
-        </p:style>
-        <p:txBody>
-          <a:bodyPr rtlCol="0" anchor="ctr"/>
-          <a:lstStyle/>
-          <a:p/>
-        </p:txBody>
-      </p:sp>
-      <p:pic>
-        <p:nvPicPr>
-          <p:cNvPr id="20" name="Picture 19" descr="image.png"/>
-          <p:cNvPicPr>
-            <a:picLocks noChangeAspect="1"/>
-          </p:cNvPicPr>
-          <p:nvPr/>
-        </p:nvPicPr>
-        <p:blipFill>
-          <a:blip r:embed="rId3"/>
-          <a:stretch>
-            <a:fillRect/>
-          </a:stretch>
-        </p:blipFill>
-        <p:spPr>
-          <a:xfrm>
-            <a:off x="6803136" y="2240280"/>
-            <a:ext cx="365760" cy="365760"/>
-          </a:xfrm>
-          <a:prstGeom prst="rect">
-            <a:avLst/>
-          </a:prstGeom>
-        </p:spPr>
-      </p:pic>
-      <p:sp>
-        <p:nvSpPr>
-          <p:cNvPr id="21" name="TextBox 20"/>
-          <p:cNvSpPr txBox="1"/>
-          <p:nvPr/>
-        </p:nvSpPr>
-        <p:spPr>
-          <a:xfrm>
-            <a:off x="7534656" y="2048256"/>
-            <a:ext cx="4069080" cy="274320"/>
-          </a:xfrm>
-          <a:prstGeom prst="rect">
-            <a:avLst/>
-          </a:prstGeom>
-          <a:noFill/>
-        </p:spPr>
-        <p:txBody>
-          <a:bodyPr wrap="square" lIns="0" rIns="0" tIns="0" bIns="0" anchor="t">
-            <a:spAutoFit/>
-          </a:bodyPr>
-          <a:lstStyle/>
-          <a:p>
-            <a:pPr algn="l"/>
-            <a:r>
-              <a:rPr sz="1100" b="1" i="0">
-                <a:solidFill>
-                  <a:srgbClr val="9FC0C9"/>
-                </a:solidFill>
-                <a:latin typeface="Calibri"/>
-              </a:rPr>
-              <a:t>H2 · PREPROCESSING</a:t>
-            </a:r>
-          </a:p>
-        </p:txBody>
-      </p:sp>
-      <p:sp>
-        <p:nvSpPr>
-          <p:cNvPr id="22" name="TextBox 21"/>
-          <p:cNvSpPr txBox="1"/>
-          <p:nvPr/>
-        </p:nvSpPr>
-        <p:spPr>
-          <a:xfrm>
-            <a:off x="7534656" y="2304288"/>
-            <a:ext cx="4114800" cy="502920"/>
-          </a:xfrm>
-          <a:prstGeom prst="rect">
-            <a:avLst/>
-          </a:prstGeom>
-          <a:noFill/>
-        </p:spPr>
-        <p:txBody>
-          <a:bodyPr wrap="square" lIns="0" rIns="0" tIns="0" bIns="0" anchor="t">
-            <a:spAutoFit/>
-          </a:bodyPr>
-          <a:lstStyle/>
-          <a:p>
-            <a:pPr algn="l"/>
-            <a:r>
-              <a:rPr sz="1650" b="1" i="0">
-                <a:solidFill>
-                  <a:srgbClr val="FFFFFF"/>
-                </a:solidFill>
-                <a:latin typeface="Cambria"/>
-              </a:rPr>
-              <a:t>YUV stain normalisation (Umer [4])</a:t>
-            </a:r>
-          </a:p>
-        </p:txBody>
-      </p:sp>
-      <p:sp>
-        <p:nvSpPr>
-          <p:cNvPr id="23" name="TextBox 22"/>
-          <p:cNvSpPr txBox="1"/>
-          <p:nvPr/>
-        </p:nvSpPr>
-        <p:spPr>
-          <a:xfrm>
-            <a:off x="6638544" y="3017520"/>
-            <a:ext cx="1188720" cy="274320"/>
-          </a:xfrm>
-          <a:prstGeom prst="rect">
-            <a:avLst/>
-          </a:prstGeom>
-          <a:noFill/>
-        </p:spPr>
-        <p:txBody>
-          <a:bodyPr wrap="square" lIns="0" rIns="0" tIns="0" bIns="0" anchor="t">
-            <a:spAutoFit/>
-          </a:bodyPr>
-          <a:lstStyle/>
-          <a:p>
-            <a:pPr algn="l"/>
-            <a:r>
-              <a:rPr sz="1050" b="1" i="0">
-                <a:solidFill>
-                  <a:srgbClr val="9FC0C9"/>
-                </a:solidFill>
-                <a:latin typeface="Calibri"/>
-              </a:rPr>
-              <a:t>CHANGE</a:t>
-            </a:r>
-          </a:p>
-        </p:txBody>
-      </p:sp>
-      <p:sp>
-        <p:nvSpPr>
-          <p:cNvPr id="24" name="TextBox 23"/>
-          <p:cNvSpPr txBox="1"/>
-          <p:nvPr/>
-        </p:nvSpPr>
-        <p:spPr>
-          <a:xfrm>
-            <a:off x="7763256" y="2990088"/>
-            <a:ext cx="3840480" cy="868680"/>
-          </a:xfrm>
-          <a:prstGeom prst="rect">
-            <a:avLst/>
-          </a:prstGeom>
-          <a:noFill/>
-        </p:spPr>
-        <p:txBody>
-          <a:bodyPr wrap="square" lIns="0" rIns="0" tIns="0" bIns="0" anchor="t">
-            <a:spAutoFit/>
-          </a:bodyPr>
-          <a:lstStyle/>
-          <a:p>
-            <a:pPr algn="l"/>
-            <a:r>
-              <a:rPr sz="1200" b="0" i="0">
-                <a:solidFill>
-                  <a:srgbClr val="D5E6EA"/>
-                </a:solidFill>
-                <a:latin typeface="Calibri"/>
-              </a:rPr>
-              <a:t>Add RGB → YUV → histogram-equalise Y → RGB before EfficientNet-B0. Grouped split kept fixed.</a:t>
-            </a:r>
-          </a:p>
-        </p:txBody>
-      </p:sp>
-      <p:sp>
-        <p:nvSpPr>
-          <p:cNvPr id="25" name="TextBox 24"/>
-          <p:cNvSpPr txBox="1"/>
-          <p:nvPr/>
-        </p:nvSpPr>
-        <p:spPr>
-          <a:xfrm>
-            <a:off x="6638544" y="3913631"/>
-            <a:ext cx="1188720" cy="274320"/>
-          </a:xfrm>
-          <a:prstGeom prst="rect">
-            <a:avLst/>
-          </a:prstGeom>
-          <a:noFill/>
-        </p:spPr>
-        <p:txBody>
-          <a:bodyPr wrap="square" lIns="0" rIns="0" tIns="0" bIns="0" anchor="t">
-            <a:spAutoFit/>
-          </a:bodyPr>
-          <a:lstStyle/>
-          <a:p>
-            <a:pPr algn="l"/>
-            <a:r>
-              <a:rPr sz="1050" b="1" i="0">
-                <a:solidFill>
-                  <a:srgbClr val="D99A00"/>
-                </a:solidFill>
-                <a:latin typeface="Calibri"/>
-              </a:rPr>
-              <a:t>WE EXPECT</a:t>
-            </a:r>
-          </a:p>
-        </p:txBody>
-      </p:sp>
-      <p:sp>
-        <p:nvSpPr>
-          <p:cNvPr id="26" name="TextBox 25"/>
-          <p:cNvSpPr txBox="1"/>
-          <p:nvPr/>
-        </p:nvSpPr>
-        <p:spPr>
-          <a:xfrm>
-            <a:off x="7763256" y="3886199"/>
-            <a:ext cx="3840480" cy="868680"/>
-          </a:xfrm>
-          <a:prstGeom prst="rect">
-            <a:avLst/>
-          </a:prstGeom>
-          <a:noFill/>
-        </p:spPr>
-        <p:txBody>
-          <a:bodyPr wrap="square" lIns="0" rIns="0" tIns="0" bIns="0" anchor="t">
-            <a:spAutoFit/>
-          </a:bodyPr>
-          <a:lstStyle/>
-          <a:p>
-            <a:pPr algn="l"/>
-            <a:r>
-              <a:rPr sz="1200" b="1" i="0">
-                <a:solidFill>
-                  <a:srgbClr val="FFFFFF"/>
-                </a:solidFill>
-                <a:latin typeface="Calibri"/>
-              </a:rPr>
-              <a:t>Higher recall and MCC than the H1 model on unseen slides; little change on the random split.</a:t>
-            </a:r>
-          </a:p>
-        </p:txBody>
-      </p:sp>
-      <p:sp>
-        <p:nvSpPr>
-          <p:cNvPr id="27" name="TextBox 26"/>
-          <p:cNvSpPr txBox="1"/>
-          <p:nvPr/>
-        </p:nvSpPr>
-        <p:spPr>
-          <a:xfrm>
-            <a:off x="6638544" y="4809744"/>
-            <a:ext cx="1188720" cy="274320"/>
-          </a:xfrm>
-          <a:prstGeom prst="rect">
-            <a:avLst/>
-          </a:prstGeom>
-          <a:noFill/>
-        </p:spPr>
-        <p:txBody>
-          <a:bodyPr wrap="square" lIns="0" rIns="0" tIns="0" bIns="0" anchor="t">
-            <a:spAutoFit/>
-          </a:bodyPr>
-          <a:lstStyle/>
-          <a:p>
-            <a:pPr algn="l"/>
-            <a:r>
-              <a:rPr sz="1050" b="1" i="0">
-                <a:solidFill>
-                  <a:srgbClr val="9FC0C9"/>
-                </a:solidFill>
-                <a:latin typeface="Calibri"/>
-              </a:rPr>
-              <a:t>BECAUSE</a:t>
-            </a:r>
-          </a:p>
-        </p:txBody>
-      </p:sp>
-      <p:sp>
-        <p:nvSpPr>
-          <p:cNvPr id="28" name="TextBox 27"/>
-          <p:cNvSpPr txBox="1"/>
-          <p:nvPr/>
-        </p:nvSpPr>
-        <p:spPr>
-          <a:xfrm>
-            <a:off x="7763256" y="4782312"/>
-            <a:ext cx="3840480" cy="868680"/>
-          </a:xfrm>
-          <a:prstGeom prst="rect">
-            <a:avLst/>
-          </a:prstGeom>
-          <a:noFill/>
-        </p:spPr>
-        <p:txBody>
-          <a:bodyPr wrap="square" lIns="0" rIns="0" tIns="0" bIns="0" anchor="t">
-            <a:spAutoFit/>
-          </a:bodyPr>
-          <a:lstStyle/>
-          <a:p>
-            <a:pPr algn="l"/>
-            <a:r>
-              <a:rPr sz="1200" b="0" i="0">
-                <a:solidFill>
-                  <a:srgbClr val="D5E6EA"/>
-                </a:solidFill>
-                <a:latin typeface="Calibri"/>
-              </a:rPr>
-              <a:t>Equalising brightness strips slide-specific colour cues, so the network has to rely on parasite morphology. That's the signal that carries across labs.</a:t>
-            </a:r>
-          </a:p>
-        </p:txBody>
-      </p:sp>
-      <p:sp>
-        <p:nvSpPr>
-          <p:cNvPr id="29" name="TextBox 28"/>
-          <p:cNvSpPr txBox="1"/>
-          <p:nvPr/>
-        </p:nvSpPr>
-        <p:spPr>
-          <a:xfrm>
-            <a:off x="640080" y="5925312"/>
-            <a:ext cx="10607040" cy="411480"/>
-          </a:xfrm>
-          <a:prstGeom prst="rect">
-            <a:avLst/>
-          </a:prstGeom>
-          <a:noFill/>
-        </p:spPr>
-        <p:txBody>
-          <a:bodyPr wrap="square" lIns="0" rIns="0" tIns="0" bIns="0" anchor="t">
-            <a:spAutoFit/>
-          </a:bodyPr>
-          <a:lstStyle/>
-          <a:p>
-            <a:pPr algn="l"/>
-            <a:r>
-              <a:rPr sz="1250" b="1" i="0">
-                <a:solidFill>
-                  <a:srgbClr val="D99A00"/>
-                </a:solidFill>
-                <a:latin typeface="Calibri"/>
-              </a:rPr>
-              <a:t>Falsifiable:  </a:t>
-            </a:r>
-            <a:r>
-              <a:rPr sz="1250" b="0" i="0">
-                <a:solidFill>
-                  <a:srgbClr val="CFE3E8"/>
-                </a:solidFill>
-                <a:latin typeface="Calibri"/>
-              </a:rPr>
-              <a:t>if H2's gain over H1 is smaller than the fold-to-fold standard deviation, we reject H2. If grouped and random splits score the same, H1 is rejected and leakage is not a real issue on this dataset.</a:t>
-            </a:r>
-          </a:p>
-        </p:txBody>
-      </p:sp>
-    </p:spTree>
-  </p:cSld>
-  <p:clrMapOvr>
-    <a:masterClrMapping/>
-  </p:clrMapOvr>
-</p:sld>
-</file>
-
-<file path=ppt/slides/slide22.xml><?xml version="1.0" encoding="utf-8"?>
-<p:sld xmlns:a="http://schemas.openxmlformats.org/drawingml/2006/main" xmlns:p="http://schemas.openxmlformats.org/presentationml/2006/main" xmlns:r="http://schemas.openxmlformats.org/officeDocument/2006/relationships">
-  <p:cSld>
-    <p:spTree>
-      <p:nvGrpSpPr>
-        <p:cNvPr id="1" name=""/>
-        <p:cNvGrpSpPr/>
-        <p:nvPr/>
-      </p:nvGrpSpPr>
-      <p:grpSpPr/>
-      <p:sp>
-        <p:nvSpPr>
-          <p:cNvPr id="2" name="TextBox 1"/>
-          <p:cNvSpPr txBox="1"/>
-          <p:nvPr/>
-        </p:nvSpPr>
-        <p:spPr>
-          <a:xfrm>
-            <a:off x="548640" y="457200"/>
-            <a:ext cx="11064240" cy="274320"/>
-          </a:xfrm>
-          <a:prstGeom prst="rect">
-            <a:avLst/>
-          </a:prstGeom>
-          <a:noFill/>
-        </p:spPr>
-        <p:txBody>
-          <a:bodyPr wrap="square" lIns="0" rIns="0" tIns="0" bIns="0" anchor="t">
-            <a:spAutoFit/>
-          </a:bodyPr>
-          <a:lstStyle/>
-          <a:p>
-            <a:pPr algn="l"/>
-            <a:r>
-              <a:rPr sz="1250" b="1" i="0">
-                <a:solidFill>
-                  <a:srgbClr val="137C8E"/>
-                </a:solidFill>
-                <a:latin typeface="Calibri"/>
-              </a:rPr>
-              <a:t>HOW WE WILL TEST IT</a:t>
-            </a:r>
-          </a:p>
-        </p:txBody>
-      </p:sp>
-      <p:sp>
-        <p:nvSpPr>
-          <p:cNvPr id="3" name="TextBox 2"/>
-          <p:cNvSpPr txBox="1"/>
-          <p:nvPr/>
-        </p:nvSpPr>
-        <p:spPr>
-          <a:xfrm>
-            <a:off x="548640" y="749808"/>
-            <a:ext cx="11064240" cy="658368"/>
-          </a:xfrm>
-          <a:prstGeom prst="rect">
-            <a:avLst/>
-          </a:prstGeom>
-          <a:noFill/>
-        </p:spPr>
-        <p:txBody>
-          <a:bodyPr wrap="square" lIns="0" rIns="0" tIns="0" bIns="0" anchor="t">
-            <a:spAutoFit/>
-          </a:bodyPr>
-          <a:lstStyle/>
-          <a:p>
-            <a:pPr algn="l"/>
-            <a:r>
-              <a:rPr sz="3000" b="1" i="0">
-                <a:solidFill>
-                  <a:srgbClr val="17262E"/>
-                </a:solidFill>
-                <a:latin typeface="Cambria"/>
-              </a:rPr>
-              <a:t>Ablation plan &amp; success criteria</a:t>
-            </a:r>
-          </a:p>
-        </p:txBody>
-      </p:sp>
-      <p:sp>
-        <p:nvSpPr>
-          <p:cNvPr id="4" name="TextBox 3"/>
-          <p:cNvSpPr txBox="1"/>
-          <p:nvPr/>
-        </p:nvSpPr>
-        <p:spPr>
-          <a:xfrm>
-            <a:off x="548640" y="1463040"/>
-            <a:ext cx="11064240" cy="457200"/>
-          </a:xfrm>
-          <a:prstGeom prst="rect">
-            <a:avLst/>
-          </a:prstGeom>
-          <a:noFill/>
-        </p:spPr>
-        <p:txBody>
-          <a:bodyPr wrap="square" lIns="0" rIns="0" tIns="0" bIns="0" anchor="t">
-            <a:spAutoFit/>
-          </a:bodyPr>
-          <a:lstStyle/>
-          <a:p>
-            <a:pPr algn="l"/>
-            <a:r>
-              <a:rPr sz="1550" b="0" i="0">
-                <a:solidFill>
-                  <a:srgbClr val="41525B"/>
-                </a:solidFill>
-                <a:latin typeface="Calibri"/>
-              </a:rPr>
-              <a:t>Each comparison changes exactly one thing (shown in brackets). Same seeds, epochs and folds throughout.</a:t>
-            </a:r>
-          </a:p>
-        </p:txBody>
-      </p:sp>
-      <p:graphicFrame>
-        <p:nvGraphicFramePr>
-          <p:cNvPr id="5" name="Table 4"/>
-          <p:cNvGraphicFramePr>
-            <a:graphicFrameLocks noGrp="1"/>
-          </p:cNvGraphicFramePr>
-          <p:nvPr/>
-        </p:nvGraphicFramePr>
-        <p:xfrm>
-          <a:off x="548640" y="2103120"/>
-          <a:ext cx="11091672" cy="2560320"/>
-        </p:xfrm>
-        <a:graphic>
-          <a:graphicData uri="http://schemas.openxmlformats.org/drawingml/2006/table">
-            <a:tbl>
-              <a:tblPr firstRow="1" bandRow="0">
-                <a:tableStyleId>{5C22544A-7EE6-4342-B048-85BDC9FD1C3A}</a:tableStyleId>
-              </a:tblPr>
-              <a:tblGrid>
-                <a:gridCol w="640080"/>
-                <a:gridCol w="1920240"/>
-                <a:gridCol w="1691640"/>
-                <a:gridCol w="5468112"/>
-                <a:gridCol w="1371600"/>
-              </a:tblGrid>
-              <a:tr h="512064">
-                <a:tc>
-                  <a:txBody>
-                    <a:bodyPr wrap="square"/>
-                    <a:lstStyle/>
-                    <a:p>
-                      <a:r>
-                        <a:rPr sz="1250" b="1">
-                          <a:solidFill>
-                            <a:srgbClr val="FFFFFF"/>
-                          </a:solidFill>
-                          <a:latin typeface="Calibri"/>
-                        </a:rPr>
-                        <a:t>ID</a:t>
-                      </a:r>
-                    </a:p>
-                  </a:txBody>
-                  <a:tcPr marL="73152" marR="73152" marT="27432" marB="27432" anchor="ctr">
-                    <a:solidFill>
-                      <a:srgbClr val="17262E"/>
-                    </a:solidFill>
-                  </a:tcPr>
-                </a:tc>
-                <a:tc>
-                  <a:txBody>
-                    <a:bodyPr wrap="square"/>
-                    <a:lstStyle/>
-                    <a:p>
-                      <a:r>
-                        <a:rPr sz="1250" b="1">
-                          <a:solidFill>
-                            <a:srgbClr val="FFFFFF"/>
-                          </a:solidFill>
-                          <a:latin typeface="Calibri"/>
-                        </a:rPr>
-                        <a:t>Split</a:t>
-                      </a:r>
-                    </a:p>
-                  </a:txBody>
-                  <a:tcPr marL="73152" marR="73152" marT="27432" marB="27432" anchor="ctr">
-                    <a:solidFill>
-                      <a:srgbClr val="17262E"/>
-                    </a:solidFill>
-                  </a:tcPr>
-                </a:tc>
-                <a:tc>
-                  <a:txBody>
-                    <a:bodyPr wrap="square"/>
-                    <a:lstStyle/>
-                    <a:p>
-                      <a:r>
-                        <a:rPr sz="1250" b="1">
-                          <a:solidFill>
-                            <a:srgbClr val="FFFFFF"/>
-                          </a:solidFill>
-                          <a:latin typeface="Calibri"/>
-                        </a:rPr>
-                        <a:t>Preprocessing</a:t>
-                      </a:r>
-                    </a:p>
-                  </a:txBody>
-                  <a:tcPr marL="73152" marR="73152" marT="27432" marB="27432" anchor="ctr">
-                    <a:solidFill>
-                      <a:srgbClr val="17262E"/>
-                    </a:solidFill>
-                  </a:tcPr>
-                </a:tc>
-                <a:tc>
-                  <a:txBody>
-                    <a:bodyPr wrap="square"/>
-                    <a:lstStyle/>
-                    <a:p>
-                      <a:r>
-                        <a:rPr sz="1250" b="1">
-                          <a:solidFill>
-                            <a:srgbClr val="FFFFFF"/>
-                          </a:solidFill>
-                          <a:latin typeface="Calibri"/>
-                        </a:rPr>
-                        <a:t>What it answers</a:t>
-                      </a:r>
-                    </a:p>
-                  </a:txBody>
-                  <a:tcPr marL="73152" marR="73152" marT="27432" marB="27432" anchor="ctr">
-                    <a:solidFill>
-                      <a:srgbClr val="17262E"/>
-                    </a:solidFill>
-                  </a:tcPr>
-                </a:tc>
-                <a:tc>
-                  <a:txBody>
-                    <a:bodyPr wrap="square"/>
-                    <a:lstStyle/>
-                    <a:p>
-                      <a:r>
-                        <a:rPr sz="1250" b="1">
-                          <a:solidFill>
-                            <a:srgbClr val="FFFFFF"/>
-                          </a:solidFill>
-                          <a:latin typeface="Calibri"/>
-                        </a:rPr>
-                        <a:t>Status</a:t>
-                      </a:r>
-                    </a:p>
-                  </a:txBody>
-                  <a:tcPr marL="73152" marR="73152" marT="27432" marB="27432" anchor="ctr">
-                    <a:solidFill>
-                      <a:srgbClr val="17262E"/>
-                    </a:solidFill>
-                  </a:tcPr>
-                </a:tc>
-              </a:tr>
-              <a:tr h="512064">
-                <a:tc>
-                  <a:txBody>
-                    <a:bodyPr wrap="square"/>
-                    <a:lstStyle/>
-                    <a:p>
-                      <a:r>
-                        <a:rPr sz="1250" b="1">
-                          <a:solidFill>
-                            <a:srgbClr val="17262E"/>
-                          </a:solidFill>
-                          <a:latin typeface="Calibri"/>
-                        </a:rPr>
-                        <a:t>A0</a:t>
-                      </a:r>
-                    </a:p>
-                  </a:txBody>
-                  <a:tcPr marL="73152" marR="73152" marT="27432" marB="27432" anchor="ctr">
-                    <a:solidFill>
-                      <a:srgbClr val="FFFFFF"/>
-                    </a:solidFill>
-                  </a:tcPr>
-                </a:tc>
-                <a:tc>
-                  <a:txBody>
-                    <a:bodyPr wrap="square"/>
-                    <a:lstStyle/>
-                    <a:p>
-                      <a:r>
-                        <a:rPr sz="1250" b="0">
-                          <a:solidFill>
-                            <a:srgbClr val="41525B"/>
-                          </a:solidFill>
-                          <a:latin typeface="Calibri"/>
-                        </a:rPr>
-                        <a:t>Image-level (paper)</a:t>
-                      </a:r>
-                    </a:p>
-                  </a:txBody>
-                  <a:tcPr marL="73152" marR="73152" marT="27432" marB="27432" anchor="ctr">
-                    <a:solidFill>
-                      <a:srgbClr val="FFFFFF"/>
-                    </a:solidFill>
-                  </a:tcPr>
-                </a:tc>
-                <a:tc>
-                  <a:txBody>
-                    <a:bodyPr wrap="square"/>
-                    <a:lstStyle/>
-                    <a:p>
-                      <a:r>
-                        <a:rPr sz="1250" b="0">
-                          <a:solidFill>
-                            <a:srgbClr val="41525B"/>
-                          </a:solidFill>
-                          <a:latin typeface="Calibri"/>
-                        </a:rPr>
-                        <a:t>None</a:t>
-                      </a:r>
-                    </a:p>
-                  </a:txBody>
-                  <a:tcPr marL="73152" marR="73152" marT="27432" marB="27432" anchor="ctr">
-                    <a:solidFill>
-                      <a:srgbClr val="FFFFFF"/>
-                    </a:solidFill>
-                  </a:tcPr>
-                </a:tc>
-                <a:tc>
-                  <a:txBody>
-                    <a:bodyPr wrap="square"/>
-                    <a:lstStyle/>
-                    <a:p>
-                      <a:r>
-                        <a:rPr sz="1250" b="0">
-                          <a:solidFill>
-                            <a:srgbClr val="41525B"/>
-                          </a:solidFill>
-                          <a:latin typeface="Calibri"/>
-                        </a:rPr>
-                        <a:t>Baseline: does our reproduction match [8]?</a:t>
-                      </a:r>
-                    </a:p>
-                  </a:txBody>
-                  <a:tcPr marL="73152" marR="73152" marT="27432" marB="27432" anchor="ctr">
-                    <a:solidFill>
-                      <a:srgbClr val="FFFFFF"/>
-                    </a:solidFill>
-                  </a:tcPr>
-                </a:tc>
-                <a:tc>
-                  <a:txBody>
-                    <a:bodyPr wrap="square"/>
-                    <a:lstStyle/>
-                    <a:p>
-                      <a:r>
-                        <a:rPr sz="1250" b="1">
-                          <a:solidFill>
-                            <a:srgbClr val="2EA79B"/>
-                          </a:solidFill>
-                          <a:latin typeface="Calibri"/>
-                        </a:rPr>
-                        <a:t>Milestone 2 ✓</a:t>
-                      </a:r>
-                    </a:p>
-                  </a:txBody>
-                  <a:tcPr marL="73152" marR="73152" marT="27432" marB="27432" anchor="ctr">
-                    <a:solidFill>
-                      <a:srgbClr val="FFFFFF"/>
-                    </a:solidFill>
-                  </a:tcPr>
-                </a:tc>
-              </a:tr>
-              <a:tr h="512064">
-                <a:tc>
-                  <a:txBody>
-                    <a:bodyPr wrap="square"/>
-                    <a:lstStyle/>
-                    <a:p>
-                      <a:r>
-                        <a:rPr sz="1250" b="1">
-                          <a:solidFill>
-                            <a:srgbClr val="17262E"/>
-                          </a:solidFill>
-                          <a:latin typeface="Calibri"/>
-                        </a:rPr>
-                        <a:t>A1</a:t>
-                      </a:r>
-                    </a:p>
-                  </a:txBody>
-                  <a:tcPr marL="73152" marR="73152" marT="27432" marB="27432" anchor="ctr">
-                    <a:solidFill>
-                      <a:srgbClr val="F5F9FA"/>
-                    </a:solidFill>
-                  </a:tcPr>
-                </a:tc>
-                <a:tc>
-                  <a:txBody>
-                    <a:bodyPr wrap="square"/>
-                    <a:lstStyle/>
-                    <a:p>
-                      <a:r>
-                        <a:rPr sz="1250" b="0">
-                          <a:solidFill>
-                            <a:srgbClr val="41525B"/>
-                          </a:solidFill>
-                          <a:latin typeface="Calibri"/>
-                        </a:rPr>
-                        <a:t>Slide-grouped</a:t>
-                      </a:r>
-                    </a:p>
-                  </a:txBody>
-                  <a:tcPr marL="73152" marR="73152" marT="27432" marB="27432" anchor="ctr">
-                    <a:solidFill>
-                      <a:srgbClr val="F5F9FA"/>
-                    </a:solidFill>
-                  </a:tcPr>
-                </a:tc>
-                <a:tc>
-                  <a:txBody>
-                    <a:bodyPr wrap="square"/>
-                    <a:lstStyle/>
-                    <a:p>
-                      <a:r>
-                        <a:rPr sz="1250" b="0">
-                          <a:solidFill>
-                            <a:srgbClr val="41525B"/>
-                          </a:solidFill>
-                          <a:latin typeface="Calibri"/>
-                        </a:rPr>
-                        <a:t>None</a:t>
-                      </a:r>
-                    </a:p>
-                  </a:txBody>
-                  <a:tcPr marL="73152" marR="73152" marT="27432" marB="27432" anchor="ctr">
-                    <a:solidFill>
-                      <a:srgbClr val="F5F9FA"/>
-                    </a:solidFill>
-                  </a:tcPr>
-                </a:tc>
-                <a:tc>
-                  <a:txBody>
-                    <a:bodyPr wrap="square"/>
-                    <a:lstStyle/>
-                    <a:p>
-                      <a:r>
-                        <a:rPr sz="1250" b="0">
-                          <a:solidFill>
-                            <a:srgbClr val="41525B"/>
-                          </a:solidFill>
-                          <a:latin typeface="Calibri"/>
-                        </a:rPr>
-                        <a:t>H1: how big is the leakage gap (A0 − A1)?</a:t>
-                      </a:r>
-                    </a:p>
-                  </a:txBody>
-                  <a:tcPr marL="73152" marR="73152" marT="27432" marB="27432" anchor="ctr">
-                    <a:solidFill>
-                      <a:srgbClr val="F5F9FA"/>
-                    </a:solidFill>
-                  </a:tcPr>
-                </a:tc>
-                <a:tc>
-                  <a:txBody>
-                    <a:bodyPr wrap="square"/>
-                    <a:lstStyle/>
-                    <a:p>
-                      <a:r>
-                        <a:rPr sz="1250" b="1">
-                          <a:solidFill>
-                            <a:srgbClr val="D99A00"/>
-                          </a:solidFill>
-                          <a:latin typeface="Calibri"/>
-                        </a:rPr>
-                        <a:t>Next</a:t>
-                      </a:r>
-                    </a:p>
-                  </a:txBody>
-                  <a:tcPr marL="73152" marR="73152" marT="27432" marB="27432" anchor="ctr">
-                    <a:solidFill>
-                      <a:srgbClr val="F5F9FA"/>
-                    </a:solidFill>
-                  </a:tcPr>
-                </a:tc>
-              </a:tr>
-              <a:tr h="512064">
-                <a:tc>
-                  <a:txBody>
-                    <a:bodyPr wrap="square"/>
-                    <a:lstStyle/>
-                    <a:p>
-                      <a:r>
-                        <a:rPr sz="1250" b="1">
-                          <a:solidFill>
-                            <a:srgbClr val="17262E"/>
-                          </a:solidFill>
-                          <a:latin typeface="Calibri"/>
-                        </a:rPr>
-                        <a:t>A2</a:t>
-                      </a:r>
-                    </a:p>
-                  </a:txBody>
-                  <a:tcPr marL="73152" marR="73152" marT="27432" marB="27432" anchor="ctr">
-                    <a:solidFill>
-                      <a:srgbClr val="FFFFFF"/>
-                    </a:solidFill>
-                  </a:tcPr>
-                </a:tc>
-                <a:tc>
-                  <a:txBody>
-                    <a:bodyPr wrap="square"/>
-                    <a:lstStyle/>
-                    <a:p>
-                      <a:r>
-                        <a:rPr sz="1250" b="0">
-                          <a:solidFill>
-                            <a:srgbClr val="41525B"/>
-                          </a:solidFill>
-                          <a:latin typeface="Calibri"/>
-                        </a:rPr>
-                        <a:t>Slide-grouped</a:t>
-                      </a:r>
-                    </a:p>
-                  </a:txBody>
-                  <a:tcPr marL="73152" marR="73152" marT="27432" marB="27432" anchor="ctr">
-                    <a:solidFill>
-                      <a:srgbClr val="FFFFFF"/>
-                    </a:solidFill>
-                  </a:tcPr>
-                </a:tc>
-                <a:tc>
-                  <a:txBody>
-                    <a:bodyPr wrap="square"/>
-                    <a:lstStyle/>
-                    <a:p>
-                      <a:r>
-                        <a:rPr sz="1250" b="0">
-                          <a:solidFill>
-                            <a:srgbClr val="41525B"/>
-                          </a:solidFill>
-                          <a:latin typeface="Calibri"/>
-                        </a:rPr>
-                        <a:t>YUV + hist-eq</a:t>
-                      </a:r>
-                    </a:p>
-                  </a:txBody>
-                  <a:tcPr marL="73152" marR="73152" marT="27432" marB="27432" anchor="ctr">
-                    <a:solidFill>
-                      <a:srgbClr val="FFFFFF"/>
-                    </a:solidFill>
-                  </a:tcPr>
-                </a:tc>
-                <a:tc>
-                  <a:txBody>
-                    <a:bodyPr wrap="square"/>
-                    <a:lstStyle/>
-                    <a:p>
-                      <a:r>
-                        <a:rPr sz="1250" b="0">
-                          <a:solidFill>
-                            <a:srgbClr val="41525B"/>
-                          </a:solidFill>
-                          <a:latin typeface="Calibri"/>
-                        </a:rPr>
-                        <a:t>H2: does stain normalisation help on unseen slides (A2 − A1)?</a:t>
-                      </a:r>
-                    </a:p>
-                  </a:txBody>
-                  <a:tcPr marL="73152" marR="73152" marT="27432" marB="27432" anchor="ctr">
-                    <a:solidFill>
-                      <a:srgbClr val="FFFFFF"/>
-                    </a:solidFill>
-                  </a:tcPr>
-                </a:tc>
-                <a:tc>
-                  <a:txBody>
-                    <a:bodyPr wrap="square"/>
-                    <a:lstStyle/>
-                    <a:p>
-                      <a:r>
-                        <a:rPr sz="1250" b="1">
-                          <a:solidFill>
-                            <a:srgbClr val="D99A00"/>
-                          </a:solidFill>
-                          <a:latin typeface="Calibri"/>
-                        </a:rPr>
-                        <a:t>Next</a:t>
-                      </a:r>
-                    </a:p>
-                  </a:txBody>
-                  <a:tcPr marL="73152" marR="73152" marT="27432" marB="27432" anchor="ctr">
-                    <a:solidFill>
-                      <a:srgbClr val="FFFFFF"/>
-                    </a:solidFill>
-                  </a:tcPr>
-                </a:tc>
-              </a:tr>
-              <a:tr h="512064">
-                <a:tc>
-                  <a:txBody>
-                    <a:bodyPr wrap="square"/>
-                    <a:lstStyle/>
-                    <a:p>
-                      <a:r>
-                        <a:rPr sz="1250" b="1">
-                          <a:solidFill>
-                            <a:srgbClr val="17262E"/>
-                          </a:solidFill>
-                          <a:latin typeface="Calibri"/>
-                        </a:rPr>
-                        <a:t>A3</a:t>
-                      </a:r>
-                    </a:p>
-                  </a:txBody>
-                  <a:tcPr marL="73152" marR="73152" marT="27432" marB="27432" anchor="ctr">
-                    <a:solidFill>
-                      <a:srgbClr val="F5F9FA"/>
-                    </a:solidFill>
-                  </a:tcPr>
-                </a:tc>
-                <a:tc>
-                  <a:txBody>
-                    <a:bodyPr wrap="square"/>
-                    <a:lstStyle/>
-                    <a:p>
-                      <a:r>
-                        <a:rPr sz="1250" b="0">
-                          <a:solidFill>
-                            <a:srgbClr val="41525B"/>
-                          </a:solidFill>
-                          <a:latin typeface="Calibri"/>
-                        </a:rPr>
-                        <a:t>Image-level</a:t>
-                      </a:r>
-                    </a:p>
-                  </a:txBody>
-                  <a:tcPr marL="73152" marR="73152" marT="27432" marB="27432" anchor="ctr">
-                    <a:solidFill>
-                      <a:srgbClr val="F5F9FA"/>
-                    </a:solidFill>
-                  </a:tcPr>
-                </a:tc>
-                <a:tc>
-                  <a:txBody>
-                    <a:bodyPr wrap="square"/>
-                    <a:lstStyle/>
-                    <a:p>
-                      <a:r>
-                        <a:rPr sz="1250" b="0">
-                          <a:solidFill>
-                            <a:srgbClr val="41525B"/>
-                          </a:solidFill>
-                          <a:latin typeface="Calibri"/>
-                        </a:rPr>
-                        <a:t>YUV + hist-eq</a:t>
-                      </a:r>
-                    </a:p>
-                  </a:txBody>
-                  <a:tcPr marL="73152" marR="73152" marT="27432" marB="27432" anchor="ctr">
-                    <a:solidFill>
-                      <a:srgbClr val="F5F9FA"/>
-                    </a:solidFill>
-                  </a:tcPr>
-                </a:tc>
-                <a:tc>
-                  <a:txBody>
-                    <a:bodyPr wrap="square"/>
-                    <a:lstStyle/>
-                    <a:p>
-                      <a:r>
-                        <a:rPr sz="1250" b="0">
-                          <a:solidFill>
-                            <a:srgbClr val="41525B"/>
-                          </a:solidFill>
-                          <a:latin typeface="Calibri"/>
-                        </a:rPr>
-                        <a:t>Control: is H2's gain specific to new slides (A3 − A0 ≈ 0)?</a:t>
-                      </a:r>
-                    </a:p>
-                  </a:txBody>
-                  <a:tcPr marL="73152" marR="73152" marT="27432" marB="27432" anchor="ctr">
-                    <a:solidFill>
-                      <a:srgbClr val="F5F9FA"/>
-                    </a:solidFill>
-                  </a:tcPr>
-                </a:tc>
-                <a:tc>
-                  <a:txBody>
-                    <a:bodyPr wrap="square"/>
-                    <a:lstStyle/>
-                    <a:p>
-                      <a:r>
-                        <a:rPr sz="1250" b="1">
-                          <a:solidFill>
-                            <a:srgbClr val="D99A00"/>
-                          </a:solidFill>
-                          <a:latin typeface="Calibri"/>
-                        </a:rPr>
-                        <a:t>Next</a:t>
-                      </a:r>
-                    </a:p>
-                  </a:txBody>
-                  <a:tcPr marL="73152" marR="73152" marT="27432" marB="27432" anchor="ctr">
-                    <a:solidFill>
-                      <a:srgbClr val="F5F9FA"/>
-                    </a:solidFill>
-                  </a:tcPr>
-                </a:tc>
-              </a:tr>
-            </a:tbl>
-          </a:graphicData>
-        </a:graphic>
-      </p:graphicFrame>
-      <p:sp>
-        <p:nvSpPr>
-          <p:cNvPr id="6" name="Rounded Rectangle 5"/>
-          <p:cNvSpPr/>
-          <p:nvPr/>
-        </p:nvSpPr>
-        <p:spPr>
-          <a:xfrm>
-            <a:off x="548640" y="4919472"/>
-            <a:ext cx="3575304" cy="1325880"/>
-          </a:xfrm>
-          <a:prstGeom prst="roundRect">
-            <a:avLst>
-              <a:gd name="adj" fmla="val 6000"/>
-            </a:avLst>
-          </a:prstGeom>
-          <a:solidFill>
-            <a:srgbClr val="F5F9FA"/>
-          </a:solidFill>
-          <a:ln w="12700">
-            <a:solidFill>
-              <a:srgbClr val="D3E1E6"/>
-            </a:solidFill>
-          </a:ln>
-          <a:effectLst/>
-        </p:spPr>
-        <p:style>
-          <a:lnRef idx="1">
-            <a:schemeClr val="accent1"/>
-          </a:lnRef>
-          <a:fillRef idx="3">
-            <a:schemeClr val="accent1"/>
-          </a:fillRef>
-          <a:effectRef idx="2">
-            <a:schemeClr val="accent1"/>
-          </a:effectRef>
-          <a:fontRef idx="minor">
-            <a:schemeClr val="lt1"/>
-          </a:fontRef>
-        </p:style>
-        <p:txBody>
-          <a:bodyPr rtlCol="0" anchor="ctr"/>
-          <a:lstStyle/>
-          <a:p/>
-        </p:txBody>
-      </p:sp>
-      <p:sp>
-        <p:nvSpPr>
-          <p:cNvPr id="7" name="Oval 6"/>
-          <p:cNvSpPr/>
-          <p:nvPr/>
-        </p:nvSpPr>
-        <p:spPr>
-          <a:xfrm>
-            <a:off x="749808" y="5074920"/>
-            <a:ext cx="566928" cy="566928"/>
-          </a:xfrm>
-          <a:prstGeom prst="ellipse">
-            <a:avLst/>
-          </a:prstGeom>
-          <a:solidFill>
-            <a:srgbClr val="137C8E"/>
-          </a:solidFill>
-          <a:ln>
-            <a:noFill/>
-          </a:ln>
-          <a:effectLst/>
-        </p:spPr>
-        <p:style>
-          <a:lnRef idx="1">
-            <a:schemeClr val="accent1"/>
-          </a:lnRef>
-          <a:fillRef idx="3">
-            <a:schemeClr val="accent1"/>
-          </a:fillRef>
-          <a:effectRef idx="2">
-            <a:schemeClr val="accent1"/>
-          </a:effectRef>
-          <a:fontRef idx="minor">
-            <a:schemeClr val="lt1"/>
-          </a:fontRef>
-        </p:style>
-        <p:txBody>
-          <a:bodyPr rtlCol="0" anchor="ctr"/>
-          <a:lstStyle/>
-          <a:p/>
-        </p:txBody>
-      </p:sp>
-      <p:pic>
-        <p:nvPicPr>
-          <p:cNvPr id="8" name="Picture 7" descr="image.png"/>
-          <p:cNvPicPr>
-            <a:picLocks noChangeAspect="1"/>
-          </p:cNvPicPr>
-          <p:nvPr/>
-        </p:nvPicPr>
-        <p:blipFill>
-          <a:blip r:embed="rId2"/>
-          <a:stretch>
-            <a:fillRect/>
-          </a:stretch>
-        </p:blipFill>
-        <p:spPr>
-          <a:xfrm>
-            <a:off x="891540" y="5216652"/>
-            <a:ext cx="283464" cy="283464"/>
-          </a:xfrm>
-          <a:prstGeom prst="rect">
-            <a:avLst/>
-          </a:prstGeom>
-        </p:spPr>
-      </p:pic>
-      <p:sp>
-        <p:nvSpPr>
-          <p:cNvPr id="9" name="TextBox 8"/>
-          <p:cNvSpPr txBox="1"/>
-          <p:nvPr/>
-        </p:nvSpPr>
-        <p:spPr>
-          <a:xfrm>
-            <a:off x="1481328" y="5093208"/>
-            <a:ext cx="2514600" cy="310896"/>
-          </a:xfrm>
-          <a:prstGeom prst="rect">
-            <a:avLst/>
-          </a:prstGeom>
-          <a:noFill/>
-        </p:spPr>
-        <p:txBody>
-          <a:bodyPr wrap="square" lIns="0" rIns="0" tIns="0" bIns="0" anchor="t">
-            <a:spAutoFit/>
-          </a:bodyPr>
-          <a:lstStyle/>
-          <a:p>
-            <a:pPr algn="l"/>
-            <a:r>
-              <a:rPr sz="1450" b="1" i="0">
-                <a:solidFill>
-                  <a:srgbClr val="17262E"/>
-                </a:solidFill>
-                <a:latin typeface="Cambria"/>
-              </a:rPr>
-              <a:t>Metrics</a:t>
-            </a:r>
-          </a:p>
-        </p:txBody>
-      </p:sp>
-      <p:sp>
-        <p:nvSpPr>
-          <p:cNvPr id="10" name="TextBox 9"/>
-          <p:cNvSpPr txBox="1"/>
-          <p:nvPr/>
-        </p:nvSpPr>
-        <p:spPr>
-          <a:xfrm>
-            <a:off x="1481328" y="5422392"/>
-            <a:ext cx="2560320" cy="777240"/>
-          </a:xfrm>
-          <a:prstGeom prst="rect">
-            <a:avLst/>
-          </a:prstGeom>
-          <a:noFill/>
-        </p:spPr>
-        <p:txBody>
-          <a:bodyPr wrap="square" lIns="0" rIns="0" tIns="0" bIns="0" anchor="t">
-            <a:spAutoFit/>
-          </a:bodyPr>
-          <a:lstStyle/>
-          <a:p>
-            <a:pPr algn="l"/>
-            <a:r>
-              <a:rPr sz="1150" b="0" i="0">
-                <a:solidFill>
-                  <a:srgbClr val="41525B"/>
-                </a:solidFill>
-                <a:latin typeface="Calibri"/>
-              </a:rPr>
-              <a:t>Accuracy, recall (missed infections), MCC, ROC-AUC. Mean ± SD over folds plus the hold-out ensemble.</a:t>
-            </a:r>
-          </a:p>
-        </p:txBody>
-      </p:sp>
-      <p:sp>
-        <p:nvSpPr>
-          <p:cNvPr id="11" name="Rounded Rectangle 10"/>
-          <p:cNvSpPr/>
-          <p:nvPr/>
-        </p:nvSpPr>
-        <p:spPr>
-          <a:xfrm>
-            <a:off x="4306824" y="4919472"/>
-            <a:ext cx="3575304" cy="1325880"/>
-          </a:xfrm>
-          <a:prstGeom prst="roundRect">
-            <a:avLst>
-              <a:gd name="adj" fmla="val 6000"/>
-            </a:avLst>
-          </a:prstGeom>
-          <a:solidFill>
-            <a:srgbClr val="F5F9FA"/>
-          </a:solidFill>
-          <a:ln w="12700">
-            <a:solidFill>
-              <a:srgbClr val="D3E1E6"/>
-            </a:solidFill>
-          </a:ln>
-          <a:effectLst/>
-        </p:spPr>
-        <p:style>
-          <a:lnRef idx="1">
-            <a:schemeClr val="accent1"/>
-          </a:lnRef>
-          <a:fillRef idx="3">
-            <a:schemeClr val="accent1"/>
-          </a:fillRef>
-          <a:effectRef idx="2">
-            <a:schemeClr val="accent1"/>
-          </a:effectRef>
-          <a:fontRef idx="minor">
-            <a:schemeClr val="lt1"/>
-          </a:fontRef>
-        </p:style>
-        <p:txBody>
-          <a:bodyPr rtlCol="0" anchor="ctr"/>
-          <a:lstStyle/>
-          <a:p/>
-        </p:txBody>
-      </p:sp>
-      <p:sp>
-        <p:nvSpPr>
-          <p:cNvPr id="12" name="Oval 11"/>
-          <p:cNvSpPr/>
-          <p:nvPr/>
-        </p:nvSpPr>
-        <p:spPr>
-          <a:xfrm>
-            <a:off x="4507992" y="5074920"/>
-            <a:ext cx="566928" cy="566928"/>
-          </a:xfrm>
-          <a:prstGeom prst="ellipse">
-            <a:avLst/>
-          </a:prstGeom>
-          <a:solidFill>
-            <a:srgbClr val="CC4A3F"/>
-          </a:solidFill>
-          <a:ln>
-            <a:noFill/>
-          </a:ln>
-          <a:effectLst/>
-        </p:spPr>
-        <p:style>
-          <a:lnRef idx="1">
-            <a:schemeClr val="accent1"/>
-          </a:lnRef>
-          <a:fillRef idx="3">
-            <a:schemeClr val="accent1"/>
-          </a:fillRef>
-          <a:effectRef idx="2">
-            <a:schemeClr val="accent1"/>
-          </a:effectRef>
-          <a:fontRef idx="minor">
-            <a:schemeClr val="lt1"/>
-          </a:fontRef>
-        </p:style>
-        <p:txBody>
-          <a:bodyPr rtlCol="0" anchor="ctr"/>
-          <a:lstStyle/>
-          <a:p/>
-        </p:txBody>
-      </p:sp>
-      <p:pic>
-        <p:nvPicPr>
-          <p:cNvPr id="13" name="Picture 12" descr="image.png"/>
-          <p:cNvPicPr>
-            <a:picLocks noChangeAspect="1"/>
-          </p:cNvPicPr>
-          <p:nvPr/>
-        </p:nvPicPr>
-        <p:blipFill>
-          <a:blip r:embed="rId3"/>
-          <a:stretch>
-            <a:fillRect/>
-          </a:stretch>
-        </p:blipFill>
-        <p:spPr>
-          <a:xfrm>
-            <a:off x="4649724" y="5216652"/>
-            <a:ext cx="283464" cy="283464"/>
-          </a:xfrm>
-          <a:prstGeom prst="rect">
-            <a:avLst/>
-          </a:prstGeom>
-        </p:spPr>
-      </p:pic>
-      <p:sp>
-        <p:nvSpPr>
-          <p:cNvPr id="14" name="TextBox 13"/>
-          <p:cNvSpPr txBox="1"/>
-          <p:nvPr/>
-        </p:nvSpPr>
-        <p:spPr>
-          <a:xfrm>
-            <a:off x="5239512" y="5093208"/>
-            <a:ext cx="2514600" cy="310896"/>
-          </a:xfrm>
-          <a:prstGeom prst="rect">
-            <a:avLst/>
-          </a:prstGeom>
-          <a:noFill/>
-        </p:spPr>
-        <p:txBody>
-          <a:bodyPr wrap="square" lIns="0" rIns="0" tIns="0" bIns="0" anchor="t">
-            <a:spAutoFit/>
-          </a:bodyPr>
-          <a:lstStyle/>
-          <a:p>
-            <a:pPr algn="l"/>
-            <a:r>
-              <a:rPr sz="1450" b="1" i="0">
-                <a:solidFill>
-                  <a:srgbClr val="17262E"/>
-                </a:solidFill>
-                <a:latin typeface="Cambria"/>
-              </a:rPr>
-              <a:t>Clinical priority</a:t>
-            </a:r>
-          </a:p>
-        </p:txBody>
-      </p:sp>
-      <p:sp>
-        <p:nvSpPr>
-          <p:cNvPr id="15" name="TextBox 14"/>
-          <p:cNvSpPr txBox="1"/>
-          <p:nvPr/>
-        </p:nvSpPr>
-        <p:spPr>
-          <a:xfrm>
-            <a:off x="5239512" y="5422392"/>
-            <a:ext cx="2560320" cy="777240"/>
-          </a:xfrm>
-          <a:prstGeom prst="rect">
-            <a:avLst/>
-          </a:prstGeom>
-          <a:noFill/>
-        </p:spPr>
-        <p:txBody>
-          <a:bodyPr wrap="square" lIns="0" rIns="0" tIns="0" bIns="0" anchor="t">
-            <a:spAutoFit/>
-          </a:bodyPr>
-          <a:lstStyle/>
-          <a:p>
-            <a:pPr algn="l"/>
-            <a:r>
-              <a:rPr sz="1150" b="0" i="0">
-                <a:solidFill>
-                  <a:srgbClr val="41525B"/>
-                </a:solidFill>
-                <a:latin typeface="Calibri"/>
-              </a:rPr>
-              <a:t>Recall first: a missed parasitized cell (false negative) costs more than a false alarm.</a:t>
-            </a:r>
-          </a:p>
-        </p:txBody>
-      </p:sp>
-      <p:sp>
-        <p:nvSpPr>
-          <p:cNvPr id="16" name="Rounded Rectangle 15"/>
-          <p:cNvSpPr/>
-          <p:nvPr/>
-        </p:nvSpPr>
-        <p:spPr>
-          <a:xfrm>
-            <a:off x="8065008" y="4919472"/>
-            <a:ext cx="3575304" cy="1325880"/>
-          </a:xfrm>
-          <a:prstGeom prst="roundRect">
-            <a:avLst>
-              <a:gd name="adj" fmla="val 6000"/>
-            </a:avLst>
-          </a:prstGeom>
-          <a:solidFill>
-            <a:srgbClr val="F5F9FA"/>
-          </a:solidFill>
-          <a:ln w="12700">
-            <a:solidFill>
-              <a:srgbClr val="D3E1E6"/>
-            </a:solidFill>
-          </a:ln>
-          <a:effectLst/>
-        </p:spPr>
-        <p:style>
-          <a:lnRef idx="1">
-            <a:schemeClr val="accent1"/>
-          </a:lnRef>
-          <a:fillRef idx="3">
-            <a:schemeClr val="accent1"/>
-          </a:fillRef>
-          <a:effectRef idx="2">
-            <a:schemeClr val="accent1"/>
-          </a:effectRef>
-          <a:fontRef idx="minor">
-            <a:schemeClr val="lt1"/>
-          </a:fontRef>
-        </p:style>
-        <p:txBody>
-          <a:bodyPr rtlCol="0" anchor="ctr"/>
-          <a:lstStyle/>
-          <a:p/>
-        </p:txBody>
-      </p:sp>
-      <p:sp>
-        <p:nvSpPr>
-          <p:cNvPr id="17" name="Oval 16"/>
-          <p:cNvSpPr/>
-          <p:nvPr/>
-        </p:nvSpPr>
-        <p:spPr>
-          <a:xfrm>
-            <a:off x="8266176" y="5074920"/>
-            <a:ext cx="566928" cy="566928"/>
-          </a:xfrm>
-          <a:prstGeom prst="ellipse">
-            <a:avLst/>
-          </a:prstGeom>
-          <a:solidFill>
-            <a:srgbClr val="8A43B0"/>
-          </a:solidFill>
-          <a:ln>
-            <a:noFill/>
-          </a:ln>
-          <a:effectLst/>
-        </p:spPr>
-        <p:style>
-          <a:lnRef idx="1">
-            <a:schemeClr val="accent1"/>
-          </a:lnRef>
-          <a:fillRef idx="3">
-            <a:schemeClr val="accent1"/>
-          </a:fillRef>
-          <a:effectRef idx="2">
-            <a:schemeClr val="accent1"/>
-          </a:effectRef>
-          <a:fontRef idx="minor">
-            <a:schemeClr val="lt1"/>
-          </a:fontRef>
-        </p:style>
-        <p:txBody>
-          <a:bodyPr rtlCol="0" anchor="ctr"/>
-          <a:lstStyle/>
-          <a:p/>
-        </p:txBody>
-      </p:sp>
-      <p:pic>
-        <p:nvPicPr>
-          <p:cNvPr id="18" name="Picture 17" descr="image.png"/>
-          <p:cNvPicPr>
-            <a:picLocks noChangeAspect="1"/>
-          </p:cNvPicPr>
-          <p:nvPr/>
-        </p:nvPicPr>
-        <p:blipFill>
-          <a:blip r:embed="rId4"/>
-          <a:stretch>
-            <a:fillRect/>
-          </a:stretch>
-        </p:blipFill>
-        <p:spPr>
-          <a:xfrm>
-            <a:off x="8407908" y="5216652"/>
-            <a:ext cx="283464" cy="283464"/>
-          </a:xfrm>
-          <a:prstGeom prst="rect">
-            <a:avLst/>
-          </a:prstGeom>
-        </p:spPr>
-      </p:pic>
-      <p:sp>
-        <p:nvSpPr>
-          <p:cNvPr id="19" name="TextBox 18"/>
-          <p:cNvSpPr txBox="1"/>
-          <p:nvPr/>
-        </p:nvSpPr>
-        <p:spPr>
-          <a:xfrm>
-            <a:off x="8997696" y="5093208"/>
-            <a:ext cx="2514600" cy="310896"/>
-          </a:xfrm>
-          <a:prstGeom prst="rect">
-            <a:avLst/>
-          </a:prstGeom>
-          <a:noFill/>
-        </p:spPr>
-        <p:txBody>
-          <a:bodyPr wrap="square" lIns="0" rIns="0" tIns="0" bIns="0" anchor="t">
-            <a:spAutoFit/>
-          </a:bodyPr>
-          <a:lstStyle/>
-          <a:p>
-            <a:pPr algn="l"/>
-            <a:r>
-              <a:rPr sz="1450" b="1" i="0">
-                <a:solidFill>
-                  <a:srgbClr val="17262E"/>
-                </a:solidFill>
-                <a:latin typeface="Cambria"/>
-              </a:rPr>
-              <a:t>Already built</a:t>
-            </a:r>
-          </a:p>
-        </p:txBody>
-      </p:sp>
-      <p:sp>
-        <p:nvSpPr>
-          <p:cNvPr id="20" name="TextBox 19"/>
-          <p:cNvSpPr txBox="1"/>
-          <p:nvPr/>
-        </p:nvSpPr>
-        <p:spPr>
-          <a:xfrm>
-            <a:off x="8997696" y="5422392"/>
-            <a:ext cx="2560320" cy="777240"/>
-          </a:xfrm>
-          <a:prstGeom prst="rect">
-            <a:avLst/>
-          </a:prstGeom>
-          <a:noFill/>
-        </p:spPr>
-        <p:txBody>
-          <a:bodyPr wrap="square" lIns="0" rIns="0" tIns="0" bIns="0" anchor="t">
-            <a:spAutoFit/>
-          </a:bodyPr>
-          <a:lstStyle/>
-          <a:p>
-            <a:pPr algn="l"/>
-            <a:r>
-              <a:rPr sz="1150" b="0" i="0">
-                <a:solidFill>
-                  <a:srgbClr val="41525B"/>
-                </a:solidFill>
-                <a:latin typeface="Calibri"/>
-              </a:rPr>
-              <a:t>The notebook has the grouped split and YUV switches. A1–A3 are one flag each.</a:t>
-            </a:r>
-          </a:p>
-        </p:txBody>
-      </p:sp>
-      <p:sp>
-        <p:nvSpPr>
-          <p:cNvPr id="21" name="TextBox 20"/>
-          <p:cNvSpPr txBox="1"/>
-          <p:nvPr/>
-        </p:nvSpPr>
-        <p:spPr>
-          <a:xfrm>
-            <a:off x="548640" y="6455664"/>
-            <a:ext cx="7315200" cy="274320"/>
-          </a:xfrm>
-          <a:prstGeom prst="rect">
-            <a:avLst/>
-          </a:prstGeom>
-          <a:noFill/>
-        </p:spPr>
-        <p:txBody>
-          <a:bodyPr wrap="square" lIns="0" rIns="0" tIns="0" bIns="0" anchor="t">
-            <a:spAutoFit/>
-          </a:bodyPr>
-          <a:lstStyle/>
-          <a:p>
-            <a:pPr algn="l"/>
-            <a:r>
-              <a:rPr sz="900" b="0" i="0">
-                <a:solidFill>
-                  <a:srgbClr val="7C8B93"/>
-                </a:solidFill>
-                <a:latin typeface="Calibri"/>
-              </a:rPr>
-              <a:t>Phase 2 · Baseline &amp; Hypothesis · Automated Malaria Cell Detection</a:t>
-            </a:r>
-          </a:p>
-        </p:txBody>
-      </p:sp>
-      <p:sp>
-        <p:nvSpPr>
-          <p:cNvPr id="22" name="TextBox 21"/>
-          <p:cNvSpPr txBox="1"/>
-          <p:nvPr/>
-        </p:nvSpPr>
-        <p:spPr>
-          <a:xfrm>
-            <a:off x="11183112" y="6419088"/>
-            <a:ext cx="457200" cy="274320"/>
-          </a:xfrm>
-          <a:prstGeom prst="rect">
-            <a:avLst/>
-          </a:prstGeom>
-          <a:noFill/>
-        </p:spPr>
-        <p:txBody>
-          <a:bodyPr wrap="square" lIns="0" rIns="0" tIns="0" bIns="0" anchor="t">
-            <a:spAutoFit/>
-          </a:bodyPr>
-          <a:lstStyle/>
-          <a:p>
-            <a:pPr algn="r"/>
-            <a:r>
-              <a:rPr sz="1000" b="0" i="0">
-                <a:solidFill>
-                  <a:srgbClr val="7C8B93"/>
-                </a:solidFill>
-                <a:latin typeface="Calibri"/>
-              </a:rPr>
-              <a:t>23</a:t>
-            </a:r>
-          </a:p>
-        </p:txBody>
-      </p:sp>
-    </p:spTree>
-  </p:cSld>
-  <p:clrMapOvr>
-    <a:masterClrMapping/>
-  </p:clrMapOvr>
-</p:sld>
-</file>
-
-<file path=ppt/slides/slide23.xml><?xml version="1.0" encoding="utf-8"?>
-<p:sld xmlns:a="http://schemas.openxmlformats.org/drawingml/2006/main" xmlns:r="http://schemas.openxmlformats.org/officeDocument/2006/relationships" xmlns:p="http://schemas.openxmlformats.org/presentationml/2006/main">
-  <p:cSld name="Slide 16">
-    <p:spTree>
-      <p:nvGrpSpPr>
-        <p:cNvPr id="1" name=""/>
-        <p:cNvGrpSpPr/>
-        <p:nvPr/>
-      </p:nvGrpSpPr>
-      <p:grpSpPr>
-        <a:xfrm>
-          <a:off x="0" y="0"/>
-          <a:ext cx="0" cy="0"/>
-          <a:chOff x="0" y="0"/>
-          <a:chExt cx="0" cy="0"/>
-        </a:xfrm>
-      </p:grpSpPr>
-      <p:sp>
-        <p:nvSpPr>
-          <p:cNvPr id="2" name="Text 0"/>
-          <p:cNvSpPr txBox="1"/>
-          <p:nvPr/>
-        </p:nvSpPr>
-        <p:spPr>
-          <a:xfrm>
-            <a:off x="548640" y="457200"/>
-            <a:ext cx="11064240" cy="274320"/>
-          </a:xfrm>
-          <a:prstGeom prst="rect">
-            <a:avLst/>
-          </a:prstGeom>
-          <a:noFill/>
-          <a:ln/>
-        </p:spPr>
-        <p:txBody>
-          <a:bodyPr wrap="square" lIns="0" tIns="0" rIns="0" bIns="0" rtlCol="0" anchor="ctr"/>
-          <a:lstStyle/>
-          <a:p>
-            <a:pPr algn="l" indent="0" marL="0">
-              <a:buNone/>
-            </a:pPr>
-            <a:r>
-              <a:rPr lang="en-US" sz="1250" b="1" spc="200" kern="0" dirty="0">
-                <a:solidFill>
-                  <a:srgbClr val="137C8E"/>
-                </a:solidFill>
-                <a:latin typeface="Calibri" pitchFamily="34" charset="0"/>
-                <a:ea typeface="Calibri" pitchFamily="34" charset="-122"/>
-                <a:cs typeface="Calibri" pitchFamily="34" charset="-120"/>
-              </a:rPr>
-              <a:t>REFERENCES</a:t>
-            </a:r>
-            <a:endParaRPr lang="en-US" sz="1250" dirty="0"/>
-          </a:p>
-        </p:txBody>
-      </p:sp>
-      <p:sp>
-        <p:nvSpPr>
-          <p:cNvPr id="3" name="Text 1"/>
-          <p:cNvSpPr txBox="1"/>
-          <p:nvPr/>
-        </p:nvSpPr>
-        <p:spPr>
-          <a:xfrm>
-            <a:off x="548640" y="749808"/>
-            <a:ext cx="11064240" cy="658368"/>
-          </a:xfrm>
-          <a:prstGeom prst="rect">
-            <a:avLst/>
-          </a:prstGeom>
-          <a:noFill/>
-          <a:ln/>
-        </p:spPr>
-        <p:txBody>
-          <a:bodyPr wrap="square" lIns="0" tIns="0" rIns="0" bIns="0" rtlCol="0" anchor="ctr"/>
-          <a:lstStyle/>
-          <a:p>
-            <a:pPr algn="l" indent="0" marL="0">
-              <a:buNone/>
-            </a:pPr>
-            <a:r>
-              <a:rPr lang="en-US" sz="3000" b="1" dirty="0">
-                <a:solidFill>
-                  <a:srgbClr val="17262E"/>
-                </a:solidFill>
-                <a:latin typeface="Cambria" pitchFamily="34" charset="0"/>
-                <a:ea typeface="Cambria" pitchFamily="34" charset="-122"/>
-                <a:cs typeface="Cambria" pitchFamily="34" charset="-120"/>
-              </a:rPr>
-              <a:t>The eleven reviewed studies</a:t>
-            </a:r>
-            <a:endParaRPr lang="en-US" sz="3000" dirty="0"/>
-          </a:p>
-        </p:txBody>
-      </p:sp>
-      <p:sp>
-        <p:nvSpPr>
-          <p:cNvPr id="4" name="Text 2"/>
-          <p:cNvSpPr txBox="1"/>
-          <p:nvPr/>
-        </p:nvSpPr>
-        <p:spPr>
-          <a:xfrm>
-            <a:off x="548640" y="1508760"/>
-            <a:ext cx="5486400" cy="4572000"/>
-          </a:xfrm>
-          <a:prstGeom prst="rect">
-            <a:avLst/>
-          </a:prstGeom>
-          <a:noFill/>
-          <a:ln/>
-        </p:spPr>
-        <p:txBody>
-          <a:bodyPr wrap="square" lIns="0" tIns="0" rIns="0" bIns="0" rtlCol="0" anchor="t"/>
-          <a:lstStyle/>
-          <a:p>
-            <a:pPr indent="0" marL="0">
-              <a:lnSpc>
-                <a:spcPct val="102000"/>
-              </a:lnSpc>
-              <a:spcAft>
-                <a:spcPts val="1000"/>
-              </a:spcAft>
-              <a:buNone/>
-            </a:pPr>
-            <a:r>
-              <a:rPr lang="en-US" sz="1150" dirty="0">
-                <a:solidFill>
-                  <a:srgbClr val="41525B"/>
-                </a:solidFill>
-                <a:latin typeface="Calibri" pitchFamily="34" charset="0"/>
-                <a:ea typeface="Calibri" pitchFamily="34" charset="-122"/>
-                <a:cs typeface="Calibri" pitchFamily="34" charset="-120"/>
-              </a:rPr>
-              <a:t>[1] Z. Liang et al., “CNN-Based Image Analysis for Malaria Diagnosis,” IEEE BIBM, 2016.</a:t>
-            </a:r>
-            <a:endParaRPr lang="en-US" sz="1150" dirty="0"/>
-          </a:p>
-          <a:p>
-            <a:pPr indent="0" marL="0">
-              <a:lnSpc>
-                <a:spcPct val="102000"/>
-              </a:lnSpc>
-              <a:spcAft>
-                <a:spcPts val="1000"/>
-              </a:spcAft>
-              <a:buNone/>
-            </a:pPr>
-            <a:r>
-              <a:rPr lang="en-US" sz="1150" dirty="0">
-                <a:solidFill>
-                  <a:srgbClr val="41525B"/>
-                </a:solidFill>
-                <a:latin typeface="Calibri" pitchFamily="34" charset="0"/>
-                <a:ea typeface="Calibri" pitchFamily="34" charset="-122"/>
-                <a:cs typeface="Calibri" pitchFamily="34" charset="-120"/>
-              </a:rPr>
-              <a:t>[2] S. Rajaraman et al., “Pre-trained CNNs as feature extractors toward improved malaria parasite detection,” PeerJ 6:e4568, 2018.</a:t>
-            </a:r>
-            <a:endParaRPr lang="en-US" sz="1150" dirty="0"/>
-          </a:p>
-          <a:p>
-            <a:pPr indent="0" marL="0">
-              <a:lnSpc>
-                <a:spcPct val="102000"/>
-              </a:lnSpc>
-              <a:spcAft>
-                <a:spcPts val="1000"/>
-              </a:spcAft>
-              <a:buNone/>
-            </a:pPr>
-            <a:r>
-              <a:rPr lang="en-US" sz="1150" dirty="0">
-                <a:solidFill>
-                  <a:srgbClr val="41525B"/>
-                </a:solidFill>
-                <a:latin typeface="Calibri" pitchFamily="34" charset="0"/>
-                <a:ea typeface="Calibri" pitchFamily="34" charset="-122"/>
-                <a:cs typeface="Calibri" pitchFamily="34" charset="-120"/>
-              </a:rPr>
-              <a:t>[3] S. Rajaraman et al., “Performance evaluation of deep neural ensembles toward malaria parasite detection,” PeerJ 7:e6977, 2019.</a:t>
-            </a:r>
-            <a:endParaRPr lang="en-US" sz="1150" dirty="0"/>
-          </a:p>
-          <a:p>
-            <a:pPr indent="0" marL="0">
-              <a:lnSpc>
-                <a:spcPct val="102000"/>
-              </a:lnSpc>
-              <a:spcAft>
-                <a:spcPts val="1000"/>
-              </a:spcAft>
-              <a:buNone/>
-            </a:pPr>
-            <a:r>
-              <a:rPr lang="en-US" sz="1150" dirty="0">
-                <a:solidFill>
-                  <a:srgbClr val="41525B"/>
-                </a:solidFill>
-                <a:latin typeface="Calibri" pitchFamily="34" charset="0"/>
-                <a:ea typeface="Calibri" pitchFamily="34" charset="-122"/>
-                <a:cs typeface="Calibri" pitchFamily="34" charset="-120"/>
-              </a:rPr>
-              <a:t>[4] M. Umer et al., “A Novel Stacked CNN for Malarial Parasite Detection in Thin Blood Smear Images,” IEEE Access 8, 2020.</a:t>
-            </a:r>
-            <a:endParaRPr lang="en-US" sz="1150" dirty="0"/>
-          </a:p>
-          <a:p>
-            <a:pPr indent="0" marL="0">
-              <a:lnSpc>
-                <a:spcPct val="102000"/>
-              </a:lnSpc>
-              <a:spcAft>
-                <a:spcPts val="1000"/>
-              </a:spcAft>
-              <a:buNone/>
-            </a:pPr>
-            <a:r>
-              <a:rPr lang="en-US" sz="1150" dirty="0">
-                <a:solidFill>
-                  <a:srgbClr val="41525B"/>
-                </a:solidFill>
-                <a:latin typeface="Calibri" pitchFamily="34" charset="0"/>
-                <a:ea typeface="Calibri" pitchFamily="34" charset="-122"/>
-                <a:cs typeface="Calibri" pitchFamily="34" charset="-120"/>
-              </a:rPr>
-              <a:t>[5] K. M. F. Fuhad et al., “Deep Learning Based Automatic Malaria Parasite Detection … Smartphone Application,” Diagnostics 10(5):329, 2020.</a:t>
-            </a:r>
-            <a:endParaRPr lang="en-US" sz="1150" dirty="0"/>
-          </a:p>
-          <a:p>
-            <a:pPr indent="0" marL="0">
-              <a:lnSpc>
-                <a:spcPct val="102000"/>
-              </a:lnSpc>
-              <a:spcAft>
-                <a:spcPts val="1000"/>
-              </a:spcAft>
-              <a:buNone/>
-            </a:pPr>
-            <a:r>
-              <a:rPr lang="en-US" sz="1150" dirty="0">
-                <a:solidFill>
-                  <a:srgbClr val="41525B"/>
-                </a:solidFill>
-                <a:latin typeface="Calibri" pitchFamily="34" charset="0"/>
-                <a:ea typeface="Calibri" pitchFamily="34" charset="-122"/>
-                <a:cs typeface="Calibri" pitchFamily="34" charset="-120"/>
-              </a:rPr>
-              <a:t>[6] O. S. Zhao et al., “Convolutional neural networks to automate the screening of malaria in low-resource countries,” PeerJ 8:e9674, 2020.</a:t>
-            </a:r>
-            <a:endParaRPr lang="en-US" sz="1150" dirty="0"/>
-          </a:p>
-        </p:txBody>
-      </p:sp>
-      <p:sp>
-        <p:nvSpPr>
-          <p:cNvPr id="5" name="Text 3"/>
-          <p:cNvSpPr txBox="1"/>
-          <p:nvPr/>
-        </p:nvSpPr>
-        <p:spPr>
-          <a:xfrm>
-            <a:off x="6263640" y="1508760"/>
-            <a:ext cx="5394960" cy="4572000"/>
-          </a:xfrm>
-          <a:prstGeom prst="rect">
-            <a:avLst/>
-          </a:prstGeom>
-          <a:noFill/>
-          <a:ln/>
-        </p:spPr>
-        <p:txBody>
-          <a:bodyPr wrap="square" lIns="0" tIns="0" rIns="0" bIns="0" rtlCol="0" anchor="t"/>
-          <a:lstStyle/>
-          <a:p>
-            <a:pPr indent="0" marL="0">
-              <a:lnSpc>
-                <a:spcPct val="102000"/>
-              </a:lnSpc>
-              <a:spcAft>
-                <a:spcPts val="1000"/>
-              </a:spcAft>
-              <a:buNone/>
-            </a:pPr>
-            <a:r>
-              <a:rPr lang="en-US" sz="1150" dirty="0">
-                <a:solidFill>
-                  <a:srgbClr val="41525B"/>
-                </a:solidFill>
-                <a:latin typeface="Calibri" pitchFamily="34" charset="0"/>
-                <a:ea typeface="Calibri" pitchFamily="34" charset="-122"/>
-                <a:cs typeface="Calibri" pitchFamily="34" charset="-120"/>
-              </a:rPr>
-              <a:t>[7] M. Masud et al., “Leveraging Deep Learning Techniques for Malaria Parasite Detection Using Mobile Application,” WCMC 2020:8895429.</a:t>
-            </a:r>
-            <a:endParaRPr lang="en-US" sz="1150" dirty="0"/>
-          </a:p>
-          <a:p>
-            <a:pPr indent="0" marL="0">
-              <a:lnSpc>
-                <a:spcPct val="102000"/>
-              </a:lnSpc>
-              <a:spcAft>
-                <a:spcPts val="1000"/>
-              </a:spcAft>
-              <a:buNone/>
-            </a:pPr>
-            <a:r>
-              <a:rPr lang="en-US" sz="1150" dirty="0">
-                <a:solidFill>
-                  <a:srgbClr val="41525B"/>
-                </a:solidFill>
-                <a:latin typeface="Calibri" pitchFamily="34" charset="0"/>
-                <a:ea typeface="Calibri" pitchFamily="34" charset="-122"/>
-                <a:cs typeface="Calibri" pitchFamily="34" charset="-120"/>
-              </a:rPr>
-              <a:t>[8] G. Marques et al., “An ensemble-based approach for automated medical diagnosis of malaria using EfficientNet,” MTAP 81, 2022.</a:t>
-            </a:r>
-            <a:endParaRPr lang="en-US" sz="1150" dirty="0"/>
-          </a:p>
-          <a:p>
-            <a:pPr indent="0" marL="0">
-              <a:lnSpc>
-                <a:spcPct val="102000"/>
-              </a:lnSpc>
-              <a:spcAft>
-                <a:spcPts val="1000"/>
-              </a:spcAft>
-              <a:buNone/>
-            </a:pPr>
-            <a:r>
-              <a:rPr lang="en-US" sz="1150" dirty="0">
-                <a:solidFill>
-                  <a:srgbClr val="41525B"/>
-                </a:solidFill>
-                <a:latin typeface="Calibri" pitchFamily="34" charset="0"/>
-                <a:ea typeface="Calibri" pitchFamily="34" charset="-122"/>
-                <a:cs typeface="Calibri" pitchFamily="34" charset="-120"/>
-              </a:rPr>
-              <a:t>[9] G. Madhu et al., “Intelligent diagnostic model … imperative inception-based capsule neural networks,” Scientific Reports 13, 2023.</a:t>
-            </a:r>
-            <a:endParaRPr lang="en-US" sz="1150" dirty="0"/>
-          </a:p>
-          <a:p>
-            <a:pPr indent="0" marL="0">
-              <a:lnSpc>
-                <a:spcPct val="102000"/>
-              </a:lnSpc>
-              <a:spcAft>
-                <a:spcPts val="1000"/>
-              </a:spcAft>
-              <a:buNone/>
-            </a:pPr>
-            <a:r>
-              <a:rPr lang="en-US" sz="1150" dirty="0">
-                <a:solidFill>
-                  <a:srgbClr val="41525B"/>
-                </a:solidFill>
-                <a:latin typeface="Calibri" pitchFamily="34" charset="0"/>
-                <a:ea typeface="Calibri" pitchFamily="34" charset="-122"/>
-                <a:cs typeface="Calibri" pitchFamily="34" charset="-120"/>
-              </a:rPr>
-              <a:t>[10] K. Hemachandran et al., “Performance Analysis of Deep Learning Algorithms in Diagnosis of Malaria Disease,” Diagnostics 13(3):534, 2023.</a:t>
-            </a:r>
-            <a:endParaRPr lang="en-US" sz="1150" dirty="0"/>
-          </a:p>
-          <a:p>
-            <a:pPr indent="0" marL="0">
-              <a:lnSpc>
-                <a:spcPct val="102000"/>
-              </a:lnSpc>
-              <a:spcAft>
-                <a:spcPts val="1000"/>
-              </a:spcAft>
-              <a:buNone/>
-            </a:pPr>
-            <a:r>
-              <a:rPr lang="en-US" sz="1150" dirty="0">
-                <a:solidFill>
-                  <a:srgbClr val="41525B"/>
-                </a:solidFill>
-                <a:latin typeface="Calibri" pitchFamily="34" charset="0"/>
-                <a:ea typeface="Calibri" pitchFamily="34" charset="-122"/>
-                <a:cs typeface="Calibri" pitchFamily="34" charset="-120"/>
-              </a:rPr>
-              <a:t>[11] M. Mujahid et al., “Efficient deep learning-based approach for malaria detection using red blood cell smears,” Scientific Reports 14, 2024.</a:t>
-            </a:r>
-            <a:endParaRPr lang="en-US" sz="1150" dirty="0"/>
-          </a:p>
-        </p:txBody>
-      </p:sp>
-      <p:sp>
-        <p:nvSpPr>
-          <p:cNvPr id="6" name="Shape 4"/>
-          <p:cNvSpPr/>
-          <p:nvPr/>
-        </p:nvSpPr>
-        <p:spPr>
-          <a:xfrm>
-            <a:off x="6263640" y="3977640"/>
-            <a:ext cx="5376672" cy="2103120"/>
-          </a:xfrm>
-          <a:prstGeom prst="roundRect">
-            <a:avLst>
-              <a:gd name="adj" fmla="val 4348"/>
-            </a:avLst>
-          </a:prstGeom>
-          <a:solidFill>
-            <a:srgbClr val="0F2E3D"/>
-          </a:solidFill>
-          <a:ln/>
-        </p:spPr>
-        <p:txBody>
-          <a:bodyPr/>
-          <a:p/>
-        </p:txBody>
-      </p:sp>
-      <p:sp>
-        <p:nvSpPr>
-          <p:cNvPr id="7" name="Shape 5"/>
-          <p:cNvSpPr/>
-          <p:nvPr/>
-        </p:nvSpPr>
-        <p:spPr>
-          <a:xfrm>
-            <a:off x="6675120" y="4297680"/>
-            <a:ext cx="822960" cy="822960"/>
-          </a:xfrm>
-          <a:prstGeom prst="ellipse">
-            <a:avLst/>
-          </a:prstGeom>
-          <a:solidFill>
-            <a:srgbClr val="2EA79B"/>
-          </a:solidFill>
-          <a:ln/>
-        </p:spPr>
-        <p:txBody>
-          <a:bodyPr/>
-          <a:p/>
-        </p:txBody>
-      </p:sp>
-      <p:pic>
-        <p:nvPicPr>
-          <p:cNvPr id="8" name="Image 0" descr="/tmp/build/assets/ic_microscope.png">    </p:cNvPr>
-          <p:cNvPicPr>
-            <a:picLocks noChangeAspect="1"/>
-          </p:cNvPicPr>
-          <p:nvPr/>
-        </p:nvPicPr>
-        <p:blipFill>
-          <a:blip r:embed="rId1"/>
-          <a:stretch>
-            <a:fillRect/>
-          </a:stretch>
-        </p:blipFill>
-        <p:spPr>
-          <a:xfrm>
-            <a:off x="6880860" y="4503420"/>
-            <a:ext cx="411480" cy="411480"/>
-          </a:xfrm>
-          <a:prstGeom prst="rect">
-            <a:avLst/>
-          </a:prstGeom>
-        </p:spPr>
-      </p:pic>
-      <p:sp>
-        <p:nvSpPr>
-          <p:cNvPr id="9" name="Text 6"/>
-          <p:cNvSpPr txBox="1"/>
-          <p:nvPr/>
-        </p:nvSpPr>
-        <p:spPr>
-          <a:xfrm>
-            <a:off x="7680960" y="4297680"/>
-            <a:ext cx="3749040" cy="502920"/>
-          </a:xfrm>
-          <a:prstGeom prst="rect">
-            <a:avLst/>
-          </a:prstGeom>
-          <a:noFill/>
-          <a:ln/>
-        </p:spPr>
-        <p:txBody>
-          <a:bodyPr wrap="square" lIns="0" tIns="0" rIns="0" bIns="0" rtlCol="0" anchor="ctr"/>
-          <a:lstStyle/>
-          <a:p>
-            <a:pPr indent="0" marL="0">
-              <a:buNone/>
-            </a:pPr>
-            <a:r>
-              <a:rPr lang="en-US" sz="2600" b="1" dirty="0">
-                <a:solidFill>
-                  <a:srgbClr val="FFFFFF"/>
-                </a:solidFill>
-                <a:latin typeface="Cambria" pitchFamily="34" charset="0"/>
-                <a:ea typeface="Cambria" pitchFamily="34" charset="-122"/>
-                <a:cs typeface="Cambria" pitchFamily="34" charset="-120"/>
-              </a:rPr>
-              <a:t>Thank you</a:t>
-            </a:r>
-            <a:endParaRPr lang="en-US" sz="2600" dirty="0"/>
-          </a:p>
-        </p:txBody>
-      </p:sp>
-      <p:sp>
-        <p:nvSpPr>
-          <p:cNvPr id="10" name="Text 7"/>
-          <p:cNvSpPr txBox="1"/>
-          <p:nvPr/>
-        </p:nvSpPr>
-        <p:spPr>
-          <a:xfrm>
-            <a:off x="7680960" y="4892040"/>
-            <a:ext cx="3703320" cy="914400"/>
-          </a:xfrm>
-          <a:prstGeom prst="rect">
-            <a:avLst/>
-          </a:prstGeom>
-          <a:noFill/>
-          <a:ln/>
-        </p:spPr>
-        <p:txBody>
-          <a:bodyPr wrap="square" lIns="0" tIns="0" rIns="0" bIns="0" rtlCol="0" anchor="ctr"/>
-          <a:lstStyle/>
-          <a:p>
-            <a:pPr indent="0" marL="0">
-              <a:lnSpc>
-                <a:spcPct val="108000"/>
-              </a:lnSpc>
-              <a:buNone/>
-            </a:pPr>
-            <a:r>
-              <a:rPr lang="en-US" sz="1300" dirty="0">
-                <a:solidFill>
-                  <a:srgbClr val="D7E7EB"/>
-                </a:solidFill>
-                <a:latin typeface="Calibri" pitchFamily="34" charset="0"/>
-                <a:ea typeface="Calibri" pitchFamily="34" charset="-122"/>
-                <a:cs typeface="Calibri" pitchFamily="34" charset="-120"/>
-              </a:rPr>
-              <a:t>Questions on methods, results, or our chosen research gap are welcome.</a:t>
-            </a:r>
-            <a:endParaRPr lang="en-US" sz="1300" dirty="0"/>
-          </a:p>
-        </p:txBody>
-      </p:sp>
-      <p:sp>
-        <p:nvSpPr>
-          <p:cNvPr id="11" name="Text 8"/>
-          <p:cNvSpPr txBox="1"/>
-          <p:nvPr/>
-        </p:nvSpPr>
-        <p:spPr>
-          <a:xfrm>
-            <a:off x="548640" y="6144768"/>
-            <a:ext cx="5577840" cy="274320"/>
-          </a:xfrm>
-          <a:prstGeom prst="rect">
-            <a:avLst/>
-          </a:prstGeom>
-          <a:noFill/>
-          <a:ln/>
-        </p:spPr>
-        <p:txBody>
-          <a:bodyPr wrap="square" lIns="0" tIns="0" rIns="0" bIns="0" rtlCol="0" anchor="ctr"/>
-          <a:lstStyle/>
-          <a:p>
-            <a:pPr indent="0" marL="0">
-              <a:buNone/>
-            </a:pPr>
-            <a:r>
-              <a:rPr lang="en-US" sz="1100" b="1" dirty="0">
-                <a:solidFill>
-                  <a:srgbClr val="137C8E"/>
-                </a:solidFill>
-                <a:latin typeface="Calibri" pitchFamily="34" charset="0"/>
-                <a:ea typeface="Calibri" pitchFamily="34" charset="-122"/>
-                <a:cs typeface="Calibri" pitchFamily="34" charset="-120"/>
-              </a:rPr>
-              <a:t>Presented by   </a:t>
-            </a:r>
-            <a:pPr indent="0" marL="0">
-              <a:buNone/>
-            </a:pPr>
-            <a:r>
-              <a:rPr lang="en-US" sz="1100" dirty="0">
-                <a:solidFill>
-                  <a:srgbClr val="41525B"/>
-                </a:solidFill>
-                <a:latin typeface="Calibri" pitchFamily="34" charset="0"/>
-                <a:ea typeface="Calibri" pitchFamily="34" charset="-122"/>
-                <a:cs typeface="Calibri" pitchFamily="34" charset="-120"/>
-              </a:rPr>
-              <a:t>Pugazhendhi J · J Amathziah · C Murali Madhav · Ravi Yadav</a:t>
-            </a:r>
-            <a:endParaRPr lang="en-US" sz="1100" dirty="0"/>
-          </a:p>
-        </p:txBody>
-      </p:sp>
-      <p:sp>
-        <p:nvSpPr>
-          <p:cNvPr id="12" name="Text 9"/>
-          <p:cNvSpPr txBox="1"/>
-          <p:nvPr/>
-        </p:nvSpPr>
-        <p:spPr>
-          <a:xfrm>
-            <a:off x="11185855" y="6419088"/>
-            <a:ext cx="457200" cy="274320"/>
-          </a:xfrm>
-          <a:prstGeom prst="rect">
-            <a:avLst/>
-          </a:prstGeom>
-          <a:noFill/>
-          <a:ln/>
-        </p:spPr>
-        <p:txBody>
-          <a:bodyPr wrap="square" lIns="0" tIns="0" rIns="0" bIns="0" rtlCol="0" anchor="ctr"/>
-          <a:lstStyle/>
-          <a:p>
-            <a:pPr algn="r" indent="0" marL="0">
-              <a:buNone/>
-            </a:pPr>
-            <a:r>
-              <a:rPr lang="en-US" sz="1000" dirty="0">
-                <a:solidFill>
-                  <a:srgbClr val="7C8B93"/>
-                </a:solidFill>
-                <a:latin typeface="Calibri" pitchFamily="34" charset="0"/>
-                <a:ea typeface="Calibri" pitchFamily="34" charset="-122"/>
-                <a:cs typeface="Calibri" pitchFamily="34" charset="-120"/>
-              </a:rPr>
-              <a:t>24</a:t>
-            </a:r>
-            <a:endParaRPr lang="en-US" sz="1000" dirty="0"/>
-          </a:p>
-        </p:txBody>
-      </p:sp>
-    </p:spTree>
-  </p:cSld>
-  <p:clrMapOvr>
-    <a:masterClrMapping/>
-  </p:clrMapOvr>
-</p:sld>
-</file>
-
-<file path=ppt/slides/slide24.xml><?xml version="1.0" encoding="utf-8"?>
-<p:sld xmlns:a="http://schemas.openxmlformats.org/drawingml/2006/main" xmlns:p="http://schemas.openxmlformats.org/presentationml/2006/main" xmlns:r="http://schemas.openxmlformats.org/officeDocument/2006/relationships">
-  <p:cSld>
-    <p:spTree>
-      <p:nvGrpSpPr>
         <p:cNvPr id="2" name=""/>
         <p:cNvGrpSpPr/>
         <p:nvPr/>
@@ -24142,6 +21123,3025 @@
 </p:sld>
 </file>
 
+<file path=ppt/slides/slide22.xml><?xml version="1.0" encoding="utf-8"?>
+<p:sld xmlns:a="http://schemas.openxmlformats.org/drawingml/2006/main" xmlns:p="http://schemas.openxmlformats.org/presentationml/2006/main" xmlns:r="http://schemas.openxmlformats.org/officeDocument/2006/relationships">
+  <p:cSld>
+    <p:spTree>
+      <p:nvGrpSpPr>
+        <p:cNvPr id="1" name=""/>
+        <p:cNvGrpSpPr/>
+        <p:nvPr/>
+      </p:nvGrpSpPr>
+      <p:grpSpPr/>
+      <p:sp>
+        <p:nvSpPr>
+          <p:cNvPr id="2" name="Oval 1"/>
+          <p:cNvSpPr/>
+          <p:nvPr/>
+        </p:nvSpPr>
+        <p:spPr>
+          <a:xfrm>
+            <a:off x="11109960" y="320040"/>
+            <a:ext cx="1005840" cy="1005840"/>
+          </a:xfrm>
+          <a:prstGeom prst="ellipse">
+            <a:avLst/>
+          </a:prstGeom>
+          <a:solidFill>
+            <a:srgbClr val="8A43B0"/>
+          </a:solidFill>
+          <a:ln>
+            <a:noFill/>
+          </a:ln>
+          <a:effectLst/>
+        </p:spPr>
+        <p:style>
+          <a:lnRef idx="1">
+            <a:schemeClr val="accent1"/>
+          </a:lnRef>
+          <a:fillRef idx="3">
+            <a:schemeClr val="accent1"/>
+          </a:fillRef>
+          <a:effectRef idx="2">
+            <a:schemeClr val="accent1"/>
+          </a:effectRef>
+          <a:fontRef idx="minor">
+            <a:schemeClr val="lt1"/>
+          </a:fontRef>
+        </p:style>
+        <p:txBody>
+          <a:bodyPr rtlCol="0" anchor="ctr"/>
+          <a:lstStyle/>
+          <a:p/>
+        </p:txBody>
+      </p:sp>
+      <p:sp>
+        <p:nvSpPr>
+          <p:cNvPr id="3" name="Oval 2"/>
+          <p:cNvSpPr/>
+          <p:nvPr/>
+        </p:nvSpPr>
+        <p:spPr>
+          <a:xfrm>
+            <a:off x="11475720" y="6172200"/>
+            <a:ext cx="822960" cy="822960"/>
+          </a:xfrm>
+          <a:prstGeom prst="ellipse">
+            <a:avLst/>
+          </a:prstGeom>
+          <a:solidFill>
+            <a:srgbClr val="137C8E"/>
+          </a:solidFill>
+          <a:ln>
+            <a:noFill/>
+          </a:ln>
+          <a:effectLst/>
+        </p:spPr>
+        <p:style>
+          <a:lnRef idx="1">
+            <a:schemeClr val="accent1"/>
+          </a:lnRef>
+          <a:fillRef idx="3">
+            <a:schemeClr val="accent1"/>
+          </a:fillRef>
+          <a:effectRef idx="2">
+            <a:schemeClr val="accent1"/>
+          </a:effectRef>
+          <a:fontRef idx="minor">
+            <a:schemeClr val="lt1"/>
+          </a:fontRef>
+        </p:style>
+        <p:txBody>
+          <a:bodyPr rtlCol="0" anchor="ctr"/>
+          <a:lstStyle/>
+          <a:p/>
+        </p:txBody>
+      </p:sp>
+      <p:sp>
+        <p:nvSpPr>
+          <p:cNvPr id="4" name="Rounded Rectangle 3"/>
+          <p:cNvSpPr/>
+          <p:nvPr/>
+        </p:nvSpPr>
+        <p:spPr>
+          <a:xfrm>
+            <a:off x="640080" y="502920"/>
+            <a:ext cx="2377440" cy="402336"/>
+          </a:xfrm>
+          <a:prstGeom prst="roundRect">
+            <a:avLst>
+              <a:gd name="adj" fmla="val 50000"/>
+            </a:avLst>
+          </a:prstGeom>
+          <a:solidFill>
+            <a:srgbClr val="D99A00"/>
+          </a:solidFill>
+          <a:ln>
+            <a:noFill/>
+          </a:ln>
+          <a:effectLst/>
+        </p:spPr>
+        <p:style>
+          <a:lnRef idx="1">
+            <a:schemeClr val="accent1"/>
+          </a:lnRef>
+          <a:fillRef idx="3">
+            <a:schemeClr val="accent1"/>
+          </a:fillRef>
+          <a:effectRef idx="2">
+            <a:schemeClr val="accent1"/>
+          </a:effectRef>
+          <a:fontRef idx="minor">
+            <a:schemeClr val="lt1"/>
+          </a:fontRef>
+        </p:style>
+        <p:txBody>
+          <a:bodyPr rtlCol="0" anchor="ctr"/>
+          <a:lstStyle/>
+          <a:p/>
+        </p:txBody>
+      </p:sp>
+      <p:sp>
+        <p:nvSpPr>
+          <p:cNvPr id="5" name="TextBox 4"/>
+          <p:cNvSpPr txBox="1"/>
+          <p:nvPr/>
+        </p:nvSpPr>
+        <p:spPr>
+          <a:xfrm>
+            <a:off x="640080" y="502920"/>
+            <a:ext cx="2377440" cy="402336"/>
+          </a:xfrm>
+          <a:prstGeom prst="rect">
+            <a:avLst/>
+          </a:prstGeom>
+          <a:noFill/>
+        </p:spPr>
+        <p:txBody>
+          <a:bodyPr wrap="square" lIns="0" rIns="0" tIns="0" bIns="0" anchor="ctr">
+            <a:spAutoFit/>
+          </a:bodyPr>
+          <a:lstStyle/>
+          <a:p>
+            <a:pPr algn="ctr"/>
+            <a:r>
+              <a:rPr sz="1250" b="1" i="0">
+                <a:solidFill>
+                  <a:srgbClr val="3A2A00"/>
+                </a:solidFill>
+                <a:latin typeface="Calibri"/>
+              </a:rPr>
+              <a:t>★ OUR HYPOTHESIS</a:t>
+            </a:r>
+          </a:p>
+        </p:txBody>
+      </p:sp>
+      <p:sp>
+        <p:nvSpPr>
+          <p:cNvPr id="6" name="TextBox 5"/>
+          <p:cNvSpPr txBox="1"/>
+          <p:nvPr/>
+        </p:nvSpPr>
+        <p:spPr>
+          <a:xfrm>
+            <a:off x="640080" y="1024128"/>
+            <a:ext cx="10972800" cy="640080"/>
+          </a:xfrm>
+          <a:prstGeom prst="rect">
+            <a:avLst/>
+          </a:prstGeom>
+          <a:noFill/>
+        </p:spPr>
+        <p:txBody>
+          <a:bodyPr wrap="square" lIns="0" rIns="0" tIns="0" bIns="0" anchor="t">
+            <a:spAutoFit/>
+          </a:bodyPr>
+          <a:lstStyle/>
+          <a:p>
+            <a:pPr algn="l"/>
+            <a:r>
+              <a:rPr sz="3000" b="1" i="0">
+                <a:solidFill>
+                  <a:srgbClr val="FFFFFF"/>
+                </a:solidFill>
+                <a:latin typeface="Cambria"/>
+              </a:rPr>
+              <a:t>Two proposed changes, one variable at a time</a:t>
+            </a:r>
+          </a:p>
+        </p:txBody>
+      </p:sp>
+      <p:sp>
+        <p:nvSpPr>
+          <p:cNvPr id="7" name="Rounded Rectangle 6"/>
+          <p:cNvSpPr/>
+          <p:nvPr/>
+        </p:nvSpPr>
+        <p:spPr>
+          <a:xfrm>
+            <a:off x="640080" y="1828800"/>
+            <a:ext cx="5468112" cy="3931920"/>
+          </a:xfrm>
+          <a:prstGeom prst="roundRect">
+            <a:avLst>
+              <a:gd name="adj" fmla="val 6000"/>
+            </a:avLst>
+          </a:prstGeom>
+          <a:solidFill>
+            <a:srgbClr val="15455A"/>
+          </a:solidFill>
+          <a:ln w="12700">
+            <a:solidFill>
+              <a:srgbClr val="0E6274"/>
+            </a:solidFill>
+          </a:ln>
+          <a:effectLst/>
+        </p:spPr>
+        <p:style>
+          <a:lnRef idx="1">
+            <a:schemeClr val="accent1"/>
+          </a:lnRef>
+          <a:fillRef idx="3">
+            <a:schemeClr val="accent1"/>
+          </a:fillRef>
+          <a:effectRef idx="2">
+            <a:schemeClr val="accent1"/>
+          </a:effectRef>
+          <a:fontRef idx="minor">
+            <a:schemeClr val="lt1"/>
+          </a:fontRef>
+        </p:style>
+        <p:txBody>
+          <a:bodyPr rtlCol="0" anchor="ctr"/>
+          <a:lstStyle/>
+          <a:p/>
+        </p:txBody>
+      </p:sp>
+      <p:sp>
+        <p:nvSpPr>
+          <p:cNvPr id="8" name="Oval 7"/>
+          <p:cNvSpPr/>
+          <p:nvPr/>
+        </p:nvSpPr>
+        <p:spPr>
+          <a:xfrm>
+            <a:off x="914400" y="2057400"/>
+            <a:ext cx="731520" cy="731520"/>
+          </a:xfrm>
+          <a:prstGeom prst="ellipse">
+            <a:avLst/>
+          </a:prstGeom>
+          <a:solidFill>
+            <a:srgbClr val="CC4A3F"/>
+          </a:solidFill>
+          <a:ln>
+            <a:noFill/>
+          </a:ln>
+          <a:effectLst/>
+        </p:spPr>
+        <p:style>
+          <a:lnRef idx="1">
+            <a:schemeClr val="accent1"/>
+          </a:lnRef>
+          <a:fillRef idx="3">
+            <a:schemeClr val="accent1"/>
+          </a:fillRef>
+          <a:effectRef idx="2">
+            <a:schemeClr val="accent1"/>
+          </a:effectRef>
+          <a:fontRef idx="minor">
+            <a:schemeClr val="lt1"/>
+          </a:fontRef>
+        </p:style>
+        <p:txBody>
+          <a:bodyPr rtlCol="0" anchor="ctr"/>
+          <a:lstStyle/>
+          <a:p/>
+        </p:txBody>
+      </p:sp>
+      <p:pic>
+        <p:nvPicPr>
+          <p:cNvPr id="9" name="Picture 8" descr="image.png"/>
+          <p:cNvPicPr>
+            <a:picLocks noChangeAspect="1"/>
+          </p:cNvPicPr>
+          <p:nvPr/>
+        </p:nvPicPr>
+        <p:blipFill>
+          <a:blip r:embed="rId2"/>
+          <a:stretch>
+            <a:fillRect/>
+          </a:stretch>
+        </p:blipFill>
+        <p:spPr>
+          <a:xfrm>
+            <a:off x="1097280" y="2240280"/>
+            <a:ext cx="365760" cy="365760"/>
+          </a:xfrm>
+          <a:prstGeom prst="rect">
+            <a:avLst/>
+          </a:prstGeom>
+        </p:spPr>
+      </p:pic>
+      <p:sp>
+        <p:nvSpPr>
+          <p:cNvPr id="10" name="TextBox 9"/>
+          <p:cNvSpPr txBox="1"/>
+          <p:nvPr/>
+        </p:nvSpPr>
+        <p:spPr>
+          <a:xfrm>
+            <a:off x="1828800" y="2048256"/>
+            <a:ext cx="4069080" cy="274320"/>
+          </a:xfrm>
+          <a:prstGeom prst="rect">
+            <a:avLst/>
+          </a:prstGeom>
+          <a:noFill/>
+        </p:spPr>
+        <p:txBody>
+          <a:bodyPr wrap="square" lIns="0" rIns="0" tIns="0" bIns="0" anchor="t">
+            <a:spAutoFit/>
+          </a:bodyPr>
+          <a:lstStyle/>
+          <a:p>
+            <a:pPr algn="l"/>
+            <a:r>
+              <a:rPr sz="1100" b="1" i="0">
+                <a:solidFill>
+                  <a:srgbClr val="9FC0C9"/>
+                </a:solidFill>
+                <a:latin typeface="Calibri"/>
+              </a:rPr>
+              <a:t>H1 · VALIDATION</a:t>
+            </a:r>
+          </a:p>
+        </p:txBody>
+      </p:sp>
+      <p:sp>
+        <p:nvSpPr>
+          <p:cNvPr id="11" name="TextBox 10"/>
+          <p:cNvSpPr txBox="1"/>
+          <p:nvPr/>
+        </p:nvSpPr>
+        <p:spPr>
+          <a:xfrm>
+            <a:off x="1828800" y="2304288"/>
+            <a:ext cx="4114800" cy="502920"/>
+          </a:xfrm>
+          <a:prstGeom prst="rect">
+            <a:avLst/>
+          </a:prstGeom>
+          <a:noFill/>
+        </p:spPr>
+        <p:txBody>
+          <a:bodyPr wrap="square" lIns="0" rIns="0" tIns="0" bIns="0" anchor="t">
+            <a:spAutoFit/>
+          </a:bodyPr>
+          <a:lstStyle/>
+          <a:p>
+            <a:pPr algn="l"/>
+            <a:r>
+              <a:rPr sz="1650" b="1" i="0">
+                <a:solidFill>
+                  <a:srgbClr val="FFFFFF"/>
+                </a:solidFill>
+                <a:latin typeface="Cambria"/>
+              </a:rPr>
+              <a:t>Leakage-free, slide-grouped split</a:t>
+            </a:r>
+          </a:p>
+        </p:txBody>
+      </p:sp>
+      <p:sp>
+        <p:nvSpPr>
+          <p:cNvPr id="12" name="TextBox 11"/>
+          <p:cNvSpPr txBox="1"/>
+          <p:nvPr/>
+        </p:nvSpPr>
+        <p:spPr>
+          <a:xfrm>
+            <a:off x="932688" y="3017520"/>
+            <a:ext cx="1188720" cy="274320"/>
+          </a:xfrm>
+          <a:prstGeom prst="rect">
+            <a:avLst/>
+          </a:prstGeom>
+          <a:noFill/>
+        </p:spPr>
+        <p:txBody>
+          <a:bodyPr wrap="square" lIns="0" rIns="0" tIns="0" bIns="0" anchor="t">
+            <a:spAutoFit/>
+          </a:bodyPr>
+          <a:lstStyle/>
+          <a:p>
+            <a:pPr algn="l"/>
+            <a:r>
+              <a:rPr sz="1050" b="1" i="0">
+                <a:solidFill>
+                  <a:srgbClr val="9FC0C9"/>
+                </a:solidFill>
+                <a:latin typeface="Calibri"/>
+              </a:rPr>
+              <a:t>CHANGE</a:t>
+            </a:r>
+          </a:p>
+        </p:txBody>
+      </p:sp>
+      <p:sp>
+        <p:nvSpPr>
+          <p:cNvPr id="13" name="TextBox 12"/>
+          <p:cNvSpPr txBox="1"/>
+          <p:nvPr/>
+        </p:nvSpPr>
+        <p:spPr>
+          <a:xfrm>
+            <a:off x="2057400" y="2990088"/>
+            <a:ext cx="3840480" cy="868680"/>
+          </a:xfrm>
+          <a:prstGeom prst="rect">
+            <a:avLst/>
+          </a:prstGeom>
+          <a:noFill/>
+        </p:spPr>
+        <p:txBody>
+          <a:bodyPr wrap="square" lIns="0" rIns="0" tIns="0" bIns="0" anchor="t">
+            <a:spAutoFit/>
+          </a:bodyPr>
+          <a:lstStyle/>
+          <a:p>
+            <a:pPr algn="l"/>
+            <a:r>
+              <a:rPr sz="1200" b="0" i="0">
+                <a:solidFill>
+                  <a:srgbClr val="D5E6EA"/>
+                </a:solidFill>
+                <a:latin typeface="Calibri"/>
+              </a:rPr>
+              <a:t>Split by slide/patient (StratifiedGroupKFold) instead of random images. Model unchanged.</a:t>
+            </a:r>
+          </a:p>
+        </p:txBody>
+      </p:sp>
+      <p:sp>
+        <p:nvSpPr>
+          <p:cNvPr id="14" name="TextBox 13"/>
+          <p:cNvSpPr txBox="1"/>
+          <p:nvPr/>
+        </p:nvSpPr>
+        <p:spPr>
+          <a:xfrm>
+            <a:off x="932688" y="3913631"/>
+            <a:ext cx="1188720" cy="274320"/>
+          </a:xfrm>
+          <a:prstGeom prst="rect">
+            <a:avLst/>
+          </a:prstGeom>
+          <a:noFill/>
+        </p:spPr>
+        <p:txBody>
+          <a:bodyPr wrap="square" lIns="0" rIns="0" tIns="0" bIns="0" anchor="t">
+            <a:spAutoFit/>
+          </a:bodyPr>
+          <a:lstStyle/>
+          <a:p>
+            <a:pPr algn="l"/>
+            <a:r>
+              <a:rPr sz="1050" b="1" i="0">
+                <a:solidFill>
+                  <a:srgbClr val="D99A00"/>
+                </a:solidFill>
+                <a:latin typeface="Calibri"/>
+              </a:rPr>
+              <a:t>WE EXPECT</a:t>
+            </a:r>
+          </a:p>
+        </p:txBody>
+      </p:sp>
+      <p:sp>
+        <p:nvSpPr>
+          <p:cNvPr id="15" name="TextBox 14"/>
+          <p:cNvSpPr txBox="1"/>
+          <p:nvPr/>
+        </p:nvSpPr>
+        <p:spPr>
+          <a:xfrm>
+            <a:off x="2057400" y="3886199"/>
+            <a:ext cx="3840480" cy="868680"/>
+          </a:xfrm>
+          <a:prstGeom prst="rect">
+            <a:avLst/>
+          </a:prstGeom>
+          <a:noFill/>
+        </p:spPr>
+        <p:txBody>
+          <a:bodyPr wrap="square" lIns="0" rIns="0" tIns="0" bIns="0" anchor="t">
+            <a:spAutoFit/>
+          </a:bodyPr>
+          <a:lstStyle/>
+          <a:p>
+            <a:pPr algn="l"/>
+            <a:r>
+              <a:rPr sz="1200" b="1" i="0">
+                <a:solidFill>
+                  <a:srgbClr val="FFFFFF"/>
+                </a:solidFill>
+                <a:latin typeface="Calibri"/>
+              </a:rPr>
+              <a:t>Accuracy and MCC fall below the image-split baseline, and fold-to-fold spread widens.</a:t>
+            </a:r>
+          </a:p>
+        </p:txBody>
+      </p:sp>
+      <p:sp>
+        <p:nvSpPr>
+          <p:cNvPr id="16" name="TextBox 15"/>
+          <p:cNvSpPr txBox="1"/>
+          <p:nvPr/>
+        </p:nvSpPr>
+        <p:spPr>
+          <a:xfrm>
+            <a:off x="932688" y="4809744"/>
+            <a:ext cx="1188720" cy="274320"/>
+          </a:xfrm>
+          <a:prstGeom prst="rect">
+            <a:avLst/>
+          </a:prstGeom>
+          <a:noFill/>
+        </p:spPr>
+        <p:txBody>
+          <a:bodyPr wrap="square" lIns="0" rIns="0" tIns="0" bIns="0" anchor="t">
+            <a:spAutoFit/>
+          </a:bodyPr>
+          <a:lstStyle/>
+          <a:p>
+            <a:pPr algn="l"/>
+            <a:r>
+              <a:rPr sz="1050" b="1" i="0">
+                <a:solidFill>
+                  <a:srgbClr val="9FC0C9"/>
+                </a:solidFill>
+                <a:latin typeface="Calibri"/>
+              </a:rPr>
+              <a:t>BECAUSE</a:t>
+            </a:r>
+          </a:p>
+        </p:txBody>
+      </p:sp>
+      <p:sp>
+        <p:nvSpPr>
+          <p:cNvPr id="17" name="TextBox 16"/>
+          <p:cNvSpPr txBox="1"/>
+          <p:nvPr/>
+        </p:nvSpPr>
+        <p:spPr>
+          <a:xfrm>
+            <a:off x="2057400" y="4782312"/>
+            <a:ext cx="3840480" cy="868680"/>
+          </a:xfrm>
+          <a:prstGeom prst="rect">
+            <a:avLst/>
+          </a:prstGeom>
+          <a:noFill/>
+        </p:spPr>
+        <p:txBody>
+          <a:bodyPr wrap="square" lIns="0" rIns="0" tIns="0" bIns="0" anchor="t">
+            <a:spAutoFit/>
+          </a:bodyPr>
+          <a:lstStyle/>
+          <a:p>
+            <a:pPr algn="l"/>
+            <a:r>
+              <a:rPr sz="1200" b="0" i="0">
+                <a:solidFill>
+                  <a:srgbClr val="D5E6EA"/>
+                </a:solidFill>
+                <a:latin typeface="Calibri"/>
+              </a:rPr>
+              <a:t>Cells from one slide share stain, lighting and the patient's cell shape. A random split lets the model recognise the slide rather than the parasite.</a:t>
+            </a:r>
+          </a:p>
+        </p:txBody>
+      </p:sp>
+      <p:sp>
+        <p:nvSpPr>
+          <p:cNvPr id="18" name="Rounded Rectangle 17"/>
+          <p:cNvSpPr/>
+          <p:nvPr/>
+        </p:nvSpPr>
+        <p:spPr>
+          <a:xfrm>
+            <a:off x="6345936" y="1828800"/>
+            <a:ext cx="5468112" cy="3931920"/>
+          </a:xfrm>
+          <a:prstGeom prst="roundRect">
+            <a:avLst>
+              <a:gd name="adj" fmla="val 6000"/>
+            </a:avLst>
+          </a:prstGeom>
+          <a:solidFill>
+            <a:srgbClr val="15455A"/>
+          </a:solidFill>
+          <a:ln w="12700">
+            <a:solidFill>
+              <a:srgbClr val="0E6274"/>
+            </a:solidFill>
+          </a:ln>
+          <a:effectLst/>
+        </p:spPr>
+        <p:style>
+          <a:lnRef idx="1">
+            <a:schemeClr val="accent1"/>
+          </a:lnRef>
+          <a:fillRef idx="3">
+            <a:schemeClr val="accent1"/>
+          </a:fillRef>
+          <a:effectRef idx="2">
+            <a:schemeClr val="accent1"/>
+          </a:effectRef>
+          <a:fontRef idx="minor">
+            <a:schemeClr val="lt1"/>
+          </a:fontRef>
+        </p:style>
+        <p:txBody>
+          <a:bodyPr rtlCol="0" anchor="ctr"/>
+          <a:lstStyle/>
+          <a:p/>
+        </p:txBody>
+      </p:sp>
+      <p:sp>
+        <p:nvSpPr>
+          <p:cNvPr id="19" name="Oval 18"/>
+          <p:cNvSpPr/>
+          <p:nvPr/>
+        </p:nvSpPr>
+        <p:spPr>
+          <a:xfrm>
+            <a:off x="6620256" y="2057400"/>
+            <a:ext cx="731520" cy="731520"/>
+          </a:xfrm>
+          <a:prstGeom prst="ellipse">
+            <a:avLst/>
+          </a:prstGeom>
+          <a:solidFill>
+            <a:srgbClr val="2EA79B"/>
+          </a:solidFill>
+          <a:ln>
+            <a:noFill/>
+          </a:ln>
+          <a:effectLst/>
+        </p:spPr>
+        <p:style>
+          <a:lnRef idx="1">
+            <a:schemeClr val="accent1"/>
+          </a:lnRef>
+          <a:fillRef idx="3">
+            <a:schemeClr val="accent1"/>
+          </a:fillRef>
+          <a:effectRef idx="2">
+            <a:schemeClr val="accent1"/>
+          </a:effectRef>
+          <a:fontRef idx="minor">
+            <a:schemeClr val="lt1"/>
+          </a:fontRef>
+        </p:style>
+        <p:txBody>
+          <a:bodyPr rtlCol="0" anchor="ctr"/>
+          <a:lstStyle/>
+          <a:p/>
+        </p:txBody>
+      </p:sp>
+      <p:pic>
+        <p:nvPicPr>
+          <p:cNvPr id="20" name="Picture 19" descr="image.png"/>
+          <p:cNvPicPr>
+            <a:picLocks noChangeAspect="1"/>
+          </p:cNvPicPr>
+          <p:nvPr/>
+        </p:nvPicPr>
+        <p:blipFill>
+          <a:blip r:embed="rId3"/>
+          <a:stretch>
+            <a:fillRect/>
+          </a:stretch>
+        </p:blipFill>
+        <p:spPr>
+          <a:xfrm>
+            <a:off x="6803136" y="2240280"/>
+            <a:ext cx="365760" cy="365760"/>
+          </a:xfrm>
+          <a:prstGeom prst="rect">
+            <a:avLst/>
+          </a:prstGeom>
+        </p:spPr>
+      </p:pic>
+      <p:sp>
+        <p:nvSpPr>
+          <p:cNvPr id="21" name="TextBox 20"/>
+          <p:cNvSpPr txBox="1"/>
+          <p:nvPr/>
+        </p:nvSpPr>
+        <p:spPr>
+          <a:xfrm>
+            <a:off x="7534656" y="2048256"/>
+            <a:ext cx="4069080" cy="274320"/>
+          </a:xfrm>
+          <a:prstGeom prst="rect">
+            <a:avLst/>
+          </a:prstGeom>
+          <a:noFill/>
+        </p:spPr>
+        <p:txBody>
+          <a:bodyPr wrap="square" lIns="0" rIns="0" tIns="0" bIns="0" anchor="t">
+            <a:spAutoFit/>
+          </a:bodyPr>
+          <a:lstStyle/>
+          <a:p>
+            <a:pPr algn="l"/>
+            <a:r>
+              <a:rPr sz="1100" b="1" i="0">
+                <a:solidFill>
+                  <a:srgbClr val="9FC0C9"/>
+                </a:solidFill>
+                <a:latin typeface="Calibri"/>
+              </a:rPr>
+              <a:t>H2 · PREPROCESSING</a:t>
+            </a:r>
+          </a:p>
+        </p:txBody>
+      </p:sp>
+      <p:sp>
+        <p:nvSpPr>
+          <p:cNvPr id="22" name="TextBox 21"/>
+          <p:cNvSpPr txBox="1"/>
+          <p:nvPr/>
+        </p:nvSpPr>
+        <p:spPr>
+          <a:xfrm>
+            <a:off x="7534656" y="2304288"/>
+            <a:ext cx="4114800" cy="502920"/>
+          </a:xfrm>
+          <a:prstGeom prst="rect">
+            <a:avLst/>
+          </a:prstGeom>
+          <a:noFill/>
+        </p:spPr>
+        <p:txBody>
+          <a:bodyPr wrap="square" lIns="0" rIns="0" tIns="0" bIns="0" anchor="t">
+            <a:spAutoFit/>
+          </a:bodyPr>
+          <a:lstStyle/>
+          <a:p>
+            <a:pPr algn="l"/>
+            <a:r>
+              <a:rPr sz="1650" b="1" i="0">
+                <a:solidFill>
+                  <a:srgbClr val="FFFFFF"/>
+                </a:solidFill>
+                <a:latin typeface="Cambria"/>
+              </a:rPr>
+              <a:t>YUV stain normalisation (Umer [4])</a:t>
+            </a:r>
+          </a:p>
+        </p:txBody>
+      </p:sp>
+      <p:sp>
+        <p:nvSpPr>
+          <p:cNvPr id="23" name="TextBox 22"/>
+          <p:cNvSpPr txBox="1"/>
+          <p:nvPr/>
+        </p:nvSpPr>
+        <p:spPr>
+          <a:xfrm>
+            <a:off x="6638544" y="3017520"/>
+            <a:ext cx="1188720" cy="274320"/>
+          </a:xfrm>
+          <a:prstGeom prst="rect">
+            <a:avLst/>
+          </a:prstGeom>
+          <a:noFill/>
+        </p:spPr>
+        <p:txBody>
+          <a:bodyPr wrap="square" lIns="0" rIns="0" tIns="0" bIns="0" anchor="t">
+            <a:spAutoFit/>
+          </a:bodyPr>
+          <a:lstStyle/>
+          <a:p>
+            <a:pPr algn="l"/>
+            <a:r>
+              <a:rPr sz="1050" b="1" i="0">
+                <a:solidFill>
+                  <a:srgbClr val="9FC0C9"/>
+                </a:solidFill>
+                <a:latin typeface="Calibri"/>
+              </a:rPr>
+              <a:t>CHANGE</a:t>
+            </a:r>
+          </a:p>
+        </p:txBody>
+      </p:sp>
+      <p:sp>
+        <p:nvSpPr>
+          <p:cNvPr id="24" name="TextBox 23"/>
+          <p:cNvSpPr txBox="1"/>
+          <p:nvPr/>
+        </p:nvSpPr>
+        <p:spPr>
+          <a:xfrm>
+            <a:off x="7763256" y="2990088"/>
+            <a:ext cx="3840480" cy="868680"/>
+          </a:xfrm>
+          <a:prstGeom prst="rect">
+            <a:avLst/>
+          </a:prstGeom>
+          <a:noFill/>
+        </p:spPr>
+        <p:txBody>
+          <a:bodyPr wrap="square" lIns="0" rIns="0" tIns="0" bIns="0" anchor="t">
+            <a:spAutoFit/>
+          </a:bodyPr>
+          <a:lstStyle/>
+          <a:p>
+            <a:pPr algn="l"/>
+            <a:r>
+              <a:rPr sz="1200" b="0" i="0">
+                <a:solidFill>
+                  <a:srgbClr val="D5E6EA"/>
+                </a:solidFill>
+                <a:latin typeface="Calibri"/>
+              </a:rPr>
+              <a:t>Add RGB → YUV → histogram-equalise Y → RGB before EfficientNet-B0. Grouped split kept fixed.</a:t>
+            </a:r>
+          </a:p>
+        </p:txBody>
+      </p:sp>
+      <p:sp>
+        <p:nvSpPr>
+          <p:cNvPr id="25" name="TextBox 24"/>
+          <p:cNvSpPr txBox="1"/>
+          <p:nvPr/>
+        </p:nvSpPr>
+        <p:spPr>
+          <a:xfrm>
+            <a:off x="6638544" y="3913631"/>
+            <a:ext cx="1188720" cy="274320"/>
+          </a:xfrm>
+          <a:prstGeom prst="rect">
+            <a:avLst/>
+          </a:prstGeom>
+          <a:noFill/>
+        </p:spPr>
+        <p:txBody>
+          <a:bodyPr wrap="square" lIns="0" rIns="0" tIns="0" bIns="0" anchor="t">
+            <a:spAutoFit/>
+          </a:bodyPr>
+          <a:lstStyle/>
+          <a:p>
+            <a:pPr algn="l"/>
+            <a:r>
+              <a:rPr sz="1050" b="1" i="0">
+                <a:solidFill>
+                  <a:srgbClr val="D99A00"/>
+                </a:solidFill>
+                <a:latin typeface="Calibri"/>
+              </a:rPr>
+              <a:t>WE EXPECT</a:t>
+            </a:r>
+          </a:p>
+        </p:txBody>
+      </p:sp>
+      <p:sp>
+        <p:nvSpPr>
+          <p:cNvPr id="26" name="TextBox 25"/>
+          <p:cNvSpPr txBox="1"/>
+          <p:nvPr/>
+        </p:nvSpPr>
+        <p:spPr>
+          <a:xfrm>
+            <a:off x="7763256" y="3886199"/>
+            <a:ext cx="3840480" cy="868680"/>
+          </a:xfrm>
+          <a:prstGeom prst="rect">
+            <a:avLst/>
+          </a:prstGeom>
+          <a:noFill/>
+        </p:spPr>
+        <p:txBody>
+          <a:bodyPr wrap="square" lIns="0" rIns="0" tIns="0" bIns="0" anchor="t">
+            <a:spAutoFit/>
+          </a:bodyPr>
+          <a:lstStyle/>
+          <a:p>
+            <a:pPr algn="l"/>
+            <a:r>
+              <a:rPr sz="1200" b="1" i="0">
+                <a:solidFill>
+                  <a:srgbClr val="FFFFFF"/>
+                </a:solidFill>
+                <a:latin typeface="Calibri"/>
+              </a:rPr>
+              <a:t>Higher recall and MCC than the H1 model on unseen slides; little change on the random split.</a:t>
+            </a:r>
+          </a:p>
+        </p:txBody>
+      </p:sp>
+      <p:sp>
+        <p:nvSpPr>
+          <p:cNvPr id="27" name="TextBox 26"/>
+          <p:cNvSpPr txBox="1"/>
+          <p:nvPr/>
+        </p:nvSpPr>
+        <p:spPr>
+          <a:xfrm>
+            <a:off x="6638544" y="4809744"/>
+            <a:ext cx="1188720" cy="274320"/>
+          </a:xfrm>
+          <a:prstGeom prst="rect">
+            <a:avLst/>
+          </a:prstGeom>
+          <a:noFill/>
+        </p:spPr>
+        <p:txBody>
+          <a:bodyPr wrap="square" lIns="0" rIns="0" tIns="0" bIns="0" anchor="t">
+            <a:spAutoFit/>
+          </a:bodyPr>
+          <a:lstStyle/>
+          <a:p>
+            <a:pPr algn="l"/>
+            <a:r>
+              <a:rPr sz="1050" b="1" i="0">
+                <a:solidFill>
+                  <a:srgbClr val="9FC0C9"/>
+                </a:solidFill>
+                <a:latin typeface="Calibri"/>
+              </a:rPr>
+              <a:t>BECAUSE</a:t>
+            </a:r>
+          </a:p>
+        </p:txBody>
+      </p:sp>
+      <p:sp>
+        <p:nvSpPr>
+          <p:cNvPr id="28" name="TextBox 27"/>
+          <p:cNvSpPr txBox="1"/>
+          <p:nvPr/>
+        </p:nvSpPr>
+        <p:spPr>
+          <a:xfrm>
+            <a:off x="7763256" y="4782312"/>
+            <a:ext cx="3840480" cy="868680"/>
+          </a:xfrm>
+          <a:prstGeom prst="rect">
+            <a:avLst/>
+          </a:prstGeom>
+          <a:noFill/>
+        </p:spPr>
+        <p:txBody>
+          <a:bodyPr wrap="square" lIns="0" rIns="0" tIns="0" bIns="0" anchor="t">
+            <a:spAutoFit/>
+          </a:bodyPr>
+          <a:lstStyle/>
+          <a:p>
+            <a:pPr algn="l"/>
+            <a:r>
+              <a:rPr sz="1200" b="0" i="0">
+                <a:solidFill>
+                  <a:srgbClr val="D5E6EA"/>
+                </a:solidFill>
+                <a:latin typeface="Calibri"/>
+              </a:rPr>
+              <a:t>Equalising brightness strips slide-specific colour cues, so the network has to rely on parasite morphology. That's the signal that carries across labs.</a:t>
+            </a:r>
+          </a:p>
+        </p:txBody>
+      </p:sp>
+      <p:sp>
+        <p:nvSpPr>
+          <p:cNvPr id="29" name="TextBox 28"/>
+          <p:cNvSpPr txBox="1"/>
+          <p:nvPr/>
+        </p:nvSpPr>
+        <p:spPr>
+          <a:xfrm>
+            <a:off x="640080" y="5925312"/>
+            <a:ext cx="10607040" cy="411480"/>
+          </a:xfrm>
+          <a:prstGeom prst="rect">
+            <a:avLst/>
+          </a:prstGeom>
+          <a:noFill/>
+        </p:spPr>
+        <p:txBody>
+          <a:bodyPr wrap="square" lIns="0" rIns="0" tIns="0" bIns="0" anchor="t">
+            <a:spAutoFit/>
+          </a:bodyPr>
+          <a:lstStyle/>
+          <a:p>
+            <a:pPr algn="l"/>
+            <a:r>
+              <a:rPr sz="1250" b="1" i="0">
+                <a:solidFill>
+                  <a:srgbClr val="D99A00"/>
+                </a:solidFill>
+                <a:latin typeface="Calibri"/>
+              </a:rPr>
+              <a:t>Falsifiable:  </a:t>
+            </a:r>
+            <a:r>
+              <a:rPr sz="1250" b="0" i="0">
+                <a:solidFill>
+                  <a:srgbClr val="CFE3E8"/>
+                </a:solidFill>
+                <a:latin typeface="Calibri"/>
+              </a:rPr>
+              <a:t>if H2's gain over H1 is smaller than the fold-to-fold standard deviation, we reject H2. If grouped and random splits score the same, H1 is rejected and leakage is not a real issue on this dataset.</a:t>
+            </a:r>
+          </a:p>
+        </p:txBody>
+      </p:sp>
+    </p:spTree>
+  </p:cSld>
+  <p:clrMapOvr>
+    <a:masterClrMapping/>
+  </p:clrMapOvr>
+</p:sld>
+</file>
+
+<file path=ppt/slides/slide23.xml><?xml version="1.0" encoding="utf-8"?>
+<p:sld xmlns:a="http://schemas.openxmlformats.org/drawingml/2006/main" xmlns:p="http://schemas.openxmlformats.org/presentationml/2006/main" xmlns:r="http://schemas.openxmlformats.org/officeDocument/2006/relationships">
+  <p:cSld>
+    <p:spTree>
+      <p:nvGrpSpPr>
+        <p:cNvPr id="1" name=""/>
+        <p:cNvGrpSpPr/>
+        <p:nvPr/>
+      </p:nvGrpSpPr>
+      <p:grpSpPr/>
+      <p:sp>
+        <p:nvSpPr>
+          <p:cNvPr id="2" name="TextBox 1"/>
+          <p:cNvSpPr txBox="1"/>
+          <p:nvPr/>
+        </p:nvSpPr>
+        <p:spPr>
+          <a:xfrm>
+            <a:off x="548640" y="457200"/>
+            <a:ext cx="11064240" cy="274320"/>
+          </a:xfrm>
+          <a:prstGeom prst="rect">
+            <a:avLst/>
+          </a:prstGeom>
+          <a:noFill/>
+        </p:spPr>
+        <p:txBody>
+          <a:bodyPr wrap="square" lIns="0" rIns="0" tIns="0" bIns="0" anchor="t">
+            <a:spAutoFit/>
+          </a:bodyPr>
+          <a:lstStyle/>
+          <a:p>
+            <a:pPr algn="l"/>
+            <a:r>
+              <a:rPr sz="1250" b="1" i="0">
+                <a:solidFill>
+                  <a:srgbClr val="137C8E"/>
+                </a:solidFill>
+                <a:latin typeface="Calibri"/>
+              </a:rPr>
+              <a:t>HOW WE WILL TEST IT</a:t>
+            </a:r>
+          </a:p>
+        </p:txBody>
+      </p:sp>
+      <p:sp>
+        <p:nvSpPr>
+          <p:cNvPr id="3" name="TextBox 2"/>
+          <p:cNvSpPr txBox="1"/>
+          <p:nvPr/>
+        </p:nvSpPr>
+        <p:spPr>
+          <a:xfrm>
+            <a:off x="548640" y="749808"/>
+            <a:ext cx="11064240" cy="658368"/>
+          </a:xfrm>
+          <a:prstGeom prst="rect">
+            <a:avLst/>
+          </a:prstGeom>
+          <a:noFill/>
+        </p:spPr>
+        <p:txBody>
+          <a:bodyPr wrap="square" lIns="0" rIns="0" tIns="0" bIns="0" anchor="t">
+            <a:spAutoFit/>
+          </a:bodyPr>
+          <a:lstStyle/>
+          <a:p>
+            <a:pPr algn="l"/>
+            <a:r>
+              <a:rPr sz="3000" b="1" i="0">
+                <a:solidFill>
+                  <a:srgbClr val="17262E"/>
+                </a:solidFill>
+                <a:latin typeface="Cambria"/>
+              </a:rPr>
+              <a:t>Ablation plan &amp; success criteria</a:t>
+            </a:r>
+          </a:p>
+        </p:txBody>
+      </p:sp>
+      <p:sp>
+        <p:nvSpPr>
+          <p:cNvPr id="4" name="TextBox 3"/>
+          <p:cNvSpPr txBox="1"/>
+          <p:nvPr/>
+        </p:nvSpPr>
+        <p:spPr>
+          <a:xfrm>
+            <a:off x="548640" y="1463040"/>
+            <a:ext cx="11064240" cy="457200"/>
+          </a:xfrm>
+          <a:prstGeom prst="rect">
+            <a:avLst/>
+          </a:prstGeom>
+          <a:noFill/>
+        </p:spPr>
+        <p:txBody>
+          <a:bodyPr wrap="square" lIns="0" rIns="0" tIns="0" bIns="0" anchor="t">
+            <a:spAutoFit/>
+          </a:bodyPr>
+          <a:lstStyle/>
+          <a:p>
+            <a:pPr algn="l"/>
+            <a:r>
+              <a:rPr sz="1550" b="0" i="0">
+                <a:solidFill>
+                  <a:srgbClr val="41525B"/>
+                </a:solidFill>
+                <a:latin typeface="Calibri"/>
+              </a:rPr>
+              <a:t>Each comparison changes exactly one thing (shown in brackets). Same seeds, epochs and folds throughout.</a:t>
+            </a:r>
+          </a:p>
+        </p:txBody>
+      </p:sp>
+      <p:graphicFrame>
+        <p:nvGraphicFramePr>
+          <p:cNvPr id="5" name="Table 4"/>
+          <p:cNvGraphicFramePr>
+            <a:graphicFrameLocks noGrp="1"/>
+          </p:cNvGraphicFramePr>
+          <p:nvPr/>
+        </p:nvGraphicFramePr>
+        <p:xfrm>
+          <a:off x="548640" y="2103120"/>
+          <a:ext cx="11091672" cy="2560320"/>
+        </p:xfrm>
+        <a:graphic>
+          <a:graphicData uri="http://schemas.openxmlformats.org/drawingml/2006/table">
+            <a:tbl>
+              <a:tblPr firstRow="1" bandRow="0">
+                <a:tableStyleId>{5C22544A-7EE6-4342-B048-85BDC9FD1C3A}</a:tableStyleId>
+              </a:tblPr>
+              <a:tblGrid>
+                <a:gridCol w="640080"/>
+                <a:gridCol w="1920240"/>
+                <a:gridCol w="1691640"/>
+                <a:gridCol w="5468112"/>
+                <a:gridCol w="1371600"/>
+              </a:tblGrid>
+              <a:tr h="512064">
+                <a:tc>
+                  <a:txBody>
+                    <a:bodyPr wrap="square"/>
+                    <a:lstStyle/>
+                    <a:p>
+                      <a:r>
+                        <a:rPr sz="1250" b="1">
+                          <a:solidFill>
+                            <a:srgbClr val="FFFFFF"/>
+                          </a:solidFill>
+                          <a:latin typeface="Calibri"/>
+                        </a:rPr>
+                        <a:t>ID</a:t>
+                      </a:r>
+                    </a:p>
+                  </a:txBody>
+                  <a:tcPr marL="73152" marR="73152" marT="27432" marB="27432" anchor="ctr">
+                    <a:solidFill>
+                      <a:srgbClr val="17262E"/>
+                    </a:solidFill>
+                  </a:tcPr>
+                </a:tc>
+                <a:tc>
+                  <a:txBody>
+                    <a:bodyPr wrap="square"/>
+                    <a:lstStyle/>
+                    <a:p>
+                      <a:r>
+                        <a:rPr sz="1250" b="1">
+                          <a:solidFill>
+                            <a:srgbClr val="FFFFFF"/>
+                          </a:solidFill>
+                          <a:latin typeface="Calibri"/>
+                        </a:rPr>
+                        <a:t>Split</a:t>
+                      </a:r>
+                    </a:p>
+                  </a:txBody>
+                  <a:tcPr marL="73152" marR="73152" marT="27432" marB="27432" anchor="ctr">
+                    <a:solidFill>
+                      <a:srgbClr val="17262E"/>
+                    </a:solidFill>
+                  </a:tcPr>
+                </a:tc>
+                <a:tc>
+                  <a:txBody>
+                    <a:bodyPr wrap="square"/>
+                    <a:lstStyle/>
+                    <a:p>
+                      <a:r>
+                        <a:rPr sz="1250" b="1">
+                          <a:solidFill>
+                            <a:srgbClr val="FFFFFF"/>
+                          </a:solidFill>
+                          <a:latin typeface="Calibri"/>
+                        </a:rPr>
+                        <a:t>Preprocessing</a:t>
+                      </a:r>
+                    </a:p>
+                  </a:txBody>
+                  <a:tcPr marL="73152" marR="73152" marT="27432" marB="27432" anchor="ctr">
+                    <a:solidFill>
+                      <a:srgbClr val="17262E"/>
+                    </a:solidFill>
+                  </a:tcPr>
+                </a:tc>
+                <a:tc>
+                  <a:txBody>
+                    <a:bodyPr wrap="square"/>
+                    <a:lstStyle/>
+                    <a:p>
+                      <a:r>
+                        <a:rPr sz="1250" b="1">
+                          <a:solidFill>
+                            <a:srgbClr val="FFFFFF"/>
+                          </a:solidFill>
+                          <a:latin typeface="Calibri"/>
+                        </a:rPr>
+                        <a:t>What it answers</a:t>
+                      </a:r>
+                    </a:p>
+                  </a:txBody>
+                  <a:tcPr marL="73152" marR="73152" marT="27432" marB="27432" anchor="ctr">
+                    <a:solidFill>
+                      <a:srgbClr val="17262E"/>
+                    </a:solidFill>
+                  </a:tcPr>
+                </a:tc>
+                <a:tc>
+                  <a:txBody>
+                    <a:bodyPr wrap="square"/>
+                    <a:lstStyle/>
+                    <a:p>
+                      <a:r>
+                        <a:rPr sz="1250" b="1">
+                          <a:solidFill>
+                            <a:srgbClr val="FFFFFF"/>
+                          </a:solidFill>
+                          <a:latin typeface="Calibri"/>
+                        </a:rPr>
+                        <a:t>Status</a:t>
+                      </a:r>
+                    </a:p>
+                  </a:txBody>
+                  <a:tcPr marL="73152" marR="73152" marT="27432" marB="27432" anchor="ctr">
+                    <a:solidFill>
+                      <a:srgbClr val="17262E"/>
+                    </a:solidFill>
+                  </a:tcPr>
+                </a:tc>
+              </a:tr>
+              <a:tr h="512064">
+                <a:tc>
+                  <a:txBody>
+                    <a:bodyPr wrap="square"/>
+                    <a:lstStyle/>
+                    <a:p>
+                      <a:r>
+                        <a:rPr sz="1250" b="1">
+                          <a:solidFill>
+                            <a:srgbClr val="17262E"/>
+                          </a:solidFill>
+                          <a:latin typeface="Calibri"/>
+                        </a:rPr>
+                        <a:t>A0</a:t>
+                      </a:r>
+                    </a:p>
+                  </a:txBody>
+                  <a:tcPr marL="73152" marR="73152" marT="27432" marB="27432" anchor="ctr">
+                    <a:solidFill>
+                      <a:srgbClr val="FFFFFF"/>
+                    </a:solidFill>
+                  </a:tcPr>
+                </a:tc>
+                <a:tc>
+                  <a:txBody>
+                    <a:bodyPr wrap="square"/>
+                    <a:lstStyle/>
+                    <a:p>
+                      <a:r>
+                        <a:rPr sz="1250" b="0">
+                          <a:solidFill>
+                            <a:srgbClr val="41525B"/>
+                          </a:solidFill>
+                          <a:latin typeface="Calibri"/>
+                        </a:rPr>
+                        <a:t>Image-level (paper)</a:t>
+                      </a:r>
+                    </a:p>
+                  </a:txBody>
+                  <a:tcPr marL="73152" marR="73152" marT="27432" marB="27432" anchor="ctr">
+                    <a:solidFill>
+                      <a:srgbClr val="FFFFFF"/>
+                    </a:solidFill>
+                  </a:tcPr>
+                </a:tc>
+                <a:tc>
+                  <a:txBody>
+                    <a:bodyPr wrap="square"/>
+                    <a:lstStyle/>
+                    <a:p>
+                      <a:r>
+                        <a:rPr sz="1250" b="0">
+                          <a:solidFill>
+                            <a:srgbClr val="41525B"/>
+                          </a:solidFill>
+                          <a:latin typeface="Calibri"/>
+                        </a:rPr>
+                        <a:t>None</a:t>
+                      </a:r>
+                    </a:p>
+                  </a:txBody>
+                  <a:tcPr marL="73152" marR="73152" marT="27432" marB="27432" anchor="ctr">
+                    <a:solidFill>
+                      <a:srgbClr val="FFFFFF"/>
+                    </a:solidFill>
+                  </a:tcPr>
+                </a:tc>
+                <a:tc>
+                  <a:txBody>
+                    <a:bodyPr wrap="square"/>
+                    <a:lstStyle/>
+                    <a:p>
+                      <a:r>
+                        <a:rPr sz="1250" b="0">
+                          <a:solidFill>
+                            <a:srgbClr val="41525B"/>
+                          </a:solidFill>
+                          <a:latin typeface="Calibri"/>
+                        </a:rPr>
+                        <a:t>Baseline: does our reproduction match [8]?</a:t>
+                      </a:r>
+                    </a:p>
+                  </a:txBody>
+                  <a:tcPr marL="73152" marR="73152" marT="27432" marB="27432" anchor="ctr">
+                    <a:solidFill>
+                      <a:srgbClr val="FFFFFF"/>
+                    </a:solidFill>
+                  </a:tcPr>
+                </a:tc>
+                <a:tc>
+                  <a:txBody>
+                    <a:bodyPr wrap="square"/>
+                    <a:lstStyle/>
+                    <a:p>
+                      <a:r>
+                        <a:rPr sz="1250" b="1">
+                          <a:solidFill>
+                            <a:srgbClr val="2EA79B"/>
+                          </a:solidFill>
+                          <a:latin typeface="Calibri"/>
+                        </a:rPr>
+                        <a:t>Milestone 2 ✓</a:t>
+                      </a:r>
+                    </a:p>
+                  </a:txBody>
+                  <a:tcPr marL="73152" marR="73152" marT="27432" marB="27432" anchor="ctr">
+                    <a:solidFill>
+                      <a:srgbClr val="FFFFFF"/>
+                    </a:solidFill>
+                  </a:tcPr>
+                </a:tc>
+              </a:tr>
+              <a:tr h="512064">
+                <a:tc>
+                  <a:txBody>
+                    <a:bodyPr wrap="square"/>
+                    <a:lstStyle/>
+                    <a:p>
+                      <a:r>
+                        <a:rPr sz="1250" b="1">
+                          <a:solidFill>
+                            <a:srgbClr val="17262E"/>
+                          </a:solidFill>
+                          <a:latin typeface="Calibri"/>
+                        </a:rPr>
+                        <a:t>A1</a:t>
+                      </a:r>
+                    </a:p>
+                  </a:txBody>
+                  <a:tcPr marL="73152" marR="73152" marT="27432" marB="27432" anchor="ctr">
+                    <a:solidFill>
+                      <a:srgbClr val="F5F9FA"/>
+                    </a:solidFill>
+                  </a:tcPr>
+                </a:tc>
+                <a:tc>
+                  <a:txBody>
+                    <a:bodyPr wrap="square"/>
+                    <a:lstStyle/>
+                    <a:p>
+                      <a:r>
+                        <a:rPr sz="1250" b="0">
+                          <a:solidFill>
+                            <a:srgbClr val="41525B"/>
+                          </a:solidFill>
+                          <a:latin typeface="Calibri"/>
+                        </a:rPr>
+                        <a:t>Slide-grouped</a:t>
+                      </a:r>
+                    </a:p>
+                  </a:txBody>
+                  <a:tcPr marL="73152" marR="73152" marT="27432" marB="27432" anchor="ctr">
+                    <a:solidFill>
+                      <a:srgbClr val="F5F9FA"/>
+                    </a:solidFill>
+                  </a:tcPr>
+                </a:tc>
+                <a:tc>
+                  <a:txBody>
+                    <a:bodyPr wrap="square"/>
+                    <a:lstStyle/>
+                    <a:p>
+                      <a:r>
+                        <a:rPr sz="1250" b="0">
+                          <a:solidFill>
+                            <a:srgbClr val="41525B"/>
+                          </a:solidFill>
+                          <a:latin typeface="Calibri"/>
+                        </a:rPr>
+                        <a:t>None</a:t>
+                      </a:r>
+                    </a:p>
+                  </a:txBody>
+                  <a:tcPr marL="73152" marR="73152" marT="27432" marB="27432" anchor="ctr">
+                    <a:solidFill>
+                      <a:srgbClr val="F5F9FA"/>
+                    </a:solidFill>
+                  </a:tcPr>
+                </a:tc>
+                <a:tc>
+                  <a:txBody>
+                    <a:bodyPr wrap="square"/>
+                    <a:lstStyle/>
+                    <a:p>
+                      <a:r>
+                        <a:rPr sz="1250" b="0">
+                          <a:solidFill>
+                            <a:srgbClr val="41525B"/>
+                          </a:solidFill>
+                          <a:latin typeface="Calibri"/>
+                        </a:rPr>
+                        <a:t>H1: how big is the leakage gap (A0 − A1)?</a:t>
+                      </a:r>
+                    </a:p>
+                  </a:txBody>
+                  <a:tcPr marL="73152" marR="73152" marT="27432" marB="27432" anchor="ctr">
+                    <a:solidFill>
+                      <a:srgbClr val="F5F9FA"/>
+                    </a:solidFill>
+                  </a:tcPr>
+                </a:tc>
+                <a:tc>
+                  <a:txBody>
+                    <a:bodyPr wrap="square"/>
+                    <a:lstStyle/>
+                    <a:p>
+                      <a:r>
+                        <a:rPr sz="1250" b="1">
+                          <a:solidFill>
+                            <a:srgbClr val="D99A00"/>
+                          </a:solidFill>
+                          <a:latin typeface="Calibri"/>
+                        </a:rPr>
+                        <a:t>Next</a:t>
+                      </a:r>
+                    </a:p>
+                  </a:txBody>
+                  <a:tcPr marL="73152" marR="73152" marT="27432" marB="27432" anchor="ctr">
+                    <a:solidFill>
+                      <a:srgbClr val="F5F9FA"/>
+                    </a:solidFill>
+                  </a:tcPr>
+                </a:tc>
+              </a:tr>
+              <a:tr h="512064">
+                <a:tc>
+                  <a:txBody>
+                    <a:bodyPr wrap="square"/>
+                    <a:lstStyle/>
+                    <a:p>
+                      <a:r>
+                        <a:rPr sz="1250" b="1">
+                          <a:solidFill>
+                            <a:srgbClr val="17262E"/>
+                          </a:solidFill>
+                          <a:latin typeface="Calibri"/>
+                        </a:rPr>
+                        <a:t>A2</a:t>
+                      </a:r>
+                    </a:p>
+                  </a:txBody>
+                  <a:tcPr marL="73152" marR="73152" marT="27432" marB="27432" anchor="ctr">
+                    <a:solidFill>
+                      <a:srgbClr val="FFFFFF"/>
+                    </a:solidFill>
+                  </a:tcPr>
+                </a:tc>
+                <a:tc>
+                  <a:txBody>
+                    <a:bodyPr wrap="square"/>
+                    <a:lstStyle/>
+                    <a:p>
+                      <a:r>
+                        <a:rPr sz="1250" b="0">
+                          <a:solidFill>
+                            <a:srgbClr val="41525B"/>
+                          </a:solidFill>
+                          <a:latin typeface="Calibri"/>
+                        </a:rPr>
+                        <a:t>Slide-grouped</a:t>
+                      </a:r>
+                    </a:p>
+                  </a:txBody>
+                  <a:tcPr marL="73152" marR="73152" marT="27432" marB="27432" anchor="ctr">
+                    <a:solidFill>
+                      <a:srgbClr val="FFFFFF"/>
+                    </a:solidFill>
+                  </a:tcPr>
+                </a:tc>
+                <a:tc>
+                  <a:txBody>
+                    <a:bodyPr wrap="square"/>
+                    <a:lstStyle/>
+                    <a:p>
+                      <a:r>
+                        <a:rPr sz="1250" b="0">
+                          <a:solidFill>
+                            <a:srgbClr val="41525B"/>
+                          </a:solidFill>
+                          <a:latin typeface="Calibri"/>
+                        </a:rPr>
+                        <a:t>YUV + hist-eq</a:t>
+                      </a:r>
+                    </a:p>
+                  </a:txBody>
+                  <a:tcPr marL="73152" marR="73152" marT="27432" marB="27432" anchor="ctr">
+                    <a:solidFill>
+                      <a:srgbClr val="FFFFFF"/>
+                    </a:solidFill>
+                  </a:tcPr>
+                </a:tc>
+                <a:tc>
+                  <a:txBody>
+                    <a:bodyPr wrap="square"/>
+                    <a:lstStyle/>
+                    <a:p>
+                      <a:r>
+                        <a:rPr sz="1250" b="0">
+                          <a:solidFill>
+                            <a:srgbClr val="41525B"/>
+                          </a:solidFill>
+                          <a:latin typeface="Calibri"/>
+                        </a:rPr>
+                        <a:t>H2: does stain normalisation help on unseen slides (A2 − A1)?</a:t>
+                      </a:r>
+                    </a:p>
+                  </a:txBody>
+                  <a:tcPr marL="73152" marR="73152" marT="27432" marB="27432" anchor="ctr">
+                    <a:solidFill>
+                      <a:srgbClr val="FFFFFF"/>
+                    </a:solidFill>
+                  </a:tcPr>
+                </a:tc>
+                <a:tc>
+                  <a:txBody>
+                    <a:bodyPr wrap="square"/>
+                    <a:lstStyle/>
+                    <a:p>
+                      <a:r>
+                        <a:rPr sz="1250" b="1">
+                          <a:solidFill>
+                            <a:srgbClr val="D99A00"/>
+                          </a:solidFill>
+                          <a:latin typeface="Calibri"/>
+                        </a:rPr>
+                        <a:t>Next</a:t>
+                      </a:r>
+                    </a:p>
+                  </a:txBody>
+                  <a:tcPr marL="73152" marR="73152" marT="27432" marB="27432" anchor="ctr">
+                    <a:solidFill>
+                      <a:srgbClr val="FFFFFF"/>
+                    </a:solidFill>
+                  </a:tcPr>
+                </a:tc>
+              </a:tr>
+              <a:tr h="512064">
+                <a:tc>
+                  <a:txBody>
+                    <a:bodyPr wrap="square"/>
+                    <a:lstStyle/>
+                    <a:p>
+                      <a:r>
+                        <a:rPr sz="1250" b="1">
+                          <a:solidFill>
+                            <a:srgbClr val="17262E"/>
+                          </a:solidFill>
+                          <a:latin typeface="Calibri"/>
+                        </a:rPr>
+                        <a:t>A3</a:t>
+                      </a:r>
+                    </a:p>
+                  </a:txBody>
+                  <a:tcPr marL="73152" marR="73152" marT="27432" marB="27432" anchor="ctr">
+                    <a:solidFill>
+                      <a:srgbClr val="F5F9FA"/>
+                    </a:solidFill>
+                  </a:tcPr>
+                </a:tc>
+                <a:tc>
+                  <a:txBody>
+                    <a:bodyPr wrap="square"/>
+                    <a:lstStyle/>
+                    <a:p>
+                      <a:r>
+                        <a:rPr sz="1250" b="0">
+                          <a:solidFill>
+                            <a:srgbClr val="41525B"/>
+                          </a:solidFill>
+                          <a:latin typeface="Calibri"/>
+                        </a:rPr>
+                        <a:t>Image-level</a:t>
+                      </a:r>
+                    </a:p>
+                  </a:txBody>
+                  <a:tcPr marL="73152" marR="73152" marT="27432" marB="27432" anchor="ctr">
+                    <a:solidFill>
+                      <a:srgbClr val="F5F9FA"/>
+                    </a:solidFill>
+                  </a:tcPr>
+                </a:tc>
+                <a:tc>
+                  <a:txBody>
+                    <a:bodyPr wrap="square"/>
+                    <a:lstStyle/>
+                    <a:p>
+                      <a:r>
+                        <a:rPr sz="1250" b="0">
+                          <a:solidFill>
+                            <a:srgbClr val="41525B"/>
+                          </a:solidFill>
+                          <a:latin typeface="Calibri"/>
+                        </a:rPr>
+                        <a:t>YUV + hist-eq</a:t>
+                      </a:r>
+                    </a:p>
+                  </a:txBody>
+                  <a:tcPr marL="73152" marR="73152" marT="27432" marB="27432" anchor="ctr">
+                    <a:solidFill>
+                      <a:srgbClr val="F5F9FA"/>
+                    </a:solidFill>
+                  </a:tcPr>
+                </a:tc>
+                <a:tc>
+                  <a:txBody>
+                    <a:bodyPr wrap="square"/>
+                    <a:lstStyle/>
+                    <a:p>
+                      <a:r>
+                        <a:rPr sz="1250" b="0">
+                          <a:solidFill>
+                            <a:srgbClr val="41525B"/>
+                          </a:solidFill>
+                          <a:latin typeface="Calibri"/>
+                        </a:rPr>
+                        <a:t>Control: is H2's gain specific to new slides (A3 − A0 ≈ 0)?</a:t>
+                      </a:r>
+                    </a:p>
+                  </a:txBody>
+                  <a:tcPr marL="73152" marR="73152" marT="27432" marB="27432" anchor="ctr">
+                    <a:solidFill>
+                      <a:srgbClr val="F5F9FA"/>
+                    </a:solidFill>
+                  </a:tcPr>
+                </a:tc>
+                <a:tc>
+                  <a:txBody>
+                    <a:bodyPr wrap="square"/>
+                    <a:lstStyle/>
+                    <a:p>
+                      <a:r>
+                        <a:rPr sz="1250" b="1">
+                          <a:solidFill>
+                            <a:srgbClr val="D99A00"/>
+                          </a:solidFill>
+                          <a:latin typeface="Calibri"/>
+                        </a:rPr>
+                        <a:t>Next</a:t>
+                      </a:r>
+                    </a:p>
+                  </a:txBody>
+                  <a:tcPr marL="73152" marR="73152" marT="27432" marB="27432" anchor="ctr">
+                    <a:solidFill>
+                      <a:srgbClr val="F5F9FA"/>
+                    </a:solidFill>
+                  </a:tcPr>
+                </a:tc>
+              </a:tr>
+            </a:tbl>
+          </a:graphicData>
+        </a:graphic>
+      </p:graphicFrame>
+      <p:sp>
+        <p:nvSpPr>
+          <p:cNvPr id="6" name="Rounded Rectangle 5"/>
+          <p:cNvSpPr/>
+          <p:nvPr/>
+        </p:nvSpPr>
+        <p:spPr>
+          <a:xfrm>
+            <a:off x="548640" y="4919472"/>
+            <a:ext cx="3575304" cy="1325880"/>
+          </a:xfrm>
+          <a:prstGeom prst="roundRect">
+            <a:avLst>
+              <a:gd name="adj" fmla="val 6000"/>
+            </a:avLst>
+          </a:prstGeom>
+          <a:solidFill>
+            <a:srgbClr val="F5F9FA"/>
+          </a:solidFill>
+          <a:ln w="12700">
+            <a:solidFill>
+              <a:srgbClr val="D3E1E6"/>
+            </a:solidFill>
+          </a:ln>
+          <a:effectLst/>
+        </p:spPr>
+        <p:style>
+          <a:lnRef idx="1">
+            <a:schemeClr val="accent1"/>
+          </a:lnRef>
+          <a:fillRef idx="3">
+            <a:schemeClr val="accent1"/>
+          </a:fillRef>
+          <a:effectRef idx="2">
+            <a:schemeClr val="accent1"/>
+          </a:effectRef>
+          <a:fontRef idx="minor">
+            <a:schemeClr val="lt1"/>
+          </a:fontRef>
+        </p:style>
+        <p:txBody>
+          <a:bodyPr rtlCol="0" anchor="ctr"/>
+          <a:lstStyle/>
+          <a:p/>
+        </p:txBody>
+      </p:sp>
+      <p:sp>
+        <p:nvSpPr>
+          <p:cNvPr id="7" name="Oval 6"/>
+          <p:cNvSpPr/>
+          <p:nvPr/>
+        </p:nvSpPr>
+        <p:spPr>
+          <a:xfrm>
+            <a:off x="749808" y="5074920"/>
+            <a:ext cx="566928" cy="566928"/>
+          </a:xfrm>
+          <a:prstGeom prst="ellipse">
+            <a:avLst/>
+          </a:prstGeom>
+          <a:solidFill>
+            <a:srgbClr val="137C8E"/>
+          </a:solidFill>
+          <a:ln>
+            <a:noFill/>
+          </a:ln>
+          <a:effectLst/>
+        </p:spPr>
+        <p:style>
+          <a:lnRef idx="1">
+            <a:schemeClr val="accent1"/>
+          </a:lnRef>
+          <a:fillRef idx="3">
+            <a:schemeClr val="accent1"/>
+          </a:fillRef>
+          <a:effectRef idx="2">
+            <a:schemeClr val="accent1"/>
+          </a:effectRef>
+          <a:fontRef idx="minor">
+            <a:schemeClr val="lt1"/>
+          </a:fontRef>
+        </p:style>
+        <p:txBody>
+          <a:bodyPr rtlCol="0" anchor="ctr"/>
+          <a:lstStyle/>
+          <a:p/>
+        </p:txBody>
+      </p:sp>
+      <p:pic>
+        <p:nvPicPr>
+          <p:cNvPr id="8" name="Picture 7" descr="image.png"/>
+          <p:cNvPicPr>
+            <a:picLocks noChangeAspect="1"/>
+          </p:cNvPicPr>
+          <p:nvPr/>
+        </p:nvPicPr>
+        <p:blipFill>
+          <a:blip r:embed="rId2"/>
+          <a:stretch>
+            <a:fillRect/>
+          </a:stretch>
+        </p:blipFill>
+        <p:spPr>
+          <a:xfrm>
+            <a:off x="891540" y="5216652"/>
+            <a:ext cx="283464" cy="283464"/>
+          </a:xfrm>
+          <a:prstGeom prst="rect">
+            <a:avLst/>
+          </a:prstGeom>
+        </p:spPr>
+      </p:pic>
+      <p:sp>
+        <p:nvSpPr>
+          <p:cNvPr id="9" name="TextBox 8"/>
+          <p:cNvSpPr txBox="1"/>
+          <p:nvPr/>
+        </p:nvSpPr>
+        <p:spPr>
+          <a:xfrm>
+            <a:off x="1481328" y="5093208"/>
+            <a:ext cx="2514600" cy="310896"/>
+          </a:xfrm>
+          <a:prstGeom prst="rect">
+            <a:avLst/>
+          </a:prstGeom>
+          <a:noFill/>
+        </p:spPr>
+        <p:txBody>
+          <a:bodyPr wrap="square" lIns="0" rIns="0" tIns="0" bIns="0" anchor="t">
+            <a:spAutoFit/>
+          </a:bodyPr>
+          <a:lstStyle/>
+          <a:p>
+            <a:pPr algn="l"/>
+            <a:r>
+              <a:rPr sz="1450" b="1" i="0">
+                <a:solidFill>
+                  <a:srgbClr val="17262E"/>
+                </a:solidFill>
+                <a:latin typeface="Cambria"/>
+              </a:rPr>
+              <a:t>Metrics</a:t>
+            </a:r>
+          </a:p>
+        </p:txBody>
+      </p:sp>
+      <p:sp>
+        <p:nvSpPr>
+          <p:cNvPr id="10" name="TextBox 9"/>
+          <p:cNvSpPr txBox="1"/>
+          <p:nvPr/>
+        </p:nvSpPr>
+        <p:spPr>
+          <a:xfrm>
+            <a:off x="1481328" y="5422392"/>
+            <a:ext cx="2560320" cy="777240"/>
+          </a:xfrm>
+          <a:prstGeom prst="rect">
+            <a:avLst/>
+          </a:prstGeom>
+          <a:noFill/>
+        </p:spPr>
+        <p:txBody>
+          <a:bodyPr wrap="square" lIns="0" rIns="0" tIns="0" bIns="0" anchor="t">
+            <a:spAutoFit/>
+          </a:bodyPr>
+          <a:lstStyle/>
+          <a:p>
+            <a:pPr algn="l"/>
+            <a:r>
+              <a:rPr sz="1150" b="0" i="0">
+                <a:solidFill>
+                  <a:srgbClr val="41525B"/>
+                </a:solidFill>
+                <a:latin typeface="Calibri"/>
+              </a:rPr>
+              <a:t>Accuracy, recall (missed infections), MCC, ROC-AUC. Mean ± SD over folds plus the hold-out ensemble.</a:t>
+            </a:r>
+          </a:p>
+        </p:txBody>
+      </p:sp>
+      <p:sp>
+        <p:nvSpPr>
+          <p:cNvPr id="11" name="Rounded Rectangle 10"/>
+          <p:cNvSpPr/>
+          <p:nvPr/>
+        </p:nvSpPr>
+        <p:spPr>
+          <a:xfrm>
+            <a:off x="4306824" y="4919472"/>
+            <a:ext cx="3575304" cy="1325880"/>
+          </a:xfrm>
+          <a:prstGeom prst="roundRect">
+            <a:avLst>
+              <a:gd name="adj" fmla="val 6000"/>
+            </a:avLst>
+          </a:prstGeom>
+          <a:solidFill>
+            <a:srgbClr val="F5F9FA"/>
+          </a:solidFill>
+          <a:ln w="12700">
+            <a:solidFill>
+              <a:srgbClr val="D3E1E6"/>
+            </a:solidFill>
+          </a:ln>
+          <a:effectLst/>
+        </p:spPr>
+        <p:style>
+          <a:lnRef idx="1">
+            <a:schemeClr val="accent1"/>
+          </a:lnRef>
+          <a:fillRef idx="3">
+            <a:schemeClr val="accent1"/>
+          </a:fillRef>
+          <a:effectRef idx="2">
+            <a:schemeClr val="accent1"/>
+          </a:effectRef>
+          <a:fontRef idx="minor">
+            <a:schemeClr val="lt1"/>
+          </a:fontRef>
+        </p:style>
+        <p:txBody>
+          <a:bodyPr rtlCol="0" anchor="ctr"/>
+          <a:lstStyle/>
+          <a:p/>
+        </p:txBody>
+      </p:sp>
+      <p:sp>
+        <p:nvSpPr>
+          <p:cNvPr id="12" name="Oval 11"/>
+          <p:cNvSpPr/>
+          <p:nvPr/>
+        </p:nvSpPr>
+        <p:spPr>
+          <a:xfrm>
+            <a:off x="4507992" y="5074920"/>
+            <a:ext cx="566928" cy="566928"/>
+          </a:xfrm>
+          <a:prstGeom prst="ellipse">
+            <a:avLst/>
+          </a:prstGeom>
+          <a:solidFill>
+            <a:srgbClr val="CC4A3F"/>
+          </a:solidFill>
+          <a:ln>
+            <a:noFill/>
+          </a:ln>
+          <a:effectLst/>
+        </p:spPr>
+        <p:style>
+          <a:lnRef idx="1">
+            <a:schemeClr val="accent1"/>
+          </a:lnRef>
+          <a:fillRef idx="3">
+            <a:schemeClr val="accent1"/>
+          </a:fillRef>
+          <a:effectRef idx="2">
+            <a:schemeClr val="accent1"/>
+          </a:effectRef>
+          <a:fontRef idx="minor">
+            <a:schemeClr val="lt1"/>
+          </a:fontRef>
+        </p:style>
+        <p:txBody>
+          <a:bodyPr rtlCol="0" anchor="ctr"/>
+          <a:lstStyle/>
+          <a:p/>
+        </p:txBody>
+      </p:sp>
+      <p:pic>
+        <p:nvPicPr>
+          <p:cNvPr id="13" name="Picture 12" descr="image.png"/>
+          <p:cNvPicPr>
+            <a:picLocks noChangeAspect="1"/>
+          </p:cNvPicPr>
+          <p:nvPr/>
+        </p:nvPicPr>
+        <p:blipFill>
+          <a:blip r:embed="rId3"/>
+          <a:stretch>
+            <a:fillRect/>
+          </a:stretch>
+        </p:blipFill>
+        <p:spPr>
+          <a:xfrm>
+            <a:off x="4649724" y="5216652"/>
+            <a:ext cx="283464" cy="283464"/>
+          </a:xfrm>
+          <a:prstGeom prst="rect">
+            <a:avLst/>
+          </a:prstGeom>
+        </p:spPr>
+      </p:pic>
+      <p:sp>
+        <p:nvSpPr>
+          <p:cNvPr id="14" name="TextBox 13"/>
+          <p:cNvSpPr txBox="1"/>
+          <p:nvPr/>
+        </p:nvSpPr>
+        <p:spPr>
+          <a:xfrm>
+            <a:off x="5239512" y="5093208"/>
+            <a:ext cx="2514600" cy="310896"/>
+          </a:xfrm>
+          <a:prstGeom prst="rect">
+            <a:avLst/>
+          </a:prstGeom>
+          <a:noFill/>
+        </p:spPr>
+        <p:txBody>
+          <a:bodyPr wrap="square" lIns="0" rIns="0" tIns="0" bIns="0" anchor="t">
+            <a:spAutoFit/>
+          </a:bodyPr>
+          <a:lstStyle/>
+          <a:p>
+            <a:pPr algn="l"/>
+            <a:r>
+              <a:rPr sz="1450" b="1" i="0">
+                <a:solidFill>
+                  <a:srgbClr val="17262E"/>
+                </a:solidFill>
+                <a:latin typeface="Cambria"/>
+              </a:rPr>
+              <a:t>Clinical priority</a:t>
+            </a:r>
+          </a:p>
+        </p:txBody>
+      </p:sp>
+      <p:sp>
+        <p:nvSpPr>
+          <p:cNvPr id="15" name="TextBox 14"/>
+          <p:cNvSpPr txBox="1"/>
+          <p:nvPr/>
+        </p:nvSpPr>
+        <p:spPr>
+          <a:xfrm>
+            <a:off x="5239512" y="5422392"/>
+            <a:ext cx="2560320" cy="777240"/>
+          </a:xfrm>
+          <a:prstGeom prst="rect">
+            <a:avLst/>
+          </a:prstGeom>
+          <a:noFill/>
+        </p:spPr>
+        <p:txBody>
+          <a:bodyPr wrap="square" lIns="0" rIns="0" tIns="0" bIns="0" anchor="t">
+            <a:spAutoFit/>
+          </a:bodyPr>
+          <a:lstStyle/>
+          <a:p>
+            <a:pPr algn="l"/>
+            <a:r>
+              <a:rPr sz="1150" b="0" i="0">
+                <a:solidFill>
+                  <a:srgbClr val="41525B"/>
+                </a:solidFill>
+                <a:latin typeface="Calibri"/>
+              </a:rPr>
+              <a:t>Recall first: a missed parasitized cell (false negative) costs more than a false alarm.</a:t>
+            </a:r>
+          </a:p>
+        </p:txBody>
+      </p:sp>
+      <p:sp>
+        <p:nvSpPr>
+          <p:cNvPr id="16" name="Rounded Rectangle 15"/>
+          <p:cNvSpPr/>
+          <p:nvPr/>
+        </p:nvSpPr>
+        <p:spPr>
+          <a:xfrm>
+            <a:off x="8065008" y="4919472"/>
+            <a:ext cx="3575304" cy="1325880"/>
+          </a:xfrm>
+          <a:prstGeom prst="roundRect">
+            <a:avLst>
+              <a:gd name="adj" fmla="val 6000"/>
+            </a:avLst>
+          </a:prstGeom>
+          <a:solidFill>
+            <a:srgbClr val="F5F9FA"/>
+          </a:solidFill>
+          <a:ln w="12700">
+            <a:solidFill>
+              <a:srgbClr val="D3E1E6"/>
+            </a:solidFill>
+          </a:ln>
+          <a:effectLst/>
+        </p:spPr>
+        <p:style>
+          <a:lnRef idx="1">
+            <a:schemeClr val="accent1"/>
+          </a:lnRef>
+          <a:fillRef idx="3">
+            <a:schemeClr val="accent1"/>
+          </a:fillRef>
+          <a:effectRef idx="2">
+            <a:schemeClr val="accent1"/>
+          </a:effectRef>
+          <a:fontRef idx="minor">
+            <a:schemeClr val="lt1"/>
+          </a:fontRef>
+        </p:style>
+        <p:txBody>
+          <a:bodyPr rtlCol="0" anchor="ctr"/>
+          <a:lstStyle/>
+          <a:p/>
+        </p:txBody>
+      </p:sp>
+      <p:sp>
+        <p:nvSpPr>
+          <p:cNvPr id="17" name="Oval 16"/>
+          <p:cNvSpPr/>
+          <p:nvPr/>
+        </p:nvSpPr>
+        <p:spPr>
+          <a:xfrm>
+            <a:off x="8266176" y="5074920"/>
+            <a:ext cx="566928" cy="566928"/>
+          </a:xfrm>
+          <a:prstGeom prst="ellipse">
+            <a:avLst/>
+          </a:prstGeom>
+          <a:solidFill>
+            <a:srgbClr val="8A43B0"/>
+          </a:solidFill>
+          <a:ln>
+            <a:noFill/>
+          </a:ln>
+          <a:effectLst/>
+        </p:spPr>
+        <p:style>
+          <a:lnRef idx="1">
+            <a:schemeClr val="accent1"/>
+          </a:lnRef>
+          <a:fillRef idx="3">
+            <a:schemeClr val="accent1"/>
+          </a:fillRef>
+          <a:effectRef idx="2">
+            <a:schemeClr val="accent1"/>
+          </a:effectRef>
+          <a:fontRef idx="minor">
+            <a:schemeClr val="lt1"/>
+          </a:fontRef>
+        </p:style>
+        <p:txBody>
+          <a:bodyPr rtlCol="0" anchor="ctr"/>
+          <a:lstStyle/>
+          <a:p/>
+        </p:txBody>
+      </p:sp>
+      <p:pic>
+        <p:nvPicPr>
+          <p:cNvPr id="18" name="Picture 17" descr="image.png"/>
+          <p:cNvPicPr>
+            <a:picLocks noChangeAspect="1"/>
+          </p:cNvPicPr>
+          <p:nvPr/>
+        </p:nvPicPr>
+        <p:blipFill>
+          <a:blip r:embed="rId4"/>
+          <a:stretch>
+            <a:fillRect/>
+          </a:stretch>
+        </p:blipFill>
+        <p:spPr>
+          <a:xfrm>
+            <a:off x="8407908" y="5216652"/>
+            <a:ext cx="283464" cy="283464"/>
+          </a:xfrm>
+          <a:prstGeom prst="rect">
+            <a:avLst/>
+          </a:prstGeom>
+        </p:spPr>
+      </p:pic>
+      <p:sp>
+        <p:nvSpPr>
+          <p:cNvPr id="19" name="TextBox 18"/>
+          <p:cNvSpPr txBox="1"/>
+          <p:nvPr/>
+        </p:nvSpPr>
+        <p:spPr>
+          <a:xfrm>
+            <a:off x="8997696" y="5093208"/>
+            <a:ext cx="2514600" cy="310896"/>
+          </a:xfrm>
+          <a:prstGeom prst="rect">
+            <a:avLst/>
+          </a:prstGeom>
+          <a:noFill/>
+        </p:spPr>
+        <p:txBody>
+          <a:bodyPr wrap="square" lIns="0" rIns="0" tIns="0" bIns="0" anchor="t">
+            <a:spAutoFit/>
+          </a:bodyPr>
+          <a:lstStyle/>
+          <a:p>
+            <a:pPr algn="l"/>
+            <a:r>
+              <a:rPr sz="1450" b="1" i="0">
+                <a:solidFill>
+                  <a:srgbClr val="17262E"/>
+                </a:solidFill>
+                <a:latin typeface="Cambria"/>
+              </a:rPr>
+              <a:t>Already built</a:t>
+            </a:r>
+          </a:p>
+        </p:txBody>
+      </p:sp>
+      <p:sp>
+        <p:nvSpPr>
+          <p:cNvPr id="20" name="TextBox 19"/>
+          <p:cNvSpPr txBox="1"/>
+          <p:nvPr/>
+        </p:nvSpPr>
+        <p:spPr>
+          <a:xfrm>
+            <a:off x="8997696" y="5422392"/>
+            <a:ext cx="2560320" cy="777240"/>
+          </a:xfrm>
+          <a:prstGeom prst="rect">
+            <a:avLst/>
+          </a:prstGeom>
+          <a:noFill/>
+        </p:spPr>
+        <p:txBody>
+          <a:bodyPr wrap="square" lIns="0" rIns="0" tIns="0" bIns="0" anchor="t">
+            <a:spAutoFit/>
+          </a:bodyPr>
+          <a:lstStyle/>
+          <a:p>
+            <a:pPr algn="l"/>
+            <a:r>
+              <a:rPr sz="1150" b="0" i="0">
+                <a:solidFill>
+                  <a:srgbClr val="41525B"/>
+                </a:solidFill>
+                <a:latin typeface="Calibri"/>
+              </a:rPr>
+              <a:t>The notebook has the grouped split and YUV switches. A1–A3 are one flag each.</a:t>
+            </a:r>
+          </a:p>
+        </p:txBody>
+      </p:sp>
+      <p:sp>
+        <p:nvSpPr>
+          <p:cNvPr id="21" name="TextBox 20"/>
+          <p:cNvSpPr txBox="1"/>
+          <p:nvPr/>
+        </p:nvSpPr>
+        <p:spPr>
+          <a:xfrm>
+            <a:off x="548640" y="6455664"/>
+            <a:ext cx="7315200" cy="274320"/>
+          </a:xfrm>
+          <a:prstGeom prst="rect">
+            <a:avLst/>
+          </a:prstGeom>
+          <a:noFill/>
+        </p:spPr>
+        <p:txBody>
+          <a:bodyPr wrap="square" lIns="0" rIns="0" tIns="0" bIns="0" anchor="t">
+            <a:spAutoFit/>
+          </a:bodyPr>
+          <a:lstStyle/>
+          <a:p>
+            <a:pPr algn="l"/>
+            <a:r>
+              <a:rPr sz="900" b="0" i="0">
+                <a:solidFill>
+                  <a:srgbClr val="7C8B93"/>
+                </a:solidFill>
+                <a:latin typeface="Calibri"/>
+              </a:rPr>
+              <a:t>Phase 2 · Baseline &amp; Hypothesis · Automated Malaria Cell Detection</a:t>
+            </a:r>
+          </a:p>
+        </p:txBody>
+      </p:sp>
+      <p:sp>
+        <p:nvSpPr>
+          <p:cNvPr id="22" name="TextBox 21"/>
+          <p:cNvSpPr txBox="1"/>
+          <p:nvPr/>
+        </p:nvSpPr>
+        <p:spPr>
+          <a:xfrm>
+            <a:off x="11183112" y="6419088"/>
+            <a:ext cx="457200" cy="274320"/>
+          </a:xfrm>
+          <a:prstGeom prst="rect">
+            <a:avLst/>
+          </a:prstGeom>
+          <a:noFill/>
+        </p:spPr>
+        <p:txBody>
+          <a:bodyPr wrap="square" lIns="0" rIns="0" tIns="0" bIns="0" anchor="t">
+            <a:spAutoFit/>
+          </a:bodyPr>
+          <a:lstStyle/>
+          <a:p>
+            <a:pPr algn="r"/>
+            <a:r>
+              <a:rPr sz="1000" b="0" i="0">
+                <a:solidFill>
+                  <a:srgbClr val="7C8B93"/>
+                </a:solidFill>
+                <a:latin typeface="Calibri"/>
+              </a:rPr>
+              <a:t>23</a:t>
+            </a:r>
+          </a:p>
+        </p:txBody>
+      </p:sp>
+    </p:spTree>
+  </p:cSld>
+  <p:clrMapOvr>
+    <a:masterClrMapping/>
+  </p:clrMapOvr>
+</p:sld>
+</file>
+
+<file path=ppt/slides/slide24.xml><?xml version="1.0" encoding="utf-8"?>
+<p:sld xmlns:a="http://schemas.openxmlformats.org/drawingml/2006/main" xmlns:r="http://schemas.openxmlformats.org/officeDocument/2006/relationships" xmlns:p="http://schemas.openxmlformats.org/presentationml/2006/main">
+  <p:cSld name="Slide 16">
+    <p:spTree>
+      <p:nvGrpSpPr>
+        <p:cNvPr id="1" name=""/>
+        <p:cNvGrpSpPr/>
+        <p:nvPr/>
+      </p:nvGrpSpPr>
+      <p:grpSpPr>
+        <a:xfrm>
+          <a:off x="0" y="0"/>
+          <a:ext cx="0" cy="0"/>
+          <a:chOff x="0" y="0"/>
+          <a:chExt cx="0" cy="0"/>
+        </a:xfrm>
+      </p:grpSpPr>
+      <p:sp>
+        <p:nvSpPr>
+          <p:cNvPr id="2" name="Text 0"/>
+          <p:cNvSpPr txBox="1"/>
+          <p:nvPr/>
+        </p:nvSpPr>
+        <p:spPr>
+          <a:xfrm>
+            <a:off x="548640" y="457200"/>
+            <a:ext cx="11064240" cy="274320"/>
+          </a:xfrm>
+          <a:prstGeom prst="rect">
+            <a:avLst/>
+          </a:prstGeom>
+          <a:noFill/>
+          <a:ln/>
+        </p:spPr>
+        <p:txBody>
+          <a:bodyPr wrap="square" lIns="0" tIns="0" rIns="0" bIns="0" rtlCol="0" anchor="ctr"/>
+          <a:lstStyle/>
+          <a:p>
+            <a:pPr algn="l" indent="0" marL="0">
+              <a:buNone/>
+            </a:pPr>
+            <a:r>
+              <a:rPr lang="en-US" sz="1250" b="1" spc="200" kern="0" dirty="0">
+                <a:solidFill>
+                  <a:srgbClr val="137C8E"/>
+                </a:solidFill>
+                <a:latin typeface="Calibri" pitchFamily="34" charset="0"/>
+                <a:ea typeface="Calibri" pitchFamily="34" charset="-122"/>
+                <a:cs typeface="Calibri" pitchFamily="34" charset="-120"/>
+              </a:rPr>
+              <a:t>REFERENCES</a:t>
+            </a:r>
+            <a:endParaRPr lang="en-US" sz="1250" dirty="0"/>
+          </a:p>
+        </p:txBody>
+      </p:sp>
+      <p:sp>
+        <p:nvSpPr>
+          <p:cNvPr id="3" name="Text 1"/>
+          <p:cNvSpPr txBox="1"/>
+          <p:nvPr/>
+        </p:nvSpPr>
+        <p:spPr>
+          <a:xfrm>
+            <a:off x="548640" y="749808"/>
+            <a:ext cx="11064240" cy="658368"/>
+          </a:xfrm>
+          <a:prstGeom prst="rect">
+            <a:avLst/>
+          </a:prstGeom>
+          <a:noFill/>
+          <a:ln/>
+        </p:spPr>
+        <p:txBody>
+          <a:bodyPr wrap="square" lIns="0" tIns="0" rIns="0" bIns="0" rtlCol="0" anchor="ctr"/>
+          <a:lstStyle/>
+          <a:p>
+            <a:pPr algn="l" indent="0" marL="0">
+              <a:buNone/>
+            </a:pPr>
+            <a:r>
+              <a:rPr lang="en-US" sz="3000" b="1" dirty="0">
+                <a:solidFill>
+                  <a:srgbClr val="17262E"/>
+                </a:solidFill>
+                <a:latin typeface="Cambria" pitchFamily="34" charset="0"/>
+                <a:ea typeface="Cambria" pitchFamily="34" charset="-122"/>
+                <a:cs typeface="Cambria" pitchFamily="34" charset="-120"/>
+              </a:rPr>
+              <a:t>The eleven reviewed studies</a:t>
+            </a:r>
+            <a:endParaRPr lang="en-US" sz="3000" dirty="0"/>
+          </a:p>
+        </p:txBody>
+      </p:sp>
+      <p:sp>
+        <p:nvSpPr>
+          <p:cNvPr id="4" name="Text 2"/>
+          <p:cNvSpPr txBox="1"/>
+          <p:nvPr/>
+        </p:nvSpPr>
+        <p:spPr>
+          <a:xfrm>
+            <a:off x="548640" y="1508760"/>
+            <a:ext cx="5486400" cy="4572000"/>
+          </a:xfrm>
+          <a:prstGeom prst="rect">
+            <a:avLst/>
+          </a:prstGeom>
+          <a:noFill/>
+          <a:ln/>
+        </p:spPr>
+        <p:txBody>
+          <a:bodyPr wrap="square" lIns="0" tIns="0" rIns="0" bIns="0" rtlCol="0" anchor="t"/>
+          <a:lstStyle/>
+          <a:p>
+            <a:pPr indent="0" marL="0">
+              <a:lnSpc>
+                <a:spcPct val="102000"/>
+              </a:lnSpc>
+              <a:spcAft>
+                <a:spcPts val="1000"/>
+              </a:spcAft>
+              <a:buNone/>
+            </a:pPr>
+            <a:r>
+              <a:rPr lang="en-US" sz="1150" dirty="0">
+                <a:solidFill>
+                  <a:srgbClr val="41525B"/>
+                </a:solidFill>
+                <a:latin typeface="Calibri" pitchFamily="34" charset="0"/>
+                <a:ea typeface="Calibri" pitchFamily="34" charset="-122"/>
+                <a:cs typeface="Calibri" pitchFamily="34" charset="-120"/>
+              </a:rPr>
+              <a:t>[1] Z. Liang et al., “CNN-Based Image Analysis for Malaria Diagnosis,” IEEE BIBM, 2016.</a:t>
+            </a:r>
+            <a:endParaRPr lang="en-US" sz="1150" dirty="0"/>
+          </a:p>
+          <a:p>
+            <a:pPr indent="0" marL="0">
+              <a:lnSpc>
+                <a:spcPct val="102000"/>
+              </a:lnSpc>
+              <a:spcAft>
+                <a:spcPts val="1000"/>
+              </a:spcAft>
+              <a:buNone/>
+            </a:pPr>
+            <a:r>
+              <a:rPr lang="en-US" sz="1150" dirty="0">
+                <a:solidFill>
+                  <a:srgbClr val="41525B"/>
+                </a:solidFill>
+                <a:latin typeface="Calibri" pitchFamily="34" charset="0"/>
+                <a:ea typeface="Calibri" pitchFamily="34" charset="-122"/>
+                <a:cs typeface="Calibri" pitchFamily="34" charset="-120"/>
+              </a:rPr>
+              <a:t>[2] S. Rajaraman et al., “Pre-trained CNNs as feature extractors toward improved malaria parasite detection,” PeerJ 6:e4568, 2018.</a:t>
+            </a:r>
+            <a:endParaRPr lang="en-US" sz="1150" dirty="0"/>
+          </a:p>
+          <a:p>
+            <a:pPr indent="0" marL="0">
+              <a:lnSpc>
+                <a:spcPct val="102000"/>
+              </a:lnSpc>
+              <a:spcAft>
+                <a:spcPts val="1000"/>
+              </a:spcAft>
+              <a:buNone/>
+            </a:pPr>
+            <a:r>
+              <a:rPr lang="en-US" sz="1150" dirty="0">
+                <a:solidFill>
+                  <a:srgbClr val="41525B"/>
+                </a:solidFill>
+                <a:latin typeface="Calibri" pitchFamily="34" charset="0"/>
+                <a:ea typeface="Calibri" pitchFamily="34" charset="-122"/>
+                <a:cs typeface="Calibri" pitchFamily="34" charset="-120"/>
+              </a:rPr>
+              <a:t>[3] S. Rajaraman et al., “Performance evaluation of deep neural ensembles toward malaria parasite detection,” PeerJ 7:e6977, 2019.</a:t>
+            </a:r>
+            <a:endParaRPr lang="en-US" sz="1150" dirty="0"/>
+          </a:p>
+          <a:p>
+            <a:pPr indent="0" marL="0">
+              <a:lnSpc>
+                <a:spcPct val="102000"/>
+              </a:lnSpc>
+              <a:spcAft>
+                <a:spcPts val="1000"/>
+              </a:spcAft>
+              <a:buNone/>
+            </a:pPr>
+            <a:r>
+              <a:rPr lang="en-US" sz="1150" dirty="0">
+                <a:solidFill>
+                  <a:srgbClr val="41525B"/>
+                </a:solidFill>
+                <a:latin typeface="Calibri" pitchFamily="34" charset="0"/>
+                <a:ea typeface="Calibri" pitchFamily="34" charset="-122"/>
+                <a:cs typeface="Calibri" pitchFamily="34" charset="-120"/>
+              </a:rPr>
+              <a:t>[4] M. Umer et al., “A Novel Stacked CNN for Malarial Parasite Detection in Thin Blood Smear Images,” IEEE Access 8, 2020.</a:t>
+            </a:r>
+            <a:endParaRPr lang="en-US" sz="1150" dirty="0"/>
+          </a:p>
+          <a:p>
+            <a:pPr indent="0" marL="0">
+              <a:lnSpc>
+                <a:spcPct val="102000"/>
+              </a:lnSpc>
+              <a:spcAft>
+                <a:spcPts val="1000"/>
+              </a:spcAft>
+              <a:buNone/>
+            </a:pPr>
+            <a:r>
+              <a:rPr lang="en-US" sz="1150" dirty="0">
+                <a:solidFill>
+                  <a:srgbClr val="41525B"/>
+                </a:solidFill>
+                <a:latin typeface="Calibri" pitchFamily="34" charset="0"/>
+                <a:ea typeface="Calibri" pitchFamily="34" charset="-122"/>
+                <a:cs typeface="Calibri" pitchFamily="34" charset="-120"/>
+              </a:rPr>
+              <a:t>[5] K. M. F. Fuhad et al., “Deep Learning Based Automatic Malaria Parasite Detection … Smartphone Application,” Diagnostics 10(5):329, 2020.</a:t>
+            </a:r>
+            <a:endParaRPr lang="en-US" sz="1150" dirty="0"/>
+          </a:p>
+          <a:p>
+            <a:pPr indent="0" marL="0">
+              <a:lnSpc>
+                <a:spcPct val="102000"/>
+              </a:lnSpc>
+              <a:spcAft>
+                <a:spcPts val="1000"/>
+              </a:spcAft>
+              <a:buNone/>
+            </a:pPr>
+            <a:r>
+              <a:rPr lang="en-US" sz="1150" dirty="0">
+                <a:solidFill>
+                  <a:srgbClr val="41525B"/>
+                </a:solidFill>
+                <a:latin typeface="Calibri" pitchFamily="34" charset="0"/>
+                <a:ea typeface="Calibri" pitchFamily="34" charset="-122"/>
+                <a:cs typeface="Calibri" pitchFamily="34" charset="-120"/>
+              </a:rPr>
+              <a:t>[6] O. S. Zhao et al., “Convolutional neural networks to automate the screening of malaria in low-resource countries,” PeerJ 8:e9674, 2020.</a:t>
+            </a:r>
+            <a:endParaRPr lang="en-US" sz="1150" dirty="0"/>
+          </a:p>
+        </p:txBody>
+      </p:sp>
+      <p:sp>
+        <p:nvSpPr>
+          <p:cNvPr id="5" name="Text 3"/>
+          <p:cNvSpPr txBox="1"/>
+          <p:nvPr/>
+        </p:nvSpPr>
+        <p:spPr>
+          <a:xfrm>
+            <a:off x="6263640" y="1508760"/>
+            <a:ext cx="5394960" cy="4572000"/>
+          </a:xfrm>
+          <a:prstGeom prst="rect">
+            <a:avLst/>
+          </a:prstGeom>
+          <a:noFill/>
+          <a:ln/>
+        </p:spPr>
+        <p:txBody>
+          <a:bodyPr wrap="square" lIns="0" tIns="0" rIns="0" bIns="0" rtlCol="0" anchor="t"/>
+          <a:lstStyle/>
+          <a:p>
+            <a:pPr indent="0" marL="0">
+              <a:lnSpc>
+                <a:spcPct val="102000"/>
+              </a:lnSpc>
+              <a:spcAft>
+                <a:spcPts val="1000"/>
+              </a:spcAft>
+              <a:buNone/>
+            </a:pPr>
+            <a:r>
+              <a:rPr lang="en-US" sz="1150" dirty="0">
+                <a:solidFill>
+                  <a:srgbClr val="41525B"/>
+                </a:solidFill>
+                <a:latin typeface="Calibri" pitchFamily="34" charset="0"/>
+                <a:ea typeface="Calibri" pitchFamily="34" charset="-122"/>
+                <a:cs typeface="Calibri" pitchFamily="34" charset="-120"/>
+              </a:rPr>
+              <a:t>[7] M. Masud et al., “Leveraging Deep Learning Techniques for Malaria Parasite Detection Using Mobile Application,” WCMC 2020:8895429.</a:t>
+            </a:r>
+            <a:endParaRPr lang="en-US" sz="1150" dirty="0"/>
+          </a:p>
+          <a:p>
+            <a:pPr indent="0" marL="0">
+              <a:lnSpc>
+                <a:spcPct val="102000"/>
+              </a:lnSpc>
+              <a:spcAft>
+                <a:spcPts val="1000"/>
+              </a:spcAft>
+              <a:buNone/>
+            </a:pPr>
+            <a:r>
+              <a:rPr lang="en-US" sz="1150" dirty="0">
+                <a:solidFill>
+                  <a:srgbClr val="41525B"/>
+                </a:solidFill>
+                <a:latin typeface="Calibri" pitchFamily="34" charset="0"/>
+                <a:ea typeface="Calibri" pitchFamily="34" charset="-122"/>
+                <a:cs typeface="Calibri" pitchFamily="34" charset="-120"/>
+              </a:rPr>
+              <a:t>[8] G. Marques et al., “An ensemble-based approach for automated medical diagnosis of malaria using EfficientNet,” MTAP 81, 2022.</a:t>
+            </a:r>
+            <a:endParaRPr lang="en-US" sz="1150" dirty="0"/>
+          </a:p>
+          <a:p>
+            <a:pPr indent="0" marL="0">
+              <a:lnSpc>
+                <a:spcPct val="102000"/>
+              </a:lnSpc>
+              <a:spcAft>
+                <a:spcPts val="1000"/>
+              </a:spcAft>
+              <a:buNone/>
+            </a:pPr>
+            <a:r>
+              <a:rPr lang="en-US" sz="1150" dirty="0">
+                <a:solidFill>
+                  <a:srgbClr val="41525B"/>
+                </a:solidFill>
+                <a:latin typeface="Calibri" pitchFamily="34" charset="0"/>
+                <a:ea typeface="Calibri" pitchFamily="34" charset="-122"/>
+                <a:cs typeface="Calibri" pitchFamily="34" charset="-120"/>
+              </a:rPr>
+              <a:t>[9] G. Madhu et al., “Intelligent diagnostic model … imperative inception-based capsule neural networks,” Scientific Reports 13, 2023.</a:t>
+            </a:r>
+            <a:endParaRPr lang="en-US" sz="1150" dirty="0"/>
+          </a:p>
+          <a:p>
+            <a:pPr indent="0" marL="0">
+              <a:lnSpc>
+                <a:spcPct val="102000"/>
+              </a:lnSpc>
+              <a:spcAft>
+                <a:spcPts val="1000"/>
+              </a:spcAft>
+              <a:buNone/>
+            </a:pPr>
+            <a:r>
+              <a:rPr lang="en-US" sz="1150" dirty="0">
+                <a:solidFill>
+                  <a:srgbClr val="41525B"/>
+                </a:solidFill>
+                <a:latin typeface="Calibri" pitchFamily="34" charset="0"/>
+                <a:ea typeface="Calibri" pitchFamily="34" charset="-122"/>
+                <a:cs typeface="Calibri" pitchFamily="34" charset="-120"/>
+              </a:rPr>
+              <a:t>[10] K. Hemachandran et al., “Performance Analysis of Deep Learning Algorithms in Diagnosis of Malaria Disease,” Diagnostics 13(3):534, 2023.</a:t>
+            </a:r>
+            <a:endParaRPr lang="en-US" sz="1150" dirty="0"/>
+          </a:p>
+          <a:p>
+            <a:pPr indent="0" marL="0">
+              <a:lnSpc>
+                <a:spcPct val="102000"/>
+              </a:lnSpc>
+              <a:spcAft>
+                <a:spcPts val="1000"/>
+              </a:spcAft>
+              <a:buNone/>
+            </a:pPr>
+            <a:r>
+              <a:rPr lang="en-US" sz="1150" dirty="0">
+                <a:solidFill>
+                  <a:srgbClr val="41525B"/>
+                </a:solidFill>
+                <a:latin typeface="Calibri" pitchFamily="34" charset="0"/>
+                <a:ea typeface="Calibri" pitchFamily="34" charset="-122"/>
+                <a:cs typeface="Calibri" pitchFamily="34" charset="-120"/>
+              </a:rPr>
+              <a:t>[11] M. Mujahid et al., “Efficient deep learning-based approach for malaria detection using red blood cell smears,” Scientific Reports 14, 2024.</a:t>
+            </a:r>
+            <a:endParaRPr lang="en-US" sz="1150" dirty="0"/>
+          </a:p>
+        </p:txBody>
+      </p:sp>
+      <p:sp>
+        <p:nvSpPr>
+          <p:cNvPr id="6" name="Shape 4"/>
+          <p:cNvSpPr/>
+          <p:nvPr/>
+        </p:nvSpPr>
+        <p:spPr>
+          <a:xfrm>
+            <a:off x="6263640" y="3977640"/>
+            <a:ext cx="5376672" cy="2103120"/>
+          </a:xfrm>
+          <a:prstGeom prst="roundRect">
+            <a:avLst>
+              <a:gd name="adj" fmla="val 4348"/>
+            </a:avLst>
+          </a:prstGeom>
+          <a:solidFill>
+            <a:srgbClr val="0F2E3D"/>
+          </a:solidFill>
+          <a:ln/>
+        </p:spPr>
+        <p:txBody>
+          <a:bodyPr/>
+          <a:p/>
+        </p:txBody>
+      </p:sp>
+      <p:sp>
+        <p:nvSpPr>
+          <p:cNvPr id="7" name="Shape 5"/>
+          <p:cNvSpPr/>
+          <p:nvPr/>
+        </p:nvSpPr>
+        <p:spPr>
+          <a:xfrm>
+            <a:off x="6675120" y="4297680"/>
+            <a:ext cx="822960" cy="822960"/>
+          </a:xfrm>
+          <a:prstGeom prst="ellipse">
+            <a:avLst/>
+          </a:prstGeom>
+          <a:solidFill>
+            <a:srgbClr val="2EA79B"/>
+          </a:solidFill>
+          <a:ln/>
+        </p:spPr>
+        <p:txBody>
+          <a:bodyPr/>
+          <a:p/>
+        </p:txBody>
+      </p:sp>
+      <p:pic>
+        <p:nvPicPr>
+          <p:cNvPr id="8" name="Image 0" descr="/tmp/build/assets/ic_microscope.png">    </p:cNvPr>
+          <p:cNvPicPr>
+            <a:picLocks noChangeAspect="1"/>
+          </p:cNvPicPr>
+          <p:nvPr/>
+        </p:nvPicPr>
+        <p:blipFill>
+          <a:blip r:embed="rId1"/>
+          <a:stretch>
+            <a:fillRect/>
+          </a:stretch>
+        </p:blipFill>
+        <p:spPr>
+          <a:xfrm>
+            <a:off x="6880860" y="4503420"/>
+            <a:ext cx="411480" cy="411480"/>
+          </a:xfrm>
+          <a:prstGeom prst="rect">
+            <a:avLst/>
+          </a:prstGeom>
+        </p:spPr>
+      </p:pic>
+      <p:sp>
+        <p:nvSpPr>
+          <p:cNvPr id="9" name="Text 6"/>
+          <p:cNvSpPr txBox="1"/>
+          <p:nvPr/>
+        </p:nvSpPr>
+        <p:spPr>
+          <a:xfrm>
+            <a:off x="7680960" y="4297680"/>
+            <a:ext cx="3749040" cy="502920"/>
+          </a:xfrm>
+          <a:prstGeom prst="rect">
+            <a:avLst/>
+          </a:prstGeom>
+          <a:noFill/>
+          <a:ln/>
+        </p:spPr>
+        <p:txBody>
+          <a:bodyPr wrap="square" lIns="0" tIns="0" rIns="0" bIns="0" rtlCol="0" anchor="ctr"/>
+          <a:lstStyle/>
+          <a:p>
+            <a:pPr indent="0" marL="0">
+              <a:buNone/>
+            </a:pPr>
+            <a:r>
+              <a:rPr lang="en-US" sz="2600" b="1" dirty="0">
+                <a:solidFill>
+                  <a:srgbClr val="FFFFFF"/>
+                </a:solidFill>
+                <a:latin typeface="Cambria" pitchFamily="34" charset="0"/>
+                <a:ea typeface="Cambria" pitchFamily="34" charset="-122"/>
+                <a:cs typeface="Cambria" pitchFamily="34" charset="-120"/>
+              </a:rPr>
+              <a:t>Thank you</a:t>
+            </a:r>
+            <a:endParaRPr lang="en-US" sz="2600" dirty="0"/>
+          </a:p>
+        </p:txBody>
+      </p:sp>
+      <p:sp>
+        <p:nvSpPr>
+          <p:cNvPr id="10" name="Text 7"/>
+          <p:cNvSpPr txBox="1"/>
+          <p:nvPr/>
+        </p:nvSpPr>
+        <p:spPr>
+          <a:xfrm>
+            <a:off x="7680960" y="4892040"/>
+            <a:ext cx="3703320" cy="914400"/>
+          </a:xfrm>
+          <a:prstGeom prst="rect">
+            <a:avLst/>
+          </a:prstGeom>
+          <a:noFill/>
+          <a:ln/>
+        </p:spPr>
+        <p:txBody>
+          <a:bodyPr wrap="square" lIns="0" tIns="0" rIns="0" bIns="0" rtlCol="0" anchor="ctr"/>
+          <a:lstStyle/>
+          <a:p>
+            <a:pPr indent="0" marL="0">
+              <a:lnSpc>
+                <a:spcPct val="108000"/>
+              </a:lnSpc>
+              <a:buNone/>
+            </a:pPr>
+            <a:r>
+              <a:rPr lang="en-US" sz="1300" dirty="0">
+                <a:solidFill>
+                  <a:srgbClr val="D7E7EB"/>
+                </a:solidFill>
+                <a:latin typeface="Calibri" pitchFamily="34" charset="0"/>
+                <a:ea typeface="Calibri" pitchFamily="34" charset="-122"/>
+                <a:cs typeface="Calibri" pitchFamily="34" charset="-120"/>
+              </a:rPr>
+              <a:t>Questions on methods, results, or our chosen research gap are welcome.</a:t>
+            </a:r>
+            <a:endParaRPr lang="en-US" sz="1300" dirty="0"/>
+          </a:p>
+        </p:txBody>
+      </p:sp>
+      <p:sp>
+        <p:nvSpPr>
+          <p:cNvPr id="11" name="Text 8"/>
+          <p:cNvSpPr txBox="1"/>
+          <p:nvPr/>
+        </p:nvSpPr>
+        <p:spPr>
+          <a:xfrm>
+            <a:off x="548640" y="6144768"/>
+            <a:ext cx="5577840" cy="274320"/>
+          </a:xfrm>
+          <a:prstGeom prst="rect">
+            <a:avLst/>
+          </a:prstGeom>
+          <a:noFill/>
+          <a:ln/>
+        </p:spPr>
+        <p:txBody>
+          <a:bodyPr wrap="square" lIns="0" tIns="0" rIns="0" bIns="0" rtlCol="0" anchor="ctr"/>
+          <a:lstStyle/>
+          <a:p>
+            <a:pPr indent="0" marL="0">
+              <a:buNone/>
+            </a:pPr>
+            <a:r>
+              <a:rPr lang="en-US" sz="1100" b="1" dirty="0">
+                <a:solidFill>
+                  <a:srgbClr val="137C8E"/>
+                </a:solidFill>
+                <a:latin typeface="Calibri" pitchFamily="34" charset="0"/>
+                <a:ea typeface="Calibri" pitchFamily="34" charset="-122"/>
+                <a:cs typeface="Calibri" pitchFamily="34" charset="-120"/>
+              </a:rPr>
+              <a:t>Presented by   </a:t>
+            </a:r>
+            <a:pPr indent="0" marL="0">
+              <a:buNone/>
+            </a:pPr>
+            <a:r>
+              <a:rPr lang="en-US" sz="1100" dirty="0">
+                <a:solidFill>
+                  <a:srgbClr val="41525B"/>
+                </a:solidFill>
+                <a:latin typeface="Calibri" pitchFamily="34" charset="0"/>
+                <a:ea typeface="Calibri" pitchFamily="34" charset="-122"/>
+                <a:cs typeface="Calibri" pitchFamily="34" charset="-120"/>
+              </a:rPr>
+              <a:t>Pugazhendhi J · J Amathziah · C Murali Madhav · Ravi Yadav</a:t>
+            </a:r>
+            <a:endParaRPr lang="en-US" sz="1100" dirty="0"/>
+          </a:p>
+        </p:txBody>
+      </p:sp>
+      <p:sp>
+        <p:nvSpPr>
+          <p:cNvPr id="12" name="Text 9"/>
+          <p:cNvSpPr txBox="1"/>
+          <p:nvPr/>
+        </p:nvSpPr>
+        <p:spPr>
+          <a:xfrm>
+            <a:off x="11185855" y="6419088"/>
+            <a:ext cx="457200" cy="274320"/>
+          </a:xfrm>
+          <a:prstGeom prst="rect">
+            <a:avLst/>
+          </a:prstGeom>
+          <a:noFill/>
+          <a:ln/>
+        </p:spPr>
+        <p:txBody>
+          <a:bodyPr wrap="square" lIns="0" tIns="0" rIns="0" bIns="0" rtlCol="0" anchor="ctr"/>
+          <a:lstStyle/>
+          <a:p>
+            <a:pPr algn="r" indent="0" marL="0">
+              <a:buNone/>
+            </a:pPr>
+            <a:r>
+              <a:rPr lang="en-US" sz="1000" dirty="0">
+                <a:solidFill>
+                  <a:srgbClr val="7C8B93"/>
+                </a:solidFill>
+                <a:latin typeface="Calibri" pitchFamily="34" charset="0"/>
+                <a:ea typeface="Calibri" pitchFamily="34" charset="-122"/>
+                <a:cs typeface="Calibri" pitchFamily="34" charset="-120"/>
+              </a:rPr>
+              <a:t>24</a:t>
+            </a:r>
+            <a:endParaRPr lang="en-US" sz="1000" dirty="0"/>
+          </a:p>
+        </p:txBody>
+      </p:sp>
+    </p:spTree>
+  </p:cSld>
+  <p:clrMapOvr>
+    <a:masterClrMapping/>
+  </p:clrMapOvr>
+</p:sld>
+</file>
+
 <file path=ppt/slides/slide3.xml><?xml version="1.0" encoding="utf-8"?>
 <p:sld xmlns:a="http://schemas.openxmlformats.org/drawingml/2006/main" xmlns:r="http://schemas.openxmlformats.org/officeDocument/2006/relationships" xmlns:p="http://schemas.openxmlformats.org/presentationml/2006/main">
   <p:cSld name="Slide 2">
@@ -25855,7 +25855,7 @@
                 <a:ea typeface="Calibri" pitchFamily="34" charset="-122"/>
                 <a:cs typeface="Calibri" pitchFamily="34" charset="-120"/>
               </a:rPr>
-              <a:t>Stage 1 — literature survey of 11 studies (slides 4–15).  Stage 2 — reproduce the base paper and state our hypothesis (slides 16–20).</a:t>
+              <a:t>Stage 1 — literature survey of 11 studies (slides 5–16).  Stage 2 — reproduce the base paper and state our hypothesis (slides 17–23).</a:t>
             </a:r>
             <a:endParaRPr lang="en-US" sz="1400" dirty="0"/>
           </a:p>
